--- a/GandG_YPS/Presentation/G&G_Revamp_ARB.pptx
+++ b/GandG_YPS/Presentation/G&G_Revamp_ARB.pptx
@@ -5,30 +5,35 @@
     <p:sldMasterId id="2147483661" r:id="rId4"/>
   </p:sldMasterIdLst>
   <p:notesMasterIdLst>
-    <p:notesMasterId r:id="rId26"/>
+    <p:notesMasterId r:id="rId31"/>
   </p:notesMasterIdLst>
   <p:sldIdLst>
     <p:sldId id="2145708748" r:id="rId5"/>
     <p:sldId id="2145708771" r:id="rId6"/>
     <p:sldId id="2145708772" r:id="rId7"/>
-    <p:sldId id="2145708750" r:id="rId8"/>
-    <p:sldId id="2145708752" r:id="rId9"/>
-    <p:sldId id="2145708761" r:id="rId10"/>
-    <p:sldId id="2145708773" r:id="rId11"/>
-    <p:sldId id="2145708758" r:id="rId12"/>
-    <p:sldId id="2145708762" r:id="rId13"/>
-    <p:sldId id="2145708778" r:id="rId14"/>
-    <p:sldId id="2145708757" r:id="rId15"/>
-    <p:sldId id="2145708774" r:id="rId16"/>
-    <p:sldId id="2145708775" r:id="rId17"/>
-    <p:sldId id="2145708754" r:id="rId18"/>
-    <p:sldId id="2145708755" r:id="rId19"/>
-    <p:sldId id="2145708776" r:id="rId20"/>
-    <p:sldId id="2145708759" r:id="rId21"/>
-    <p:sldId id="2145708777" r:id="rId22"/>
-    <p:sldId id="2145708756" r:id="rId23"/>
-    <p:sldId id="2145708760" r:id="rId24"/>
-    <p:sldId id="2145708766" r:id="rId25"/>
+    <p:sldId id="2145708781" r:id="rId8"/>
+    <p:sldId id="2145708783" r:id="rId9"/>
+    <p:sldId id="2145708782" r:id="rId10"/>
+    <p:sldId id="2145708750" r:id="rId11"/>
+    <p:sldId id="2145708752" r:id="rId12"/>
+    <p:sldId id="2145708784" r:id="rId13"/>
+    <p:sldId id="2145708785" r:id="rId14"/>
+    <p:sldId id="2145708761" r:id="rId15"/>
+    <p:sldId id="2145708786" r:id="rId16"/>
+    <p:sldId id="2145708787" r:id="rId17"/>
+    <p:sldId id="2145708773" r:id="rId18"/>
+    <p:sldId id="2145708791" r:id="rId19"/>
+    <p:sldId id="2145708758" r:id="rId20"/>
+    <p:sldId id="2145708762" r:id="rId21"/>
+    <p:sldId id="2145708780" r:id="rId22"/>
+    <p:sldId id="2145708779" r:id="rId23"/>
+    <p:sldId id="2145708778" r:id="rId24"/>
+    <p:sldId id="2145708792" r:id="rId25"/>
+    <p:sldId id="2145708757" r:id="rId26"/>
+    <p:sldId id="2145708788" r:id="rId27"/>
+    <p:sldId id="2145708789" r:id="rId28"/>
+    <p:sldId id="2145708790" r:id="rId29"/>
+    <p:sldId id="2145708766" r:id="rId30"/>
   </p:sldIdLst>
   <p:sldSz cx="12192000" cy="6858000"/>
   <p:notesSz cx="6858000" cy="9144000"/>
@@ -135,2453 +140,6 @@
 </p:presentation>
 </file>
 
-<file path=ppt/changesInfos/changesInfo1.xml><?xml version="1.0" encoding="utf-8"?>
-<pc:chgInfo xmlns:a="http://schemas.openxmlformats.org/drawingml/2006/main" xmlns:r="http://schemas.openxmlformats.org/officeDocument/2006/relationships" xmlns:ac="http://schemas.microsoft.com/office/drawing/2013/main/command" xmlns:pc="http://schemas.microsoft.com/office/powerpoint/2013/main/command">
-  <pc:docChgLst>
-    <pc:chgData name="Aung Myo Aye" userId="e1862572-8acc-4a7b-a49a-743c77eeb174" providerId="ADAL" clId="{A68CC819-48BB-418B-9452-3602D0216508}"/>
-    <pc:docChg chg="undo custSel addSld delSld modSld">
-      <pc:chgData name="Aung Myo Aye" userId="e1862572-8acc-4a7b-a49a-743c77eeb174" providerId="ADAL" clId="{A68CC819-48BB-418B-9452-3602D0216508}" dt="2025-02-13T08:56:41.126" v="2054" actId="20577"/>
-      <pc:docMkLst>
-        <pc:docMk/>
-      </pc:docMkLst>
-      <pc:sldChg chg="delSp modSp add del mod">
-        <pc:chgData name="Aung Myo Aye" userId="e1862572-8acc-4a7b-a49a-743c77eeb174" providerId="ADAL" clId="{A68CC819-48BB-418B-9452-3602D0216508}" dt="2025-01-29T02:39:15.149" v="67" actId="47"/>
-        <pc:sldMkLst>
-          <pc:docMk/>
-          <pc:sldMk cId="521418458" sldId="6367"/>
-        </pc:sldMkLst>
-      </pc:sldChg>
-      <pc:sldChg chg="del">
-        <pc:chgData name="Aung Myo Aye" userId="e1862572-8acc-4a7b-a49a-743c77eeb174" providerId="ADAL" clId="{A68CC819-48BB-418B-9452-3602D0216508}" dt="2025-01-29T02:36:09.212" v="26" actId="47"/>
-        <pc:sldMkLst>
-          <pc:docMk/>
-          <pc:sldMk cId="440516599" sldId="2145708746"/>
-        </pc:sldMkLst>
-      </pc:sldChg>
-      <pc:sldChg chg="del">
-        <pc:chgData name="Aung Myo Aye" userId="e1862572-8acc-4a7b-a49a-743c77eeb174" providerId="ADAL" clId="{A68CC819-48BB-418B-9452-3602D0216508}" dt="2025-01-29T02:36:09.212" v="26" actId="47"/>
-        <pc:sldMkLst>
-          <pc:docMk/>
-          <pc:sldMk cId="2361578008" sldId="2145708747"/>
-        </pc:sldMkLst>
-      </pc:sldChg>
-      <pc:sldChg chg="modSp mod">
-        <pc:chgData name="Aung Myo Aye" userId="e1862572-8acc-4a7b-a49a-743c77eeb174" providerId="ADAL" clId="{A68CC819-48BB-418B-9452-3602D0216508}" dt="2025-01-29T02:36:04.105" v="25" actId="14100"/>
-        <pc:sldMkLst>
-          <pc:docMk/>
-          <pc:sldMk cId="308816287" sldId="2145708748"/>
-        </pc:sldMkLst>
-        <pc:spChg chg="mod">
-          <ac:chgData name="Aung Myo Aye" userId="e1862572-8acc-4a7b-a49a-743c77eeb174" providerId="ADAL" clId="{A68CC819-48BB-418B-9452-3602D0216508}" dt="2025-01-29T02:36:04.105" v="25" actId="14100"/>
-          <ac:spMkLst>
-            <pc:docMk/>
-            <pc:sldMk cId="308816287" sldId="2145708748"/>
-            <ac:spMk id="2" creationId="{789CF22F-5AA4-B171-99C4-50EE2DCE24BE}"/>
-          </ac:spMkLst>
-        </pc:spChg>
-      </pc:sldChg>
-      <pc:sldChg chg="new del">
-        <pc:chgData name="Aung Myo Aye" userId="e1862572-8acc-4a7b-a49a-743c77eeb174" providerId="ADAL" clId="{A68CC819-48BB-418B-9452-3602D0216508}" dt="2025-01-29T02:36:15.105" v="28" actId="680"/>
-        <pc:sldMkLst>
-          <pc:docMk/>
-          <pc:sldMk cId="1910767487" sldId="2145708749"/>
-        </pc:sldMkLst>
-      </pc:sldChg>
-      <pc:sldChg chg="del">
-        <pc:chgData name="Aung Myo Aye" userId="e1862572-8acc-4a7b-a49a-743c77eeb174" providerId="ADAL" clId="{A68CC819-48BB-418B-9452-3602D0216508}" dt="2025-01-29T02:36:09.212" v="26" actId="47"/>
-        <pc:sldMkLst>
-          <pc:docMk/>
-          <pc:sldMk cId="2303615275" sldId="2145708749"/>
-        </pc:sldMkLst>
-      </pc:sldChg>
-      <pc:sldChg chg="addSp delSp modSp new mod">
-        <pc:chgData name="Aung Myo Aye" userId="e1862572-8acc-4a7b-a49a-743c77eeb174" providerId="ADAL" clId="{A68CC819-48BB-418B-9452-3602D0216508}" dt="2025-02-13T08:22:47.152" v="2047" actId="1076"/>
-        <pc:sldMkLst>
-          <pc:docMk/>
-          <pc:sldMk cId="3282884465" sldId="2145708749"/>
-        </pc:sldMkLst>
-        <pc:spChg chg="mod">
-          <ac:chgData name="Aung Myo Aye" userId="e1862572-8acc-4a7b-a49a-743c77eeb174" providerId="ADAL" clId="{A68CC819-48BB-418B-9452-3602D0216508}" dt="2025-01-29T03:05:38.463" v="1796" actId="1035"/>
-          <ac:spMkLst>
-            <pc:docMk/>
-            <pc:sldMk cId="3282884465" sldId="2145708749"/>
-            <ac:spMk id="3" creationId="{B50CADA1-7584-1C87-C45D-D6CC37B56AE0}"/>
-          </ac:spMkLst>
-        </pc:spChg>
-        <pc:spChg chg="add mod">
-          <ac:chgData name="Aung Myo Aye" userId="e1862572-8acc-4a7b-a49a-743c77eeb174" providerId="ADAL" clId="{A68CC819-48BB-418B-9452-3602D0216508}" dt="2025-02-11T09:35:01.927" v="2023" actId="207"/>
-          <ac:spMkLst>
-            <pc:docMk/>
-            <pc:sldMk cId="3282884465" sldId="2145708749"/>
-            <ac:spMk id="8" creationId="{4C0AD3AA-7ABE-6BC0-1E79-5DA30092DF59}"/>
-          </ac:spMkLst>
-        </pc:spChg>
-        <pc:spChg chg="add mod">
-          <ac:chgData name="Aung Myo Aye" userId="e1862572-8acc-4a7b-a49a-743c77eeb174" providerId="ADAL" clId="{A68CC819-48BB-418B-9452-3602D0216508}" dt="2025-02-11T09:35:04.845" v="2024" actId="207"/>
-          <ac:spMkLst>
-            <pc:docMk/>
-            <pc:sldMk cId="3282884465" sldId="2145708749"/>
-            <ac:spMk id="9" creationId="{C5C87ABD-9515-AA9C-548E-264400FD800C}"/>
-          </ac:spMkLst>
-        </pc:spChg>
-        <pc:spChg chg="add mod">
-          <ac:chgData name="Aung Myo Aye" userId="e1862572-8acc-4a7b-a49a-743c77eeb174" providerId="ADAL" clId="{A68CC819-48BB-418B-9452-3602D0216508}" dt="2025-02-11T09:37:31.064" v="2027" actId="207"/>
-          <ac:spMkLst>
-            <pc:docMk/>
-            <pc:sldMk cId="3282884465" sldId="2145708749"/>
-            <ac:spMk id="11" creationId="{7CABE04E-97C2-17A3-2607-6CCAF3DFA271}"/>
-          </ac:spMkLst>
-        </pc:spChg>
-        <pc:spChg chg="add mod">
-          <ac:chgData name="Aung Myo Aye" userId="e1862572-8acc-4a7b-a49a-743c77eeb174" providerId="ADAL" clId="{A68CC819-48BB-418B-9452-3602D0216508}" dt="2025-02-11T09:37:31.064" v="2027" actId="207"/>
-          <ac:spMkLst>
-            <pc:docMk/>
-            <pc:sldMk cId="3282884465" sldId="2145708749"/>
-            <ac:spMk id="13" creationId="{F73B76DC-DB24-C2E3-6B1C-25E8F8E52BAF}"/>
-          </ac:spMkLst>
-        </pc:spChg>
-        <pc:spChg chg="add mod">
-          <ac:chgData name="Aung Myo Aye" userId="e1862572-8acc-4a7b-a49a-743c77eeb174" providerId="ADAL" clId="{A68CC819-48BB-418B-9452-3602D0216508}" dt="2025-02-11T09:37:31.064" v="2027" actId="207"/>
-          <ac:spMkLst>
-            <pc:docMk/>
-            <pc:sldMk cId="3282884465" sldId="2145708749"/>
-            <ac:spMk id="14" creationId="{4D730116-E390-D360-97E9-F2A6436372C5}"/>
-          </ac:spMkLst>
-        </pc:spChg>
-        <pc:spChg chg="add mod">
-          <ac:chgData name="Aung Myo Aye" userId="e1862572-8acc-4a7b-a49a-743c77eeb174" providerId="ADAL" clId="{A68CC819-48BB-418B-9452-3602D0216508}" dt="2025-02-11T09:37:35.763" v="2028" actId="207"/>
-          <ac:spMkLst>
-            <pc:docMk/>
-            <pc:sldMk cId="3282884465" sldId="2145708749"/>
-            <ac:spMk id="15" creationId="{03E2B0AF-3000-4F70-8321-E521EC97F91E}"/>
-          </ac:spMkLst>
-        </pc:spChg>
-        <pc:spChg chg="add mod">
-          <ac:chgData name="Aung Myo Aye" userId="e1862572-8acc-4a7b-a49a-743c77eeb174" providerId="ADAL" clId="{A68CC819-48BB-418B-9452-3602D0216508}" dt="2025-02-13T08:22:47.152" v="2047" actId="1076"/>
-          <ac:spMkLst>
-            <pc:docMk/>
-            <pc:sldMk cId="3282884465" sldId="2145708749"/>
-            <ac:spMk id="16" creationId="{3DA017A1-1198-401A-B626-E7424840B389}"/>
-          </ac:spMkLst>
-        </pc:spChg>
-        <pc:spChg chg="add mod">
-          <ac:chgData name="Aung Myo Aye" userId="e1862572-8acc-4a7b-a49a-743c77eeb174" providerId="ADAL" clId="{A68CC819-48BB-418B-9452-3602D0216508}" dt="2025-02-11T09:35:32.238" v="2026" actId="207"/>
-          <ac:spMkLst>
-            <pc:docMk/>
-            <pc:sldMk cId="3282884465" sldId="2145708749"/>
-            <ac:spMk id="17" creationId="{897B3CE8-0631-FB5D-244E-545851D59A60}"/>
-          </ac:spMkLst>
-        </pc:spChg>
-        <pc:graphicFrameChg chg="add mod modGraphic">
-          <ac:chgData name="Aung Myo Aye" userId="e1862572-8acc-4a7b-a49a-743c77eeb174" providerId="ADAL" clId="{A68CC819-48BB-418B-9452-3602D0216508}" dt="2025-02-11T09:38:23.181" v="2036" actId="113"/>
-          <ac:graphicFrameMkLst>
-            <pc:docMk/>
-            <pc:sldMk cId="3282884465" sldId="2145708749"/>
-            <ac:graphicFrameMk id="6" creationId="{67431946-B77E-F2FB-6CA8-E500E07A93C3}"/>
-          </ac:graphicFrameMkLst>
-        </pc:graphicFrameChg>
-      </pc:sldChg>
-      <pc:sldChg chg="addSp delSp modSp add mod">
-        <pc:chgData name="Aung Myo Aye" userId="e1862572-8acc-4a7b-a49a-743c77eeb174" providerId="ADAL" clId="{A68CC819-48BB-418B-9452-3602D0216508}" dt="2025-02-13T08:56:41.126" v="2054" actId="20577"/>
-        <pc:sldMkLst>
-          <pc:docMk/>
-          <pc:sldMk cId="307570946" sldId="2145708750"/>
-        </pc:sldMkLst>
-        <pc:spChg chg="mod">
-          <ac:chgData name="Aung Myo Aye" userId="e1862572-8acc-4a7b-a49a-743c77eeb174" providerId="ADAL" clId="{A68CC819-48BB-418B-9452-3602D0216508}" dt="2025-02-10T05:19:13.672" v="2022" actId="20577"/>
-          <ac:spMkLst>
-            <pc:docMk/>
-            <pc:sldMk cId="307570946" sldId="2145708750"/>
-            <ac:spMk id="3" creationId="{38BFD591-D491-D85F-CB99-5001B5C9B286}"/>
-          </ac:spMkLst>
-        </pc:spChg>
-        <pc:spChg chg="mod">
-          <ac:chgData name="Aung Myo Aye" userId="e1862572-8acc-4a7b-a49a-743c77eeb174" providerId="ADAL" clId="{A68CC819-48BB-418B-9452-3602D0216508}" dt="2025-02-13T08:21:08.457" v="2038" actId="14100"/>
-          <ac:spMkLst>
-            <pc:docMk/>
-            <pc:sldMk cId="307570946" sldId="2145708750"/>
-            <ac:spMk id="4" creationId="{71AF4D64-2810-4074-1315-5AF0DD7E6873}"/>
-          </ac:spMkLst>
-        </pc:spChg>
-        <pc:spChg chg="add mod">
-          <ac:chgData name="Aung Myo Aye" userId="e1862572-8acc-4a7b-a49a-743c77eeb174" providerId="ADAL" clId="{A68CC819-48BB-418B-9452-3602D0216508}" dt="2025-02-13T08:34:50.772" v="2048" actId="1076"/>
-          <ac:spMkLst>
-            <pc:docMk/>
-            <pc:sldMk cId="307570946" sldId="2145708750"/>
-            <ac:spMk id="8" creationId="{E73D3D8C-0944-CEB5-FB8F-D07446EF8200}"/>
-          </ac:spMkLst>
-        </pc:spChg>
-        <pc:graphicFrameChg chg="mod modGraphic">
-          <ac:chgData name="Aung Myo Aye" userId="e1862572-8acc-4a7b-a49a-743c77eeb174" providerId="ADAL" clId="{A68CC819-48BB-418B-9452-3602D0216508}" dt="2025-02-13T08:56:41.126" v="2054" actId="20577"/>
-          <ac:graphicFrameMkLst>
-            <pc:docMk/>
-            <pc:sldMk cId="307570946" sldId="2145708750"/>
-            <ac:graphicFrameMk id="6" creationId="{7EDF3696-2580-A2BE-4F4A-B797B6E59272}"/>
-          </ac:graphicFrameMkLst>
-        </pc:graphicFrameChg>
-      </pc:sldChg>
-      <pc:sldChg chg="del">
-        <pc:chgData name="Aung Myo Aye" userId="e1862572-8acc-4a7b-a49a-743c77eeb174" providerId="ADAL" clId="{A68CC819-48BB-418B-9452-3602D0216508}" dt="2025-01-29T02:36:09.212" v="26" actId="47"/>
-        <pc:sldMkLst>
-          <pc:docMk/>
-          <pc:sldMk cId="1444435074" sldId="2145708750"/>
-        </pc:sldMkLst>
-      </pc:sldChg>
-      <pc:sldChg chg="modSp del mod">
-        <pc:chgData name="Aung Myo Aye" userId="e1862572-8acc-4a7b-a49a-743c77eeb174" providerId="ADAL" clId="{A68CC819-48BB-418B-9452-3602D0216508}" dt="2025-02-13T08:21:37.254" v="2045" actId="47"/>
-        <pc:sldMkLst>
-          <pc:docMk/>
-          <pc:sldMk cId="1951609717" sldId="2145708751"/>
-        </pc:sldMkLst>
-      </pc:sldChg>
-      <pc:sldMasterChg chg="delSldLayout">
-        <pc:chgData name="Aung Myo Aye" userId="e1862572-8acc-4a7b-a49a-743c77eeb174" providerId="ADAL" clId="{A68CC819-48BB-418B-9452-3602D0216508}" dt="2025-01-29T02:39:15.149" v="67" actId="47"/>
-        <pc:sldMasterMkLst>
-          <pc:docMk/>
-          <pc:sldMasterMk cId="1892677854" sldId="2147483661"/>
-        </pc:sldMasterMkLst>
-        <pc:sldLayoutChg chg="del">
-          <pc:chgData name="Aung Myo Aye" userId="e1862572-8acc-4a7b-a49a-743c77eeb174" providerId="ADAL" clId="{A68CC819-48BB-418B-9452-3602D0216508}" dt="2025-01-29T02:36:09.212" v="26" actId="47"/>
-          <pc:sldLayoutMkLst>
-            <pc:docMk/>
-            <pc:sldMasterMk cId="1892677854" sldId="2147483661"/>
-            <pc:sldLayoutMk cId="1082645017" sldId="2147483683"/>
-          </pc:sldLayoutMkLst>
-        </pc:sldLayoutChg>
-        <pc:sldLayoutChg chg="del">
-          <pc:chgData name="Aung Myo Aye" userId="e1862572-8acc-4a7b-a49a-743c77eeb174" providerId="ADAL" clId="{A68CC819-48BB-418B-9452-3602D0216508}" dt="2025-01-29T02:39:15.149" v="67" actId="47"/>
-          <pc:sldLayoutMkLst>
-            <pc:docMk/>
-            <pc:sldMasterMk cId="1892677854" sldId="2147483661"/>
-            <pc:sldLayoutMk cId="2713456149" sldId="2147483683"/>
-          </pc:sldLayoutMkLst>
-        </pc:sldLayoutChg>
-      </pc:sldMasterChg>
-    </pc:docChg>
-  </pc:docChgLst>
-  <pc:docChgLst>
-    <pc:chgData name="Aung Myo Aye" userId="e1862572-8acc-4a7b-a49a-743c77eeb174" providerId="ADAL" clId="{A30B9FD0-0CE2-47B9-ADFD-B26122832D4C}"/>
-    <pc:docChg chg="undo custSel addSld delSld modSld sldOrd">
-      <pc:chgData name="Aung Myo Aye" userId="e1862572-8acc-4a7b-a49a-743c77eeb174" providerId="ADAL" clId="{A30B9FD0-0CE2-47B9-ADFD-B26122832D4C}" dt="2025-01-28T15:32:27.456" v="9872" actId="14100"/>
-      <pc:docMkLst>
-        <pc:docMk/>
-      </pc:docMkLst>
-      <pc:sldChg chg="del">
-        <pc:chgData name="Aung Myo Aye" userId="e1862572-8acc-4a7b-a49a-743c77eeb174" providerId="ADAL" clId="{A30B9FD0-0CE2-47B9-ADFD-B26122832D4C}" dt="2025-01-27T07:54:34.463" v="1" actId="47"/>
-        <pc:sldMkLst>
-          <pc:docMk/>
-          <pc:sldMk cId="3913151875" sldId="2145708743"/>
-        </pc:sldMkLst>
-      </pc:sldChg>
-      <pc:sldChg chg="del">
-        <pc:chgData name="Aung Myo Aye" userId="e1862572-8acc-4a7b-a49a-743c77eeb174" providerId="ADAL" clId="{A30B9FD0-0CE2-47B9-ADFD-B26122832D4C}" dt="2025-01-27T07:54:34.259" v="0" actId="47"/>
-        <pc:sldMkLst>
-          <pc:docMk/>
-          <pc:sldMk cId="3156077037" sldId="2145708744"/>
-        </pc:sldMkLst>
-      </pc:sldChg>
-      <pc:sldChg chg="del">
-        <pc:chgData name="Aung Myo Aye" userId="e1862572-8acc-4a7b-a49a-743c77eeb174" providerId="ADAL" clId="{A30B9FD0-0CE2-47B9-ADFD-B26122832D4C}" dt="2025-01-27T07:54:34.636" v="2" actId="47"/>
-        <pc:sldMkLst>
-          <pc:docMk/>
-          <pc:sldMk cId="3570320426" sldId="2145708745"/>
-        </pc:sldMkLst>
-      </pc:sldChg>
-      <pc:sldChg chg="addSp delSp modSp add del mod">
-        <pc:chgData name="Aung Myo Aye" userId="e1862572-8acc-4a7b-a49a-743c77eeb174" providerId="ADAL" clId="{A30B9FD0-0CE2-47B9-ADFD-B26122832D4C}" dt="2025-01-28T07:42:49.260" v="7741" actId="255"/>
-        <pc:sldMkLst>
-          <pc:docMk/>
-          <pc:sldMk cId="440516599" sldId="2145708746"/>
-        </pc:sldMkLst>
-      </pc:sldChg>
-      <pc:sldChg chg="addSp delSp modSp add mod">
-        <pc:chgData name="Aung Myo Aye" userId="e1862572-8acc-4a7b-a49a-743c77eeb174" providerId="ADAL" clId="{A30B9FD0-0CE2-47B9-ADFD-B26122832D4C}" dt="2025-01-28T07:43:26.374" v="7743" actId="554"/>
-        <pc:sldMkLst>
-          <pc:docMk/>
-          <pc:sldMk cId="2361578008" sldId="2145708747"/>
-        </pc:sldMkLst>
-      </pc:sldChg>
-      <pc:sldChg chg="del">
-        <pc:chgData name="Aung Myo Aye" userId="e1862572-8acc-4a7b-a49a-743c77eeb174" providerId="ADAL" clId="{A30B9FD0-0CE2-47B9-ADFD-B26122832D4C}" dt="2025-01-27T07:54:34.777" v="3" actId="47"/>
-        <pc:sldMkLst>
-          <pc:docMk/>
-          <pc:sldMk cId="3618114981" sldId="2145708747"/>
-        </pc:sldMkLst>
-      </pc:sldChg>
-      <pc:sldChg chg="modSp new mod ord">
-        <pc:chgData name="Aung Myo Aye" userId="e1862572-8acc-4a7b-a49a-743c77eeb174" providerId="ADAL" clId="{A30B9FD0-0CE2-47B9-ADFD-B26122832D4C}" dt="2025-01-28T14:06:13.639" v="9871" actId="20577"/>
-        <pc:sldMkLst>
-          <pc:docMk/>
-          <pc:sldMk cId="308816287" sldId="2145708748"/>
-        </pc:sldMkLst>
-        <pc:spChg chg="mod">
-          <ac:chgData name="Aung Myo Aye" userId="e1862572-8acc-4a7b-a49a-743c77eeb174" providerId="ADAL" clId="{A30B9FD0-0CE2-47B9-ADFD-B26122832D4C}" dt="2025-01-28T14:06:13.639" v="9871" actId="20577"/>
-          <ac:spMkLst>
-            <pc:docMk/>
-            <pc:sldMk cId="308816287" sldId="2145708748"/>
-            <ac:spMk id="2" creationId="{789CF22F-5AA4-B171-99C4-50EE2DCE24BE}"/>
-          </ac:spMkLst>
-        </pc:spChg>
-      </pc:sldChg>
-      <pc:sldChg chg="addSp delSp modSp add mod">
-        <pc:chgData name="Aung Myo Aye" userId="e1862572-8acc-4a7b-a49a-743c77eeb174" providerId="ADAL" clId="{A30B9FD0-0CE2-47B9-ADFD-B26122832D4C}" dt="2025-01-28T08:13:34.935" v="8592" actId="1076"/>
-        <pc:sldMkLst>
-          <pc:docMk/>
-          <pc:sldMk cId="2303615275" sldId="2145708749"/>
-        </pc:sldMkLst>
-      </pc:sldChg>
-      <pc:sldChg chg="addSp delSp modSp add mod">
-        <pc:chgData name="Aung Myo Aye" userId="e1862572-8acc-4a7b-a49a-743c77eeb174" providerId="ADAL" clId="{A30B9FD0-0CE2-47B9-ADFD-B26122832D4C}" dt="2025-01-28T15:32:27.456" v="9872" actId="14100"/>
-        <pc:sldMkLst>
-          <pc:docMk/>
-          <pc:sldMk cId="1444435074" sldId="2145708750"/>
-        </pc:sldMkLst>
-      </pc:sldChg>
-      <pc:sldMasterChg chg="addSldLayout delSldLayout">
-        <pc:chgData name="Aung Myo Aye" userId="e1862572-8acc-4a7b-a49a-743c77eeb174" providerId="ADAL" clId="{A30B9FD0-0CE2-47B9-ADFD-B26122832D4C}" dt="2025-01-27T07:54:36.774" v="5" actId="47"/>
-        <pc:sldMasterMkLst>
-          <pc:docMk/>
-          <pc:sldMasterMk cId="1892677854" sldId="2147483661"/>
-        </pc:sldMasterMkLst>
-        <pc:sldLayoutChg chg="add del">
-          <pc:chgData name="Aung Myo Aye" userId="e1862572-8acc-4a7b-a49a-743c77eeb174" providerId="ADAL" clId="{A30B9FD0-0CE2-47B9-ADFD-B26122832D4C}" dt="2025-01-27T07:54:36.774" v="5" actId="47"/>
-          <pc:sldLayoutMkLst>
-            <pc:docMk/>
-            <pc:sldMasterMk cId="1892677854" sldId="2147483661"/>
-            <pc:sldLayoutMk cId="1082645017" sldId="2147483683"/>
-          </pc:sldLayoutMkLst>
-        </pc:sldLayoutChg>
-      </pc:sldMasterChg>
-    </pc:docChg>
-  </pc:docChgLst>
-  <pc:docChgLst>
-    <pc:chgData name="Cynthia Nyein" userId="S::cynthia.nyein@cdsg.com.mm::073e3caf-4790-4810-9055-bae9186b44dc" providerId="AD" clId="Web-{6E6C571C-83AA-5908-E5AB-B0F6A74C6F2F}"/>
-    <pc:docChg chg="addSld delSld modSld">
-      <pc:chgData name="Cynthia Nyein" userId="S::cynthia.nyein@cdsg.com.mm::073e3caf-4790-4810-9055-bae9186b44dc" providerId="AD" clId="Web-{6E6C571C-83AA-5908-E5AB-B0F6A74C6F2F}" dt="2025-02-11T09:53:16.761" v="267" actId="1076"/>
-      <pc:docMkLst>
-        <pc:docMk/>
-      </pc:docMkLst>
-      <pc:sldChg chg="addSp modSp">
-        <pc:chgData name="Cynthia Nyein" userId="S::cynthia.nyein@cdsg.com.mm::073e3caf-4790-4810-9055-bae9186b44dc" providerId="AD" clId="Web-{6E6C571C-83AA-5908-E5AB-B0F6A74C6F2F}" dt="2025-02-11T09:53:16.761" v="267" actId="1076"/>
-        <pc:sldMkLst>
-          <pc:docMk/>
-          <pc:sldMk cId="3282884465" sldId="2145708749"/>
-        </pc:sldMkLst>
-        <pc:spChg chg="add mod">
-          <ac:chgData name="Cynthia Nyein" userId="S::cynthia.nyein@cdsg.com.mm::073e3caf-4790-4810-9055-bae9186b44dc" providerId="AD" clId="Web-{6E6C571C-83AA-5908-E5AB-B0F6A74C6F2F}" dt="2025-02-11T09:53:16.761" v="267" actId="1076"/>
-          <ac:spMkLst>
-            <pc:docMk/>
-            <pc:sldMk cId="3282884465" sldId="2145708749"/>
-            <ac:spMk id="4" creationId="{2CDADCFD-D045-887D-4F38-80FEF26CEC08}"/>
-          </ac:spMkLst>
-        </pc:spChg>
-        <pc:graphicFrameChg chg="mod modGraphic">
-          <ac:chgData name="Cynthia Nyein" userId="S::cynthia.nyein@cdsg.com.mm::073e3caf-4790-4810-9055-bae9186b44dc" providerId="AD" clId="Web-{6E6C571C-83AA-5908-E5AB-B0F6A74C6F2F}" dt="2025-02-11T09:52:51.604" v="263"/>
-          <ac:graphicFrameMkLst>
-            <pc:docMk/>
-            <pc:sldMk cId="3282884465" sldId="2145708749"/>
-            <ac:graphicFrameMk id="6" creationId="{67431946-B77E-F2FB-6CA8-E500E07A93C3}"/>
-          </ac:graphicFrameMkLst>
-        </pc:graphicFrameChg>
-      </pc:sldChg>
-      <pc:sldChg chg="modSp add del replId">
-        <pc:chgData name="Cynthia Nyein" userId="S::cynthia.nyein@cdsg.com.mm::073e3caf-4790-4810-9055-bae9186b44dc" providerId="AD" clId="Web-{6E6C571C-83AA-5908-E5AB-B0F6A74C6F2F}" dt="2025-02-11T09:46:06.308" v="71"/>
-        <pc:sldMkLst>
-          <pc:docMk/>
-          <pc:sldMk cId="3405647989" sldId="2145708751"/>
-        </pc:sldMkLst>
-      </pc:sldChg>
-    </pc:docChg>
-  </pc:docChgLst>
-  <pc:docChgLst>
-    <pc:chgData name="Aung Myo Aye" userId="e1862572-8acc-4a7b-a49a-743c77eeb174" providerId="ADAL" clId="{7EB27C8B-9B6E-430A-AA80-4597109E7BFC}"/>
-    <pc:docChg chg="custSel addSld modSld">
-      <pc:chgData name="Aung Myo Aye" userId="e1862572-8acc-4a7b-a49a-743c77eeb174" providerId="ADAL" clId="{7EB27C8B-9B6E-430A-AA80-4597109E7BFC}" dt="2025-03-10T03:30:09.540" v="494" actId="14100"/>
-      <pc:docMkLst>
-        <pc:docMk/>
-      </pc:docMkLst>
-      <pc:sldChg chg="modSp mod">
-        <pc:chgData name="Aung Myo Aye" userId="e1862572-8acc-4a7b-a49a-743c77eeb174" providerId="ADAL" clId="{7EB27C8B-9B6E-430A-AA80-4597109E7BFC}" dt="2025-03-04T02:07:47.233" v="1" actId="14100"/>
-        <pc:sldMkLst>
-          <pc:docMk/>
-          <pc:sldMk cId="3282884465" sldId="2145708749"/>
-        </pc:sldMkLst>
-        <pc:graphicFrameChg chg="modGraphic">
-          <ac:chgData name="Aung Myo Aye" userId="e1862572-8acc-4a7b-a49a-743c77eeb174" providerId="ADAL" clId="{7EB27C8B-9B6E-430A-AA80-4597109E7BFC}" dt="2025-03-04T02:07:47.233" v="1" actId="14100"/>
-          <ac:graphicFrameMkLst>
-            <pc:docMk/>
-            <pc:sldMk cId="3282884465" sldId="2145708749"/>
-            <ac:graphicFrameMk id="6" creationId="{67431946-B77E-F2FB-6CA8-E500E07A93C3}"/>
-          </ac:graphicFrameMkLst>
-        </pc:graphicFrameChg>
-      </pc:sldChg>
-      <pc:sldChg chg="modSp mod">
-        <pc:chgData name="Aung Myo Aye" userId="e1862572-8acc-4a7b-a49a-743c77eeb174" providerId="ADAL" clId="{7EB27C8B-9B6E-430A-AA80-4597109E7BFC}" dt="2025-03-04T02:07:12.156" v="0" actId="2164"/>
-        <pc:sldMkLst>
-          <pc:docMk/>
-          <pc:sldMk cId="307570946" sldId="2145708750"/>
-        </pc:sldMkLst>
-        <pc:graphicFrameChg chg="modGraphic">
-          <ac:chgData name="Aung Myo Aye" userId="e1862572-8acc-4a7b-a49a-743c77eeb174" providerId="ADAL" clId="{7EB27C8B-9B6E-430A-AA80-4597109E7BFC}" dt="2025-03-04T02:07:12.156" v="0" actId="2164"/>
-          <ac:graphicFrameMkLst>
-            <pc:docMk/>
-            <pc:sldMk cId="307570946" sldId="2145708750"/>
-            <ac:graphicFrameMk id="6" creationId="{7EDF3696-2580-A2BE-4F4A-B797B6E59272}"/>
-          </ac:graphicFrameMkLst>
-        </pc:graphicFrameChg>
-      </pc:sldChg>
-      <pc:sldChg chg="addSp delSp modSp add mod">
-        <pc:chgData name="Aung Myo Aye" userId="e1862572-8acc-4a7b-a49a-743c77eeb174" providerId="ADAL" clId="{7EB27C8B-9B6E-430A-AA80-4597109E7BFC}" dt="2025-03-10T03:30:09.540" v="494" actId="14100"/>
-        <pc:sldMkLst>
-          <pc:docMk/>
-          <pc:sldMk cId="552837469" sldId="2145708751"/>
-        </pc:sldMkLst>
-        <pc:spChg chg="del">
-          <ac:chgData name="Aung Myo Aye" userId="e1862572-8acc-4a7b-a49a-743c77eeb174" providerId="ADAL" clId="{7EB27C8B-9B6E-430A-AA80-4597109E7BFC}" dt="2025-03-10T03:20:38.191" v="5" actId="478"/>
-          <ac:spMkLst>
-            <pc:docMk/>
-            <pc:sldMk cId="552837469" sldId="2145708751"/>
-            <ac:spMk id="4" creationId="{7E8D4B90-5D50-6CDE-7BA9-A2C483C9603D}"/>
-          </ac:spMkLst>
-        </pc:spChg>
-        <pc:spChg chg="add mod">
-          <ac:chgData name="Aung Myo Aye" userId="e1862572-8acc-4a7b-a49a-743c77eeb174" providerId="ADAL" clId="{7EB27C8B-9B6E-430A-AA80-4597109E7BFC}" dt="2025-03-10T03:30:09.540" v="494" actId="14100"/>
-          <ac:spMkLst>
-            <pc:docMk/>
-            <pc:sldMk cId="552837469" sldId="2145708751"/>
-            <ac:spMk id="5" creationId="{E22DAEFA-E0BA-12FA-8A6D-210E0364EF1F}"/>
-          </ac:spMkLst>
-        </pc:spChg>
-        <pc:spChg chg="del">
-          <ac:chgData name="Aung Myo Aye" userId="e1862572-8acc-4a7b-a49a-743c77eeb174" providerId="ADAL" clId="{7EB27C8B-9B6E-430A-AA80-4597109E7BFC}" dt="2025-03-10T03:20:36.813" v="4" actId="478"/>
-          <ac:spMkLst>
-            <pc:docMk/>
-            <pc:sldMk cId="552837469" sldId="2145708751"/>
-            <ac:spMk id="8" creationId="{FB49D008-EF65-72A4-1A6A-2C268AE62E1C}"/>
-          </ac:spMkLst>
-        </pc:spChg>
-        <pc:graphicFrameChg chg="mod modGraphic">
-          <ac:chgData name="Aung Myo Aye" userId="e1862572-8acc-4a7b-a49a-743c77eeb174" providerId="ADAL" clId="{7EB27C8B-9B6E-430A-AA80-4597109E7BFC}" dt="2025-03-10T03:29:56.079" v="487" actId="14734"/>
-          <ac:graphicFrameMkLst>
-            <pc:docMk/>
-            <pc:sldMk cId="552837469" sldId="2145708751"/>
-            <ac:graphicFrameMk id="6" creationId="{2BE3BA08-55EC-5B73-7421-44689B4F6FC4}"/>
-          </ac:graphicFrameMkLst>
-        </pc:graphicFrameChg>
-      </pc:sldChg>
-    </pc:docChg>
-  </pc:docChgLst>
-  <pc:docChgLst>
-    <pc:chgData name="Cynthia Nyein" userId="S::cynthia.nyein@cdsg.com.mm::073e3caf-4790-4810-9055-bae9186b44dc" providerId="AD" clId="Web-{699A2A7B-AFB7-B950-18DE-70C67CD4DDAC}"/>
-    <pc:docChg chg="modSld">
-      <pc:chgData name="Cynthia Nyein" userId="S::cynthia.nyein@cdsg.com.mm::073e3caf-4790-4810-9055-bae9186b44dc" providerId="AD" clId="Web-{699A2A7B-AFB7-B950-18DE-70C67CD4DDAC}" dt="2025-02-13T08:42:44.900" v="235"/>
-      <pc:docMkLst>
-        <pc:docMk/>
-      </pc:docMkLst>
-      <pc:sldChg chg="modSp">
-        <pc:chgData name="Cynthia Nyein" userId="S::cynthia.nyein@cdsg.com.mm::073e3caf-4790-4810-9055-bae9186b44dc" providerId="AD" clId="Web-{699A2A7B-AFB7-B950-18DE-70C67CD4DDAC}" dt="2025-02-13T08:42:44.900" v="235"/>
-        <pc:sldMkLst>
-          <pc:docMk/>
-          <pc:sldMk cId="307570946" sldId="2145708750"/>
-        </pc:sldMkLst>
-        <pc:spChg chg="mod">
-          <ac:chgData name="Cynthia Nyein" userId="S::cynthia.nyein@cdsg.com.mm::073e3caf-4790-4810-9055-bae9186b44dc" providerId="AD" clId="Web-{699A2A7B-AFB7-B950-18DE-70C67CD4DDAC}" dt="2025-02-13T08:41:36.945" v="204" actId="1076"/>
-          <ac:spMkLst>
-            <pc:docMk/>
-            <pc:sldMk cId="307570946" sldId="2145708750"/>
-            <ac:spMk id="4" creationId="{71AF4D64-2810-4074-1315-5AF0DD7E6873}"/>
-          </ac:spMkLst>
-        </pc:spChg>
-        <pc:spChg chg="mod">
-          <ac:chgData name="Cynthia Nyein" userId="S::cynthia.nyein@cdsg.com.mm::073e3caf-4790-4810-9055-bae9186b44dc" providerId="AD" clId="Web-{699A2A7B-AFB7-B950-18DE-70C67CD4DDAC}" dt="2025-02-13T08:41:48.680" v="206" actId="1076"/>
-          <ac:spMkLst>
-            <pc:docMk/>
-            <pc:sldMk cId="307570946" sldId="2145708750"/>
-            <ac:spMk id="8" creationId="{E73D3D8C-0944-CEB5-FB8F-D07446EF8200}"/>
-          </ac:spMkLst>
-        </pc:spChg>
-        <pc:graphicFrameChg chg="mod modGraphic">
-          <ac:chgData name="Cynthia Nyein" userId="S::cynthia.nyein@cdsg.com.mm::073e3caf-4790-4810-9055-bae9186b44dc" providerId="AD" clId="Web-{699A2A7B-AFB7-B950-18DE-70C67CD4DDAC}" dt="2025-02-13T08:42:44.900" v="235"/>
-          <ac:graphicFrameMkLst>
-            <pc:docMk/>
-            <pc:sldMk cId="307570946" sldId="2145708750"/>
-            <ac:graphicFrameMk id="6" creationId="{7EDF3696-2580-A2BE-4F4A-B797B6E59272}"/>
-          </ac:graphicFrameMkLst>
-        </pc:graphicFrameChg>
-      </pc:sldChg>
-    </pc:docChg>
-  </pc:docChgLst>
-  <pc:docChgLst>
-    <pc:chgData name="Ei Myat Mon" userId="e6357aa9-fa6e-4417-bbe1-b057167c5708" providerId="ADAL" clId="{52191A20-731C-4621-9F36-B28FC4FBC900}"/>
-    <pc:docChg chg="undo redo custSel addSld delSld modSld sldOrd">
-      <pc:chgData name="Ei Myat Mon" userId="e6357aa9-fa6e-4417-bbe1-b057167c5708" providerId="ADAL" clId="{52191A20-731C-4621-9F36-B28FC4FBC900}" dt="2025-07-10T07:11:12.852" v="4043" actId="20577"/>
-      <pc:docMkLst>
-        <pc:docMk/>
-      </pc:docMkLst>
-      <pc:sldChg chg="modSp mod">
-        <pc:chgData name="Ei Myat Mon" userId="e6357aa9-fa6e-4417-bbe1-b057167c5708" providerId="ADAL" clId="{52191A20-731C-4621-9F36-B28FC4FBC900}" dt="2025-06-26T02:34:37.261" v="1884" actId="20577"/>
-        <pc:sldMkLst>
-          <pc:docMk/>
-          <pc:sldMk cId="308816287" sldId="2145708748"/>
-        </pc:sldMkLst>
-        <pc:spChg chg="mod">
-          <ac:chgData name="Ei Myat Mon" userId="e6357aa9-fa6e-4417-bbe1-b057167c5708" providerId="ADAL" clId="{52191A20-731C-4621-9F36-B28FC4FBC900}" dt="2025-06-24T08:57:58.182" v="234" actId="14100"/>
-          <ac:spMkLst>
-            <pc:docMk/>
-            <pc:sldMk cId="308816287" sldId="2145708748"/>
-            <ac:spMk id="2" creationId="{789CF22F-5AA4-B171-99C4-50EE2DCE24BE}"/>
-          </ac:spMkLst>
-        </pc:spChg>
-        <pc:spChg chg="mod">
-          <ac:chgData name="Ei Myat Mon" userId="e6357aa9-fa6e-4417-bbe1-b057167c5708" providerId="ADAL" clId="{52191A20-731C-4621-9F36-B28FC4FBC900}" dt="2025-06-26T02:34:37.261" v="1884" actId="20577"/>
-          <ac:spMkLst>
-            <pc:docMk/>
-            <pc:sldMk cId="308816287" sldId="2145708748"/>
-            <ac:spMk id="4" creationId="{DC6C52E4-7A16-A6FD-0E8E-5DB151B24147}"/>
-          </ac:spMkLst>
-        </pc:spChg>
-      </pc:sldChg>
-      <pc:sldChg chg="modSp del mod">
-        <pc:chgData name="Ei Myat Mon" userId="e6357aa9-fa6e-4417-bbe1-b057167c5708" providerId="ADAL" clId="{52191A20-731C-4621-9F36-B28FC4FBC900}" dt="2025-06-12T03:01:08.208" v="195" actId="2696"/>
-        <pc:sldMkLst>
-          <pc:docMk/>
-          <pc:sldMk cId="3282884465" sldId="2145708749"/>
-        </pc:sldMkLst>
-        <pc:graphicFrameChg chg="modGraphic">
-          <ac:chgData name="Ei Myat Mon" userId="e6357aa9-fa6e-4417-bbe1-b057167c5708" providerId="ADAL" clId="{52191A20-731C-4621-9F36-B28FC4FBC900}" dt="2025-06-12T02:58:50.647" v="194" actId="6549"/>
-          <ac:graphicFrameMkLst>
-            <pc:docMk/>
-            <pc:sldMk cId="3282884465" sldId="2145708749"/>
-            <ac:graphicFrameMk id="3" creationId="{5B271AF5-35D0-0510-4653-B3955AA94B92}"/>
-          </ac:graphicFrameMkLst>
-        </pc:graphicFrameChg>
-      </pc:sldChg>
-      <pc:sldChg chg="modSp mod">
-        <pc:chgData name="Ei Myat Mon" userId="e6357aa9-fa6e-4417-bbe1-b057167c5708" providerId="ADAL" clId="{52191A20-731C-4621-9F36-B28FC4FBC900}" dt="2025-07-10T07:10:44.123" v="4039" actId="20577"/>
-        <pc:sldMkLst>
-          <pc:docMk/>
-          <pc:sldMk cId="615142532" sldId="2145708750"/>
-        </pc:sldMkLst>
-        <pc:graphicFrameChg chg="mod modGraphic">
-          <ac:chgData name="Ei Myat Mon" userId="e6357aa9-fa6e-4417-bbe1-b057167c5708" providerId="ADAL" clId="{52191A20-731C-4621-9F36-B28FC4FBC900}" dt="2025-07-10T07:10:44.123" v="4039" actId="20577"/>
-          <ac:graphicFrameMkLst>
-            <pc:docMk/>
-            <pc:sldMk cId="615142532" sldId="2145708750"/>
-            <ac:graphicFrameMk id="4" creationId="{7DAAC8F7-9035-8E1E-2CD1-C78762AA6E00}"/>
-          </ac:graphicFrameMkLst>
-        </pc:graphicFrameChg>
-      </pc:sldChg>
-      <pc:sldChg chg="addSp modSp del mod">
-        <pc:chgData name="Ei Myat Mon" userId="e6357aa9-fa6e-4417-bbe1-b057167c5708" providerId="ADAL" clId="{52191A20-731C-4621-9F36-B28FC4FBC900}" dt="2025-06-24T15:57:05.588" v="235" actId="47"/>
-        <pc:sldMkLst>
-          <pc:docMk/>
-          <pc:sldMk cId="1691034162" sldId="2145708751"/>
-        </pc:sldMkLst>
-        <pc:picChg chg="add mod">
-          <ac:chgData name="Ei Myat Mon" userId="e6357aa9-fa6e-4417-bbe1-b057167c5708" providerId="ADAL" clId="{52191A20-731C-4621-9F36-B28FC4FBC900}" dt="2025-06-08T14:34:35.542" v="38" actId="14100"/>
-          <ac:picMkLst>
-            <pc:docMk/>
-            <pc:sldMk cId="1691034162" sldId="2145708751"/>
-            <ac:picMk id="5" creationId="{F911097D-5EFE-088D-5250-674344B54E43}"/>
-          </ac:picMkLst>
-        </pc:picChg>
-      </pc:sldChg>
-      <pc:sldChg chg="modSp mod">
-        <pc:chgData name="Ei Myat Mon" userId="e6357aa9-fa6e-4417-bbe1-b057167c5708" providerId="ADAL" clId="{52191A20-731C-4621-9F36-B28FC4FBC900}" dt="2025-07-10T07:05:00.056" v="4026" actId="20577"/>
-        <pc:sldMkLst>
-          <pc:docMk/>
-          <pc:sldMk cId="2253167209" sldId="2145708752"/>
-        </pc:sldMkLst>
-        <pc:spChg chg="mod">
-          <ac:chgData name="Ei Myat Mon" userId="e6357aa9-fa6e-4417-bbe1-b057167c5708" providerId="ADAL" clId="{52191A20-731C-4621-9F36-B28FC4FBC900}" dt="2025-07-10T07:05:00.056" v="4026" actId="20577"/>
-          <ac:spMkLst>
-            <pc:docMk/>
-            <pc:sldMk cId="2253167209" sldId="2145708752"/>
-            <ac:spMk id="6" creationId="{4A08F4D0-3A0B-98D3-152B-8DA7EAE1C4AE}"/>
-          </ac:spMkLst>
-        </pc:spChg>
-      </pc:sldChg>
-      <pc:sldChg chg="addSp modSp mod">
-        <pc:chgData name="Ei Myat Mon" userId="e6357aa9-fa6e-4417-bbe1-b057167c5708" providerId="ADAL" clId="{52191A20-731C-4621-9F36-B28FC4FBC900}" dt="2025-07-08T03:43:10.169" v="3298" actId="20577"/>
-        <pc:sldMkLst>
-          <pc:docMk/>
-          <pc:sldMk cId="3932400498" sldId="2145708753"/>
-        </pc:sldMkLst>
-        <pc:spChg chg="mod">
-          <ac:chgData name="Ei Myat Mon" userId="e6357aa9-fa6e-4417-bbe1-b057167c5708" providerId="ADAL" clId="{52191A20-731C-4621-9F36-B28FC4FBC900}" dt="2025-07-01T06:47:05.667" v="2116" actId="20577"/>
-          <ac:spMkLst>
-            <pc:docMk/>
-            <pc:sldMk cId="3932400498" sldId="2145708753"/>
-            <ac:spMk id="3" creationId="{BB450111-7510-0566-CEE8-E74AC3EFBBD5}"/>
-          </ac:spMkLst>
-        </pc:spChg>
-        <pc:spChg chg="add mod">
-          <ac:chgData name="Ei Myat Mon" userId="e6357aa9-fa6e-4417-bbe1-b057167c5708" providerId="ADAL" clId="{52191A20-731C-4621-9F36-B28FC4FBC900}" dt="2025-07-08T03:43:10.169" v="3298" actId="20577"/>
-          <ac:spMkLst>
-            <pc:docMk/>
-            <pc:sldMk cId="3932400498" sldId="2145708753"/>
-            <ac:spMk id="5" creationId="{566B8245-5E31-8595-1259-F8F47FB33882}"/>
-          </ac:spMkLst>
-        </pc:spChg>
-      </pc:sldChg>
-      <pc:sldChg chg="addSp modSp mod">
-        <pc:chgData name="Ei Myat Mon" userId="e6357aa9-fa6e-4417-bbe1-b057167c5708" providerId="ADAL" clId="{52191A20-731C-4621-9F36-B28FC4FBC900}" dt="2025-06-25T16:30:56.716" v="1374" actId="1076"/>
-        <pc:sldMkLst>
-          <pc:docMk/>
-          <pc:sldMk cId="3307641602" sldId="2145708754"/>
-        </pc:sldMkLst>
-        <pc:picChg chg="add mod">
-          <ac:chgData name="Ei Myat Mon" userId="e6357aa9-fa6e-4417-bbe1-b057167c5708" providerId="ADAL" clId="{52191A20-731C-4621-9F36-B28FC4FBC900}" dt="2025-06-25T16:30:56.716" v="1374" actId="1076"/>
-          <ac:picMkLst>
-            <pc:docMk/>
-            <pc:sldMk cId="3307641602" sldId="2145708754"/>
-            <ac:picMk id="5" creationId="{4EE47914-F5D9-D02D-633B-427E9EAB5409}"/>
-          </ac:picMkLst>
-        </pc:picChg>
-      </pc:sldChg>
-      <pc:sldChg chg="addSp delSp modSp mod">
-        <pc:chgData name="Ei Myat Mon" userId="e6357aa9-fa6e-4417-bbe1-b057167c5708" providerId="ADAL" clId="{52191A20-731C-4621-9F36-B28FC4FBC900}" dt="2025-06-25T16:31:33.146" v="1383" actId="1076"/>
-        <pc:sldMkLst>
-          <pc:docMk/>
-          <pc:sldMk cId="3136416228" sldId="2145708755"/>
-        </pc:sldMkLst>
-        <pc:spChg chg="mod">
-          <ac:chgData name="Ei Myat Mon" userId="e6357aa9-fa6e-4417-bbe1-b057167c5708" providerId="ADAL" clId="{52191A20-731C-4621-9F36-B28FC4FBC900}" dt="2025-06-25T16:31:18.295" v="1379" actId="20577"/>
-          <ac:spMkLst>
-            <pc:docMk/>
-            <pc:sldMk cId="3136416228" sldId="2145708755"/>
-            <ac:spMk id="3" creationId="{034BC941-541B-1E4C-3F34-859BB7109AA3}"/>
-          </ac:spMkLst>
-        </pc:spChg>
-        <pc:picChg chg="add mod">
-          <ac:chgData name="Ei Myat Mon" userId="e6357aa9-fa6e-4417-bbe1-b057167c5708" providerId="ADAL" clId="{52191A20-731C-4621-9F36-B28FC4FBC900}" dt="2025-06-25T16:31:33.146" v="1383" actId="1076"/>
-          <ac:picMkLst>
-            <pc:docMk/>
-            <pc:sldMk cId="3136416228" sldId="2145708755"/>
-            <ac:picMk id="5" creationId="{3CFBFB0F-F0DE-35A8-D789-5EE14015B058}"/>
-          </ac:picMkLst>
-        </pc:picChg>
-        <pc:picChg chg="add del mod">
-          <ac:chgData name="Ei Myat Mon" userId="e6357aa9-fa6e-4417-bbe1-b057167c5708" providerId="ADAL" clId="{52191A20-731C-4621-9F36-B28FC4FBC900}" dt="2025-06-08T14:44:42.995" v="109" actId="478"/>
-          <ac:picMkLst>
-            <pc:docMk/>
-            <pc:sldMk cId="3136416228" sldId="2145708755"/>
-            <ac:picMk id="5" creationId="{C29CA025-22CB-8768-15F0-578D685EDB3F}"/>
-          </ac:picMkLst>
-        </pc:picChg>
-        <pc:picChg chg="add del mod">
-          <ac:chgData name="Ei Myat Mon" userId="e6357aa9-fa6e-4417-bbe1-b057167c5708" providerId="ADAL" clId="{52191A20-731C-4621-9F36-B28FC4FBC900}" dt="2025-06-25T04:07:44.833" v="482" actId="478"/>
-          <ac:picMkLst>
-            <pc:docMk/>
-            <pc:sldMk cId="3136416228" sldId="2145708755"/>
-            <ac:picMk id="7" creationId="{BA6FD6A4-8789-2788-E84E-D16AF642495B}"/>
-          </ac:picMkLst>
-        </pc:picChg>
-      </pc:sldChg>
-      <pc:sldChg chg="modSp mod">
-        <pc:chgData name="Ei Myat Mon" userId="e6357aa9-fa6e-4417-bbe1-b057167c5708" providerId="ADAL" clId="{52191A20-731C-4621-9F36-B28FC4FBC900}" dt="2025-06-08T14:49:29.891" v="181" actId="20577"/>
-        <pc:sldMkLst>
-          <pc:docMk/>
-          <pc:sldMk cId="4188361211" sldId="2145708756"/>
-        </pc:sldMkLst>
-        <pc:graphicFrameChg chg="modGraphic">
-          <ac:chgData name="Ei Myat Mon" userId="e6357aa9-fa6e-4417-bbe1-b057167c5708" providerId="ADAL" clId="{52191A20-731C-4621-9F36-B28FC4FBC900}" dt="2025-06-08T14:49:29.891" v="181" actId="20577"/>
-          <ac:graphicFrameMkLst>
-            <pc:docMk/>
-            <pc:sldMk cId="4188361211" sldId="2145708756"/>
-            <ac:graphicFrameMk id="4" creationId="{D86AEC2E-9D21-4669-85D3-73EF3BB5D461}"/>
-          </ac:graphicFrameMkLst>
-        </pc:graphicFrameChg>
-      </pc:sldChg>
-      <pc:sldChg chg="addSp delSp modSp new add del mod ord">
-        <pc:chgData name="Ei Myat Mon" userId="e6357aa9-fa6e-4417-bbe1-b057167c5708" providerId="ADAL" clId="{52191A20-731C-4621-9F36-B28FC4FBC900}" dt="2025-07-10T06:57:33.178" v="3871" actId="1076"/>
-        <pc:sldMkLst>
-          <pc:docMk/>
-          <pc:sldMk cId="296769422" sldId="2145708757"/>
-        </pc:sldMkLst>
-        <pc:spChg chg="mod">
-          <ac:chgData name="Ei Myat Mon" userId="e6357aa9-fa6e-4417-bbe1-b057167c5708" providerId="ADAL" clId="{52191A20-731C-4621-9F36-B28FC4FBC900}" dt="2025-06-04T03:11:18.006" v="34" actId="20577"/>
-          <ac:spMkLst>
-            <pc:docMk/>
-            <pc:sldMk cId="296769422" sldId="2145708757"/>
-            <ac:spMk id="3" creationId="{6D3407A6-CDE3-D3A9-EF51-C54D92FB1B5D}"/>
-          </ac:spMkLst>
-        </pc:spChg>
-        <pc:picChg chg="add mod">
-          <ac:chgData name="Ei Myat Mon" userId="e6357aa9-fa6e-4417-bbe1-b057167c5708" providerId="ADAL" clId="{52191A20-731C-4621-9F36-B28FC4FBC900}" dt="2025-07-10T06:57:33.178" v="3871" actId="1076"/>
-          <ac:picMkLst>
-            <pc:docMk/>
-            <pc:sldMk cId="296769422" sldId="2145708757"/>
-            <ac:picMk id="5" creationId="{03FDDC62-F24F-4787-E4DD-C201422EA061}"/>
-          </ac:picMkLst>
-        </pc:picChg>
-        <pc:picChg chg="add del mod">
-          <ac:chgData name="Ei Myat Mon" userId="e6357aa9-fa6e-4417-bbe1-b057167c5708" providerId="ADAL" clId="{52191A20-731C-4621-9F36-B28FC4FBC900}" dt="2025-07-07T08:17:21.835" v="3262" actId="478"/>
-          <ac:picMkLst>
-            <pc:docMk/>
-            <pc:sldMk cId="296769422" sldId="2145708757"/>
-            <ac:picMk id="5" creationId="{59EEA3D5-11EF-7942-B70C-70464AB660BC}"/>
-          </ac:picMkLst>
-        </pc:picChg>
-        <pc:picChg chg="add del">
-          <ac:chgData name="Ei Myat Mon" userId="e6357aa9-fa6e-4417-bbe1-b057167c5708" providerId="ADAL" clId="{52191A20-731C-4621-9F36-B28FC4FBC900}" dt="2025-06-04T03:07:33.195" v="13" actId="22"/>
-          <ac:picMkLst>
-            <pc:docMk/>
-            <pc:sldMk cId="296769422" sldId="2145708757"/>
-            <ac:picMk id="5" creationId="{9367D2FB-0DE9-870C-8373-94262B2EE466}"/>
-          </ac:picMkLst>
-        </pc:picChg>
-        <pc:picChg chg="add del mod">
-          <ac:chgData name="Ei Myat Mon" userId="e6357aa9-fa6e-4417-bbe1-b057167c5708" providerId="ADAL" clId="{52191A20-731C-4621-9F36-B28FC4FBC900}" dt="2025-06-25T04:07:40.261" v="480" actId="478"/>
-          <ac:picMkLst>
-            <pc:docMk/>
-            <pc:sldMk cId="296769422" sldId="2145708757"/>
-            <ac:picMk id="7" creationId="{6B7432EB-0078-6FC8-DE2D-9265386C2A96}"/>
-          </ac:picMkLst>
-        </pc:picChg>
-      </pc:sldChg>
-      <pc:sldChg chg="addSp delSp modSp add mod">
-        <pc:chgData name="Ei Myat Mon" userId="e6357aa9-fa6e-4417-bbe1-b057167c5708" providerId="ADAL" clId="{52191A20-731C-4621-9F36-B28FC4FBC900}" dt="2025-07-10T06:54:40.150" v="3863" actId="1076"/>
-        <pc:sldMkLst>
-          <pc:docMk/>
-          <pc:sldMk cId="3363287682" sldId="2145708758"/>
-        </pc:sldMkLst>
-        <pc:spChg chg="mod">
-          <ac:chgData name="Ei Myat Mon" userId="e6357aa9-fa6e-4417-bbe1-b057167c5708" providerId="ADAL" clId="{52191A20-731C-4621-9F36-B28FC4FBC900}" dt="2025-06-25T05:07:30.507" v="816" actId="20577"/>
-          <ac:spMkLst>
-            <pc:docMk/>
-            <pc:sldMk cId="3363287682" sldId="2145708758"/>
-            <ac:spMk id="3" creationId="{F43F683D-1547-ED8B-AFDE-8F3ED9815590}"/>
-          </ac:spMkLst>
-        </pc:spChg>
-        <pc:picChg chg="add del mod">
-          <ac:chgData name="Ei Myat Mon" userId="e6357aa9-fa6e-4417-bbe1-b057167c5708" providerId="ADAL" clId="{52191A20-731C-4621-9F36-B28FC4FBC900}" dt="2025-07-10T06:43:38.113" v="3860" actId="478"/>
-          <ac:picMkLst>
-            <pc:docMk/>
-            <pc:sldMk cId="3363287682" sldId="2145708758"/>
-            <ac:picMk id="5" creationId="{140ECA78-CAF8-B482-70F8-ED9DDF8F00D5}"/>
-          </ac:picMkLst>
-        </pc:picChg>
-        <pc:picChg chg="del">
-          <ac:chgData name="Ei Myat Mon" userId="e6357aa9-fa6e-4417-bbe1-b057167c5708" providerId="ADAL" clId="{52191A20-731C-4621-9F36-B28FC4FBC900}" dt="2025-06-08T14:37:26.709" v="83" actId="478"/>
-          <ac:picMkLst>
-            <pc:docMk/>
-            <pc:sldMk cId="3363287682" sldId="2145708758"/>
-            <ac:picMk id="5" creationId="{F911097D-5EFE-088D-5250-674344B54E43}"/>
-          </ac:picMkLst>
-        </pc:picChg>
-        <pc:picChg chg="add mod">
-          <ac:chgData name="Ei Myat Mon" userId="e6357aa9-fa6e-4417-bbe1-b057167c5708" providerId="ADAL" clId="{52191A20-731C-4621-9F36-B28FC4FBC900}" dt="2025-07-10T06:54:40.150" v="3863" actId="1076"/>
-          <ac:picMkLst>
-            <pc:docMk/>
-            <pc:sldMk cId="3363287682" sldId="2145708758"/>
-            <ac:picMk id="6" creationId="{B1709687-71C1-DF3F-C673-458EE4FB09FB}"/>
-          </ac:picMkLst>
-        </pc:picChg>
-        <pc:picChg chg="add del mod">
-          <ac:chgData name="Ei Myat Mon" userId="e6357aa9-fa6e-4417-bbe1-b057167c5708" providerId="ADAL" clId="{52191A20-731C-4621-9F36-B28FC4FBC900}" dt="2025-06-08T14:39:46.026" v="87" actId="478"/>
-          <ac:picMkLst>
-            <pc:docMk/>
-            <pc:sldMk cId="3363287682" sldId="2145708758"/>
-            <ac:picMk id="6" creationId="{CAC7C10B-56C0-8937-B342-0C556EBD0C86}"/>
-          </ac:picMkLst>
-        </pc:picChg>
-        <pc:picChg chg="add del mod">
-          <ac:chgData name="Ei Myat Mon" userId="e6357aa9-fa6e-4417-bbe1-b057167c5708" providerId="ADAL" clId="{52191A20-731C-4621-9F36-B28FC4FBC900}" dt="2025-06-25T04:07:47.407" v="483" actId="478"/>
-          <ac:picMkLst>
-            <pc:docMk/>
-            <pc:sldMk cId="3363287682" sldId="2145708758"/>
-            <ac:picMk id="8" creationId="{1878F775-B7D9-957F-BEBE-84ED49E8E5A2}"/>
-          </ac:picMkLst>
-        </pc:picChg>
-      </pc:sldChg>
-      <pc:sldChg chg="addSp delSp modSp add mod">
-        <pc:chgData name="Ei Myat Mon" userId="e6357aa9-fa6e-4417-bbe1-b057167c5708" providerId="ADAL" clId="{52191A20-731C-4621-9F36-B28FC4FBC900}" dt="2025-07-10T06:58:01.561" v="3900" actId="1076"/>
-        <pc:sldMkLst>
-          <pc:docMk/>
-          <pc:sldMk cId="128412827" sldId="2145708759"/>
-        </pc:sldMkLst>
-        <pc:spChg chg="mod">
-          <ac:chgData name="Ei Myat Mon" userId="e6357aa9-fa6e-4417-bbe1-b057167c5708" providerId="ADAL" clId="{52191A20-731C-4621-9F36-B28FC4FBC900}" dt="2025-07-10T06:57:49.956" v="3897" actId="20577"/>
-          <ac:spMkLst>
-            <pc:docMk/>
-            <pc:sldMk cId="128412827" sldId="2145708759"/>
-            <ac:spMk id="3" creationId="{034BC941-541B-1E4C-3F34-859BB7109AA3}"/>
-          </ac:spMkLst>
-        </pc:spChg>
-        <pc:picChg chg="add del mod">
-          <ac:chgData name="Ei Myat Mon" userId="e6357aa9-fa6e-4417-bbe1-b057167c5708" providerId="ADAL" clId="{52191A20-731C-4621-9F36-B28FC4FBC900}" dt="2025-06-25T04:07:42.210" v="481" actId="478"/>
-          <ac:picMkLst>
-            <pc:docMk/>
-            <pc:sldMk cId="128412827" sldId="2145708759"/>
-            <ac:picMk id="5" creationId="{03149ED5-688F-EDEA-1095-F6155924A5EC}"/>
-          </ac:picMkLst>
-        </pc:picChg>
-        <pc:picChg chg="add del mod">
-          <ac:chgData name="Ei Myat Mon" userId="e6357aa9-fa6e-4417-bbe1-b057167c5708" providerId="ADAL" clId="{52191A20-731C-4621-9F36-B28FC4FBC900}" dt="2025-07-10T06:57:42.729" v="3872" actId="478"/>
-          <ac:picMkLst>
-            <pc:docMk/>
-            <pc:sldMk cId="128412827" sldId="2145708759"/>
-            <ac:picMk id="5" creationId="{0BBCA7CB-2C20-78CD-7311-B03A1474BC32}"/>
-          </ac:picMkLst>
-        </pc:picChg>
-        <pc:picChg chg="add del mod">
-          <ac:chgData name="Ei Myat Mon" userId="e6357aa9-fa6e-4417-bbe1-b057167c5708" providerId="ADAL" clId="{52191A20-731C-4621-9F36-B28FC4FBC900}" dt="2025-06-26T03:35:08.924" v="1922" actId="478"/>
-          <ac:picMkLst>
-            <pc:docMk/>
-            <pc:sldMk cId="128412827" sldId="2145708759"/>
-            <ac:picMk id="6" creationId="{0BF68AE0-F402-4918-ED23-26B17BB96049}"/>
-          </ac:picMkLst>
-        </pc:picChg>
-        <pc:picChg chg="add mod">
-          <ac:chgData name="Ei Myat Mon" userId="e6357aa9-fa6e-4417-bbe1-b057167c5708" providerId="ADAL" clId="{52191A20-731C-4621-9F36-B28FC4FBC900}" dt="2025-07-10T06:58:01.561" v="3900" actId="1076"/>
-          <ac:picMkLst>
-            <pc:docMk/>
-            <pc:sldMk cId="128412827" sldId="2145708759"/>
-            <ac:picMk id="6" creationId="{8387E26C-1930-3DD9-1084-04C8B3BF8C2B}"/>
-          </ac:picMkLst>
-        </pc:picChg>
-        <pc:picChg chg="del">
-          <ac:chgData name="Ei Myat Mon" userId="e6357aa9-fa6e-4417-bbe1-b057167c5708" providerId="ADAL" clId="{52191A20-731C-4621-9F36-B28FC4FBC900}" dt="2025-06-08T14:46:16.804" v="127" actId="478"/>
-          <ac:picMkLst>
-            <pc:docMk/>
-            <pc:sldMk cId="128412827" sldId="2145708759"/>
-            <ac:picMk id="7" creationId="{BA6FD6A4-8789-2788-E84E-D16AF642495B}"/>
-          </ac:picMkLst>
-        </pc:picChg>
-      </pc:sldChg>
-      <pc:sldChg chg="addSp delSp modSp add mod">
-        <pc:chgData name="Ei Myat Mon" userId="e6357aa9-fa6e-4417-bbe1-b057167c5708" providerId="ADAL" clId="{52191A20-731C-4621-9F36-B28FC4FBC900}" dt="2025-07-10T07:00:09.837" v="3962" actId="20577"/>
-        <pc:sldMkLst>
-          <pc:docMk/>
-          <pc:sldMk cId="3489865888" sldId="2145708760"/>
-        </pc:sldMkLst>
-        <pc:spChg chg="mod">
-          <ac:chgData name="Ei Myat Mon" userId="e6357aa9-fa6e-4417-bbe1-b057167c5708" providerId="ADAL" clId="{52191A20-731C-4621-9F36-B28FC4FBC900}" dt="2025-06-11T09:57:00.305" v="185" actId="20577"/>
-          <ac:spMkLst>
-            <pc:docMk/>
-            <pc:sldMk cId="3489865888" sldId="2145708760"/>
-            <ac:spMk id="3" creationId="{E2F2EA55-F46C-8AB0-0140-A4E9772F2B82}"/>
-          </ac:spMkLst>
-        </pc:spChg>
-        <pc:spChg chg="add mod">
-          <ac:chgData name="Ei Myat Mon" userId="e6357aa9-fa6e-4417-bbe1-b057167c5708" providerId="ADAL" clId="{52191A20-731C-4621-9F36-B28FC4FBC900}" dt="2025-07-08T04:17:31.394" v="3706" actId="1035"/>
-          <ac:spMkLst>
-            <pc:docMk/>
-            <pc:sldMk cId="3489865888" sldId="2145708760"/>
-            <ac:spMk id="6" creationId="{1424A366-1B5F-1CCD-6477-79A97E868083}"/>
-          </ac:spMkLst>
-        </pc:spChg>
-        <pc:spChg chg="add mod">
-          <ac:chgData name="Ei Myat Mon" userId="e6357aa9-fa6e-4417-bbe1-b057167c5708" providerId="ADAL" clId="{52191A20-731C-4621-9F36-B28FC4FBC900}" dt="2025-07-08T04:24:14.432" v="3798" actId="1035"/>
-          <ac:spMkLst>
-            <pc:docMk/>
-            <pc:sldMk cId="3489865888" sldId="2145708760"/>
-            <ac:spMk id="8" creationId="{D49BD8D4-76E4-E96B-8559-4CC53B4297B8}"/>
-          </ac:spMkLst>
-        </pc:spChg>
-        <pc:graphicFrameChg chg="add mod modGraphic">
-          <ac:chgData name="Ei Myat Mon" userId="e6357aa9-fa6e-4417-bbe1-b057167c5708" providerId="ADAL" clId="{52191A20-731C-4621-9F36-B28FC4FBC900}" dt="2025-07-10T07:00:05.360" v="3960" actId="20577"/>
-          <ac:graphicFrameMkLst>
-            <pc:docMk/>
-            <pc:sldMk cId="3489865888" sldId="2145708760"/>
-            <ac:graphicFrameMk id="4" creationId="{398AE5EF-5909-EC42-BCAA-9907DC0D466D}"/>
-          </ac:graphicFrameMkLst>
-        </pc:graphicFrameChg>
-        <pc:graphicFrameChg chg="del">
-          <ac:chgData name="Ei Myat Mon" userId="e6357aa9-fa6e-4417-bbe1-b057167c5708" providerId="ADAL" clId="{52191A20-731C-4621-9F36-B28FC4FBC900}" dt="2025-06-12T03:49:29.028" v="196" actId="478"/>
-          <ac:graphicFrameMkLst>
-            <pc:docMk/>
-            <pc:sldMk cId="3489865888" sldId="2145708760"/>
-            <ac:graphicFrameMk id="4" creationId="{D86AEC2E-9D21-4669-85D3-73EF3BB5D461}"/>
-          </ac:graphicFrameMkLst>
-        </pc:graphicFrameChg>
-        <pc:graphicFrameChg chg="add mod modGraphic">
-          <ac:chgData name="Ei Myat Mon" userId="e6357aa9-fa6e-4417-bbe1-b057167c5708" providerId="ADAL" clId="{52191A20-731C-4621-9F36-B28FC4FBC900}" dt="2025-07-10T07:00:09.837" v="3962" actId="20577"/>
-          <ac:graphicFrameMkLst>
-            <pc:docMk/>
-            <pc:sldMk cId="3489865888" sldId="2145708760"/>
-            <ac:graphicFrameMk id="9" creationId="{CFD50AB7-B461-B3E7-DA57-7C336546F6F6}"/>
-          </ac:graphicFrameMkLst>
-        </pc:graphicFrameChg>
-      </pc:sldChg>
-      <pc:sldChg chg="addSp delSp modSp add mod">
-        <pc:chgData name="Ei Myat Mon" userId="e6357aa9-fa6e-4417-bbe1-b057167c5708" providerId="ADAL" clId="{52191A20-731C-4621-9F36-B28FC4FBC900}" dt="2025-07-10T07:11:12.852" v="4043" actId="20577"/>
-        <pc:sldMkLst>
-          <pc:docMk/>
-          <pc:sldMk cId="1235559352" sldId="2145708761"/>
-        </pc:sldMkLst>
-        <pc:spChg chg="add del">
-          <ac:chgData name="Ei Myat Mon" userId="e6357aa9-fa6e-4417-bbe1-b057167c5708" providerId="ADAL" clId="{52191A20-731C-4621-9F36-B28FC4FBC900}" dt="2025-06-25T15:48:35.340" v="1237"/>
-          <ac:spMkLst>
-            <pc:docMk/>
-            <pc:sldMk cId="1235559352" sldId="2145708761"/>
-            <ac:spMk id="4" creationId="{C297DCE1-8A95-5162-EF42-7E03311B3347}"/>
-          </ac:spMkLst>
-        </pc:spChg>
-        <pc:spChg chg="add del">
-          <ac:chgData name="Ei Myat Mon" userId="e6357aa9-fa6e-4417-bbe1-b057167c5708" providerId="ADAL" clId="{52191A20-731C-4621-9F36-B28FC4FBC900}" dt="2025-06-25T15:48:45.288" v="1239"/>
-          <ac:spMkLst>
-            <pc:docMk/>
-            <pc:sldMk cId="1235559352" sldId="2145708761"/>
-            <ac:spMk id="5" creationId="{1BE841D0-295C-1FE0-90EA-C6F299FC2054}"/>
-          </ac:spMkLst>
-        </pc:spChg>
-        <pc:spChg chg="mod">
-          <ac:chgData name="Ei Myat Mon" userId="e6357aa9-fa6e-4417-bbe1-b057167c5708" providerId="ADAL" clId="{52191A20-731C-4621-9F36-B28FC4FBC900}" dt="2025-07-10T07:11:12.852" v="4043" actId="20577"/>
-          <ac:spMkLst>
-            <pc:docMk/>
-            <pc:sldMk cId="1235559352" sldId="2145708761"/>
-            <ac:spMk id="19" creationId="{85B4683E-03BA-A611-0997-F9DE828A7C96}"/>
-          </ac:spMkLst>
-        </pc:spChg>
-        <pc:graphicFrameChg chg="del modGraphic">
-          <ac:chgData name="Ei Myat Mon" userId="e6357aa9-fa6e-4417-bbe1-b057167c5708" providerId="ADAL" clId="{52191A20-731C-4621-9F36-B28FC4FBC900}" dt="2025-06-25T15:43:28.970" v="1207" actId="478"/>
-          <ac:graphicFrameMkLst>
-            <pc:docMk/>
-            <pc:sldMk cId="1235559352" sldId="2145708761"/>
-            <ac:graphicFrameMk id="3" creationId="{5B271AF5-35D0-0510-4653-B3955AA94B92}"/>
-          </ac:graphicFrameMkLst>
-        </pc:graphicFrameChg>
-      </pc:sldChg>
-      <pc:sldChg chg="addSp delSp modSp new mod">
-        <pc:chgData name="Ei Myat Mon" userId="e6357aa9-fa6e-4417-bbe1-b057167c5708" providerId="ADAL" clId="{52191A20-731C-4621-9F36-B28FC4FBC900}" dt="2025-07-10T06:57:03.213" v="3868"/>
-        <pc:sldMkLst>
-          <pc:docMk/>
-          <pc:sldMk cId="1563390098" sldId="2145708762"/>
-        </pc:sldMkLst>
-        <pc:spChg chg="mod">
-          <ac:chgData name="Ei Myat Mon" userId="e6357aa9-fa6e-4417-bbe1-b057167c5708" providerId="ADAL" clId="{52191A20-731C-4621-9F36-B28FC4FBC900}" dt="2025-06-25T05:07:44.555" v="831" actId="20577"/>
-          <ac:spMkLst>
-            <pc:docMk/>
-            <pc:sldMk cId="1563390098" sldId="2145708762"/>
-            <ac:spMk id="3" creationId="{E87A27D2-3989-9BB6-7123-D448AD8D2F09}"/>
-          </ac:spMkLst>
-        </pc:spChg>
-        <pc:picChg chg="add del mod">
-          <ac:chgData name="Ei Myat Mon" userId="e6357aa9-fa6e-4417-bbe1-b057167c5708" providerId="ADAL" clId="{52191A20-731C-4621-9F36-B28FC4FBC900}" dt="2025-07-10T06:55:20.090" v="3864" actId="478"/>
-          <ac:picMkLst>
-            <pc:docMk/>
-            <pc:sldMk cId="1563390098" sldId="2145708762"/>
-            <ac:picMk id="5" creationId="{650AA0EC-B214-2752-0464-2035BEA12CEA}"/>
-          </ac:picMkLst>
-        </pc:picChg>
-        <pc:picChg chg="add del mod">
-          <ac:chgData name="Ei Myat Mon" userId="e6357aa9-fa6e-4417-bbe1-b057167c5708" providerId="ADAL" clId="{52191A20-731C-4621-9F36-B28FC4FBC900}" dt="2025-07-10T06:55:37.606" v="3867" actId="478"/>
-          <ac:picMkLst>
-            <pc:docMk/>
-            <pc:sldMk cId="1563390098" sldId="2145708762"/>
-            <ac:picMk id="6" creationId="{51CFBB0B-2B53-BD35-F347-DA6ACAADE41E}"/>
-          </ac:picMkLst>
-        </pc:picChg>
-        <pc:picChg chg="add mod">
-          <ac:chgData name="Ei Myat Mon" userId="e6357aa9-fa6e-4417-bbe1-b057167c5708" providerId="ADAL" clId="{52191A20-731C-4621-9F36-B28FC4FBC900}" dt="2025-07-10T06:57:03.213" v="3868"/>
-          <ac:picMkLst>
-            <pc:docMk/>
-            <pc:sldMk cId="1563390098" sldId="2145708762"/>
-            <ac:picMk id="8" creationId="{06E2C659-16B3-9B33-D4AC-4E23B147969E}"/>
-          </ac:picMkLst>
-        </pc:picChg>
-      </pc:sldChg>
-      <pc:sldChg chg="addSp modSp new mod">
-        <pc:chgData name="Ei Myat Mon" userId="e6357aa9-fa6e-4417-bbe1-b057167c5708" providerId="ADAL" clId="{52191A20-731C-4621-9F36-B28FC4FBC900}" dt="2025-07-08T03:52:35.816" v="3471" actId="1036"/>
-        <pc:sldMkLst>
-          <pc:docMk/>
-          <pc:sldMk cId="3328870981" sldId="2145708763"/>
-        </pc:sldMkLst>
-        <pc:spChg chg="mod">
-          <ac:chgData name="Ei Myat Mon" userId="e6357aa9-fa6e-4417-bbe1-b057167c5708" providerId="ADAL" clId="{52191A20-731C-4621-9F36-B28FC4FBC900}" dt="2025-07-08T03:51:01.633" v="3358" actId="20577"/>
-          <ac:spMkLst>
-            <pc:docMk/>
-            <pc:sldMk cId="3328870981" sldId="2145708763"/>
-            <ac:spMk id="3" creationId="{76FDE8BA-1206-F8D4-569F-C56F9AEFDB67}"/>
-          </ac:spMkLst>
-        </pc:spChg>
-        <pc:spChg chg="add mod">
-          <ac:chgData name="Ei Myat Mon" userId="e6357aa9-fa6e-4417-bbe1-b057167c5708" providerId="ADAL" clId="{52191A20-731C-4621-9F36-B28FC4FBC900}" dt="2025-07-08T03:52:35.816" v="3471" actId="1036"/>
-          <ac:spMkLst>
-            <pc:docMk/>
-            <pc:sldMk cId="3328870981" sldId="2145708763"/>
-            <ac:spMk id="5" creationId="{59D0D200-2EED-C57C-98B7-8FC7AA4B9674}"/>
-          </ac:spMkLst>
-        </pc:spChg>
-        <pc:spChg chg="add mod">
-          <ac:chgData name="Ei Myat Mon" userId="e6357aa9-fa6e-4417-bbe1-b057167c5708" providerId="ADAL" clId="{52191A20-731C-4621-9F36-B28FC4FBC900}" dt="2025-07-08T03:50:13.315" v="3332" actId="14100"/>
-          <ac:spMkLst>
-            <pc:docMk/>
-            <pc:sldMk cId="3328870981" sldId="2145708763"/>
-            <ac:spMk id="6" creationId="{54C370DD-37EF-855B-F0B0-18EAC0901655}"/>
-          </ac:spMkLst>
-        </pc:spChg>
-        <pc:spChg chg="add mod">
-          <ac:chgData name="Ei Myat Mon" userId="e6357aa9-fa6e-4417-bbe1-b057167c5708" providerId="ADAL" clId="{52191A20-731C-4621-9F36-B28FC4FBC900}" dt="2025-07-01T06:59:36.057" v="2452" actId="1036"/>
-          <ac:spMkLst>
-            <pc:docMk/>
-            <pc:sldMk cId="3328870981" sldId="2145708763"/>
-            <ac:spMk id="7" creationId="{FDBBC10D-45FC-FBD7-4C20-9E11A0F4FE32}"/>
-          </ac:spMkLst>
-        </pc:spChg>
-        <pc:graphicFrameChg chg="add mod modGraphic">
-          <ac:chgData name="Ei Myat Mon" userId="e6357aa9-fa6e-4417-bbe1-b057167c5708" providerId="ADAL" clId="{52191A20-731C-4621-9F36-B28FC4FBC900}" dt="2025-07-08T03:52:35.816" v="3471" actId="1036"/>
-          <ac:graphicFrameMkLst>
-            <pc:docMk/>
-            <pc:sldMk cId="3328870981" sldId="2145708763"/>
-            <ac:graphicFrameMk id="4" creationId="{18976A95-D610-5D4B-924A-1FC780380A62}"/>
-          </ac:graphicFrameMkLst>
-        </pc:graphicFrameChg>
-      </pc:sldChg>
-      <pc:sldChg chg="addSp delSp modSp new del mod">
-        <pc:chgData name="Ei Myat Mon" userId="e6357aa9-fa6e-4417-bbe1-b057167c5708" providerId="ADAL" clId="{52191A20-731C-4621-9F36-B28FC4FBC900}" dt="2025-07-08T03:51:19.683" v="3359" actId="47"/>
-        <pc:sldMkLst>
-          <pc:docMk/>
-          <pc:sldMk cId="3481656410" sldId="2145708764"/>
-        </pc:sldMkLst>
-        <pc:spChg chg="mod">
-          <ac:chgData name="Ei Myat Mon" userId="e6357aa9-fa6e-4417-bbe1-b057167c5708" providerId="ADAL" clId="{52191A20-731C-4621-9F36-B28FC4FBC900}" dt="2025-06-25T05:22:33.842" v="1049" actId="20577"/>
-          <ac:spMkLst>
-            <pc:docMk/>
-            <pc:sldMk cId="3481656410" sldId="2145708764"/>
-            <ac:spMk id="3" creationId="{31366888-7FC4-F8EA-D09D-CD848609A35F}"/>
-          </ac:spMkLst>
-        </pc:spChg>
-        <pc:spChg chg="add del mod">
-          <ac:chgData name="Ei Myat Mon" userId="e6357aa9-fa6e-4417-bbe1-b057167c5708" providerId="ADAL" clId="{52191A20-731C-4621-9F36-B28FC4FBC900}" dt="2025-07-01T03:41:25.917" v="2093" actId="22"/>
-          <ac:spMkLst>
-            <pc:docMk/>
-            <pc:sldMk cId="3481656410" sldId="2145708764"/>
-            <ac:spMk id="6" creationId="{37B78E3D-2472-40BC-BDDA-7C064F54899F}"/>
-          </ac:spMkLst>
-        </pc:spChg>
-        <pc:spChg chg="add mod">
-          <ac:chgData name="Ei Myat Mon" userId="e6357aa9-fa6e-4417-bbe1-b057167c5708" providerId="ADAL" clId="{52191A20-731C-4621-9F36-B28FC4FBC900}" dt="2025-07-01T06:56:16.185" v="2233" actId="207"/>
-          <ac:spMkLst>
-            <pc:docMk/>
-            <pc:sldMk cId="3481656410" sldId="2145708764"/>
-            <ac:spMk id="8" creationId="{324C7135-F7C6-D8FC-FE8C-B31A3AA2CD3F}"/>
-          </ac:spMkLst>
-        </pc:spChg>
-        <pc:spChg chg="add mod">
-          <ac:chgData name="Ei Myat Mon" userId="e6357aa9-fa6e-4417-bbe1-b057167c5708" providerId="ADAL" clId="{52191A20-731C-4621-9F36-B28FC4FBC900}" dt="2025-07-08T03:47:55.235" v="3330" actId="20577"/>
-          <ac:spMkLst>
-            <pc:docMk/>
-            <pc:sldMk cId="3481656410" sldId="2145708764"/>
-            <ac:spMk id="10" creationId="{678C03E7-D50F-65AD-9084-3F311C6B1F04}"/>
-          </ac:spMkLst>
-        </pc:spChg>
-        <pc:graphicFrameChg chg="add del mod modGraphic">
-          <ac:chgData name="Ei Myat Mon" userId="e6357aa9-fa6e-4417-bbe1-b057167c5708" providerId="ADAL" clId="{52191A20-731C-4621-9F36-B28FC4FBC900}" dt="2025-07-01T06:52:10.407" v="2122" actId="478"/>
-          <ac:graphicFrameMkLst>
-            <pc:docMk/>
-            <pc:sldMk cId="3481656410" sldId="2145708764"/>
-            <ac:graphicFrameMk id="4" creationId="{0AA7FD6A-E839-5E24-7829-8BAB9EDFBC6E}"/>
-          </ac:graphicFrameMkLst>
-        </pc:graphicFrameChg>
-      </pc:sldChg>
-      <pc:sldChg chg="addSp delSp modSp new mod">
-        <pc:chgData name="Ei Myat Mon" userId="e6357aa9-fa6e-4417-bbe1-b057167c5708" providerId="ADAL" clId="{52191A20-731C-4621-9F36-B28FC4FBC900}" dt="2025-07-10T06:59:39.300" v="3946" actId="1076"/>
-        <pc:sldMkLst>
-          <pc:docMk/>
-          <pc:sldMk cId="1881148810" sldId="2145708765"/>
-        </pc:sldMkLst>
-        <pc:spChg chg="mod">
-          <ac:chgData name="Ei Myat Mon" userId="e6357aa9-fa6e-4417-bbe1-b057167c5708" providerId="ADAL" clId="{52191A20-731C-4621-9F36-B28FC4FBC900}" dt="2025-06-25T16:32:17.429" v="1410" actId="20577"/>
-          <ac:spMkLst>
-            <pc:docMk/>
-            <pc:sldMk cId="1881148810" sldId="2145708765"/>
-            <ac:spMk id="3" creationId="{71D9137C-C8F4-1449-0661-6FECA1C355AD}"/>
-          </ac:spMkLst>
-        </pc:spChg>
-        <pc:picChg chg="add del mod">
-          <ac:chgData name="Ei Myat Mon" userId="e6357aa9-fa6e-4417-bbe1-b057167c5708" providerId="ADAL" clId="{52191A20-731C-4621-9F36-B28FC4FBC900}" dt="2025-07-10T06:58:56.132" v="3943" actId="478"/>
-          <ac:picMkLst>
-            <pc:docMk/>
-            <pc:sldMk cId="1881148810" sldId="2145708765"/>
-            <ac:picMk id="5" creationId="{A1200FBF-8139-EB3E-E509-23D31A3DB09E}"/>
-          </ac:picMkLst>
-        </pc:picChg>
-        <pc:picChg chg="add mod">
-          <ac:chgData name="Ei Myat Mon" userId="e6357aa9-fa6e-4417-bbe1-b057167c5708" providerId="ADAL" clId="{52191A20-731C-4621-9F36-B28FC4FBC900}" dt="2025-07-10T06:59:39.300" v="3946" actId="1076"/>
-          <ac:picMkLst>
-            <pc:docMk/>
-            <pc:sldMk cId="1881148810" sldId="2145708765"/>
-            <ac:picMk id="6" creationId="{00008E83-151E-8B5D-32E7-73057B83C066}"/>
-          </ac:picMkLst>
-        </pc:picChg>
-      </pc:sldChg>
-      <pc:sldChg chg="delSp new del">
-        <pc:chgData name="Ei Myat Mon" userId="e6357aa9-fa6e-4417-bbe1-b057167c5708" providerId="ADAL" clId="{52191A20-731C-4621-9F36-B28FC4FBC900}" dt="2025-06-25T16:18:20.036" v="1334" actId="47"/>
-        <pc:sldMkLst>
-          <pc:docMk/>
-          <pc:sldMk cId="3146924406" sldId="2145708765"/>
-        </pc:sldMkLst>
-        <pc:spChg chg="del">
-          <ac:chgData name="Ei Myat Mon" userId="e6357aa9-fa6e-4417-bbe1-b057167c5708" providerId="ADAL" clId="{52191A20-731C-4621-9F36-B28FC4FBC900}" dt="2025-06-25T16:18:16.127" v="1333" actId="478"/>
-          <ac:spMkLst>
-            <pc:docMk/>
-            <pc:sldMk cId="3146924406" sldId="2145708765"/>
-            <ac:spMk id="3" creationId="{C5B69EFF-C6CE-0BAD-FCBB-A596612D62FB}"/>
-          </ac:spMkLst>
-        </pc:spChg>
-      </pc:sldChg>
-      <pc:sldChg chg="delSp modSp add mod">
-        <pc:chgData name="Ei Myat Mon" userId="e6357aa9-fa6e-4417-bbe1-b057167c5708" providerId="ADAL" clId="{52191A20-731C-4621-9F36-B28FC4FBC900}" dt="2025-06-26T02:20:08.091" v="1765" actId="1036"/>
-        <pc:sldMkLst>
-          <pc:docMk/>
-          <pc:sldMk cId="1784669213" sldId="2145708766"/>
-        </pc:sldMkLst>
-        <pc:spChg chg="mod">
-          <ac:chgData name="Ei Myat Mon" userId="e6357aa9-fa6e-4417-bbe1-b057167c5708" providerId="ADAL" clId="{52191A20-731C-4621-9F36-B28FC4FBC900}" dt="2025-06-26T02:20:08.091" v="1765" actId="1036"/>
-          <ac:spMkLst>
-            <pc:docMk/>
-            <pc:sldMk cId="1784669213" sldId="2145708766"/>
-            <ac:spMk id="3" creationId="{E2F2EA55-F46C-8AB0-0140-A4E9772F2B82}"/>
-          </ac:spMkLst>
-        </pc:spChg>
-        <pc:spChg chg="del">
-          <ac:chgData name="Ei Myat Mon" userId="e6357aa9-fa6e-4417-bbe1-b057167c5708" providerId="ADAL" clId="{52191A20-731C-4621-9F36-B28FC4FBC900}" dt="2025-06-26T02:18:55.170" v="1730" actId="478"/>
-          <ac:spMkLst>
-            <pc:docMk/>
-            <pc:sldMk cId="1784669213" sldId="2145708766"/>
-            <ac:spMk id="6" creationId="{1424A366-1B5F-1CCD-6477-79A97E868083}"/>
-          </ac:spMkLst>
-        </pc:spChg>
-        <pc:spChg chg="del">
-          <ac:chgData name="Ei Myat Mon" userId="e6357aa9-fa6e-4417-bbe1-b057167c5708" providerId="ADAL" clId="{52191A20-731C-4621-9F36-B28FC4FBC900}" dt="2025-06-26T02:18:50.914" v="1728" actId="478"/>
-          <ac:spMkLst>
-            <pc:docMk/>
-            <pc:sldMk cId="1784669213" sldId="2145708766"/>
-            <ac:spMk id="8" creationId="{D49BD8D4-76E4-E96B-8559-4CC53B4297B8}"/>
-          </ac:spMkLst>
-        </pc:spChg>
-        <pc:graphicFrameChg chg="del">
-          <ac:chgData name="Ei Myat Mon" userId="e6357aa9-fa6e-4417-bbe1-b057167c5708" providerId="ADAL" clId="{52191A20-731C-4621-9F36-B28FC4FBC900}" dt="2025-06-26T02:18:48.338" v="1727" actId="478"/>
-          <ac:graphicFrameMkLst>
-            <pc:docMk/>
-            <pc:sldMk cId="1784669213" sldId="2145708766"/>
-            <ac:graphicFrameMk id="4" creationId="{398AE5EF-5909-EC42-BCAA-9907DC0D466D}"/>
-          </ac:graphicFrameMkLst>
-        </pc:graphicFrameChg>
-        <pc:graphicFrameChg chg="del">
-          <ac:chgData name="Ei Myat Mon" userId="e6357aa9-fa6e-4417-bbe1-b057167c5708" providerId="ADAL" clId="{52191A20-731C-4621-9F36-B28FC4FBC900}" dt="2025-06-26T02:18:51.773" v="1729" actId="478"/>
-          <ac:graphicFrameMkLst>
-            <pc:docMk/>
-            <pc:sldMk cId="1784669213" sldId="2145708766"/>
-            <ac:graphicFrameMk id="9" creationId="{CFD50AB7-B461-B3E7-DA57-7C336546F6F6}"/>
-          </ac:graphicFrameMkLst>
-        </pc:graphicFrameChg>
-      </pc:sldChg>
-      <pc:sldChg chg="addSp delSp modSp add mod ord">
-        <pc:chgData name="Ei Myat Mon" userId="e6357aa9-fa6e-4417-bbe1-b057167c5708" providerId="ADAL" clId="{52191A20-731C-4621-9F36-B28FC4FBC900}" dt="2025-07-07T07:37:18.234" v="2930" actId="20577"/>
-        <pc:sldMkLst>
-          <pc:docMk/>
-          <pc:sldMk cId="3233955761" sldId="2145708767"/>
-        </pc:sldMkLst>
-        <pc:spChg chg="del">
-          <ac:chgData name="Ei Myat Mon" userId="e6357aa9-fa6e-4417-bbe1-b057167c5708" providerId="ADAL" clId="{52191A20-731C-4621-9F36-B28FC4FBC900}" dt="2025-07-01T03:46:18.306" v="2102" actId="478"/>
-          <ac:spMkLst>
-            <pc:docMk/>
-            <pc:sldMk cId="3233955761" sldId="2145708767"/>
-            <ac:spMk id="3" creationId="{E2F2EA55-F46C-8AB0-0140-A4E9772F2B82}"/>
-          </ac:spMkLst>
-        </pc:spChg>
-        <pc:spChg chg="add mod">
-          <ac:chgData name="Ei Myat Mon" userId="e6357aa9-fa6e-4417-bbe1-b057167c5708" providerId="ADAL" clId="{52191A20-731C-4621-9F36-B28FC4FBC900}" dt="2025-07-07T07:37:14.241" v="2929" actId="20577"/>
-          <ac:spMkLst>
-            <pc:docMk/>
-            <pc:sldMk cId="3233955761" sldId="2145708767"/>
-            <ac:spMk id="5" creationId="{A8A595C4-A8D1-1008-2F32-0E5C2D2C514F}"/>
-          </ac:spMkLst>
-        </pc:spChg>
-        <pc:spChg chg="del">
-          <ac:chgData name="Ei Myat Mon" userId="e6357aa9-fa6e-4417-bbe1-b057167c5708" providerId="ADAL" clId="{52191A20-731C-4621-9F36-B28FC4FBC900}" dt="2025-07-01T03:46:13.310" v="2100" actId="478"/>
-          <ac:spMkLst>
-            <pc:docMk/>
-            <pc:sldMk cId="3233955761" sldId="2145708767"/>
-            <ac:spMk id="6" creationId="{1424A366-1B5F-1CCD-6477-79A97E868083}"/>
-          </ac:spMkLst>
-        </pc:spChg>
-        <pc:spChg chg="add mod">
-          <ac:chgData name="Ei Myat Mon" userId="e6357aa9-fa6e-4417-bbe1-b057167c5708" providerId="ADAL" clId="{52191A20-731C-4621-9F36-B28FC4FBC900}" dt="2025-07-07T07:37:18.234" v="2930" actId="20577"/>
-          <ac:spMkLst>
-            <pc:docMk/>
-            <pc:sldMk cId="3233955761" sldId="2145708767"/>
-            <ac:spMk id="6" creationId="{52F1C4E0-B5C9-94A3-A6FC-E75BB4F5C23B}"/>
-          </ac:spMkLst>
-        </pc:spChg>
-        <pc:spChg chg="del">
-          <ac:chgData name="Ei Myat Mon" userId="e6357aa9-fa6e-4417-bbe1-b057167c5708" providerId="ADAL" clId="{52191A20-731C-4621-9F36-B28FC4FBC900}" dt="2025-07-01T03:46:15.036" v="2101" actId="478"/>
-          <ac:spMkLst>
-            <pc:docMk/>
-            <pc:sldMk cId="3233955761" sldId="2145708767"/>
-            <ac:spMk id="8" creationId="{D49BD8D4-76E4-E96B-8559-4CC53B4297B8}"/>
-          </ac:spMkLst>
-        </pc:spChg>
-        <pc:spChg chg="add mod">
-          <ac:chgData name="Ei Myat Mon" userId="e6357aa9-fa6e-4417-bbe1-b057167c5708" providerId="ADAL" clId="{52191A20-731C-4621-9F36-B28FC4FBC900}" dt="2025-07-07T07:26:20.693" v="2731" actId="1035"/>
-          <ac:spMkLst>
-            <pc:docMk/>
-            <pc:sldMk cId="3233955761" sldId="2145708767"/>
-            <ac:spMk id="10" creationId="{299F3B65-9F26-06BF-AC36-E199BBB71BD2}"/>
-          </ac:spMkLst>
-        </pc:spChg>
-        <pc:graphicFrameChg chg="del">
-          <ac:chgData name="Ei Myat Mon" userId="e6357aa9-fa6e-4417-bbe1-b057167c5708" providerId="ADAL" clId="{52191A20-731C-4621-9F36-B28FC4FBC900}" dt="2025-07-01T03:46:10.123" v="2099" actId="478"/>
-          <ac:graphicFrameMkLst>
-            <pc:docMk/>
-            <pc:sldMk cId="3233955761" sldId="2145708767"/>
-            <ac:graphicFrameMk id="4" creationId="{398AE5EF-5909-EC42-BCAA-9907DC0D466D}"/>
-          </ac:graphicFrameMkLst>
-        </pc:graphicFrameChg>
-        <pc:graphicFrameChg chg="del">
-          <ac:chgData name="Ei Myat Mon" userId="e6357aa9-fa6e-4417-bbe1-b057167c5708" providerId="ADAL" clId="{52191A20-731C-4621-9F36-B28FC4FBC900}" dt="2025-07-01T03:46:07.789" v="2098" actId="478"/>
-          <ac:graphicFrameMkLst>
-            <pc:docMk/>
-            <pc:sldMk cId="3233955761" sldId="2145708767"/>
-            <ac:graphicFrameMk id="9" creationId="{CFD50AB7-B461-B3E7-DA57-7C336546F6F6}"/>
-          </ac:graphicFrameMkLst>
-        </pc:graphicFrameChg>
-      </pc:sldChg>
-      <pc:sldChg chg="addSp delSp modSp new del mod ord">
-        <pc:chgData name="Ei Myat Mon" userId="e6357aa9-fa6e-4417-bbe1-b057167c5708" providerId="ADAL" clId="{52191A20-731C-4621-9F36-B28FC4FBC900}" dt="2025-07-07T07:34:09.802" v="2843" actId="47"/>
-        <pc:sldMkLst>
-          <pc:docMk/>
-          <pc:sldMk cId="2191693603" sldId="2145708768"/>
-        </pc:sldMkLst>
-        <pc:spChg chg="mod">
-          <ac:chgData name="Ei Myat Mon" userId="e6357aa9-fa6e-4417-bbe1-b057167c5708" providerId="ADAL" clId="{52191A20-731C-4621-9F36-B28FC4FBC900}" dt="2025-07-07T07:33:07.932" v="2803" actId="20577"/>
-          <ac:spMkLst>
-            <pc:docMk/>
-            <pc:sldMk cId="2191693603" sldId="2145708768"/>
-            <ac:spMk id="3" creationId="{B6F1CD2F-FFCE-B2A2-A7C8-ABEB5DF7A842}"/>
-          </ac:spMkLst>
-        </pc:spChg>
-        <pc:spChg chg="add del mod">
-          <ac:chgData name="Ei Myat Mon" userId="e6357aa9-fa6e-4417-bbe1-b057167c5708" providerId="ADAL" clId="{52191A20-731C-4621-9F36-B28FC4FBC900}" dt="2025-07-07T07:33:50.199" v="2839"/>
-          <ac:spMkLst>
-            <pc:docMk/>
-            <pc:sldMk cId="2191693603" sldId="2145708768"/>
-            <ac:spMk id="5" creationId="{62242C5C-958E-5EE6-A834-E97489528FDB}"/>
-          </ac:spMkLst>
-        </pc:spChg>
-      </pc:sldChg>
-      <pc:sldChg chg="modSp add mod ord">
-        <pc:chgData name="Ei Myat Mon" userId="e6357aa9-fa6e-4417-bbe1-b057167c5708" providerId="ADAL" clId="{52191A20-731C-4621-9F36-B28FC4FBC900}" dt="2025-07-07T07:52:46.789" v="3142" actId="1037"/>
-        <pc:sldMkLst>
-          <pc:docMk/>
-          <pc:sldMk cId="527323572" sldId="2145708769"/>
-        </pc:sldMkLst>
-        <pc:spChg chg="mod">
-          <ac:chgData name="Ei Myat Mon" userId="e6357aa9-fa6e-4417-bbe1-b057167c5708" providerId="ADAL" clId="{52191A20-731C-4621-9F36-B28FC4FBC900}" dt="2025-07-07T07:37:30.109" v="2933" actId="20577"/>
-          <ac:spMkLst>
-            <pc:docMk/>
-            <pc:sldMk cId="527323572" sldId="2145708769"/>
-            <ac:spMk id="3" creationId="{31366888-7FC4-F8EA-D09D-CD848609A35F}"/>
-          </ac:spMkLst>
-        </pc:spChg>
-        <pc:spChg chg="mod">
-          <ac:chgData name="Ei Myat Mon" userId="e6357aa9-fa6e-4417-bbe1-b057167c5708" providerId="ADAL" clId="{52191A20-731C-4621-9F36-B28FC4FBC900}" dt="2025-07-07T07:52:46.789" v="3142" actId="1037"/>
-          <ac:spMkLst>
-            <pc:docMk/>
-            <pc:sldMk cId="527323572" sldId="2145708769"/>
-            <ac:spMk id="8" creationId="{324C7135-F7C6-D8FC-FE8C-B31A3AA2CD3F}"/>
-          </ac:spMkLst>
-        </pc:spChg>
-        <pc:spChg chg="mod">
-          <ac:chgData name="Ei Myat Mon" userId="e6357aa9-fa6e-4417-bbe1-b057167c5708" providerId="ADAL" clId="{52191A20-731C-4621-9F36-B28FC4FBC900}" dt="2025-07-07T07:52:11.497" v="3118" actId="20577"/>
-          <ac:spMkLst>
-            <pc:docMk/>
-            <pc:sldMk cId="527323572" sldId="2145708769"/>
-            <ac:spMk id="10" creationId="{678C03E7-D50F-65AD-9084-3F311C6B1F04}"/>
-          </ac:spMkLst>
-        </pc:spChg>
-      </pc:sldChg>
-      <pc:sldChg chg="addSp delSp modSp add mod">
-        <pc:chgData name="Ei Myat Mon" userId="e6357aa9-fa6e-4417-bbe1-b057167c5708" providerId="ADAL" clId="{52191A20-731C-4621-9F36-B28FC4FBC900}" dt="2025-07-10T06:58:46.205" v="3942" actId="1076"/>
-        <pc:sldMkLst>
-          <pc:docMk/>
-          <pc:sldMk cId="2930741464" sldId="2145708770"/>
-        </pc:sldMkLst>
-        <pc:spChg chg="mod">
-          <ac:chgData name="Ei Myat Mon" userId="e6357aa9-fa6e-4417-bbe1-b057167c5708" providerId="ADAL" clId="{52191A20-731C-4621-9F36-B28FC4FBC900}" dt="2025-07-10T06:58:30.618" v="3939" actId="20577"/>
-          <ac:spMkLst>
-            <pc:docMk/>
-            <pc:sldMk cId="2930741464" sldId="2145708770"/>
-            <ac:spMk id="3" creationId="{034BC941-541B-1E4C-3F34-859BB7109AA3}"/>
-          </ac:spMkLst>
-        </pc:spChg>
-        <pc:picChg chg="add mod">
-          <ac:chgData name="Ei Myat Mon" userId="e6357aa9-fa6e-4417-bbe1-b057167c5708" providerId="ADAL" clId="{52191A20-731C-4621-9F36-B28FC4FBC900}" dt="2025-07-10T06:58:46.205" v="3942" actId="1076"/>
-          <ac:picMkLst>
-            <pc:docMk/>
-            <pc:sldMk cId="2930741464" sldId="2145708770"/>
-            <ac:picMk id="5" creationId="{FA1DBE6E-796E-D5B4-2E2E-60FBB560A945}"/>
-          </ac:picMkLst>
-        </pc:picChg>
-        <pc:picChg chg="del">
-          <ac:chgData name="Ei Myat Mon" userId="e6357aa9-fa6e-4417-bbe1-b057167c5708" providerId="ADAL" clId="{52191A20-731C-4621-9F36-B28FC4FBC900}" dt="2025-07-10T06:58:24.574" v="3923" actId="478"/>
-          <ac:picMkLst>
-            <pc:docMk/>
-            <pc:sldMk cId="2930741464" sldId="2145708770"/>
-            <ac:picMk id="6" creationId="{8387E26C-1930-3DD9-1084-04C8B3BF8C2B}"/>
-          </ac:picMkLst>
-        </pc:picChg>
-      </pc:sldChg>
-    </pc:docChg>
-  </pc:docChgLst>
-  <pc:docChgLst>
-    <pc:chgData name="Ei Myat Mon" userId="e6357aa9-fa6e-4417-bbe1-b057167c5708" providerId="ADAL" clId="{AEAB674A-923E-46CA-BFAF-5965F0535CA7}"/>
-    <pc:docChg chg="undo custSel modSld">
-      <pc:chgData name="Ei Myat Mon" userId="e6357aa9-fa6e-4417-bbe1-b057167c5708" providerId="ADAL" clId="{AEAB674A-923E-46CA-BFAF-5965F0535CA7}" dt="2025-12-12T08:57:16.252" v="49" actId="14100"/>
-      <pc:docMkLst>
-        <pc:docMk/>
-      </pc:docMkLst>
-      <pc:sldChg chg="addSp modSp mod">
-        <pc:chgData name="Ei Myat Mon" userId="e6357aa9-fa6e-4417-bbe1-b057167c5708" providerId="ADAL" clId="{AEAB674A-923E-46CA-BFAF-5965F0535CA7}" dt="2025-12-12T06:44:25.851" v="23" actId="1076"/>
-        <pc:sldMkLst>
-          <pc:docMk/>
-          <pc:sldMk cId="296769422" sldId="2145708757"/>
-        </pc:sldMkLst>
-        <pc:spChg chg="add mod">
-          <ac:chgData name="Ei Myat Mon" userId="e6357aa9-fa6e-4417-bbe1-b057167c5708" providerId="ADAL" clId="{AEAB674A-923E-46CA-BFAF-5965F0535CA7}" dt="2025-12-12T03:17:17.471" v="20" actId="255"/>
-          <ac:spMkLst>
-            <pc:docMk/>
-            <pc:sldMk cId="296769422" sldId="2145708757"/>
-            <ac:spMk id="5" creationId="{5EA11346-B117-7460-D6BF-6354E886A4D2}"/>
-          </ac:spMkLst>
-        </pc:spChg>
-        <pc:picChg chg="add mod">
-          <ac:chgData name="Ei Myat Mon" userId="e6357aa9-fa6e-4417-bbe1-b057167c5708" providerId="ADAL" clId="{AEAB674A-923E-46CA-BFAF-5965F0535CA7}" dt="2025-12-12T06:44:25.851" v="23" actId="1076"/>
-          <ac:picMkLst>
-            <pc:docMk/>
-            <pc:sldMk cId="296769422" sldId="2145708757"/>
-            <ac:picMk id="7" creationId="{E2A940CF-2D15-547E-98B1-7FF28FDF7C34}"/>
-          </ac:picMkLst>
-        </pc:picChg>
-      </pc:sldChg>
-      <pc:sldChg chg="addSp modSp mod">
-        <pc:chgData name="Ei Myat Mon" userId="e6357aa9-fa6e-4417-bbe1-b057167c5708" providerId="ADAL" clId="{AEAB674A-923E-46CA-BFAF-5965F0535CA7}" dt="2025-12-04T05:05:43.904" v="17" actId="1076"/>
-        <pc:sldMkLst>
-          <pc:docMk/>
-          <pc:sldMk cId="3363287682" sldId="2145708758"/>
-        </pc:sldMkLst>
-        <pc:spChg chg="add mod">
-          <ac:chgData name="Ei Myat Mon" userId="e6357aa9-fa6e-4417-bbe1-b057167c5708" providerId="ADAL" clId="{AEAB674A-923E-46CA-BFAF-5965F0535CA7}" dt="2025-12-04T05:05:43.904" v="17" actId="1076"/>
-          <ac:spMkLst>
-            <pc:docMk/>
-            <pc:sldMk cId="3363287682" sldId="2145708758"/>
-            <ac:spMk id="5" creationId="{82FAD60E-CFEC-2969-C965-6D7602D8379A}"/>
-          </ac:spMkLst>
-        </pc:spChg>
-        <pc:picChg chg="add mod">
-          <ac:chgData name="Ei Myat Mon" userId="e6357aa9-fa6e-4417-bbe1-b057167c5708" providerId="ADAL" clId="{AEAB674A-923E-46CA-BFAF-5965F0535CA7}" dt="2025-12-04T05:05:39.019" v="16" actId="1076"/>
-          <ac:picMkLst>
-            <pc:docMk/>
-            <pc:sldMk cId="3363287682" sldId="2145708758"/>
-            <ac:picMk id="7" creationId="{63DDF4DC-EFCA-12D3-89DC-683518865446}"/>
-          </ac:picMkLst>
-        </pc:picChg>
-      </pc:sldChg>
-      <pc:sldChg chg="addSp delSp modSp mod">
-        <pc:chgData name="Ei Myat Mon" userId="e6357aa9-fa6e-4417-bbe1-b057167c5708" providerId="ADAL" clId="{AEAB674A-923E-46CA-BFAF-5965F0535CA7}" dt="2025-12-12T08:57:16.252" v="49" actId="14100"/>
-        <pc:sldMkLst>
-          <pc:docMk/>
-          <pc:sldMk cId="1563390098" sldId="2145708762"/>
-        </pc:sldMkLst>
-        <pc:spChg chg="add mod">
-          <ac:chgData name="Ei Myat Mon" userId="e6357aa9-fa6e-4417-bbe1-b057167c5708" providerId="ADAL" clId="{AEAB674A-923E-46CA-BFAF-5965F0535CA7}" dt="2025-12-12T08:47:22.080" v="41" actId="14100"/>
-          <ac:spMkLst>
-            <pc:docMk/>
-            <pc:sldMk cId="1563390098" sldId="2145708762"/>
-            <ac:spMk id="7" creationId="{CE745D66-859B-A9EB-87D5-0D075FFD9D01}"/>
-          </ac:spMkLst>
-        </pc:spChg>
-        <pc:picChg chg="add del mod">
-          <ac:chgData name="Ei Myat Mon" userId="e6357aa9-fa6e-4417-bbe1-b057167c5708" providerId="ADAL" clId="{AEAB674A-923E-46CA-BFAF-5965F0535CA7}" dt="2025-12-12T08:56:56.972" v="44" actId="478"/>
-          <ac:picMkLst>
-            <pc:docMk/>
-            <pc:sldMk cId="1563390098" sldId="2145708762"/>
-            <ac:picMk id="5" creationId="{16773B7C-74E1-0BAC-00E6-3ABB05E56865}"/>
-          </ac:picMkLst>
-        </pc:picChg>
-        <pc:picChg chg="add mod">
-          <ac:chgData name="Ei Myat Mon" userId="e6357aa9-fa6e-4417-bbe1-b057167c5708" providerId="ADAL" clId="{AEAB674A-923E-46CA-BFAF-5965F0535CA7}" dt="2025-12-12T08:57:16.252" v="49" actId="14100"/>
-          <ac:picMkLst>
-            <pc:docMk/>
-            <pc:sldMk cId="1563390098" sldId="2145708762"/>
-            <ac:picMk id="9" creationId="{899A5962-98FF-B136-73F3-60B851E0BA16}"/>
-          </ac:picMkLst>
-        </pc:picChg>
-      </pc:sldChg>
-      <pc:sldChg chg="addSp modSp mod">
-        <pc:chgData name="Ei Myat Mon" userId="e6357aa9-fa6e-4417-bbe1-b057167c5708" providerId="ADAL" clId="{AEAB674A-923E-46CA-BFAF-5965F0535CA7}" dt="2025-12-12T08:06:25.850" v="32" actId="1076"/>
-        <pc:sldMkLst>
-          <pc:docMk/>
-          <pc:sldMk cId="2224916" sldId="2145708773"/>
-        </pc:sldMkLst>
-        <pc:spChg chg="add mod">
-          <ac:chgData name="Ei Myat Mon" userId="e6357aa9-fa6e-4417-bbe1-b057167c5708" providerId="ADAL" clId="{AEAB674A-923E-46CA-BFAF-5965F0535CA7}" dt="2025-12-12T08:06:25.850" v="32" actId="1076"/>
-          <ac:spMkLst>
-            <pc:docMk/>
-            <pc:sldMk cId="2224916" sldId="2145708773"/>
-            <ac:spMk id="7" creationId="{2DE14C54-E52B-D7B2-AEF3-2AB70C46F51C}"/>
-          </ac:spMkLst>
-        </pc:spChg>
-        <pc:picChg chg="add mod">
-          <ac:chgData name="Ei Myat Mon" userId="e6357aa9-fa6e-4417-bbe1-b057167c5708" providerId="ADAL" clId="{AEAB674A-923E-46CA-BFAF-5965F0535CA7}" dt="2025-12-12T08:02:42.670" v="26" actId="1076"/>
-          <ac:picMkLst>
-            <pc:docMk/>
-            <pc:sldMk cId="2224916" sldId="2145708773"/>
-            <ac:picMk id="5" creationId="{6EB207E7-4542-1289-3145-260DB3FAC1AB}"/>
-          </ac:picMkLst>
-        </pc:picChg>
-      </pc:sldChg>
-    </pc:docChg>
-  </pc:docChgLst>
-  <pc:docChgLst>
-    <pc:chgData name="Aung Myo Aye" userId="e1862572-8acc-4a7b-a49a-743c77eeb174" providerId="ADAL" clId="{ED7FAEED-4319-4A65-8234-BC76AA74A5A5}"/>
-    <pc:docChg chg="undo custSel addSld modSld sldOrd">
-      <pc:chgData name="Aung Myo Aye" userId="e1862572-8acc-4a7b-a49a-743c77eeb174" providerId="ADAL" clId="{ED7FAEED-4319-4A65-8234-BC76AA74A5A5}" dt="2025-01-17T01:58:31.184" v="3651" actId="20577"/>
-      <pc:docMkLst>
-        <pc:docMk/>
-      </pc:docMkLst>
-      <pc:sldChg chg="modSp mod">
-        <pc:chgData name="Aung Myo Aye" userId="e1862572-8acc-4a7b-a49a-743c77eeb174" providerId="ADAL" clId="{ED7FAEED-4319-4A65-8234-BC76AA74A5A5}" dt="2025-01-14T03:57:08.227" v="2010" actId="20577"/>
-        <pc:sldMkLst>
-          <pc:docMk/>
-          <pc:sldMk cId="3913151875" sldId="2145708743"/>
-        </pc:sldMkLst>
-      </pc:sldChg>
-      <pc:sldChg chg="modSp mod">
-        <pc:chgData name="Aung Myo Aye" userId="e1862572-8acc-4a7b-a49a-743c77eeb174" providerId="ADAL" clId="{ED7FAEED-4319-4A65-8234-BC76AA74A5A5}" dt="2025-01-17T01:58:31.184" v="3651" actId="20577"/>
-        <pc:sldMkLst>
-          <pc:docMk/>
-          <pc:sldMk cId="3156077037" sldId="2145708744"/>
-        </pc:sldMkLst>
-      </pc:sldChg>
-      <pc:sldChg chg="modSp mod">
-        <pc:chgData name="Aung Myo Aye" userId="e1862572-8acc-4a7b-a49a-743c77eeb174" providerId="ADAL" clId="{ED7FAEED-4319-4A65-8234-BC76AA74A5A5}" dt="2025-01-14T03:57:18.773" v="2030" actId="20577"/>
-        <pc:sldMkLst>
-          <pc:docMk/>
-          <pc:sldMk cId="3570320426" sldId="2145708745"/>
-        </pc:sldMkLst>
-      </pc:sldChg>
-      <pc:sldChg chg="addSp delSp modSp add mod ord">
-        <pc:chgData name="Aung Myo Aye" userId="e1862572-8acc-4a7b-a49a-743c77eeb174" providerId="ADAL" clId="{ED7FAEED-4319-4A65-8234-BC76AA74A5A5}" dt="2025-01-14T04:04:06.598" v="2041" actId="14100"/>
-        <pc:sldMkLst>
-          <pc:docMk/>
-          <pc:sldMk cId="440516599" sldId="2145708746"/>
-        </pc:sldMkLst>
-      </pc:sldChg>
-      <pc:sldChg chg="addSp delSp modSp add mod">
-        <pc:chgData name="Aung Myo Aye" userId="e1862572-8acc-4a7b-a49a-743c77eeb174" providerId="ADAL" clId="{ED7FAEED-4319-4A65-8234-BC76AA74A5A5}" dt="2025-01-14T07:07:16.858" v="3643" actId="313"/>
-        <pc:sldMkLst>
-          <pc:docMk/>
-          <pc:sldMk cId="3618114981" sldId="2145708747"/>
-        </pc:sldMkLst>
-      </pc:sldChg>
-    </pc:docChg>
-  </pc:docChgLst>
-  <pc:docChgLst>
-    <pc:chgData name="Cynthia Nyein" userId="S::cynthia.nyein@cdsg.com.mm::073e3caf-4790-4810-9055-bae9186b44dc" providerId="AD" clId="Web-{FCAEA65D-D7AE-2D29-15F2-9EE498284A9E}"/>
-    <pc:docChg chg="modSld">
-      <pc:chgData name="Cynthia Nyein" userId="S::cynthia.nyein@cdsg.com.mm::073e3caf-4790-4810-9055-bae9186b44dc" providerId="AD" clId="Web-{FCAEA65D-D7AE-2D29-15F2-9EE498284A9E}" dt="2025-02-13T08:44:13.800" v="35"/>
-      <pc:docMkLst>
-        <pc:docMk/>
-      </pc:docMkLst>
-      <pc:sldChg chg="modSp">
-        <pc:chgData name="Cynthia Nyein" userId="S::cynthia.nyein@cdsg.com.mm::073e3caf-4790-4810-9055-bae9186b44dc" providerId="AD" clId="Web-{FCAEA65D-D7AE-2D29-15F2-9EE498284A9E}" dt="2025-02-13T08:44:13.800" v="35"/>
-        <pc:sldMkLst>
-          <pc:docMk/>
-          <pc:sldMk cId="307570946" sldId="2145708750"/>
-        </pc:sldMkLst>
-        <pc:graphicFrameChg chg="mod modGraphic">
-          <ac:chgData name="Cynthia Nyein" userId="S::cynthia.nyein@cdsg.com.mm::073e3caf-4790-4810-9055-bae9186b44dc" providerId="AD" clId="Web-{FCAEA65D-D7AE-2D29-15F2-9EE498284A9E}" dt="2025-02-13T08:44:13.800" v="35"/>
-          <ac:graphicFrameMkLst>
-            <pc:docMk/>
-            <pc:sldMk cId="307570946" sldId="2145708750"/>
-            <ac:graphicFrameMk id="6" creationId="{7EDF3696-2580-A2BE-4F4A-B797B6E59272}"/>
-          </ac:graphicFrameMkLst>
-        </pc:graphicFrameChg>
-      </pc:sldChg>
-    </pc:docChg>
-  </pc:docChgLst>
-  <pc:docChgLst>
-    <pc:chgData name="Cynthia Nyein" userId="S::cynthia.nyein@cdsg.com.mm::073e3caf-4790-4810-9055-bae9186b44dc" providerId="AD" clId="Web-{ED7F8E27-C9B2-D4D0-E1AC-697ADC2FCCBF}"/>
-    <pc:docChg chg="addSld modSld">
-      <pc:chgData name="Cynthia Nyein" userId="S::cynthia.nyein@cdsg.com.mm::073e3caf-4790-4810-9055-bae9186b44dc" providerId="AD" clId="Web-{ED7F8E27-C9B2-D4D0-E1AC-697ADC2FCCBF}" dt="2025-02-11T09:57:29.054" v="95"/>
-      <pc:docMkLst>
-        <pc:docMk/>
-      </pc:docMkLst>
-      <pc:sldChg chg="modSp">
-        <pc:chgData name="Cynthia Nyein" userId="S::cynthia.nyein@cdsg.com.mm::073e3caf-4790-4810-9055-bae9186b44dc" providerId="AD" clId="Web-{ED7F8E27-C9B2-D4D0-E1AC-697ADC2FCCBF}" dt="2025-02-11T09:57:11.147" v="91"/>
-        <pc:sldMkLst>
-          <pc:docMk/>
-          <pc:sldMk cId="3282884465" sldId="2145708749"/>
-        </pc:sldMkLst>
-        <pc:spChg chg="mod">
-          <ac:chgData name="Cynthia Nyein" userId="S::cynthia.nyein@cdsg.com.mm::073e3caf-4790-4810-9055-bae9186b44dc" providerId="AD" clId="Web-{ED7F8E27-C9B2-D4D0-E1AC-697ADC2FCCBF}" dt="2025-02-11T09:54:51.315" v="0" actId="1076"/>
-          <ac:spMkLst>
-            <pc:docMk/>
-            <pc:sldMk cId="3282884465" sldId="2145708749"/>
-            <ac:spMk id="4" creationId="{2CDADCFD-D045-887D-4F38-80FEF26CEC08}"/>
-          </ac:spMkLst>
-        </pc:spChg>
-        <pc:graphicFrameChg chg="mod modGraphic">
-          <ac:chgData name="Cynthia Nyein" userId="S::cynthia.nyein@cdsg.com.mm::073e3caf-4790-4810-9055-bae9186b44dc" providerId="AD" clId="Web-{ED7F8E27-C9B2-D4D0-E1AC-697ADC2FCCBF}" dt="2025-02-11T09:57:11.147" v="91"/>
-          <ac:graphicFrameMkLst>
-            <pc:docMk/>
-            <pc:sldMk cId="3282884465" sldId="2145708749"/>
-            <ac:graphicFrameMk id="6" creationId="{67431946-B77E-F2FB-6CA8-E500E07A93C3}"/>
-          </ac:graphicFrameMkLst>
-        </pc:graphicFrameChg>
-      </pc:sldChg>
-      <pc:sldChg chg="delSp modSp add replId">
-        <pc:chgData name="Cynthia Nyein" userId="S::cynthia.nyein@cdsg.com.mm::073e3caf-4790-4810-9055-bae9186b44dc" providerId="AD" clId="Web-{ED7F8E27-C9B2-D4D0-E1AC-697ADC2FCCBF}" dt="2025-02-11T09:57:29.054" v="95"/>
-        <pc:sldMkLst>
-          <pc:docMk/>
-          <pc:sldMk cId="1951609717" sldId="2145708751"/>
-        </pc:sldMkLst>
-      </pc:sldChg>
-    </pc:docChg>
-  </pc:docChgLst>
-  <pc:docChgLst>
-    <pc:chgData name="Ei Myat Mon" userId="S::eimyat.mon@cdsg.com.mm::e6357aa9-fa6e-4417-bbe1-b057167c5708" providerId="AD" clId="Web-{1E16787E-2E38-86C1-5C64-AF0A642E86A0}"/>
-    <pc:docChg chg="modSld">
-      <pc:chgData name="Ei Myat Mon" userId="S::eimyat.mon@cdsg.com.mm::e6357aa9-fa6e-4417-bbe1-b057167c5708" providerId="AD" clId="Web-{1E16787E-2E38-86C1-5C64-AF0A642E86A0}" dt="2025-06-08T14:31:11.020" v="5"/>
-      <pc:docMkLst>
-        <pc:docMk/>
-      </pc:docMkLst>
-      <pc:sldChg chg="addSp delSp modSp">
-        <pc:chgData name="Ei Myat Mon" userId="S::eimyat.mon@cdsg.com.mm::e6357aa9-fa6e-4417-bbe1-b057167c5708" providerId="AD" clId="Web-{1E16787E-2E38-86C1-5C64-AF0A642E86A0}" dt="2025-06-08T14:31:11.020" v="5"/>
-        <pc:sldMkLst>
-          <pc:docMk/>
-          <pc:sldMk cId="1691034162" sldId="2145708751"/>
-        </pc:sldMkLst>
-        <pc:picChg chg="add del mod">
-          <ac:chgData name="Ei Myat Mon" userId="S::eimyat.mon@cdsg.com.mm::e6357aa9-fa6e-4417-bbe1-b057167c5708" providerId="AD" clId="Web-{1E16787E-2E38-86C1-5C64-AF0A642E86A0}" dt="2025-06-08T14:31:11.020" v="5"/>
-          <ac:picMkLst>
-            <pc:docMk/>
-            <pc:sldMk cId="1691034162" sldId="2145708751"/>
-            <ac:picMk id="4" creationId="{4B11EA42-12C0-F11D-53C1-04C0751A7573}"/>
-          </ac:picMkLst>
-        </pc:picChg>
-      </pc:sldChg>
-    </pc:docChg>
-  </pc:docChgLst>
-  <pc:docChgLst>
-    <pc:chgData name="Ba Thein Naing" userId="35d28a5d50ce0cfe" providerId="LiveId" clId="{2C6F86D1-93C2-465E-AC81-9B62652E6ADB}"/>
-    <pc:docChg chg="undo redo custSel addSld delSld modSld sldOrd modMainMaster">
-      <pc:chgData name="Ba Thein Naing" userId="35d28a5d50ce0cfe" providerId="LiveId" clId="{2C6F86D1-93C2-465E-AC81-9B62652E6ADB}" dt="2024-12-18T01:10:59.958" v="3086" actId="47"/>
-      <pc:docMkLst>
-        <pc:docMk/>
-      </pc:docMkLst>
-      <pc:sldChg chg="add del">
-        <pc:chgData name="Ba Thein Naing" userId="35d28a5d50ce0cfe" providerId="LiveId" clId="{2C6F86D1-93C2-465E-AC81-9B62652E6ADB}" dt="2024-12-17T05:34:19.576" v="138" actId="47"/>
-        <pc:sldMkLst>
-          <pc:docMk/>
-          <pc:sldMk cId="2005336888" sldId="557"/>
-        </pc:sldMkLst>
-      </pc:sldChg>
-      <pc:sldChg chg="addSp delSp modSp add del mod modClrScheme chgLayout">
-        <pc:chgData name="Ba Thein Naing" userId="35d28a5d50ce0cfe" providerId="LiveId" clId="{2C6F86D1-93C2-465E-AC81-9B62652E6ADB}" dt="2024-12-17T05:32:58.530" v="87" actId="47"/>
-        <pc:sldMkLst>
-          <pc:docMk/>
-          <pc:sldMk cId="2977785055" sldId="558"/>
-        </pc:sldMkLst>
-      </pc:sldChg>
-      <pc:sldChg chg="addSp delSp modSp add del mod modClrScheme chgLayout">
-        <pc:chgData name="Ba Thein Naing" userId="35d28a5d50ce0cfe" providerId="LiveId" clId="{2C6F86D1-93C2-465E-AC81-9B62652E6ADB}" dt="2024-12-17T05:32:58.530" v="87" actId="47"/>
-        <pc:sldMkLst>
-          <pc:docMk/>
-          <pc:sldMk cId="1252460617" sldId="559"/>
-        </pc:sldMkLst>
-      </pc:sldChg>
-      <pc:sldChg chg="addSp delSp modSp add del mod modClrScheme chgLayout">
-        <pc:chgData name="Ba Thein Naing" userId="35d28a5d50ce0cfe" providerId="LiveId" clId="{2C6F86D1-93C2-465E-AC81-9B62652E6ADB}" dt="2024-12-17T05:32:58.530" v="87" actId="47"/>
-        <pc:sldMkLst>
-          <pc:docMk/>
-          <pc:sldMk cId="1119298670" sldId="560"/>
-        </pc:sldMkLst>
-      </pc:sldChg>
-      <pc:sldChg chg="addSp delSp modSp add del mod modClrScheme chgLayout">
-        <pc:chgData name="Ba Thein Naing" userId="35d28a5d50ce0cfe" providerId="LiveId" clId="{2C6F86D1-93C2-465E-AC81-9B62652E6ADB}" dt="2024-12-17T05:32:58.530" v="87" actId="47"/>
-        <pc:sldMkLst>
-          <pc:docMk/>
-          <pc:sldMk cId="530744575" sldId="561"/>
-        </pc:sldMkLst>
-      </pc:sldChg>
-      <pc:sldChg chg="addSp delSp modSp add del mod modClrScheme chgLayout">
-        <pc:chgData name="Ba Thein Naing" userId="35d28a5d50ce0cfe" providerId="LiveId" clId="{2C6F86D1-93C2-465E-AC81-9B62652E6ADB}" dt="2024-12-17T05:33:00.028" v="88" actId="47"/>
-        <pc:sldMkLst>
-          <pc:docMk/>
-          <pc:sldMk cId="2851597010" sldId="562"/>
-        </pc:sldMkLst>
-      </pc:sldChg>
-      <pc:sldChg chg="addSp delSp modSp add del mod modClrScheme chgLayout">
-        <pc:chgData name="Ba Thein Naing" userId="35d28a5d50ce0cfe" providerId="LiveId" clId="{2C6F86D1-93C2-465E-AC81-9B62652E6ADB}" dt="2024-12-17T05:32:58.530" v="87" actId="47"/>
-        <pc:sldMkLst>
-          <pc:docMk/>
-          <pc:sldMk cId="3169987321" sldId="564"/>
-        </pc:sldMkLst>
-      </pc:sldChg>
-      <pc:sldChg chg="addSp delSp modSp mod chgLayout">
-        <pc:chgData name="Ba Thein Naing" userId="35d28a5d50ce0cfe" providerId="LiveId" clId="{2C6F86D1-93C2-465E-AC81-9B62652E6ADB}" dt="2024-12-18T00:51:11.376" v="2741" actId="20577"/>
-        <pc:sldMkLst>
-          <pc:docMk/>
-          <pc:sldMk cId="691411247" sldId="1021"/>
-        </pc:sldMkLst>
-      </pc:sldChg>
-      <pc:sldChg chg="addSp delSp modSp add mod ord modClrScheme chgLayout">
-        <pc:chgData name="Ba Thein Naing" userId="35d28a5d50ce0cfe" providerId="LiveId" clId="{2C6F86D1-93C2-465E-AC81-9B62652E6ADB}" dt="2024-12-17T08:44:30.049" v="2454"/>
-        <pc:sldMkLst>
-          <pc:docMk/>
-          <pc:sldMk cId="3909403657" sldId="1081"/>
-        </pc:sldMkLst>
-      </pc:sldChg>
-      <pc:sldChg chg="add del ord">
-        <pc:chgData name="Ba Thein Naing" userId="35d28a5d50ce0cfe" providerId="LiveId" clId="{2C6F86D1-93C2-465E-AC81-9B62652E6ADB}" dt="2024-12-17T07:14:53.836" v="674" actId="47"/>
-        <pc:sldMkLst>
-          <pc:docMk/>
-          <pc:sldMk cId="552092180" sldId="1083"/>
-        </pc:sldMkLst>
-      </pc:sldChg>
-      <pc:sldChg chg="addSp delSp modSp add del mod ord modClrScheme chgLayout">
-        <pc:chgData name="Ba Thein Naing" userId="35d28a5d50ce0cfe" providerId="LiveId" clId="{2C6F86D1-93C2-465E-AC81-9B62652E6ADB}" dt="2024-12-17T08:33:27.507" v="1990" actId="47"/>
-        <pc:sldMkLst>
-          <pc:docMk/>
-          <pc:sldMk cId="829221988" sldId="1084"/>
-        </pc:sldMkLst>
-      </pc:sldChg>
-      <pc:sldChg chg="add del">
-        <pc:chgData name="Ba Thein Naing" userId="35d28a5d50ce0cfe" providerId="LiveId" clId="{2C6F86D1-93C2-465E-AC81-9B62652E6ADB}" dt="2024-12-17T05:34:46.675" v="143" actId="47"/>
-        <pc:sldMkLst>
-          <pc:docMk/>
-          <pc:sldMk cId="1654532799" sldId="4744"/>
-        </pc:sldMkLst>
-      </pc:sldChg>
-      <pc:sldChg chg="addSp delSp modSp add mod ord modClrScheme chgLayout">
-        <pc:chgData name="Ba Thein Naing" userId="35d28a5d50ce0cfe" providerId="LiveId" clId="{2C6F86D1-93C2-465E-AC81-9B62652E6ADB}" dt="2024-12-17T08:44:30.049" v="2454"/>
-        <pc:sldMkLst>
-          <pc:docMk/>
-          <pc:sldMk cId="3895704166" sldId="4759"/>
-        </pc:sldMkLst>
-      </pc:sldChg>
-      <pc:sldChg chg="addSp delSp modSp add mod ord modClrScheme chgLayout">
-        <pc:chgData name="Ba Thein Naing" userId="35d28a5d50ce0cfe" providerId="LiveId" clId="{2C6F86D1-93C2-465E-AC81-9B62652E6ADB}" dt="2024-12-17T08:44:30.049" v="2454"/>
-        <pc:sldMkLst>
-          <pc:docMk/>
-          <pc:sldMk cId="4251562097" sldId="4760"/>
-        </pc:sldMkLst>
-      </pc:sldChg>
-      <pc:sldChg chg="add del ord">
-        <pc:chgData name="Ba Thein Naing" userId="35d28a5d50ce0cfe" providerId="LiveId" clId="{2C6F86D1-93C2-465E-AC81-9B62652E6ADB}" dt="2024-12-17T07:14:05.596" v="663" actId="47"/>
-        <pc:sldMkLst>
-          <pc:docMk/>
-          <pc:sldMk cId="1291708723" sldId="4773"/>
-        </pc:sldMkLst>
-      </pc:sldChg>
-      <pc:sldChg chg="addSp delSp modSp add del mod modClrScheme chgLayout">
-        <pc:chgData name="Ba Thein Naing" userId="35d28a5d50ce0cfe" providerId="LiveId" clId="{2C6F86D1-93C2-465E-AC81-9B62652E6ADB}" dt="2024-12-17T07:18:21.513" v="713" actId="47"/>
-        <pc:sldMkLst>
-          <pc:docMk/>
-          <pc:sldMk cId="517067848" sldId="4792"/>
-        </pc:sldMkLst>
-      </pc:sldChg>
-      <pc:sldChg chg="addSp delSp modSp add mod ord modClrScheme chgLayout">
-        <pc:chgData name="Ba Thein Naing" userId="35d28a5d50ce0cfe" providerId="LiveId" clId="{2C6F86D1-93C2-465E-AC81-9B62652E6ADB}" dt="2024-12-17T08:44:30.049" v="2454"/>
-        <pc:sldMkLst>
-          <pc:docMk/>
-          <pc:sldMk cId="700882500" sldId="4794"/>
-        </pc:sldMkLst>
-      </pc:sldChg>
-      <pc:sldChg chg="add del ord">
-        <pc:chgData name="Ba Thein Naing" userId="35d28a5d50ce0cfe" providerId="LiveId" clId="{2C6F86D1-93C2-465E-AC81-9B62652E6ADB}" dt="2024-12-18T01:10:59.958" v="3086" actId="47"/>
-        <pc:sldMkLst>
-          <pc:docMk/>
-          <pc:sldMk cId="2981310560" sldId="4799"/>
-        </pc:sldMkLst>
-      </pc:sldChg>
-      <pc:sldChg chg="addSp delSp modSp add mod ord modClrScheme chgLayout">
-        <pc:chgData name="Ba Thein Naing" userId="35d28a5d50ce0cfe" providerId="LiveId" clId="{2C6F86D1-93C2-465E-AC81-9B62652E6ADB}" dt="2024-12-17T08:44:30.049" v="2454"/>
-        <pc:sldMkLst>
-          <pc:docMk/>
-          <pc:sldMk cId="3948196440" sldId="4800"/>
-        </pc:sldMkLst>
-      </pc:sldChg>
-      <pc:sldChg chg="addSp delSp modSp new mod">
-        <pc:chgData name="Ba Thein Naing" userId="35d28a5d50ce0cfe" providerId="LiveId" clId="{2C6F86D1-93C2-465E-AC81-9B62652E6ADB}" dt="2024-12-18T01:08:58.899" v="3085"/>
-        <pc:sldMkLst>
-          <pc:docMk/>
-          <pc:sldMk cId="3308366527" sldId="4801"/>
-        </pc:sldMkLst>
-      </pc:sldChg>
-      <pc:sldChg chg="modSp new del mod ord">
-        <pc:chgData name="Ba Thein Naing" userId="35d28a5d50ce0cfe" providerId="LiveId" clId="{2C6F86D1-93C2-465E-AC81-9B62652E6ADB}" dt="2024-12-17T07:11:35.574" v="630" actId="47"/>
-        <pc:sldMkLst>
-          <pc:docMk/>
-          <pc:sldMk cId="813239752" sldId="4802"/>
-        </pc:sldMkLst>
-      </pc:sldChg>
-      <pc:sldChg chg="modSp new add del mod ord">
-        <pc:chgData name="Ba Thein Naing" userId="35d28a5d50ce0cfe" providerId="LiveId" clId="{2C6F86D1-93C2-465E-AC81-9B62652E6ADB}" dt="2024-12-18T01:04:40.529" v="3039" actId="20577"/>
-        <pc:sldMkLst>
-          <pc:docMk/>
-          <pc:sldMk cId="858962034" sldId="4802"/>
-        </pc:sldMkLst>
-      </pc:sldChg>
-      <pc:sldChg chg="addSp modSp new del">
-        <pc:chgData name="Ba Thein Naing" userId="35d28a5d50ce0cfe" providerId="LiveId" clId="{2C6F86D1-93C2-465E-AC81-9B62652E6ADB}" dt="2024-12-17T07:12:28.994" v="641" actId="680"/>
-        <pc:sldMkLst>
-          <pc:docMk/>
-          <pc:sldMk cId="3794021572" sldId="4802"/>
-        </pc:sldMkLst>
-      </pc:sldChg>
-      <pc:sldChg chg="addSp delSp modSp new mod">
-        <pc:chgData name="Ba Thein Naing" userId="35d28a5d50ce0cfe" providerId="LiveId" clId="{2C6F86D1-93C2-465E-AC81-9B62652E6ADB}" dt="2024-12-18T01:06:18.564" v="3048" actId="14100"/>
-        <pc:sldMkLst>
-          <pc:docMk/>
-          <pc:sldMk cId="2062535619" sldId="4803"/>
-        </pc:sldMkLst>
-      </pc:sldChg>
-      <pc:sldChg chg="addSp delSp modSp add del">
-        <pc:chgData name="Ba Thein Naing" userId="35d28a5d50ce0cfe" providerId="LiveId" clId="{2C6F86D1-93C2-465E-AC81-9B62652E6ADB}" dt="2024-12-17T07:15:50.622" v="683" actId="47"/>
-        <pc:sldMkLst>
-          <pc:docMk/>
-          <pc:sldMk cId="2752721793" sldId="4803"/>
-        </pc:sldMkLst>
-      </pc:sldChg>
-      <pc:sldChg chg="addSp delSp modSp add ord">
-        <pc:chgData name="Ba Thein Naing" userId="35d28a5d50ce0cfe" providerId="LiveId" clId="{2C6F86D1-93C2-465E-AC81-9B62652E6ADB}" dt="2024-12-17T08:44:30.049" v="2454"/>
-        <pc:sldMkLst>
-          <pc:docMk/>
-          <pc:sldMk cId="3557654588" sldId="4804"/>
-        </pc:sldMkLst>
-      </pc:sldChg>
-      <pc:sldChg chg="addSp delSp modSp new mod">
-        <pc:chgData name="Ba Thein Naing" userId="35d28a5d50ce0cfe" providerId="LiveId" clId="{2C6F86D1-93C2-465E-AC81-9B62652E6ADB}" dt="2024-12-17T08:52:06.676" v="2621" actId="20577"/>
-        <pc:sldMkLst>
-          <pc:docMk/>
-          <pc:sldMk cId="3544591455" sldId="4805"/>
-        </pc:sldMkLst>
-      </pc:sldChg>
-      <pc:sldChg chg="addSp delSp modSp new mod">
-        <pc:chgData name="Ba Thein Naing" userId="35d28a5d50ce0cfe" providerId="LiveId" clId="{2C6F86D1-93C2-465E-AC81-9B62652E6ADB}" dt="2024-12-18T00:51:57.382" v="2769" actId="20577"/>
-        <pc:sldMkLst>
-          <pc:docMk/>
-          <pc:sldMk cId="1178377525" sldId="4806"/>
-        </pc:sldMkLst>
-      </pc:sldChg>
-      <pc:sldChg chg="add del">
-        <pc:chgData name="Ba Thein Naing" userId="35d28a5d50ce0cfe" providerId="LiveId" clId="{2C6F86D1-93C2-465E-AC81-9B62652E6ADB}" dt="2024-12-17T08:32:15.400" v="1962"/>
-        <pc:sldMkLst>
-          <pc:docMk/>
-          <pc:sldMk cId="1383093931" sldId="2145708739"/>
-        </pc:sldMkLst>
-      </pc:sldChg>
-      <pc:sldChg chg="addSp delSp modSp add mod">
-        <pc:chgData name="Ba Thein Naing" userId="35d28a5d50ce0cfe" providerId="LiveId" clId="{2C6F86D1-93C2-465E-AC81-9B62652E6ADB}" dt="2024-12-18T01:00:48.596" v="2961" actId="20577"/>
-        <pc:sldMkLst>
-          <pc:docMk/>
-          <pc:sldMk cId="2639535741" sldId="2145708740"/>
-        </pc:sldMkLst>
-      </pc:sldChg>
-      <pc:sldChg chg="del">
-        <pc:chgData name="Ba Thein Naing" userId="35d28a5d50ce0cfe" providerId="LiveId" clId="{2C6F86D1-93C2-465E-AC81-9B62652E6ADB}" dt="2024-12-16T07:36:47.788" v="0" actId="47"/>
-        <pc:sldMkLst>
-          <pc:docMk/>
-          <pc:sldMk cId="2755403398" sldId="2145708740"/>
-        </pc:sldMkLst>
-      </pc:sldChg>
-      <pc:sldChg chg="modSp new mod">
-        <pc:chgData name="Ba Thein Naing" userId="35d28a5d50ce0cfe" providerId="LiveId" clId="{2C6F86D1-93C2-465E-AC81-9B62652E6ADB}" dt="2024-12-17T08:53:07.288" v="2681" actId="20577"/>
-        <pc:sldMkLst>
-          <pc:docMk/>
-          <pc:sldMk cId="1889133097" sldId="2145708741"/>
-        </pc:sldMkLst>
-      </pc:sldChg>
-      <pc:sldChg chg="del">
-        <pc:chgData name="Ba Thein Naing" userId="35d28a5d50ce0cfe" providerId="LiveId" clId="{2C6F86D1-93C2-465E-AC81-9B62652E6ADB}" dt="2024-12-16T07:36:47.788" v="0" actId="47"/>
-        <pc:sldMkLst>
-          <pc:docMk/>
-          <pc:sldMk cId="3985844814" sldId="2145708741"/>
-        </pc:sldMkLst>
-      </pc:sldChg>
-      <pc:sldChg chg="add">
-        <pc:chgData name="Ba Thein Naing" userId="35d28a5d50ce0cfe" providerId="LiveId" clId="{2C6F86D1-93C2-465E-AC81-9B62652E6ADB}" dt="2024-12-17T08:54:31.035" v="2682"/>
-        <pc:sldMkLst>
-          <pc:docMk/>
-          <pc:sldMk cId="1478767576" sldId="2145708742"/>
-        </pc:sldMkLst>
-      </pc:sldChg>
-      <pc:sldChg chg="del">
-        <pc:chgData name="Ba Thein Naing" userId="35d28a5d50ce0cfe" providerId="LiveId" clId="{2C6F86D1-93C2-465E-AC81-9B62652E6ADB}" dt="2024-12-16T07:36:47.788" v="0" actId="47"/>
-        <pc:sldMkLst>
-          <pc:docMk/>
-          <pc:sldMk cId="2074982228" sldId="2145708742"/>
-        </pc:sldMkLst>
-      </pc:sldChg>
-      <pc:sldChg chg="del">
-        <pc:chgData name="Ba Thein Naing" userId="35d28a5d50ce0cfe" providerId="LiveId" clId="{2C6F86D1-93C2-465E-AC81-9B62652E6ADB}" dt="2024-12-16T07:36:47.788" v="0" actId="47"/>
-        <pc:sldMkLst>
-          <pc:docMk/>
-          <pc:sldMk cId="3119337142" sldId="2145708744"/>
-        </pc:sldMkLst>
-      </pc:sldChg>
-      <pc:sldChg chg="del">
-        <pc:chgData name="Ba Thein Naing" userId="35d28a5d50ce0cfe" providerId="LiveId" clId="{2C6F86D1-93C2-465E-AC81-9B62652E6ADB}" dt="2024-12-16T07:36:47.788" v="0" actId="47"/>
-        <pc:sldMkLst>
-          <pc:docMk/>
-          <pc:sldMk cId="2460170361" sldId="2145708745"/>
-        </pc:sldMkLst>
-      </pc:sldChg>
-      <pc:sldChg chg="del">
-        <pc:chgData name="Ba Thein Naing" userId="35d28a5d50ce0cfe" providerId="LiveId" clId="{2C6F86D1-93C2-465E-AC81-9B62652E6ADB}" dt="2024-12-16T07:36:47.788" v="0" actId="47"/>
-        <pc:sldMkLst>
-          <pc:docMk/>
-          <pc:sldMk cId="3749780199" sldId="2145708746"/>
-        </pc:sldMkLst>
-      </pc:sldChg>
-      <pc:sldChg chg="del">
-        <pc:chgData name="Ba Thein Naing" userId="35d28a5d50ce0cfe" providerId="LiveId" clId="{2C6F86D1-93C2-465E-AC81-9B62652E6ADB}" dt="2024-12-16T07:36:47.788" v="0" actId="47"/>
-        <pc:sldMkLst>
-          <pc:docMk/>
-          <pc:sldMk cId="3727556282" sldId="2145708747"/>
-        </pc:sldMkLst>
-      </pc:sldChg>
-      <pc:sldChg chg="del">
-        <pc:chgData name="Ba Thein Naing" userId="35d28a5d50ce0cfe" providerId="LiveId" clId="{2C6F86D1-93C2-465E-AC81-9B62652E6ADB}" dt="2024-12-16T07:36:47.788" v="0" actId="47"/>
-        <pc:sldMkLst>
-          <pc:docMk/>
-          <pc:sldMk cId="794277017" sldId="2145708748"/>
-        </pc:sldMkLst>
-      </pc:sldChg>
-      <pc:sldChg chg="del">
-        <pc:chgData name="Ba Thein Naing" userId="35d28a5d50ce0cfe" providerId="LiveId" clId="{2C6F86D1-93C2-465E-AC81-9B62652E6ADB}" dt="2024-12-16T07:36:47.788" v="0" actId="47"/>
-        <pc:sldMkLst>
-          <pc:docMk/>
-          <pc:sldMk cId="1369501962" sldId="2145708749"/>
-        </pc:sldMkLst>
-      </pc:sldChg>
-      <pc:sldChg chg="del">
-        <pc:chgData name="Ba Thein Naing" userId="35d28a5d50ce0cfe" providerId="LiveId" clId="{2C6F86D1-93C2-465E-AC81-9B62652E6ADB}" dt="2024-12-16T07:36:47.788" v="0" actId="47"/>
-        <pc:sldMkLst>
-          <pc:docMk/>
-          <pc:sldMk cId="1315168957" sldId="2145708750"/>
-        </pc:sldMkLst>
-      </pc:sldChg>
-      <pc:sldChg chg="del">
-        <pc:chgData name="Ba Thein Naing" userId="35d28a5d50ce0cfe" providerId="LiveId" clId="{2C6F86D1-93C2-465E-AC81-9B62652E6ADB}" dt="2024-12-16T07:36:47.788" v="0" actId="47"/>
-        <pc:sldMkLst>
-          <pc:docMk/>
-          <pc:sldMk cId="869080509" sldId="2145708751"/>
-        </pc:sldMkLst>
-      </pc:sldChg>
-      <pc:sldChg chg="del">
-        <pc:chgData name="Ba Thein Naing" userId="35d28a5d50ce0cfe" providerId="LiveId" clId="{2C6F86D1-93C2-465E-AC81-9B62652E6ADB}" dt="2024-12-16T07:36:47.788" v="0" actId="47"/>
-        <pc:sldMkLst>
-          <pc:docMk/>
-          <pc:sldMk cId="3439094535" sldId="2145708752"/>
-        </pc:sldMkLst>
-      </pc:sldChg>
-      <pc:sldChg chg="del">
-        <pc:chgData name="Ba Thein Naing" userId="35d28a5d50ce0cfe" providerId="LiveId" clId="{2C6F86D1-93C2-465E-AC81-9B62652E6ADB}" dt="2024-12-16T07:36:47.788" v="0" actId="47"/>
-        <pc:sldMkLst>
-          <pc:docMk/>
-          <pc:sldMk cId="3898807591" sldId="2145708753"/>
-        </pc:sldMkLst>
-      </pc:sldChg>
-      <pc:sldChg chg="del">
-        <pc:chgData name="Ba Thein Naing" userId="35d28a5d50ce0cfe" providerId="LiveId" clId="{2C6F86D1-93C2-465E-AC81-9B62652E6ADB}" dt="2024-12-16T07:36:47.788" v="0" actId="47"/>
-        <pc:sldMkLst>
-          <pc:docMk/>
-          <pc:sldMk cId="1921309905" sldId="2145708754"/>
-        </pc:sldMkLst>
-      </pc:sldChg>
-      <pc:sldChg chg="del">
-        <pc:chgData name="Ba Thein Naing" userId="35d28a5d50ce0cfe" providerId="LiveId" clId="{2C6F86D1-93C2-465E-AC81-9B62652E6ADB}" dt="2024-12-16T07:36:47.788" v="0" actId="47"/>
-        <pc:sldMkLst>
-          <pc:docMk/>
-          <pc:sldMk cId="74446894" sldId="2145708756"/>
-        </pc:sldMkLst>
-      </pc:sldChg>
-      <pc:sldChg chg="del">
-        <pc:chgData name="Ba Thein Naing" userId="35d28a5d50ce0cfe" providerId="LiveId" clId="{2C6F86D1-93C2-465E-AC81-9B62652E6ADB}" dt="2024-12-16T07:36:47.788" v="0" actId="47"/>
-        <pc:sldMkLst>
-          <pc:docMk/>
-          <pc:sldMk cId="36781880" sldId="2145708757"/>
-        </pc:sldMkLst>
-      </pc:sldChg>
-      <pc:sldChg chg="del">
-        <pc:chgData name="Ba Thein Naing" userId="35d28a5d50ce0cfe" providerId="LiveId" clId="{2C6F86D1-93C2-465E-AC81-9B62652E6ADB}" dt="2024-12-16T07:36:47.788" v="0" actId="47"/>
-        <pc:sldMkLst>
-          <pc:docMk/>
-          <pc:sldMk cId="2145537419" sldId="2145708758"/>
-        </pc:sldMkLst>
-      </pc:sldChg>
-      <pc:sldChg chg="del">
-        <pc:chgData name="Ba Thein Naing" userId="35d28a5d50ce0cfe" providerId="LiveId" clId="{2C6F86D1-93C2-465E-AC81-9B62652E6ADB}" dt="2024-12-16T07:36:47.788" v="0" actId="47"/>
-        <pc:sldMkLst>
-          <pc:docMk/>
-          <pc:sldMk cId="2191777018" sldId="2145708760"/>
-        </pc:sldMkLst>
-      </pc:sldChg>
-      <pc:sldChg chg="del">
-        <pc:chgData name="Ba Thein Naing" userId="35d28a5d50ce0cfe" providerId="LiveId" clId="{2C6F86D1-93C2-465E-AC81-9B62652E6ADB}" dt="2024-12-16T07:36:47.788" v="0" actId="47"/>
-        <pc:sldMkLst>
-          <pc:docMk/>
-          <pc:sldMk cId="254285969" sldId="2145708761"/>
-        </pc:sldMkLst>
-      </pc:sldChg>
-      <pc:sldMasterChg chg="delSldLayout modSldLayout sldLayoutOrd">
-        <pc:chgData name="Ba Thein Naing" userId="35d28a5d50ce0cfe" providerId="LiveId" clId="{2C6F86D1-93C2-465E-AC81-9B62652E6ADB}" dt="2024-12-17T05:45:59.740" v="438" actId="14100"/>
-        <pc:sldMasterMkLst>
-          <pc:docMk/>
-          <pc:sldMasterMk cId="1892677854" sldId="2147483661"/>
-        </pc:sldMasterMkLst>
-        <pc:sldLayoutChg chg="delSp modSp">
-          <pc:chgData name="Ba Thein Naing" userId="35d28a5d50ce0cfe" providerId="LiveId" clId="{2C6F86D1-93C2-465E-AC81-9B62652E6ADB}" dt="2024-12-17T05:45:59.740" v="438" actId="14100"/>
-          <pc:sldLayoutMkLst>
-            <pc:docMk/>
-            <pc:sldMasterMk cId="1892677854" sldId="2147483661"/>
-            <pc:sldLayoutMk cId="1517239369" sldId="2147483662"/>
-          </pc:sldLayoutMkLst>
-          <pc:spChg chg="mod">
-            <ac:chgData name="Ba Thein Naing" userId="35d28a5d50ce0cfe" providerId="LiveId" clId="{2C6F86D1-93C2-465E-AC81-9B62652E6ADB}" dt="2024-12-17T05:45:59.740" v="438" actId="14100"/>
-            <ac:spMkLst>
-              <pc:docMk/>
-              <pc:sldMasterMk cId="1892677854" sldId="2147483661"/>
-              <pc:sldLayoutMk cId="1517239369" sldId="2147483662"/>
-              <ac:spMk id="18" creationId="{86C0EAA3-C71A-43A2-91D0-C6C31102094E}"/>
-            </ac:spMkLst>
-          </pc:spChg>
-        </pc:sldLayoutChg>
-        <pc:sldLayoutChg chg="modSp ord">
-          <pc:chgData name="Ba Thein Naing" userId="35d28a5d50ce0cfe" providerId="LiveId" clId="{2C6F86D1-93C2-465E-AC81-9B62652E6ADB}" dt="2024-12-17T05:27:20.541" v="53" actId="14100"/>
-          <pc:sldLayoutMkLst>
-            <pc:docMk/>
-            <pc:sldMasterMk cId="1892677854" sldId="2147483661"/>
-            <pc:sldLayoutMk cId="422516848" sldId="2147483664"/>
-          </pc:sldLayoutMkLst>
-        </pc:sldLayoutChg>
-        <pc:sldLayoutChg chg="del">
-          <pc:chgData name="Ba Thein Naing" userId="35d28a5d50ce0cfe" providerId="LiveId" clId="{2C6F86D1-93C2-465E-AC81-9B62652E6ADB}" dt="2024-12-16T07:36:47.788" v="0" actId="47"/>
-          <pc:sldLayoutMkLst>
-            <pc:docMk/>
-            <pc:sldMasterMk cId="1892677854" sldId="2147483661"/>
-            <pc:sldLayoutMk cId="1257053046" sldId="2147483679"/>
-          </pc:sldLayoutMkLst>
-        </pc:sldLayoutChg>
-        <pc:sldLayoutChg chg="delSp">
-          <pc:chgData name="Ba Thein Naing" userId="35d28a5d50ce0cfe" providerId="LiveId" clId="{2C6F86D1-93C2-465E-AC81-9B62652E6ADB}" dt="2024-12-17T05:28:25.772" v="64" actId="478"/>
-          <pc:sldLayoutMkLst>
-            <pc:docMk/>
-            <pc:sldMasterMk cId="1892677854" sldId="2147483661"/>
-            <pc:sldLayoutMk cId="3889387020" sldId="2147483679"/>
-          </pc:sldLayoutMkLst>
-        </pc:sldLayoutChg>
-        <pc:sldLayoutChg chg="del">
-          <pc:chgData name="Ba Thein Naing" userId="35d28a5d50ce0cfe" providerId="LiveId" clId="{2C6F86D1-93C2-465E-AC81-9B62652E6ADB}" dt="2024-12-16T07:36:47.788" v="0" actId="47"/>
-          <pc:sldLayoutMkLst>
-            <pc:docMk/>
-            <pc:sldMasterMk cId="1892677854" sldId="2147483661"/>
-            <pc:sldLayoutMk cId="1158554751" sldId="2147483680"/>
-          </pc:sldLayoutMkLst>
-        </pc:sldLayoutChg>
-        <pc:sldLayoutChg chg="del">
-          <pc:chgData name="Ba Thein Naing" userId="35d28a5d50ce0cfe" providerId="LiveId" clId="{2C6F86D1-93C2-465E-AC81-9B62652E6ADB}" dt="2024-12-17T05:34:19.576" v="138" actId="47"/>
-          <pc:sldLayoutMkLst>
-            <pc:docMk/>
-            <pc:sldMasterMk cId="1892677854" sldId="2147483661"/>
-            <pc:sldLayoutMk cId="1292883619" sldId="2147483680"/>
-          </pc:sldLayoutMkLst>
-        </pc:sldLayoutChg>
-      </pc:sldMasterChg>
-    </pc:docChg>
-  </pc:docChgLst>
-  <pc:docChgLst>
-    <pc:chgData name="Pyae Phyo Aung" userId="S::pyaephyo.aung@cdsg.com.mm::faf9559a-86c8-4531-9072-0bb9fb9689f8" providerId="AD" clId="Web-{546F6A9B-70BF-AB80-92BF-42B0D60C6F89}"/>
-    <pc:docChg chg="modSld">
-      <pc:chgData name="Pyae Phyo Aung" userId="S::pyaephyo.aung@cdsg.com.mm::faf9559a-86c8-4531-9072-0bb9fb9689f8" providerId="AD" clId="Web-{546F6A9B-70BF-AB80-92BF-42B0D60C6F89}" dt="2025-02-11T11:37:38.526" v="28" actId="1076"/>
-      <pc:docMkLst>
-        <pc:docMk/>
-      </pc:docMkLst>
-      <pc:sldChg chg="addSp delSp modSp">
-        <pc:chgData name="Pyae Phyo Aung" userId="S::pyaephyo.aung@cdsg.com.mm::faf9559a-86c8-4531-9072-0bb9fb9689f8" providerId="AD" clId="Web-{546F6A9B-70BF-AB80-92BF-42B0D60C6F89}" dt="2025-02-11T11:37:38.526" v="28" actId="1076"/>
-        <pc:sldMkLst>
-          <pc:docMk/>
-          <pc:sldMk cId="307570946" sldId="2145708750"/>
-        </pc:sldMkLst>
-        <pc:spChg chg="mod">
-          <ac:chgData name="Pyae Phyo Aung" userId="S::pyaephyo.aung@cdsg.com.mm::faf9559a-86c8-4531-9072-0bb9fb9689f8" providerId="AD" clId="Web-{546F6A9B-70BF-AB80-92BF-42B0D60C6F89}" dt="2025-02-11T11:36:38.384" v="9" actId="14100"/>
-          <ac:spMkLst>
-            <pc:docMk/>
-            <pc:sldMk cId="307570946" sldId="2145708750"/>
-            <ac:spMk id="4" creationId="{71AF4D64-2810-4074-1315-5AF0DD7E6873}"/>
-          </ac:spMkLst>
-        </pc:spChg>
-        <pc:graphicFrameChg chg="mod modGraphic">
-          <ac:chgData name="Pyae Phyo Aung" userId="S::pyaephyo.aung@cdsg.com.mm::faf9559a-86c8-4531-9072-0bb9fb9689f8" providerId="AD" clId="Web-{546F6A9B-70BF-AB80-92BF-42B0D60C6F89}" dt="2025-02-11T11:37:07.385" v="23"/>
-          <ac:graphicFrameMkLst>
-            <pc:docMk/>
-            <pc:sldMk cId="307570946" sldId="2145708750"/>
-            <ac:graphicFrameMk id="6" creationId="{7EDF3696-2580-A2BE-4F4A-B797B6E59272}"/>
-          </ac:graphicFrameMkLst>
-        </pc:graphicFrameChg>
-      </pc:sldChg>
-    </pc:docChg>
-  </pc:docChgLst>
-  <pc:docChgLst>
-    <pc:chgData name="Ei Myat Mon" userId="e6357aa9-fa6e-4417-bbe1-b057167c5708" providerId="ADAL" clId="{F6E3D79F-8865-4301-8308-895C759B23C8}"/>
-    <pc:docChg chg="undo custSel addSld delSld modSld">
-      <pc:chgData name="Ei Myat Mon" userId="e6357aa9-fa6e-4417-bbe1-b057167c5708" providerId="ADAL" clId="{F6E3D79F-8865-4301-8308-895C759B23C8}" dt="2025-08-05T02:19:17.968" v="166"/>
-      <pc:docMkLst>
-        <pc:docMk/>
-      </pc:docMkLst>
-      <pc:sldChg chg="modSp mod">
-        <pc:chgData name="Ei Myat Mon" userId="e6357aa9-fa6e-4417-bbe1-b057167c5708" providerId="ADAL" clId="{F6E3D79F-8865-4301-8308-895C759B23C8}" dt="2025-08-05T02:18:51.137" v="165" actId="20577"/>
-        <pc:sldMkLst>
-          <pc:docMk/>
-          <pc:sldMk cId="615142532" sldId="2145708750"/>
-        </pc:sldMkLst>
-        <pc:graphicFrameChg chg="mod modGraphic">
-          <ac:chgData name="Ei Myat Mon" userId="e6357aa9-fa6e-4417-bbe1-b057167c5708" providerId="ADAL" clId="{F6E3D79F-8865-4301-8308-895C759B23C8}" dt="2025-08-05T02:18:51.137" v="165" actId="20577"/>
-          <ac:graphicFrameMkLst>
-            <pc:docMk/>
-            <pc:sldMk cId="615142532" sldId="2145708750"/>
-            <ac:graphicFrameMk id="4" creationId="{7DAAC8F7-9035-8E1E-2CD1-C78762AA6E00}"/>
-          </ac:graphicFrameMkLst>
-        </pc:graphicFrameChg>
-      </pc:sldChg>
-      <pc:sldChg chg="modSp mod">
-        <pc:chgData name="Ei Myat Mon" userId="e6357aa9-fa6e-4417-bbe1-b057167c5708" providerId="ADAL" clId="{F6E3D79F-8865-4301-8308-895C759B23C8}" dt="2025-08-05T02:18:22.886" v="151" actId="20577"/>
-        <pc:sldMkLst>
-          <pc:docMk/>
-          <pc:sldMk cId="2253167209" sldId="2145708752"/>
-        </pc:sldMkLst>
-        <pc:spChg chg="mod">
-          <ac:chgData name="Ei Myat Mon" userId="e6357aa9-fa6e-4417-bbe1-b057167c5708" providerId="ADAL" clId="{F6E3D79F-8865-4301-8308-895C759B23C8}" dt="2025-08-05T02:18:22.886" v="151" actId="20577"/>
-          <ac:spMkLst>
-            <pc:docMk/>
-            <pc:sldMk cId="2253167209" sldId="2145708752"/>
-            <ac:spMk id="6" creationId="{4A08F4D0-3A0B-98D3-152B-8DA7EAE1C4AE}"/>
-          </ac:spMkLst>
-        </pc:spChg>
-      </pc:sldChg>
-      <pc:sldChg chg="modSp mod">
-        <pc:chgData name="Ei Myat Mon" userId="e6357aa9-fa6e-4417-bbe1-b057167c5708" providerId="ADAL" clId="{F6E3D79F-8865-4301-8308-895C759B23C8}" dt="2025-08-05T02:18:35.773" v="158" actId="20577"/>
-        <pc:sldMkLst>
-          <pc:docMk/>
-          <pc:sldMk cId="3932400498" sldId="2145708753"/>
-        </pc:sldMkLst>
-        <pc:spChg chg="mod">
-          <ac:chgData name="Ei Myat Mon" userId="e6357aa9-fa6e-4417-bbe1-b057167c5708" providerId="ADAL" clId="{F6E3D79F-8865-4301-8308-895C759B23C8}" dt="2025-08-05T02:18:35.773" v="158" actId="20577"/>
-          <ac:spMkLst>
-            <pc:docMk/>
-            <pc:sldMk cId="3932400498" sldId="2145708753"/>
-            <ac:spMk id="5" creationId="{566B8245-5E31-8595-1259-F8F47FB33882}"/>
-          </ac:spMkLst>
-        </pc:spChg>
-      </pc:sldChg>
-      <pc:sldChg chg="addSp delSp modSp mod">
-        <pc:chgData name="Ei Myat Mon" userId="e6357aa9-fa6e-4417-bbe1-b057167c5708" providerId="ADAL" clId="{F6E3D79F-8865-4301-8308-895C759B23C8}" dt="2025-08-05T02:15:11.266" v="127" actId="1076"/>
-        <pc:sldMkLst>
-          <pc:docMk/>
-          <pc:sldMk cId="3136416228" sldId="2145708755"/>
-        </pc:sldMkLst>
-        <pc:picChg chg="del">
-          <ac:chgData name="Ei Myat Mon" userId="e6357aa9-fa6e-4417-bbe1-b057167c5708" providerId="ADAL" clId="{F6E3D79F-8865-4301-8308-895C759B23C8}" dt="2025-08-05T02:14:58.248" v="124" actId="478"/>
-          <ac:picMkLst>
-            <pc:docMk/>
-            <pc:sldMk cId="3136416228" sldId="2145708755"/>
-            <ac:picMk id="5" creationId="{3CFBFB0F-F0DE-35A8-D789-5EE14015B058}"/>
-          </ac:picMkLst>
-        </pc:picChg>
-        <pc:picChg chg="add mod">
-          <ac:chgData name="Ei Myat Mon" userId="e6357aa9-fa6e-4417-bbe1-b057167c5708" providerId="ADAL" clId="{F6E3D79F-8865-4301-8308-895C759B23C8}" dt="2025-08-05T02:15:11.266" v="127" actId="1076"/>
-          <ac:picMkLst>
-            <pc:docMk/>
-            <pc:sldMk cId="3136416228" sldId="2145708755"/>
-            <ac:picMk id="6" creationId="{E15C50F9-4D6A-A972-F9E1-92C2609FBFAB}"/>
-          </ac:picMkLst>
-        </pc:picChg>
-      </pc:sldChg>
-      <pc:sldChg chg="addSp delSp modSp mod">
-        <pc:chgData name="Ei Myat Mon" userId="e6357aa9-fa6e-4417-bbe1-b057167c5708" providerId="ADAL" clId="{F6E3D79F-8865-4301-8308-895C759B23C8}" dt="2025-08-04T09:03:16.391" v="101"/>
-        <pc:sldMkLst>
-          <pc:docMk/>
-          <pc:sldMk cId="4188361211" sldId="2145708756"/>
-        </pc:sldMkLst>
-        <pc:graphicFrameChg chg="del">
-          <ac:chgData name="Ei Myat Mon" userId="e6357aa9-fa6e-4417-bbe1-b057167c5708" providerId="ADAL" clId="{F6E3D79F-8865-4301-8308-895C759B23C8}" dt="2025-08-04T09:03:15.210" v="100" actId="478"/>
-          <ac:graphicFrameMkLst>
-            <pc:docMk/>
-            <pc:sldMk cId="4188361211" sldId="2145708756"/>
-            <ac:graphicFrameMk id="4" creationId="{D86AEC2E-9D21-4669-85D3-73EF3BB5D461}"/>
-          </ac:graphicFrameMkLst>
-        </pc:graphicFrameChg>
-        <pc:graphicFrameChg chg="add mod">
-          <ac:chgData name="Ei Myat Mon" userId="e6357aa9-fa6e-4417-bbe1-b057167c5708" providerId="ADAL" clId="{F6E3D79F-8865-4301-8308-895C759B23C8}" dt="2025-08-04T09:03:16.391" v="101"/>
-          <ac:graphicFrameMkLst>
-            <pc:docMk/>
-            <pc:sldMk cId="4188361211" sldId="2145708756"/>
-            <ac:graphicFrameMk id="5" creationId="{CDA86A76-0050-A116-53D0-1EEEC0343FD5}"/>
-          </ac:graphicFrameMkLst>
-        </pc:graphicFrameChg>
-      </pc:sldChg>
-      <pc:sldChg chg="addSp delSp modSp add del mod">
-        <pc:chgData name="Ei Myat Mon" userId="e6357aa9-fa6e-4417-bbe1-b057167c5708" providerId="ADAL" clId="{F6E3D79F-8865-4301-8308-895C759B23C8}" dt="2025-08-05T02:14:20.117" v="105" actId="14100"/>
-        <pc:sldMkLst>
-          <pc:docMk/>
-          <pc:sldMk cId="3363287682" sldId="2145708758"/>
-        </pc:sldMkLst>
-        <pc:picChg chg="add del mod">
-          <ac:chgData name="Ei Myat Mon" userId="e6357aa9-fa6e-4417-bbe1-b057167c5708" providerId="ADAL" clId="{F6E3D79F-8865-4301-8308-895C759B23C8}" dt="2025-08-05T02:14:05.072" v="102" actId="478"/>
-          <ac:picMkLst>
-            <pc:docMk/>
-            <pc:sldMk cId="3363287682" sldId="2145708758"/>
-            <ac:picMk id="5" creationId="{35F0FBA8-3413-4B1F-2D14-EA8E5A9F860E}"/>
-          </ac:picMkLst>
-        </pc:picChg>
-        <pc:picChg chg="add mod">
-          <ac:chgData name="Ei Myat Mon" userId="e6357aa9-fa6e-4417-bbe1-b057167c5708" providerId="ADAL" clId="{F6E3D79F-8865-4301-8308-895C759B23C8}" dt="2025-08-05T02:14:20.117" v="105" actId="14100"/>
-          <ac:picMkLst>
-            <pc:docMk/>
-            <pc:sldMk cId="3363287682" sldId="2145708758"/>
-            <ac:picMk id="6" creationId="{5277F33A-8C16-3944-9EC2-8101D6FBF7B0}"/>
-          </ac:picMkLst>
-        </pc:picChg>
-        <pc:picChg chg="del">
-          <ac:chgData name="Ei Myat Mon" userId="e6357aa9-fa6e-4417-bbe1-b057167c5708" providerId="ADAL" clId="{F6E3D79F-8865-4301-8308-895C759B23C8}" dt="2025-08-04T08:53:11.880" v="94" actId="478"/>
-          <ac:picMkLst>
-            <pc:docMk/>
-            <pc:sldMk cId="3363287682" sldId="2145708758"/>
-            <ac:picMk id="6" creationId="{B1709687-71C1-DF3F-C673-458EE4FB09FB}"/>
-          </ac:picMkLst>
-        </pc:picChg>
-      </pc:sldChg>
-      <pc:sldChg chg="modSp mod">
-        <pc:chgData name="Ei Myat Mon" userId="e6357aa9-fa6e-4417-bbe1-b057167c5708" providerId="ADAL" clId="{F6E3D79F-8865-4301-8308-895C759B23C8}" dt="2025-08-05T02:19:17.968" v="166"/>
-        <pc:sldMkLst>
-          <pc:docMk/>
-          <pc:sldMk cId="1235559352" sldId="2145708761"/>
-        </pc:sldMkLst>
-        <pc:spChg chg="mod">
-          <ac:chgData name="Ei Myat Mon" userId="e6357aa9-fa6e-4417-bbe1-b057167c5708" providerId="ADAL" clId="{F6E3D79F-8865-4301-8308-895C759B23C8}" dt="2025-08-05T02:19:17.968" v="166"/>
-          <ac:spMkLst>
-            <pc:docMk/>
-            <pc:sldMk cId="1235559352" sldId="2145708761"/>
-            <ac:spMk id="19" creationId="{85B4683E-03BA-A611-0997-F9DE828A7C96}"/>
-          </ac:spMkLst>
-        </pc:spChg>
-      </pc:sldChg>
-      <pc:sldChg chg="addSp delSp modSp mod">
-        <pc:chgData name="Ei Myat Mon" userId="e6357aa9-fa6e-4417-bbe1-b057167c5708" providerId="ADAL" clId="{F6E3D79F-8865-4301-8308-895C759B23C8}" dt="2025-08-05T02:14:42.786" v="123" actId="1035"/>
-        <pc:sldMkLst>
-          <pc:docMk/>
-          <pc:sldMk cId="1563390098" sldId="2145708762"/>
-        </pc:sldMkLst>
-        <pc:picChg chg="add del mod">
-          <ac:chgData name="Ei Myat Mon" userId="e6357aa9-fa6e-4417-bbe1-b057167c5708" providerId="ADAL" clId="{F6E3D79F-8865-4301-8308-895C759B23C8}" dt="2025-08-05T02:14:24.846" v="106" actId="478"/>
-          <ac:picMkLst>
-            <pc:docMk/>
-            <pc:sldMk cId="1563390098" sldId="2145708762"/>
-            <ac:picMk id="5" creationId="{7E2A147B-DBB7-308B-EEF6-4168CCE03261}"/>
-          </ac:picMkLst>
-        </pc:picChg>
-        <pc:picChg chg="add mod">
-          <ac:chgData name="Ei Myat Mon" userId="e6357aa9-fa6e-4417-bbe1-b057167c5708" providerId="ADAL" clId="{F6E3D79F-8865-4301-8308-895C759B23C8}" dt="2025-08-05T02:14:42.786" v="123" actId="1035"/>
-          <ac:picMkLst>
-            <pc:docMk/>
-            <pc:sldMk cId="1563390098" sldId="2145708762"/>
-            <ac:picMk id="6" creationId="{89AA8618-7F9D-EA28-A380-94806547AF43}"/>
-          </ac:picMkLst>
-        </pc:picChg>
-        <pc:picChg chg="del">
-          <ac:chgData name="Ei Myat Mon" userId="e6357aa9-fa6e-4417-bbe1-b057167c5708" providerId="ADAL" clId="{F6E3D79F-8865-4301-8308-895C759B23C8}" dt="2025-08-04T08:53:40.116" v="98" actId="478"/>
-          <ac:picMkLst>
-            <pc:docMk/>
-            <pc:sldMk cId="1563390098" sldId="2145708762"/>
-            <ac:picMk id="8" creationId="{06E2C659-16B3-9B33-D4AC-4E23B147969E}"/>
-          </ac:picMkLst>
-        </pc:picChg>
-      </pc:sldChg>
-    </pc:docChg>
-  </pc:docChgLst>
-  <pc:docChgLst>
-    <pc:chgData name="Aung Myo Aye" userId="c3d7fd38c0bd61f1" providerId="LiveId" clId="{F612EA70-A341-4C73-AA14-4E3282D2A819}"/>
-    <pc:docChg chg="modSld">
-      <pc:chgData name="Aung Myo Aye" userId="c3d7fd38c0bd61f1" providerId="LiveId" clId="{F612EA70-A341-4C73-AA14-4E3282D2A819}" dt="2024-12-19T10:20:21.070" v="11" actId="20577"/>
-      <pc:docMkLst>
-        <pc:docMk/>
-      </pc:docMkLst>
-      <pc:sldChg chg="modSp mod">
-        <pc:chgData name="Aung Myo Aye" userId="c3d7fd38c0bd61f1" providerId="LiveId" clId="{F612EA70-A341-4C73-AA14-4E3282D2A819}" dt="2024-12-19T10:17:44.423" v="5" actId="2711"/>
-        <pc:sldMkLst>
-          <pc:docMk/>
-          <pc:sldMk cId="691411247" sldId="1021"/>
-        </pc:sldMkLst>
-      </pc:sldChg>
-      <pc:sldChg chg="modSp mod">
-        <pc:chgData name="Aung Myo Aye" userId="c3d7fd38c0bd61f1" providerId="LiveId" clId="{F612EA70-A341-4C73-AA14-4E3282D2A819}" dt="2024-12-19T10:20:21.070" v="11" actId="20577"/>
-        <pc:sldMkLst>
-          <pc:docMk/>
-          <pc:sldMk cId="1478767576" sldId="2145708742"/>
-        </pc:sldMkLst>
-      </pc:sldChg>
-    </pc:docChg>
-  </pc:docChgLst>
-  <pc:docChgLst>
-    <pc:chgData name="Pyae Phyo Aung" userId="S::pyaephyo.aung@cdsg.com.mm::faf9559a-86c8-4531-9072-0bb9fb9689f8" providerId="AD" clId="Web-{F1949A8B-214C-66EF-3643-7E983E961CEF}"/>
-    <pc:docChg chg="modSld">
-      <pc:chgData name="Pyae Phyo Aung" userId="S::pyaephyo.aung@cdsg.com.mm::faf9559a-86c8-4531-9072-0bb9fb9689f8" providerId="AD" clId="Web-{F1949A8B-214C-66EF-3643-7E983E961CEF}" dt="2025-02-10T03:58:49.558" v="232"/>
-      <pc:docMkLst>
-        <pc:docMk/>
-      </pc:docMkLst>
-      <pc:sldChg chg="addSp delSp modSp">
-        <pc:chgData name="Pyae Phyo Aung" userId="S::pyaephyo.aung@cdsg.com.mm::faf9559a-86c8-4531-9072-0bb9fb9689f8" providerId="AD" clId="Web-{F1949A8B-214C-66EF-3643-7E983E961CEF}" dt="2025-02-10T03:58:49.558" v="232"/>
-        <pc:sldMkLst>
-          <pc:docMk/>
-          <pc:sldMk cId="307570946" sldId="2145708750"/>
-        </pc:sldMkLst>
-        <pc:spChg chg="mod">
-          <ac:chgData name="Pyae Phyo Aung" userId="S::pyaephyo.aung@cdsg.com.mm::faf9559a-86c8-4531-9072-0bb9fb9689f8" providerId="AD" clId="Web-{F1949A8B-214C-66EF-3643-7E983E961CEF}" dt="2025-02-10T03:55:18.979" v="33" actId="14100"/>
-          <ac:spMkLst>
-            <pc:docMk/>
-            <pc:sldMk cId="307570946" sldId="2145708750"/>
-            <ac:spMk id="4" creationId="{71AF4D64-2810-4074-1315-5AF0DD7E6873}"/>
-          </ac:spMkLst>
-        </pc:spChg>
-        <pc:graphicFrameChg chg="mod modGraphic">
-          <ac:chgData name="Pyae Phyo Aung" userId="S::pyaephyo.aung@cdsg.com.mm::faf9559a-86c8-4531-9072-0bb9fb9689f8" providerId="AD" clId="Web-{F1949A8B-214C-66EF-3643-7E983E961CEF}" dt="2025-02-10T03:58:49.558" v="232"/>
-          <ac:graphicFrameMkLst>
-            <pc:docMk/>
-            <pc:sldMk cId="307570946" sldId="2145708750"/>
-            <ac:graphicFrameMk id="6" creationId="{7EDF3696-2580-A2BE-4F4A-B797B6E59272}"/>
-          </ac:graphicFrameMkLst>
-        </pc:graphicFrameChg>
-      </pc:sldChg>
-    </pc:docChg>
-  </pc:docChgLst>
-  <pc:docChgLst>
-    <pc:chgData name="Pyae Phyo Aung" userId="S::pyaephyo.aung@cdsg.com.mm::faf9559a-86c8-4531-9072-0bb9fb9689f8" providerId="AD" clId="Web-{5F8C203B-DC17-783F-2B79-AD1954821256}"/>
-    <pc:docChg chg="modSld">
-      <pc:chgData name="Pyae Phyo Aung" userId="S::pyaephyo.aung@cdsg.com.mm::faf9559a-86c8-4531-9072-0bb9fb9689f8" providerId="AD" clId="Web-{5F8C203B-DC17-783F-2B79-AD1954821256}" dt="2025-02-06T09:17:30.813" v="0" actId="14100"/>
-      <pc:docMkLst>
-        <pc:docMk/>
-      </pc:docMkLst>
-      <pc:sldChg chg="modSp">
-        <pc:chgData name="Pyae Phyo Aung" userId="S::pyaephyo.aung@cdsg.com.mm::faf9559a-86c8-4531-9072-0bb9fb9689f8" providerId="AD" clId="Web-{5F8C203B-DC17-783F-2B79-AD1954821256}" dt="2025-02-06T09:17:30.813" v="0" actId="14100"/>
-        <pc:sldMkLst>
-          <pc:docMk/>
-          <pc:sldMk cId="307570946" sldId="2145708750"/>
-        </pc:sldMkLst>
-        <pc:spChg chg="mod">
-          <ac:chgData name="Pyae Phyo Aung" userId="S::pyaephyo.aung@cdsg.com.mm::faf9559a-86c8-4531-9072-0bb9fb9689f8" providerId="AD" clId="Web-{5F8C203B-DC17-783F-2B79-AD1954821256}" dt="2025-02-06T09:17:30.813" v="0" actId="14100"/>
-          <ac:spMkLst>
-            <pc:docMk/>
-            <pc:sldMk cId="307570946" sldId="2145708750"/>
-            <ac:spMk id="4" creationId="{71AF4D64-2810-4074-1315-5AF0DD7E6873}"/>
-          </ac:spMkLst>
-        </pc:spChg>
-      </pc:sldChg>
-    </pc:docChg>
-  </pc:docChgLst>
-  <pc:docChgLst>
-    <pc:chgData name="Ei Myat Mon" userId="e6357aa9-fa6e-4417-bbe1-b057167c5708" providerId="ADAL" clId="{DF4A567D-5C2B-4460-BE52-FC91439008E9}"/>
-    <pc:docChg chg="addSld delSld modSld sldOrd">
-      <pc:chgData name="Ei Myat Mon" userId="e6357aa9-fa6e-4417-bbe1-b057167c5708" providerId="ADAL" clId="{DF4A567D-5C2B-4460-BE52-FC91439008E9}" dt="2026-01-06T04:00:37.763" v="27" actId="113"/>
-      <pc:docMkLst>
-        <pc:docMk/>
-      </pc:docMkLst>
-      <pc:sldChg chg="del">
-        <pc:chgData name="Ei Myat Mon" userId="e6357aa9-fa6e-4417-bbe1-b057167c5708" providerId="ADAL" clId="{DF4A567D-5C2B-4460-BE52-FC91439008E9}" dt="2026-01-06T03:56:57.789" v="0" actId="2696"/>
-        <pc:sldMkLst>
-          <pc:docMk/>
-          <pc:sldMk cId="3932400498" sldId="2145708753"/>
-        </pc:sldMkLst>
-      </pc:sldChg>
-      <pc:sldChg chg="modSp mod">
-        <pc:chgData name="Ei Myat Mon" userId="e6357aa9-fa6e-4417-bbe1-b057167c5708" providerId="ADAL" clId="{DF4A567D-5C2B-4460-BE52-FC91439008E9}" dt="2026-01-06T04:00:37.763" v="27" actId="113"/>
-        <pc:sldMkLst>
-          <pc:docMk/>
-          <pc:sldMk cId="2341347600" sldId="2145708775"/>
-        </pc:sldMkLst>
-        <pc:spChg chg="mod">
-          <ac:chgData name="Ei Myat Mon" userId="e6357aa9-fa6e-4417-bbe1-b057167c5708" providerId="ADAL" clId="{DF4A567D-5C2B-4460-BE52-FC91439008E9}" dt="2026-01-06T04:00:37.763" v="27" actId="113"/>
-          <ac:spMkLst>
-            <pc:docMk/>
-            <pc:sldMk cId="2341347600" sldId="2145708775"/>
-            <ac:spMk id="5" creationId="{22509ED9-06DF-70F4-C752-38470969F884}"/>
-          </ac:spMkLst>
-        </pc:spChg>
-      </pc:sldChg>
-      <pc:sldChg chg="addSp modSp new mod ord">
-        <pc:chgData name="Ei Myat Mon" userId="e6357aa9-fa6e-4417-bbe1-b057167c5708" providerId="ADAL" clId="{DF4A567D-5C2B-4460-BE52-FC91439008E9}" dt="2026-01-06T04:00:01.799" v="26"/>
-        <pc:sldMkLst>
-          <pc:docMk/>
-          <pc:sldMk cId="3811131600" sldId="2145708778"/>
-        </pc:sldMkLst>
-        <pc:spChg chg="mod">
-          <ac:chgData name="Ei Myat Mon" userId="e6357aa9-fa6e-4417-bbe1-b057167c5708" providerId="ADAL" clId="{DF4A567D-5C2B-4460-BE52-FC91439008E9}" dt="2026-01-06T03:58:12.198" v="15" actId="20577"/>
-          <ac:spMkLst>
-            <pc:docMk/>
-            <pc:sldMk cId="3811131600" sldId="2145708778"/>
-            <ac:spMk id="3" creationId="{1CEB25EF-88E3-154B-60A8-18D70F3CBC48}"/>
-          </ac:spMkLst>
-        </pc:spChg>
-        <pc:spChg chg="add mod">
-          <ac:chgData name="Ei Myat Mon" userId="e6357aa9-fa6e-4417-bbe1-b057167c5708" providerId="ADAL" clId="{DF4A567D-5C2B-4460-BE52-FC91439008E9}" dt="2026-01-06T03:59:40.598" v="20" actId="113"/>
-          <ac:spMkLst>
-            <pc:docMk/>
-            <pc:sldMk cId="3811131600" sldId="2145708778"/>
-            <ac:spMk id="5" creationId="{D616CE12-C861-B003-EC41-2E1FA93E7570}"/>
-          </ac:spMkLst>
-        </pc:spChg>
-      </pc:sldChg>
-    </pc:docChg>
-  </pc:docChgLst>
-  <pc:docChgLst>
-    <pc:chgData name="Pyae Phyo Aung" userId="faf9559a-86c8-4531-9072-0bb9fb9689f8" providerId="ADAL" clId="{E10AC9A8-E9BA-41FB-86FE-C9B3D27EC546}"/>
-    <pc:docChg chg="custSel modSld">
-      <pc:chgData name="Pyae Phyo Aung" userId="faf9559a-86c8-4531-9072-0bb9fb9689f8" providerId="ADAL" clId="{E10AC9A8-E9BA-41FB-86FE-C9B3D27EC546}" dt="2025-02-06T05:22:33.338" v="74" actId="20577"/>
-      <pc:docMkLst>
-        <pc:docMk/>
-      </pc:docMkLst>
-      <pc:sldChg chg="addSp delSp modSp mod">
-        <pc:chgData name="Pyae Phyo Aung" userId="faf9559a-86c8-4531-9072-0bb9fb9689f8" providerId="ADAL" clId="{E10AC9A8-E9BA-41FB-86FE-C9B3D27EC546}" dt="2025-02-06T05:22:33.338" v="74" actId="20577"/>
-        <pc:sldMkLst>
-          <pc:docMk/>
-          <pc:sldMk cId="307570946" sldId="2145708750"/>
-        </pc:sldMkLst>
-        <pc:spChg chg="add mod">
-          <ac:chgData name="Pyae Phyo Aung" userId="faf9559a-86c8-4531-9072-0bb9fb9689f8" providerId="ADAL" clId="{E10AC9A8-E9BA-41FB-86FE-C9B3D27EC546}" dt="2025-02-06T05:22:06.462" v="53" actId="1076"/>
-          <ac:spMkLst>
-            <pc:docMk/>
-            <pc:sldMk cId="307570946" sldId="2145708750"/>
-            <ac:spMk id="4" creationId="{71AF4D64-2810-4074-1315-5AF0DD7E6873}"/>
-          </ac:spMkLst>
-        </pc:spChg>
-        <pc:graphicFrameChg chg="mod modGraphic">
-          <ac:chgData name="Pyae Phyo Aung" userId="faf9559a-86c8-4531-9072-0bb9fb9689f8" providerId="ADAL" clId="{E10AC9A8-E9BA-41FB-86FE-C9B3D27EC546}" dt="2025-02-06T05:22:33.338" v="74" actId="20577"/>
-          <ac:graphicFrameMkLst>
-            <pc:docMk/>
-            <pc:sldMk cId="307570946" sldId="2145708750"/>
-            <ac:graphicFrameMk id="6" creationId="{7EDF3696-2580-A2BE-4F4A-B797B6E59272}"/>
-          </ac:graphicFrameMkLst>
-        </pc:graphicFrameChg>
-      </pc:sldChg>
-    </pc:docChg>
-  </pc:docChgLst>
-  <pc:docChgLst>
-    <pc:chgData name="Ba Thein Naing" userId="35d28a5d50ce0cfe" providerId="LiveId" clId="{3F84ACA9-DE29-468A-B3C4-7115F148ABE8}"/>
-    <pc:docChg chg="custSel addSld modSld sldOrd">
-      <pc:chgData name="Ba Thein Naing" userId="35d28a5d50ce0cfe" providerId="LiveId" clId="{3F84ACA9-DE29-468A-B3C4-7115F148ABE8}" dt="2024-12-16T04:44:52.740" v="2250" actId="6549"/>
-      <pc:docMkLst>
-        <pc:docMk/>
-      </pc:docMkLst>
-      <pc:sldChg chg="delSp modSp mod">
-        <pc:chgData name="Ba Thein Naing" userId="35d28a5d50ce0cfe" providerId="LiveId" clId="{3F84ACA9-DE29-468A-B3C4-7115F148ABE8}" dt="2024-12-16T02:14:12.949" v="1604" actId="113"/>
-        <pc:sldMkLst>
-          <pc:docMk/>
-          <pc:sldMk cId="1383093931" sldId="2145708739"/>
-        </pc:sldMkLst>
-      </pc:sldChg>
-      <pc:sldChg chg="modSp mod">
-        <pc:chgData name="Ba Thein Naing" userId="35d28a5d50ce0cfe" providerId="LiveId" clId="{3F84ACA9-DE29-468A-B3C4-7115F148ABE8}" dt="2024-12-16T02:01:47.734" v="1460" actId="20577"/>
-        <pc:sldMkLst>
-          <pc:docMk/>
-          <pc:sldMk cId="2755403398" sldId="2145708740"/>
-        </pc:sldMkLst>
-      </pc:sldChg>
-      <pc:sldChg chg="modSp mod">
-        <pc:chgData name="Ba Thein Naing" userId="35d28a5d50ce0cfe" providerId="LiveId" clId="{3F84ACA9-DE29-468A-B3C4-7115F148ABE8}" dt="2024-12-15T17:37:05.030" v="1" actId="1076"/>
-        <pc:sldMkLst>
-          <pc:docMk/>
-          <pc:sldMk cId="3985844814" sldId="2145708741"/>
-        </pc:sldMkLst>
-      </pc:sldChg>
-      <pc:sldChg chg="modSp mod">
-        <pc:chgData name="Ba Thein Naing" userId="35d28a5d50ce0cfe" providerId="LiveId" clId="{3F84ACA9-DE29-468A-B3C4-7115F148ABE8}" dt="2024-12-16T03:13:38.963" v="2170" actId="20577"/>
-        <pc:sldMkLst>
-          <pc:docMk/>
-          <pc:sldMk cId="2074982228" sldId="2145708742"/>
-        </pc:sldMkLst>
-      </pc:sldChg>
-      <pc:sldChg chg="modSp mod">
-        <pc:chgData name="Ba Thein Naing" userId="35d28a5d50ce0cfe" providerId="LiveId" clId="{3F84ACA9-DE29-468A-B3C4-7115F148ABE8}" dt="2024-12-16T03:54:09.387" v="2179" actId="20577"/>
-        <pc:sldMkLst>
-          <pc:docMk/>
-          <pc:sldMk cId="3749780199" sldId="2145708746"/>
-        </pc:sldMkLst>
-      </pc:sldChg>
-      <pc:sldChg chg="modSp mod">
-        <pc:chgData name="Ba Thein Naing" userId="35d28a5d50ce0cfe" providerId="LiveId" clId="{3F84ACA9-DE29-468A-B3C4-7115F148ABE8}" dt="2024-12-16T02:12:40.278" v="1585" actId="1036"/>
-        <pc:sldMkLst>
-          <pc:docMk/>
-          <pc:sldMk cId="3727556282" sldId="2145708747"/>
-        </pc:sldMkLst>
-      </pc:sldChg>
-      <pc:sldChg chg="modSp mod">
-        <pc:chgData name="Ba Thein Naing" userId="35d28a5d50ce0cfe" providerId="LiveId" clId="{3F84ACA9-DE29-468A-B3C4-7115F148ABE8}" dt="2024-12-16T03:29:54.903" v="2173" actId="20577"/>
-        <pc:sldMkLst>
-          <pc:docMk/>
-          <pc:sldMk cId="1369501962" sldId="2145708749"/>
-        </pc:sldMkLst>
-      </pc:sldChg>
-      <pc:sldChg chg="modSp mod">
-        <pc:chgData name="Ba Thein Naing" userId="35d28a5d50ce0cfe" providerId="LiveId" clId="{3F84ACA9-DE29-468A-B3C4-7115F148ABE8}" dt="2024-12-15T18:19:25.859" v="251" actId="20577"/>
-        <pc:sldMkLst>
-          <pc:docMk/>
-          <pc:sldMk cId="1315168957" sldId="2145708750"/>
-        </pc:sldMkLst>
-      </pc:sldChg>
-      <pc:sldChg chg="modSp ord">
-        <pc:chgData name="Ba Thein Naing" userId="35d28a5d50ce0cfe" providerId="LiveId" clId="{3F84ACA9-DE29-468A-B3C4-7115F148ABE8}" dt="2024-12-16T02:25:18.140" v="2169" actId="2711"/>
-        <pc:sldMkLst>
-          <pc:docMk/>
-          <pc:sldMk cId="869080509" sldId="2145708751"/>
-        </pc:sldMkLst>
-      </pc:sldChg>
-      <pc:sldChg chg="modSp mod">
-        <pc:chgData name="Ba Thein Naing" userId="35d28a5d50ce0cfe" providerId="LiveId" clId="{3F84ACA9-DE29-468A-B3C4-7115F148ABE8}" dt="2024-12-16T02:13:31.089" v="1598" actId="20577"/>
-        <pc:sldMkLst>
-          <pc:docMk/>
-          <pc:sldMk cId="1921309905" sldId="2145708754"/>
-        </pc:sldMkLst>
-      </pc:sldChg>
-      <pc:sldChg chg="addSp delSp modSp mod">
-        <pc:chgData name="Ba Thein Naing" userId="35d28a5d50ce0cfe" providerId="LiveId" clId="{3F84ACA9-DE29-468A-B3C4-7115F148ABE8}" dt="2024-12-16T04:43:30.008" v="2203" actId="1076"/>
-        <pc:sldMkLst>
-          <pc:docMk/>
-          <pc:sldMk cId="74446894" sldId="2145708756"/>
-        </pc:sldMkLst>
-      </pc:sldChg>
-      <pc:sldChg chg="modSp mod">
-        <pc:chgData name="Ba Thein Naing" userId="35d28a5d50ce0cfe" providerId="LiveId" clId="{3F84ACA9-DE29-468A-B3C4-7115F148ABE8}" dt="2024-12-16T02:00:29.102" v="1371" actId="27636"/>
-        <pc:sldMkLst>
-          <pc:docMk/>
-          <pc:sldMk cId="2145537419" sldId="2145708758"/>
-        </pc:sldMkLst>
-      </pc:sldChg>
-      <pc:sldChg chg="modSp mod">
-        <pc:chgData name="Ba Thein Naing" userId="35d28a5d50ce0cfe" providerId="LiveId" clId="{3F84ACA9-DE29-468A-B3C4-7115F148ABE8}" dt="2024-12-16T04:44:52.740" v="2250" actId="6549"/>
-        <pc:sldMkLst>
-          <pc:docMk/>
-          <pc:sldMk cId="2191777018" sldId="2145708760"/>
-        </pc:sldMkLst>
-      </pc:sldChg>
-      <pc:sldChg chg="addSp delSp modSp add mod ord modClrScheme chgLayout">
-        <pc:chgData name="Ba Thein Naing" userId="35d28a5d50ce0cfe" providerId="LiveId" clId="{3F84ACA9-DE29-468A-B3C4-7115F148ABE8}" dt="2024-12-16T04:16:43.126" v="2200" actId="20577"/>
-        <pc:sldMkLst>
-          <pc:docMk/>
-          <pc:sldMk cId="254285969" sldId="2145708761"/>
-        </pc:sldMkLst>
-      </pc:sldChg>
-    </pc:docChg>
-  </pc:docChgLst>
-</pc:chgInfo>
-</file>
-
 <file path=ppt/notesMasters/notesMaster1.xml><?xml version="1.0" encoding="utf-8"?>
 <p:notesMaster xmlns:a="http://schemas.openxmlformats.org/drawingml/2006/main" xmlns:r="http://schemas.openxmlformats.org/officeDocument/2006/relationships" xmlns:p="http://schemas.openxmlformats.org/presentationml/2006/main">
   <p:cSld>
@@ -2664,7 +222,7 @@
           <a:p>
             <a:fld id="{CFB89EC9-ADF7-4CD8-A359-4B3486574A56}" type="datetimeFigureOut">
               <a:rPr lang="en-US" smtClean="0"/>
-              <a:t>1/6/2026</a:t>
+              <a:t>3/26/2026</a:t>
             </a:fld>
             <a:endParaRPr lang="en-US"/>
           </a:p>
@@ -2959,6 +517,13 @@
           </p:nvPr>
         </p:nvSpPr>
         <p:spPr/>
+        <p:txBody>
+          <a:bodyPr/>
+          <a:lstStyle/>
+          <a:p>
+            <a:endParaRPr lang="en-US"/>
+          </a:p>
+        </p:txBody>
       </p:sp>
       <p:sp>
         <p:nvSpPr>
@@ -2996,7 +561,7 @@
           <a:p>
             <a:fld id="{74180750-FA6C-4B62-A27E-0AEE5A77FE02}" type="slidenum">
               <a:rPr lang="en-US" smtClean="0"/>
-              <a:t>6</a:t>
+              <a:t>11</a:t>
             </a:fld>
             <a:endParaRPr lang="en-US"/>
           </a:p>
@@ -3020,6 +585,236 @@
   <p:cSld>
     <p:spTree>
       <p:nvGrpSpPr>
+        <p:cNvPr id="1" name="">
+          <a:extLst>
+            <a:ext uri="{FF2B5EF4-FFF2-40B4-BE49-F238E27FC236}">
+              <a16:creationId xmlns:a16="http://schemas.microsoft.com/office/drawing/2014/main" id="{10CED0C0-594D-AD6B-1AAB-0E0EDDE488E8}"/>
+            </a:ext>
+          </a:extLst>
+        </p:cNvPr>
+        <p:cNvGrpSpPr/>
+        <p:nvPr/>
+      </p:nvGrpSpPr>
+      <p:grpSpPr>
+        <a:xfrm>
+          <a:off x="0" y="0"/>
+          <a:ext cx="0" cy="0"/>
+          <a:chOff x="0" y="0"/>
+          <a:chExt cx="0" cy="0"/>
+        </a:xfrm>
+      </p:grpSpPr>
+      <p:sp>
+        <p:nvSpPr>
+          <p:cNvPr id="2" name="Slide Image Placeholder 1">
+            <a:extLst>
+              <a:ext uri="{FF2B5EF4-FFF2-40B4-BE49-F238E27FC236}">
+                <a16:creationId xmlns:a16="http://schemas.microsoft.com/office/drawing/2014/main" id="{5401743D-D3DC-A77E-922F-29C8658328F8}"/>
+              </a:ext>
+            </a:extLst>
+          </p:cNvPr>
+          <p:cNvSpPr>
+            <a:spLocks noGrp="1" noRot="1" noChangeAspect="1"/>
+          </p:cNvSpPr>
+          <p:nvPr>
+            <p:ph type="sldImg"/>
+          </p:nvPr>
+        </p:nvSpPr>
+        <p:spPr/>
+        <p:txBody>
+          <a:bodyPr/>
+          <a:lstStyle/>
+          <a:p>
+            <a:endParaRPr lang="en-US"/>
+          </a:p>
+        </p:txBody>
+      </p:sp>
+      <p:sp>
+        <p:nvSpPr>
+          <p:cNvPr id="3" name="Notes Placeholder 2">
+            <a:extLst>
+              <a:ext uri="{FF2B5EF4-FFF2-40B4-BE49-F238E27FC236}">
+                <a16:creationId xmlns:a16="http://schemas.microsoft.com/office/drawing/2014/main" id="{FB63A0CE-54D4-CCF7-737E-96547B1D4B82}"/>
+              </a:ext>
+            </a:extLst>
+          </p:cNvPr>
+          <p:cNvSpPr>
+            <a:spLocks noGrp="1"/>
+          </p:cNvSpPr>
+          <p:nvPr>
+            <p:ph type="body" idx="1"/>
+          </p:nvPr>
+        </p:nvSpPr>
+        <p:spPr/>
+        <p:txBody>
+          <a:bodyPr/>
+          <a:lstStyle/>
+          <a:p>
+            <a:endParaRPr lang="en-US" dirty="0"/>
+          </a:p>
+        </p:txBody>
+      </p:sp>
+      <p:sp>
+        <p:nvSpPr>
+          <p:cNvPr id="4" name="Slide Number Placeholder 3">
+            <a:extLst>
+              <a:ext uri="{FF2B5EF4-FFF2-40B4-BE49-F238E27FC236}">
+                <a16:creationId xmlns:a16="http://schemas.microsoft.com/office/drawing/2014/main" id="{88053D90-C47F-AB5F-FE7F-EDDFEF2775A9}"/>
+              </a:ext>
+            </a:extLst>
+          </p:cNvPr>
+          <p:cNvSpPr>
+            <a:spLocks noGrp="1"/>
+          </p:cNvSpPr>
+          <p:nvPr>
+            <p:ph type="sldNum" sz="quarter" idx="5"/>
+          </p:nvPr>
+        </p:nvSpPr>
+        <p:spPr/>
+        <p:txBody>
+          <a:bodyPr/>
+          <a:lstStyle/>
+          <a:p>
+            <a:fld id="{74180750-FA6C-4B62-A27E-0AEE5A77FE02}" type="slidenum">
+              <a:rPr lang="en-US" smtClean="0"/>
+              <a:t>12</a:t>
+            </a:fld>
+            <a:endParaRPr lang="en-US"/>
+          </a:p>
+        </p:txBody>
+      </p:sp>
+    </p:spTree>
+    <p:extLst>
+      <p:ext uri="{BB962C8B-B14F-4D97-AF65-F5344CB8AC3E}">
+        <p14:creationId xmlns:p14="http://schemas.microsoft.com/office/powerpoint/2010/main" val="3871047793"/>
+      </p:ext>
+    </p:extLst>
+  </p:cSld>
+  <p:clrMapOvr>
+    <a:masterClrMapping/>
+  </p:clrMapOvr>
+</p:notes>
+</file>
+
+<file path=ppt/notesSlides/notesSlide3.xml><?xml version="1.0" encoding="utf-8"?>
+<p:notes xmlns:a="http://schemas.openxmlformats.org/drawingml/2006/main" xmlns:r="http://schemas.openxmlformats.org/officeDocument/2006/relationships" xmlns:p="http://schemas.openxmlformats.org/presentationml/2006/main">
+  <p:cSld>
+    <p:spTree>
+      <p:nvGrpSpPr>
+        <p:cNvPr id="1" name="">
+          <a:extLst>
+            <a:ext uri="{FF2B5EF4-FFF2-40B4-BE49-F238E27FC236}">
+              <a16:creationId xmlns:a16="http://schemas.microsoft.com/office/drawing/2014/main" id="{14570585-199B-79AA-B53A-FE42F001B436}"/>
+            </a:ext>
+          </a:extLst>
+        </p:cNvPr>
+        <p:cNvGrpSpPr/>
+        <p:nvPr/>
+      </p:nvGrpSpPr>
+      <p:grpSpPr>
+        <a:xfrm>
+          <a:off x="0" y="0"/>
+          <a:ext cx="0" cy="0"/>
+          <a:chOff x="0" y="0"/>
+          <a:chExt cx="0" cy="0"/>
+        </a:xfrm>
+      </p:grpSpPr>
+      <p:sp>
+        <p:nvSpPr>
+          <p:cNvPr id="2" name="Slide Image Placeholder 1">
+            <a:extLst>
+              <a:ext uri="{FF2B5EF4-FFF2-40B4-BE49-F238E27FC236}">
+                <a16:creationId xmlns:a16="http://schemas.microsoft.com/office/drawing/2014/main" id="{318477ED-5566-01F5-6506-B6EFDAEEFBE1}"/>
+              </a:ext>
+            </a:extLst>
+          </p:cNvPr>
+          <p:cNvSpPr>
+            <a:spLocks noGrp="1" noRot="1" noChangeAspect="1"/>
+          </p:cNvSpPr>
+          <p:nvPr>
+            <p:ph type="sldImg"/>
+          </p:nvPr>
+        </p:nvSpPr>
+        <p:spPr/>
+        <p:txBody>
+          <a:bodyPr/>
+          <a:lstStyle/>
+          <a:p>
+            <a:endParaRPr lang="en-US"/>
+          </a:p>
+        </p:txBody>
+      </p:sp>
+      <p:sp>
+        <p:nvSpPr>
+          <p:cNvPr id="3" name="Notes Placeholder 2">
+            <a:extLst>
+              <a:ext uri="{FF2B5EF4-FFF2-40B4-BE49-F238E27FC236}">
+                <a16:creationId xmlns:a16="http://schemas.microsoft.com/office/drawing/2014/main" id="{CAFB4DEA-C250-819F-9D90-E496250E5B32}"/>
+              </a:ext>
+            </a:extLst>
+          </p:cNvPr>
+          <p:cNvSpPr>
+            <a:spLocks noGrp="1"/>
+          </p:cNvSpPr>
+          <p:nvPr>
+            <p:ph type="body" idx="1"/>
+          </p:nvPr>
+        </p:nvSpPr>
+        <p:spPr/>
+        <p:txBody>
+          <a:bodyPr/>
+          <a:lstStyle/>
+          <a:p>
+            <a:endParaRPr lang="en-US" dirty="0"/>
+          </a:p>
+        </p:txBody>
+      </p:sp>
+      <p:sp>
+        <p:nvSpPr>
+          <p:cNvPr id="4" name="Slide Number Placeholder 3">
+            <a:extLst>
+              <a:ext uri="{FF2B5EF4-FFF2-40B4-BE49-F238E27FC236}">
+                <a16:creationId xmlns:a16="http://schemas.microsoft.com/office/drawing/2014/main" id="{AF15CAD9-9363-368E-5754-060B100C69F9}"/>
+              </a:ext>
+            </a:extLst>
+          </p:cNvPr>
+          <p:cNvSpPr>
+            <a:spLocks noGrp="1"/>
+          </p:cNvSpPr>
+          <p:nvPr>
+            <p:ph type="sldNum" sz="quarter" idx="5"/>
+          </p:nvPr>
+        </p:nvSpPr>
+        <p:spPr/>
+        <p:txBody>
+          <a:bodyPr/>
+          <a:lstStyle/>
+          <a:p>
+            <a:fld id="{74180750-FA6C-4B62-A27E-0AEE5A77FE02}" type="slidenum">
+              <a:rPr lang="en-US" smtClean="0"/>
+              <a:t>13</a:t>
+            </a:fld>
+            <a:endParaRPr lang="en-US"/>
+          </a:p>
+        </p:txBody>
+      </p:sp>
+    </p:spTree>
+    <p:extLst>
+      <p:ext uri="{BB962C8B-B14F-4D97-AF65-F5344CB8AC3E}">
+        <p14:creationId xmlns:p14="http://schemas.microsoft.com/office/powerpoint/2010/main" val="4284545273"/>
+      </p:ext>
+    </p:extLst>
+  </p:cSld>
+  <p:clrMapOvr>
+    <a:masterClrMapping/>
+  </p:clrMapOvr>
+</p:notes>
+</file>
+
+<file path=ppt/notesSlides/notesSlide4.xml><?xml version="1.0" encoding="utf-8"?>
+<p:notes xmlns:a="http://schemas.openxmlformats.org/drawingml/2006/main" xmlns:r="http://schemas.openxmlformats.org/officeDocument/2006/relationships" xmlns:p="http://schemas.openxmlformats.org/presentationml/2006/main">
+  <p:cSld>
+    <p:spTree>
+      <p:nvGrpSpPr>
         <p:cNvPr id="1" name=""/>
         <p:cNvGrpSpPr/>
         <p:nvPr/>
@@ -3043,6 +838,13 @@
           </p:nvPr>
         </p:nvSpPr>
         <p:spPr/>
+        <p:txBody>
+          <a:bodyPr/>
+          <a:lstStyle/>
+          <a:p>
+            <a:endParaRPr lang="en-US"/>
+          </a:p>
+        </p:txBody>
       </p:sp>
       <p:sp>
         <p:nvSpPr>
@@ -3080,7 +882,7 @@
           <a:p>
             <a:fld id="{74180750-FA6C-4B62-A27E-0AEE5A77FE02}" type="slidenum">
               <a:rPr lang="en-US" smtClean="0"/>
-              <a:t>9</a:t>
+              <a:t>17</a:t>
             </a:fld>
             <a:endParaRPr lang="en-US"/>
           </a:p>
@@ -3090,6 +892,526 @@
     <p:extLst>
       <p:ext uri="{BB962C8B-B14F-4D97-AF65-F5344CB8AC3E}">
         <p14:creationId xmlns:p14="http://schemas.microsoft.com/office/powerpoint/2010/main" val="4279810021"/>
+      </p:ext>
+    </p:extLst>
+  </p:cSld>
+  <p:clrMapOvr>
+    <a:masterClrMapping/>
+  </p:clrMapOvr>
+</p:notes>
+</file>
+
+<file path=ppt/notesSlides/notesSlide5.xml><?xml version="1.0" encoding="utf-8"?>
+<p:notes xmlns:a="http://schemas.openxmlformats.org/drawingml/2006/main" xmlns:r="http://schemas.openxmlformats.org/officeDocument/2006/relationships" xmlns:p="http://schemas.openxmlformats.org/presentationml/2006/main">
+  <p:cSld>
+    <p:spTree>
+      <p:nvGrpSpPr>
+        <p:cNvPr id="1" name="">
+          <a:extLst>
+            <a:ext uri="{FF2B5EF4-FFF2-40B4-BE49-F238E27FC236}">
+              <a16:creationId xmlns:a16="http://schemas.microsoft.com/office/drawing/2014/main" id="{48545CF1-E897-6B2F-4523-70D3E62309A8}"/>
+            </a:ext>
+          </a:extLst>
+        </p:cNvPr>
+        <p:cNvGrpSpPr/>
+        <p:nvPr/>
+      </p:nvGrpSpPr>
+      <p:grpSpPr>
+        <a:xfrm>
+          <a:off x="0" y="0"/>
+          <a:ext cx="0" cy="0"/>
+          <a:chOff x="0" y="0"/>
+          <a:chExt cx="0" cy="0"/>
+        </a:xfrm>
+      </p:grpSpPr>
+      <p:sp>
+        <p:nvSpPr>
+          <p:cNvPr id="2" name="Slide Image Placeholder 1">
+            <a:extLst>
+              <a:ext uri="{FF2B5EF4-FFF2-40B4-BE49-F238E27FC236}">
+                <a16:creationId xmlns:a16="http://schemas.microsoft.com/office/drawing/2014/main" id="{B6276CAA-4DE4-2550-EA74-2A2A72D344A2}"/>
+              </a:ext>
+            </a:extLst>
+          </p:cNvPr>
+          <p:cNvSpPr>
+            <a:spLocks noGrp="1" noRot="1" noChangeAspect="1"/>
+          </p:cNvSpPr>
+          <p:nvPr>
+            <p:ph type="sldImg"/>
+          </p:nvPr>
+        </p:nvSpPr>
+        <p:spPr/>
+        <p:txBody>
+          <a:bodyPr/>
+          <a:lstStyle/>
+          <a:p>
+            <a:endParaRPr lang="en-US"/>
+          </a:p>
+        </p:txBody>
+      </p:sp>
+      <p:sp>
+        <p:nvSpPr>
+          <p:cNvPr id="3" name="Notes Placeholder 2">
+            <a:extLst>
+              <a:ext uri="{FF2B5EF4-FFF2-40B4-BE49-F238E27FC236}">
+                <a16:creationId xmlns:a16="http://schemas.microsoft.com/office/drawing/2014/main" id="{1963F645-12A9-0EFC-FF35-9409618AA998}"/>
+              </a:ext>
+            </a:extLst>
+          </p:cNvPr>
+          <p:cNvSpPr>
+            <a:spLocks noGrp="1"/>
+          </p:cNvSpPr>
+          <p:nvPr>
+            <p:ph type="body" idx="1"/>
+          </p:nvPr>
+        </p:nvSpPr>
+        <p:spPr/>
+        <p:txBody>
+          <a:bodyPr/>
+          <a:lstStyle/>
+          <a:p>
+            <a:endParaRPr lang="en-US" dirty="0"/>
+          </a:p>
+        </p:txBody>
+      </p:sp>
+      <p:sp>
+        <p:nvSpPr>
+          <p:cNvPr id="4" name="Slide Number Placeholder 3">
+            <a:extLst>
+              <a:ext uri="{FF2B5EF4-FFF2-40B4-BE49-F238E27FC236}">
+                <a16:creationId xmlns:a16="http://schemas.microsoft.com/office/drawing/2014/main" id="{2E97976C-C953-BAE6-DB4A-974F8910535B}"/>
+              </a:ext>
+            </a:extLst>
+          </p:cNvPr>
+          <p:cNvSpPr>
+            <a:spLocks noGrp="1"/>
+          </p:cNvSpPr>
+          <p:nvPr>
+            <p:ph type="sldNum" sz="quarter" idx="5"/>
+          </p:nvPr>
+        </p:nvSpPr>
+        <p:spPr/>
+        <p:txBody>
+          <a:bodyPr/>
+          <a:lstStyle/>
+          <a:p>
+            <a:fld id="{74180750-FA6C-4B62-A27E-0AEE5A77FE02}" type="slidenum">
+              <a:rPr lang="en-US" smtClean="0"/>
+              <a:t>18</a:t>
+            </a:fld>
+            <a:endParaRPr lang="en-US"/>
+          </a:p>
+        </p:txBody>
+      </p:sp>
+    </p:spTree>
+    <p:extLst>
+      <p:ext uri="{BB962C8B-B14F-4D97-AF65-F5344CB8AC3E}">
+        <p14:creationId xmlns:p14="http://schemas.microsoft.com/office/powerpoint/2010/main" val="2256020481"/>
+      </p:ext>
+    </p:extLst>
+  </p:cSld>
+  <p:clrMapOvr>
+    <a:masterClrMapping/>
+  </p:clrMapOvr>
+</p:notes>
+</file>
+
+<file path=ppt/notesSlides/notesSlide6.xml><?xml version="1.0" encoding="utf-8"?>
+<p:notes xmlns:a="http://schemas.openxmlformats.org/drawingml/2006/main" xmlns:r="http://schemas.openxmlformats.org/officeDocument/2006/relationships" xmlns:p="http://schemas.openxmlformats.org/presentationml/2006/main">
+  <p:cSld>
+    <p:spTree>
+      <p:nvGrpSpPr>
+        <p:cNvPr id="1" name="">
+          <a:extLst>
+            <a:ext uri="{FF2B5EF4-FFF2-40B4-BE49-F238E27FC236}">
+              <a16:creationId xmlns:a16="http://schemas.microsoft.com/office/drawing/2014/main" id="{98A2C5E7-9F2B-490A-D94F-8D70754E8EA6}"/>
+            </a:ext>
+          </a:extLst>
+        </p:cNvPr>
+        <p:cNvGrpSpPr/>
+        <p:nvPr/>
+      </p:nvGrpSpPr>
+      <p:grpSpPr>
+        <a:xfrm>
+          <a:off x="0" y="0"/>
+          <a:ext cx="0" cy="0"/>
+          <a:chOff x="0" y="0"/>
+          <a:chExt cx="0" cy="0"/>
+        </a:xfrm>
+      </p:grpSpPr>
+      <p:sp>
+        <p:nvSpPr>
+          <p:cNvPr id="2" name="Slide Image Placeholder 1">
+            <a:extLst>
+              <a:ext uri="{FF2B5EF4-FFF2-40B4-BE49-F238E27FC236}">
+                <a16:creationId xmlns:a16="http://schemas.microsoft.com/office/drawing/2014/main" id="{3F5ADEE9-69A7-3A8C-0404-849CD9678474}"/>
+              </a:ext>
+            </a:extLst>
+          </p:cNvPr>
+          <p:cNvSpPr>
+            <a:spLocks noGrp="1" noRot="1" noChangeAspect="1"/>
+          </p:cNvSpPr>
+          <p:nvPr>
+            <p:ph type="sldImg"/>
+          </p:nvPr>
+        </p:nvSpPr>
+        <p:spPr/>
+        <p:txBody>
+          <a:bodyPr/>
+          <a:lstStyle/>
+          <a:p>
+            <a:endParaRPr lang="en-US"/>
+          </a:p>
+        </p:txBody>
+      </p:sp>
+      <p:sp>
+        <p:nvSpPr>
+          <p:cNvPr id="3" name="Notes Placeholder 2">
+            <a:extLst>
+              <a:ext uri="{FF2B5EF4-FFF2-40B4-BE49-F238E27FC236}">
+                <a16:creationId xmlns:a16="http://schemas.microsoft.com/office/drawing/2014/main" id="{1696280D-F1C5-9264-5FD4-31D2E4A09B15}"/>
+              </a:ext>
+            </a:extLst>
+          </p:cNvPr>
+          <p:cNvSpPr>
+            <a:spLocks noGrp="1"/>
+          </p:cNvSpPr>
+          <p:nvPr>
+            <p:ph type="body" idx="1"/>
+          </p:nvPr>
+        </p:nvSpPr>
+        <p:spPr/>
+        <p:txBody>
+          <a:bodyPr/>
+          <a:lstStyle/>
+          <a:p>
+            <a:endParaRPr lang="en-US" dirty="0"/>
+          </a:p>
+        </p:txBody>
+      </p:sp>
+      <p:sp>
+        <p:nvSpPr>
+          <p:cNvPr id="4" name="Slide Number Placeholder 3">
+            <a:extLst>
+              <a:ext uri="{FF2B5EF4-FFF2-40B4-BE49-F238E27FC236}">
+                <a16:creationId xmlns:a16="http://schemas.microsoft.com/office/drawing/2014/main" id="{DF69F398-F8D1-63E8-7F40-CE7F906F6666}"/>
+              </a:ext>
+            </a:extLst>
+          </p:cNvPr>
+          <p:cNvSpPr>
+            <a:spLocks noGrp="1"/>
+          </p:cNvSpPr>
+          <p:nvPr>
+            <p:ph type="sldNum" sz="quarter" idx="5"/>
+          </p:nvPr>
+        </p:nvSpPr>
+        <p:spPr/>
+        <p:txBody>
+          <a:bodyPr/>
+          <a:lstStyle/>
+          <a:p>
+            <a:fld id="{74180750-FA6C-4B62-A27E-0AEE5A77FE02}" type="slidenum">
+              <a:rPr lang="en-US" smtClean="0"/>
+              <a:t>19</a:t>
+            </a:fld>
+            <a:endParaRPr lang="en-US"/>
+          </a:p>
+        </p:txBody>
+      </p:sp>
+    </p:spTree>
+    <p:extLst>
+      <p:ext uri="{BB962C8B-B14F-4D97-AF65-F5344CB8AC3E}">
+        <p14:creationId xmlns:p14="http://schemas.microsoft.com/office/powerpoint/2010/main" val="845664708"/>
+      </p:ext>
+    </p:extLst>
+  </p:cSld>
+  <p:clrMapOvr>
+    <a:masterClrMapping/>
+  </p:clrMapOvr>
+</p:notes>
+</file>
+
+<file path=ppt/notesSlides/notesSlide7.xml><?xml version="1.0" encoding="utf-8"?>
+<p:notes xmlns:a="http://schemas.openxmlformats.org/drawingml/2006/main" xmlns:r="http://schemas.openxmlformats.org/officeDocument/2006/relationships" xmlns:p="http://schemas.openxmlformats.org/presentationml/2006/main">
+  <p:cSld>
+    <p:spTree>
+      <p:nvGrpSpPr>
+        <p:cNvPr id="1" name=""/>
+        <p:cNvGrpSpPr/>
+        <p:nvPr/>
+      </p:nvGrpSpPr>
+      <p:grpSpPr>
+        <a:xfrm>
+          <a:off x="0" y="0"/>
+          <a:ext cx="0" cy="0"/>
+          <a:chOff x="0" y="0"/>
+          <a:chExt cx="0" cy="0"/>
+        </a:xfrm>
+      </p:grpSpPr>
+      <p:sp>
+        <p:nvSpPr>
+          <p:cNvPr id="2" name="Slide Image Placeholder 1"/>
+          <p:cNvSpPr>
+            <a:spLocks noGrp="1" noRot="1" noChangeAspect="1"/>
+          </p:cNvSpPr>
+          <p:nvPr>
+            <p:ph type="sldImg"/>
+          </p:nvPr>
+        </p:nvSpPr>
+        <p:spPr/>
+        <p:txBody>
+          <a:bodyPr/>
+          <a:lstStyle/>
+          <a:p>
+            <a:endParaRPr lang="en-US"/>
+          </a:p>
+        </p:txBody>
+      </p:sp>
+      <p:sp>
+        <p:nvSpPr>
+          <p:cNvPr id="3" name="Notes Placeholder 2"/>
+          <p:cNvSpPr>
+            <a:spLocks noGrp="1"/>
+          </p:cNvSpPr>
+          <p:nvPr>
+            <p:ph type="body" idx="1"/>
+          </p:nvPr>
+        </p:nvSpPr>
+        <p:spPr/>
+        <p:txBody>
+          <a:bodyPr/>
+          <a:lstStyle/>
+          <a:p>
+            <a:endParaRPr lang="en-US" dirty="0"/>
+          </a:p>
+        </p:txBody>
+      </p:sp>
+      <p:sp>
+        <p:nvSpPr>
+          <p:cNvPr id="4" name="Slide Number Placeholder 3"/>
+          <p:cNvSpPr>
+            <a:spLocks noGrp="1"/>
+          </p:cNvSpPr>
+          <p:nvPr>
+            <p:ph type="sldNum" sz="quarter" idx="5"/>
+          </p:nvPr>
+        </p:nvSpPr>
+        <p:spPr/>
+        <p:txBody>
+          <a:bodyPr/>
+          <a:lstStyle/>
+          <a:p>
+            <a:fld id="{74180750-FA6C-4B62-A27E-0AEE5A77FE02}" type="slidenum">
+              <a:rPr lang="en-US" smtClean="0"/>
+              <a:t>20</a:t>
+            </a:fld>
+            <a:endParaRPr lang="en-US"/>
+          </a:p>
+        </p:txBody>
+      </p:sp>
+    </p:spTree>
+    <p:extLst>
+      <p:ext uri="{BB962C8B-B14F-4D97-AF65-F5344CB8AC3E}">
+        <p14:creationId xmlns:p14="http://schemas.microsoft.com/office/powerpoint/2010/main" val="3808407428"/>
+      </p:ext>
+    </p:extLst>
+  </p:cSld>
+  <p:clrMapOvr>
+    <a:masterClrMapping/>
+  </p:clrMapOvr>
+</p:notes>
+</file>
+
+<file path=ppt/notesSlides/notesSlide8.xml><?xml version="1.0" encoding="utf-8"?>
+<p:notes xmlns:a="http://schemas.openxmlformats.org/drawingml/2006/main" xmlns:r="http://schemas.openxmlformats.org/officeDocument/2006/relationships" xmlns:p="http://schemas.openxmlformats.org/presentationml/2006/main">
+  <p:cSld>
+    <p:spTree>
+      <p:nvGrpSpPr>
+        <p:cNvPr id="1" name="">
+          <a:extLst>
+            <a:ext uri="{FF2B5EF4-FFF2-40B4-BE49-F238E27FC236}">
+              <a16:creationId xmlns:a16="http://schemas.microsoft.com/office/drawing/2014/main" id="{1B8AAB93-17BB-BF8C-2E83-28E0B4065725}"/>
+            </a:ext>
+          </a:extLst>
+        </p:cNvPr>
+        <p:cNvGrpSpPr/>
+        <p:nvPr/>
+      </p:nvGrpSpPr>
+      <p:grpSpPr>
+        <a:xfrm>
+          <a:off x="0" y="0"/>
+          <a:ext cx="0" cy="0"/>
+          <a:chOff x="0" y="0"/>
+          <a:chExt cx="0" cy="0"/>
+        </a:xfrm>
+      </p:grpSpPr>
+      <p:sp>
+        <p:nvSpPr>
+          <p:cNvPr id="2" name="Slide Image Placeholder 1">
+            <a:extLst>
+              <a:ext uri="{FF2B5EF4-FFF2-40B4-BE49-F238E27FC236}">
+                <a16:creationId xmlns:a16="http://schemas.microsoft.com/office/drawing/2014/main" id="{B6367799-8E92-4239-665D-53401C985160}"/>
+              </a:ext>
+            </a:extLst>
+          </p:cNvPr>
+          <p:cNvSpPr>
+            <a:spLocks noGrp="1" noRot="1" noChangeAspect="1"/>
+          </p:cNvSpPr>
+          <p:nvPr>
+            <p:ph type="sldImg"/>
+          </p:nvPr>
+        </p:nvSpPr>
+        <p:spPr/>
+        <p:txBody>
+          <a:bodyPr/>
+          <a:lstStyle/>
+          <a:p>
+            <a:endParaRPr lang="en-US"/>
+          </a:p>
+        </p:txBody>
+      </p:sp>
+      <p:sp>
+        <p:nvSpPr>
+          <p:cNvPr id="3" name="Notes Placeholder 2">
+            <a:extLst>
+              <a:ext uri="{FF2B5EF4-FFF2-40B4-BE49-F238E27FC236}">
+                <a16:creationId xmlns:a16="http://schemas.microsoft.com/office/drawing/2014/main" id="{B27E28F0-DC8E-50B8-8768-49BE117D0E86}"/>
+              </a:ext>
+            </a:extLst>
+          </p:cNvPr>
+          <p:cNvSpPr>
+            <a:spLocks noGrp="1"/>
+          </p:cNvSpPr>
+          <p:nvPr>
+            <p:ph type="body" idx="1"/>
+          </p:nvPr>
+        </p:nvSpPr>
+        <p:spPr/>
+        <p:txBody>
+          <a:bodyPr/>
+          <a:lstStyle/>
+          <a:p>
+            <a:endParaRPr lang="en-US" dirty="0"/>
+          </a:p>
+        </p:txBody>
+      </p:sp>
+      <p:sp>
+        <p:nvSpPr>
+          <p:cNvPr id="4" name="Slide Number Placeholder 3">
+            <a:extLst>
+              <a:ext uri="{FF2B5EF4-FFF2-40B4-BE49-F238E27FC236}">
+                <a16:creationId xmlns:a16="http://schemas.microsoft.com/office/drawing/2014/main" id="{803EBB59-74EC-BCA7-58B5-E701A4C4769A}"/>
+              </a:ext>
+            </a:extLst>
+          </p:cNvPr>
+          <p:cNvSpPr>
+            <a:spLocks noGrp="1"/>
+          </p:cNvSpPr>
+          <p:nvPr>
+            <p:ph type="sldNum" sz="quarter" idx="5"/>
+          </p:nvPr>
+        </p:nvSpPr>
+        <p:spPr/>
+        <p:txBody>
+          <a:bodyPr/>
+          <a:lstStyle/>
+          <a:p>
+            <a:fld id="{74180750-FA6C-4B62-A27E-0AEE5A77FE02}" type="slidenum">
+              <a:rPr lang="en-US" smtClean="0"/>
+              <a:t>21</a:t>
+            </a:fld>
+            <a:endParaRPr lang="en-US"/>
+          </a:p>
+        </p:txBody>
+      </p:sp>
+    </p:spTree>
+    <p:extLst>
+      <p:ext uri="{BB962C8B-B14F-4D97-AF65-F5344CB8AC3E}">
+        <p14:creationId xmlns:p14="http://schemas.microsoft.com/office/powerpoint/2010/main" val="1232789253"/>
+      </p:ext>
+    </p:extLst>
+  </p:cSld>
+  <p:clrMapOvr>
+    <a:masterClrMapping/>
+  </p:clrMapOvr>
+</p:notes>
+</file>
+
+<file path=ppt/notesSlides/notesSlide9.xml><?xml version="1.0" encoding="utf-8"?>
+<p:notes xmlns:a="http://schemas.openxmlformats.org/drawingml/2006/main" xmlns:r="http://schemas.openxmlformats.org/officeDocument/2006/relationships" xmlns:p="http://schemas.openxmlformats.org/presentationml/2006/main">
+  <p:cSld>
+    <p:spTree>
+      <p:nvGrpSpPr>
+        <p:cNvPr id="1" name=""/>
+        <p:cNvGrpSpPr/>
+        <p:nvPr/>
+      </p:nvGrpSpPr>
+      <p:grpSpPr>
+        <a:xfrm>
+          <a:off x="0" y="0"/>
+          <a:ext cx="0" cy="0"/>
+          <a:chOff x="0" y="0"/>
+          <a:chExt cx="0" cy="0"/>
+        </a:xfrm>
+      </p:grpSpPr>
+      <p:sp>
+        <p:nvSpPr>
+          <p:cNvPr id="2" name="Slide Image Placeholder 1"/>
+          <p:cNvSpPr>
+            <a:spLocks noGrp="1" noRot="1" noChangeAspect="1"/>
+          </p:cNvSpPr>
+          <p:nvPr>
+            <p:ph type="sldImg"/>
+          </p:nvPr>
+        </p:nvSpPr>
+        <p:spPr/>
+      </p:sp>
+      <p:sp>
+        <p:nvSpPr>
+          <p:cNvPr id="3" name="Notes Placeholder 2"/>
+          <p:cNvSpPr>
+            <a:spLocks noGrp="1"/>
+          </p:cNvSpPr>
+          <p:nvPr>
+            <p:ph type="body" idx="1"/>
+          </p:nvPr>
+        </p:nvSpPr>
+        <p:spPr/>
+        <p:txBody>
+          <a:bodyPr/>
+          <a:lstStyle/>
+          <a:p>
+            <a:endParaRPr lang="en-US" dirty="0"/>
+          </a:p>
+        </p:txBody>
+      </p:sp>
+      <p:sp>
+        <p:nvSpPr>
+          <p:cNvPr id="4" name="Slide Number Placeholder 3"/>
+          <p:cNvSpPr>
+            <a:spLocks noGrp="1"/>
+          </p:cNvSpPr>
+          <p:nvPr>
+            <p:ph type="sldNum" sz="quarter" idx="5"/>
+          </p:nvPr>
+        </p:nvSpPr>
+        <p:spPr/>
+        <p:txBody>
+          <a:bodyPr/>
+          <a:lstStyle/>
+          <a:p>
+            <a:fld id="{74180750-FA6C-4B62-A27E-0AEE5A77FE02}" type="slidenum">
+              <a:rPr lang="en-US" smtClean="0"/>
+              <a:t>25</a:t>
+            </a:fld>
+            <a:endParaRPr lang="en-US"/>
+          </a:p>
+        </p:txBody>
+      </p:sp>
+    </p:spTree>
+    <p:extLst>
+      <p:ext uri="{BB962C8B-B14F-4D97-AF65-F5344CB8AC3E}">
+        <p14:creationId xmlns:p14="http://schemas.microsoft.com/office/powerpoint/2010/main" val="4146203184"/>
       </p:ext>
     </p:extLst>
   </p:cSld>
@@ -3297,7 +1619,7 @@
                   </a:prstClr>
                 </a:solidFill>
               </a:rPr>
-              <a:t>1/6/2026</a:t>
+              <a:t>3/26/2026</a:t>
             </a:fld>
             <a:endParaRPr lang="en-US">
               <a:solidFill>
@@ -4138,7 +2460,7 @@
           <a:p>
             <a:fld id="{A1CDCD78-8B7B-4976-8AE0-648AF1DF3CEB}" type="datetime1">
               <a:rPr lang="en-US" smtClean="0"/>
-              <a:t>1/6/2026</a:t>
+              <a:t>3/26/2026</a:t>
             </a:fld>
             <a:endParaRPr lang="en-US"/>
           </a:p>
@@ -4342,6 +2664,13 @@
             <a:schemeClr val="lt1"/>
           </a:fontRef>
         </p:style>
+        <p:txBody>
+          <a:bodyPr/>
+          <a:lstStyle/>
+          <a:p>
+            <a:endParaRPr lang="en-US"/>
+          </a:p>
+        </p:txBody>
       </p:sp>
     </p:spTree>
     <p:extLst>
@@ -4569,7 +2898,7 @@
                 </a:spcAft>
                 <a:defRPr/>
               </a:pPr>
-              <a:t>1/6/2026</a:t>
+              <a:t>3/26/2026</a:t>
             </a:fld>
             <a:endParaRPr lang="en-US">
               <a:solidFill>
@@ -5321,7 +3650,7 @@
               <a:rPr lang="en-GB" sz="3600" dirty="0">
                 <a:latin typeface="Aptos Narrow" panose="020B0004020202020204" pitchFamily="34" charset="0"/>
               </a:rPr>
-              <a:t>ABC Project</a:t>
+              <a:t>G&amp; G Revamp</a:t>
             </a:r>
           </a:p>
           <a:p>
@@ -5414,7 +3743,13 @@
   <p:cSld>
     <p:spTree>
       <p:nvGrpSpPr>
-        <p:cNvPr id="1" name=""/>
+        <p:cNvPr id="1" name="">
+          <a:extLst>
+            <a:ext uri="{FF2B5EF4-FFF2-40B4-BE49-F238E27FC236}">
+              <a16:creationId xmlns:a16="http://schemas.microsoft.com/office/drawing/2014/main" id="{E27539CC-91C8-CE6C-7864-AD93F8C5DAA9}"/>
+            </a:ext>
+          </a:extLst>
+        </p:cNvPr>
         <p:cNvGrpSpPr/>
         <p:nvPr/>
       </p:nvGrpSpPr>
@@ -5431,7 +3766,7 @@
           <p:cNvPr id="2" name="Slide Number Placeholder 1">
             <a:extLst>
               <a:ext uri="{FF2B5EF4-FFF2-40B4-BE49-F238E27FC236}">
-                <a16:creationId xmlns:a16="http://schemas.microsoft.com/office/drawing/2014/main" id="{EFD5D123-49E2-F0CE-4FE5-17CB1B0FC8BE}"/>
+                <a16:creationId xmlns:a16="http://schemas.microsoft.com/office/drawing/2014/main" id="{BDD309A1-B26D-0A21-2A99-3B98EE7BAC3F}"/>
               </a:ext>
             </a:extLst>
           </p:cNvPr>
@@ -5460,7 +3795,7 @@
           <p:cNvPr id="3" name="Text Placeholder 2">
             <a:extLst>
               <a:ext uri="{FF2B5EF4-FFF2-40B4-BE49-F238E27FC236}">
-                <a16:creationId xmlns:a16="http://schemas.microsoft.com/office/drawing/2014/main" id="{1CEB25EF-88E3-154B-60A8-18D70F3CBC48}"/>
+                <a16:creationId xmlns:a16="http://schemas.microsoft.com/office/drawing/2014/main" id="{04E5F536-B441-9EDC-BAFC-BBBCA5922233}"/>
               </a:ext>
             </a:extLst>
           </p:cNvPr>
@@ -5478,17 +3813,17 @@
           <a:p>
             <a:r>
               <a:rPr lang="en-US" dirty="0"/>
-              <a:t>Error Handling</a:t>
-            </a:r>
-          </a:p>
-        </p:txBody>
-      </p:sp>
-      <p:sp>
-        <p:nvSpPr>
-          <p:cNvPr id="5" name="TextBox 4">
-            <a:extLst>
-              <a:ext uri="{FF2B5EF4-FFF2-40B4-BE49-F238E27FC236}">
-                <a16:creationId xmlns:a16="http://schemas.microsoft.com/office/drawing/2014/main" id="{D616CE12-C861-B003-EC41-2E1FA93E7570}"/>
+              <a:t>Scope</a:t>
+            </a:r>
+          </a:p>
+        </p:txBody>
+      </p:sp>
+      <p:sp>
+        <p:nvSpPr>
+          <p:cNvPr id="6" name="TextBox 5">
+            <a:extLst>
+              <a:ext uri="{FF2B5EF4-FFF2-40B4-BE49-F238E27FC236}">
+                <a16:creationId xmlns:a16="http://schemas.microsoft.com/office/drawing/2014/main" id="{B2E4EF5A-7DEE-214D-A7F2-C9918FA244D8}"/>
               </a:ext>
             </a:extLst>
           </p:cNvPr>
@@ -5497,8 +3832,8 @@
         </p:nvSpPr>
         <p:spPr>
           <a:xfrm>
-            <a:off x="81002" y="914400"/>
-            <a:ext cx="9062998" cy="523220"/>
+            <a:off x="148281" y="930876"/>
+            <a:ext cx="11434119" cy="5478423"/>
           </a:xfrm>
           <a:prstGeom prst="rect">
             <a:avLst/>
@@ -5511,25 +3846,232 @@
           </a:bodyPr>
           <a:lstStyle/>
           <a:p>
-            <a:r>
-              <a:rPr lang="en-US" sz="1400" dirty="0"/>
-              <a:t>Describe error handling strategy and standard responses across all layers. Include a </a:t>
-            </a:r>
+            <a:pPr>
+              <a:lnSpc>
+                <a:spcPct val="150000"/>
+              </a:lnSpc>
+            </a:pPr>
             <a:r>
               <a:rPr lang="en-US" sz="1400" b="1" dirty="0"/>
-              <a:t>sequence diagram </a:t>
-            </a:r>
-            <a:r>
-              <a:rPr lang="en-US" sz="1400" dirty="0"/>
-              <a:t>showing the flow of errors through detection, logging, retry/fallback, and alerting.</a:t>
-            </a:r>
+              <a:t>Out-Scope</a:t>
+            </a:r>
+          </a:p>
+          <a:p>
+            <a:pPr marL="285750" indent="-285750">
+              <a:lnSpc>
+                <a:spcPct val="150000"/>
+              </a:lnSpc>
+              <a:buFont typeface="Wingdings" panose="05000000000000000000" pitchFamily="2" charset="2"/>
+              <a:buChar char="Ø"/>
+            </a:pPr>
+            <a:r>
+              <a:rPr lang="en-US" sz="1400" dirty="0"/>
+              <a:t>Only selected table will archive and archive data can’t fetch from system and require manual query support for old data fetching or report generation.</a:t>
+            </a:r>
+          </a:p>
+          <a:p>
+            <a:pPr marL="285750" indent="-285750">
+              <a:lnSpc>
+                <a:spcPct val="150000"/>
+              </a:lnSpc>
+              <a:buFont typeface="Wingdings" panose="05000000000000000000" pitchFamily="2" charset="2"/>
+              <a:buChar char="Ø"/>
+            </a:pPr>
+            <a:r>
+              <a:rPr lang="en-US" sz="1400" dirty="0"/>
+              <a:t>Only 1 year data will left at original G&amp;G database for processing.</a:t>
+            </a:r>
+          </a:p>
+          <a:p>
+            <a:pPr marL="285750" indent="-285750">
+              <a:lnSpc>
+                <a:spcPct val="150000"/>
+              </a:lnSpc>
+              <a:buFont typeface="Wingdings" panose="05000000000000000000" pitchFamily="2" charset="2"/>
+              <a:buChar char="Ø"/>
+            </a:pPr>
+            <a:r>
+              <a:rPr lang="en-US" sz="1400" dirty="0"/>
+              <a:t>Only retry service will apply for sale operations at G&amp;G Bill ,subscription , </a:t>
+            </a:r>
+            <a:r>
+              <a:rPr lang="en-US" sz="1400" dirty="0" err="1"/>
+              <a:t>Eservices</a:t>
+            </a:r>
+            <a:r>
+              <a:rPr lang="en-US" sz="1400" dirty="0"/>
+              <a:t> and </a:t>
+            </a:r>
+            <a:r>
+              <a:rPr lang="en-US" sz="1400" dirty="0" err="1"/>
+              <a:t>yps</a:t>
+            </a:r>
+            <a:r>
+              <a:rPr lang="en-US" sz="1400" dirty="0"/>
+              <a:t> service.</a:t>
+            </a:r>
+          </a:p>
+          <a:p>
+            <a:pPr marL="285750" indent="-285750">
+              <a:lnSpc>
+                <a:spcPct val="150000"/>
+              </a:lnSpc>
+              <a:buFont typeface="Wingdings" panose="05000000000000000000" pitchFamily="2" charset="2"/>
+              <a:buChar char="Ø"/>
+            </a:pPr>
+            <a:r>
+              <a:rPr lang="en-US" sz="1400" dirty="0"/>
+              <a:t>Only code optimization &amp; adding Redia and Rabbit MQ will apply at G&amp;G Services for processing faster &amp; prevent sale operation fail or time out error but this can’t help unsuccessful top up or time out issues at  telecom side .</a:t>
+            </a:r>
+          </a:p>
+          <a:p>
+            <a:pPr marL="285750" indent="-285750">
+              <a:lnSpc>
+                <a:spcPct val="150000"/>
+              </a:lnSpc>
+              <a:buFont typeface="Wingdings" panose="05000000000000000000" pitchFamily="2" charset="2"/>
+              <a:buChar char="Ø"/>
+            </a:pPr>
+            <a:r>
+              <a:rPr lang="en-US" sz="1400" dirty="0"/>
+              <a:t>Non-functional requirements not explicitly covered (e.g., hardware upgrades outside the current architecture).</a:t>
+            </a:r>
+          </a:p>
+          <a:p>
+            <a:pPr marL="285750" indent="-285750">
+              <a:lnSpc>
+                <a:spcPct val="150000"/>
+              </a:lnSpc>
+              <a:buFont typeface="Wingdings" panose="05000000000000000000" pitchFamily="2" charset="2"/>
+              <a:buChar char="Ø"/>
+            </a:pPr>
+            <a:r>
+              <a:rPr lang="en-US" sz="1400" dirty="0"/>
+              <a:t>Any future enhancements or modules beyond the current project scope.</a:t>
+            </a:r>
+          </a:p>
+          <a:p>
+            <a:pPr marL="285750" indent="-285750">
+              <a:lnSpc>
+                <a:spcPct val="150000"/>
+              </a:lnSpc>
+              <a:buFont typeface="Wingdings" panose="05000000000000000000" pitchFamily="2" charset="2"/>
+              <a:buChar char="Ø"/>
+            </a:pPr>
+            <a:r>
+              <a:rPr lang="en-US" sz="1400" dirty="0"/>
+              <a:t>In data Sync , sync process flow will faster than current set up but data will not reach real time .</a:t>
+            </a:r>
+          </a:p>
+          <a:p>
+            <a:pPr marL="285750" indent="-285750">
+              <a:lnSpc>
+                <a:spcPct val="150000"/>
+              </a:lnSpc>
+              <a:buFont typeface="Wingdings" panose="05000000000000000000" pitchFamily="2" charset="2"/>
+              <a:buChar char="Ø"/>
+            </a:pPr>
+            <a:r>
+              <a:rPr lang="en-US" sz="1400" dirty="0"/>
+              <a:t>YPS service side incomplete data may fail at </a:t>
+            </a:r>
+            <a:r>
+              <a:rPr lang="en-US" sz="1400" dirty="0" err="1"/>
+              <a:t>g&amp;g</a:t>
+            </a:r>
+            <a:r>
+              <a:rPr lang="en-US" sz="1400" dirty="0"/>
+              <a:t> side and this will not cover by system and require manual upload by align with  </a:t>
+            </a:r>
+            <a:r>
+              <a:rPr lang="en-US" sz="1400" dirty="0" err="1"/>
+              <a:t>yps</a:t>
+            </a:r>
+            <a:r>
+              <a:rPr lang="en-US" sz="1400" dirty="0"/>
+              <a:t> side.</a:t>
+            </a:r>
+          </a:p>
+          <a:p>
+            <a:pPr marL="285750" indent="-285750">
+              <a:lnSpc>
+                <a:spcPct val="150000"/>
+              </a:lnSpc>
+              <a:buFont typeface="Wingdings" panose="05000000000000000000" pitchFamily="2" charset="2"/>
+              <a:buChar char="Ø"/>
+            </a:pPr>
+            <a:r>
+              <a:rPr lang="en-US" sz="1400" dirty="0"/>
+              <a:t>In YPS revamp ,  clicking reprint require for printing </a:t>
+            </a:r>
+            <a:r>
+              <a:rPr lang="en-US" sz="1400" dirty="0" err="1"/>
+              <a:t>yps</a:t>
+            </a:r>
+            <a:r>
+              <a:rPr lang="en-US" sz="1400" dirty="0"/>
+              <a:t> voucher for top up bill with device which does not have built in printer.</a:t>
+            </a:r>
+          </a:p>
+          <a:p>
+            <a:pPr marL="285750" indent="-285750">
+              <a:lnSpc>
+                <a:spcPct val="150000"/>
+              </a:lnSpc>
+              <a:buFont typeface="Wingdings" panose="05000000000000000000" pitchFamily="2" charset="2"/>
+              <a:buChar char="Ø"/>
+            </a:pPr>
+            <a:endParaRPr lang="en-US" sz="1400" dirty="0"/>
+          </a:p>
+          <a:p>
+            <a:pPr marL="285750" indent="-285750">
+              <a:lnSpc>
+                <a:spcPct val="150000"/>
+              </a:lnSpc>
+              <a:buFont typeface="Wingdings" panose="05000000000000000000" pitchFamily="2" charset="2"/>
+              <a:buChar char="Ø"/>
+            </a:pPr>
+            <a:endParaRPr lang="en-US" sz="1400" dirty="0"/>
+          </a:p>
+          <a:p>
+            <a:pPr marL="285750" indent="-285750">
+              <a:lnSpc>
+                <a:spcPct val="150000"/>
+              </a:lnSpc>
+              <a:buFont typeface="Wingdings" panose="05000000000000000000" pitchFamily="2" charset="2"/>
+              <a:buChar char="Ø"/>
+            </a:pPr>
+            <a:endParaRPr lang="en-US" sz="1400" dirty="0"/>
+          </a:p>
+          <a:p>
+            <a:pPr marL="285750" indent="-285750">
+              <a:lnSpc>
+                <a:spcPct val="150000"/>
+              </a:lnSpc>
+              <a:buFont typeface="Wingdings" panose="05000000000000000000" pitchFamily="2" charset="2"/>
+              <a:buChar char="Ø"/>
+            </a:pPr>
+            <a:endParaRPr lang="en-US" sz="1400" dirty="0"/>
+          </a:p>
+          <a:p>
+            <a:pPr marL="285750" indent="-285750">
+              <a:lnSpc>
+                <a:spcPct val="150000"/>
+              </a:lnSpc>
+              <a:buFont typeface="Wingdings" panose="05000000000000000000" pitchFamily="2" charset="2"/>
+              <a:buChar char="Ø"/>
+            </a:pPr>
+            <a:endParaRPr lang="en-US" sz="1400" dirty="0"/>
+          </a:p>
+          <a:p>
+            <a:endParaRPr lang="en-US" sz="1400" dirty="0"/>
           </a:p>
         </p:txBody>
       </p:sp>
     </p:spTree>
     <p:extLst>
       <p:ext uri="{BB962C8B-B14F-4D97-AF65-F5344CB8AC3E}">
-        <p14:creationId xmlns:p14="http://schemas.microsoft.com/office/powerpoint/2010/main" val="3811131600"/>
+        <p14:creationId xmlns:p14="http://schemas.microsoft.com/office/powerpoint/2010/main" val="1386108881"/>
       </p:ext>
     </p:extLst>
   </p:cSld>
@@ -5561,7 +4103,7 @@
           <p:cNvPr id="2" name="Slide Number Placeholder 1">
             <a:extLst>
               <a:ext uri="{FF2B5EF4-FFF2-40B4-BE49-F238E27FC236}">
-                <a16:creationId xmlns:a16="http://schemas.microsoft.com/office/drawing/2014/main" id="{2C6D1A3D-D8D1-97E3-EFD0-0A8F2EB4A746}"/>
+                <a16:creationId xmlns:a16="http://schemas.microsoft.com/office/drawing/2014/main" id="{2653FD79-DFAF-0975-69EF-FB3463742E2D}"/>
               </a:ext>
             </a:extLst>
           </p:cNvPr>
@@ -5587,10 +4129,10 @@
       </p:sp>
       <p:sp>
         <p:nvSpPr>
-          <p:cNvPr id="3" name="Text Placeholder 2">
-            <a:extLst>
-              <a:ext uri="{FF2B5EF4-FFF2-40B4-BE49-F238E27FC236}">
-                <a16:creationId xmlns:a16="http://schemas.microsoft.com/office/drawing/2014/main" id="{6D3407A6-CDE3-D3A9-EF51-C54D92FB1B5D}"/>
+          <p:cNvPr id="18" name="Text Placeholder 2">
+            <a:extLst>
+              <a:ext uri="{FF2B5EF4-FFF2-40B4-BE49-F238E27FC236}">
+                <a16:creationId xmlns:a16="http://schemas.microsoft.com/office/drawing/2014/main" id="{B6A3574E-BCA8-647A-9EAA-2CEFC6088E80}"/>
               </a:ext>
             </a:extLst>
           </p:cNvPr>
@@ -5601,24 +4143,29 @@
             <p:ph type="body" idx="1"/>
           </p:nvPr>
         </p:nvSpPr>
-        <p:spPr/>
+        <p:spPr>
+          <a:xfrm>
+            <a:off x="81002" y="48294"/>
+            <a:ext cx="10226779" cy="465975"/>
+          </a:xfrm>
+        </p:spPr>
         <p:txBody>
           <a:bodyPr/>
           <a:lstStyle/>
           <a:p>
             <a:r>
               <a:rPr lang="en-US" dirty="0"/>
-              <a:t>Deployment Diagram</a:t>
-            </a:r>
-          </a:p>
-        </p:txBody>
-      </p:sp>
-      <p:sp>
-        <p:nvSpPr>
-          <p:cNvPr id="5" name="TextBox 4">
-            <a:extLst>
-              <a:ext uri="{FF2B5EF4-FFF2-40B4-BE49-F238E27FC236}">
-                <a16:creationId xmlns:a16="http://schemas.microsoft.com/office/drawing/2014/main" id="{5EA11346-B117-7460-D6BF-6354E886A4D2}"/>
+              <a:t>Assumptions And Constraints</a:t>
+            </a:r>
+          </a:p>
+        </p:txBody>
+      </p:sp>
+      <p:sp>
+        <p:nvSpPr>
+          <p:cNvPr id="19" name="TextBox 18">
+            <a:extLst>
+              <a:ext uri="{FF2B5EF4-FFF2-40B4-BE49-F238E27FC236}">
+                <a16:creationId xmlns:a16="http://schemas.microsoft.com/office/drawing/2014/main" id="{85B4683E-03BA-A611-0997-F9DE828A7C96}"/>
               </a:ext>
             </a:extLst>
           </p:cNvPr>
@@ -5627,8 +4174,8 @@
         </p:nvSpPr>
         <p:spPr>
           <a:xfrm>
-            <a:off x="81002" y="873211"/>
-            <a:ext cx="9062998" cy="523220"/>
+            <a:off x="81001" y="864974"/>
+            <a:ext cx="11460209" cy="5586145"/>
           </a:xfrm>
           <a:prstGeom prst="rect">
             <a:avLst/>
@@ -5642,52 +4189,212 @@
           <a:lstStyle/>
           <a:p>
             <a:r>
-              <a:rPr lang="en-US" sz="1400" dirty="0"/>
-              <a:t>Describe how the solution components are deployed across the hosting environment, including application runtime locations, network zones, and supporting infrastructure services.</a:t>
-            </a:r>
-          </a:p>
-        </p:txBody>
-      </p:sp>
-      <p:pic>
-        <p:nvPicPr>
-          <p:cNvPr id="7" name="Picture 6">
-            <a:extLst>
-              <a:ext uri="{FF2B5EF4-FFF2-40B4-BE49-F238E27FC236}">
-                <a16:creationId xmlns:a16="http://schemas.microsoft.com/office/drawing/2014/main" id="{E2A940CF-2D15-547E-98B1-7FF28FDF7C34}"/>
-              </a:ext>
-            </a:extLst>
-          </p:cNvPr>
-          <p:cNvPicPr>
-            <a:picLocks noChangeAspect="1"/>
-          </p:cNvPicPr>
-          <p:nvPr/>
-        </p:nvPicPr>
-        <p:blipFill>
-          <a:blip r:embed="rId2">
-            <a:extLst>
-              <a:ext uri="{28A0092B-C50C-407E-A947-70E740481C1C}">
-                <a14:useLocalDpi xmlns:a14="http://schemas.microsoft.com/office/drawing/2010/main" val="0"/>
-              </a:ext>
-            </a:extLst>
-          </a:blip>
-          <a:stretch>
-            <a:fillRect/>
-          </a:stretch>
-        </p:blipFill>
-        <p:spPr>
-          <a:xfrm>
-            <a:off x="203200" y="1435945"/>
-            <a:ext cx="7933433" cy="5422055"/>
-          </a:xfrm>
-          <a:prstGeom prst="rect">
-            <a:avLst/>
-          </a:prstGeom>
-        </p:spPr>
-      </p:pic>
+              <a:rPr lang="en-US" sz="1400" b="1" dirty="0"/>
+              <a:t>Assumption</a:t>
+            </a:r>
+          </a:p>
+          <a:p>
+            <a:pPr>
+              <a:lnSpc>
+                <a:spcPct val="150000"/>
+              </a:lnSpc>
+            </a:pPr>
+            <a:r>
+              <a:rPr lang="en-US" sz="1400" dirty="0"/>
+              <a:t>YPS Revamp</a:t>
+            </a:r>
+          </a:p>
+          <a:p>
+            <a:pPr marL="285750" indent="-285750">
+              <a:lnSpc>
+                <a:spcPct val="150000"/>
+              </a:lnSpc>
+              <a:buFont typeface="Wingdings" panose="05000000000000000000" pitchFamily="2" charset="2"/>
+              <a:buChar char="Ø"/>
+            </a:pPr>
+            <a:r>
+              <a:rPr lang="en-US" sz="1400" dirty="0"/>
+              <a:t>Due to time out issues and delay in processing sale operations for </a:t>
+            </a:r>
+            <a:r>
+              <a:rPr lang="en-US" sz="1400" dirty="0" err="1"/>
+              <a:t>yps</a:t>
+            </a:r>
+            <a:r>
+              <a:rPr lang="en-US" sz="1400" dirty="0"/>
+              <a:t> , use Rabbit MQ for dividing preparing sale  data part and processing sale  part for more quick response and async processing.</a:t>
+            </a:r>
+          </a:p>
+          <a:p>
+            <a:pPr marL="285750" indent="-285750">
+              <a:lnSpc>
+                <a:spcPct val="150000"/>
+              </a:lnSpc>
+              <a:buFont typeface="Wingdings" panose="05000000000000000000" pitchFamily="2" charset="2"/>
+              <a:buChar char="Ø"/>
+            </a:pPr>
+            <a:r>
+              <a:rPr lang="en-US" sz="1400" dirty="0"/>
+              <a:t>To  recover sale related operations fail due to database connection or other case need to use retry mechanism.</a:t>
+            </a:r>
+          </a:p>
+          <a:p>
+            <a:pPr marL="285750" indent="-285750">
+              <a:lnSpc>
+                <a:spcPct val="150000"/>
+              </a:lnSpc>
+              <a:buFont typeface="Wingdings" panose="05000000000000000000" pitchFamily="2" charset="2"/>
+              <a:buChar char="Ø"/>
+            </a:pPr>
+            <a:r>
+              <a:rPr lang="en-US" sz="1400" dirty="0"/>
+              <a:t>To prevent static data like bill , product and store fetch many time from database , data will store and fetch from </a:t>
+            </a:r>
+            <a:r>
+              <a:rPr lang="en-US" sz="1400" dirty="0" err="1"/>
+              <a:t>redis</a:t>
+            </a:r>
+            <a:r>
+              <a:rPr lang="en-US" sz="1400" dirty="0"/>
+              <a:t> ( store will hold for 10 min , bill and product will hold for 6 </a:t>
+            </a:r>
+            <a:r>
+              <a:rPr lang="en-US" sz="1400" dirty="0" err="1"/>
+              <a:t>hr</a:t>
+            </a:r>
+            <a:r>
+              <a:rPr lang="en-US" sz="1400" dirty="0"/>
+              <a:t>)</a:t>
+            </a:r>
+          </a:p>
+          <a:p>
+            <a:pPr marL="285750" indent="-285750">
+              <a:lnSpc>
+                <a:spcPct val="150000"/>
+              </a:lnSpc>
+              <a:buFont typeface="Wingdings" panose="05000000000000000000" pitchFamily="2" charset="2"/>
+              <a:buChar char="Ø"/>
+            </a:pPr>
+            <a:r>
+              <a:rPr lang="en-US" sz="1400" dirty="0"/>
+              <a:t>To make </a:t>
+            </a:r>
+            <a:r>
+              <a:rPr lang="en-US" sz="1400" dirty="0" err="1"/>
+              <a:t>yps</a:t>
+            </a:r>
+            <a:r>
+              <a:rPr lang="en-US" sz="1400" dirty="0"/>
+              <a:t> service more scalable in future  separate </a:t>
+            </a:r>
+            <a:r>
+              <a:rPr lang="en-US" sz="1400" dirty="0" err="1"/>
+              <a:t>yps</a:t>
+            </a:r>
+            <a:r>
+              <a:rPr lang="en-US" sz="1400" dirty="0"/>
+              <a:t> operations as new service repo by following microservice architecture</a:t>
+            </a:r>
+          </a:p>
+          <a:p>
+            <a:pPr>
+              <a:lnSpc>
+                <a:spcPct val="150000"/>
+              </a:lnSpc>
+            </a:pPr>
+            <a:endParaRPr lang="en-US" sz="1400" dirty="0"/>
+          </a:p>
+          <a:p>
+            <a:pPr>
+              <a:lnSpc>
+                <a:spcPct val="150000"/>
+              </a:lnSpc>
+            </a:pPr>
+            <a:r>
+              <a:rPr lang="en-US" sz="1400" dirty="0"/>
+              <a:t>G&amp;G </a:t>
+            </a:r>
+          </a:p>
+          <a:p>
+            <a:pPr marL="285750" indent="-285750">
+              <a:lnSpc>
+                <a:spcPct val="150000"/>
+              </a:lnSpc>
+              <a:buFont typeface="Wingdings" panose="05000000000000000000" pitchFamily="2" charset="2"/>
+              <a:buChar char="Ø"/>
+            </a:pPr>
+            <a:r>
+              <a:rPr lang="en-US" sz="1400" dirty="0"/>
+              <a:t>To reduce time out issues and more faster processing sale operations for G&amp;G, use queue by publishing sale operations part which is major business logic and sale completion part ( commission , print , print summary ,sale response )  which consume from queue and process</a:t>
+            </a:r>
+          </a:p>
+          <a:p>
+            <a:pPr marL="285750" indent="-285750">
+              <a:lnSpc>
+                <a:spcPct val="150000"/>
+              </a:lnSpc>
+              <a:buFont typeface="Wingdings" panose="05000000000000000000" pitchFamily="2" charset="2"/>
+              <a:buChar char="Ø"/>
+            </a:pPr>
+            <a:r>
+              <a:rPr lang="en-US" sz="1400" dirty="0"/>
+              <a:t>To  recover sale related operations fail due to database connection or other case need to use retry mechanism.</a:t>
+            </a:r>
+          </a:p>
+          <a:p>
+            <a:pPr marL="285750" indent="-285750">
+              <a:lnSpc>
+                <a:spcPct val="150000"/>
+              </a:lnSpc>
+              <a:buFont typeface="Wingdings" panose="05000000000000000000" pitchFamily="2" charset="2"/>
+              <a:buChar char="Ø"/>
+            </a:pPr>
+            <a:r>
+              <a:rPr lang="en-US" sz="1400" dirty="0"/>
+              <a:t>To prevent static data like bill , product and store fetch many time from database , data will store and fetch from </a:t>
+            </a:r>
+            <a:r>
+              <a:rPr lang="en-US" sz="1400" dirty="0" err="1"/>
+              <a:t>redis</a:t>
+            </a:r>
+            <a:r>
+              <a:rPr lang="en-US" sz="1400" dirty="0"/>
+              <a:t> ( store will hold for 10 min , bill and product will hold for 6 </a:t>
+            </a:r>
+            <a:r>
+              <a:rPr lang="en-US" sz="1400" dirty="0" err="1"/>
+              <a:t>hr</a:t>
+            </a:r>
+            <a:r>
+              <a:rPr lang="en-US" sz="1400" dirty="0"/>
+              <a:t>)</a:t>
+            </a:r>
+          </a:p>
+          <a:p>
+            <a:pPr marL="285750" indent="-285750">
+              <a:lnSpc>
+                <a:spcPct val="150000"/>
+              </a:lnSpc>
+              <a:buFont typeface="Wingdings" panose="05000000000000000000" pitchFamily="2" charset="2"/>
+              <a:buChar char="Ø"/>
+            </a:pPr>
+            <a:r>
+              <a:rPr lang="en-US" sz="1400" dirty="0"/>
+              <a:t>To reduce financial lost due to time out in top up , status check will done for time out case and this will minimize to some extent for top up bill lost.</a:t>
+            </a:r>
+          </a:p>
+          <a:p>
+            <a:endParaRPr lang="en-US" sz="1400" dirty="0"/>
+          </a:p>
+          <a:p>
+            <a:endParaRPr lang="en-US" sz="1400" dirty="0"/>
+          </a:p>
+        </p:txBody>
+      </p:sp>
     </p:spTree>
     <p:extLst>
       <p:ext uri="{BB962C8B-B14F-4D97-AF65-F5344CB8AC3E}">
-        <p14:creationId xmlns:p14="http://schemas.microsoft.com/office/powerpoint/2010/main" val="296769422"/>
+        <p14:creationId xmlns:p14="http://schemas.microsoft.com/office/powerpoint/2010/main" val="1235559352"/>
       </p:ext>
     </p:extLst>
   </p:cSld>
@@ -5702,7 +4409,13 @@
   <p:cSld>
     <p:spTree>
       <p:nvGrpSpPr>
-        <p:cNvPr id="1" name=""/>
+        <p:cNvPr id="1" name="">
+          <a:extLst>
+            <a:ext uri="{FF2B5EF4-FFF2-40B4-BE49-F238E27FC236}">
+              <a16:creationId xmlns:a16="http://schemas.microsoft.com/office/drawing/2014/main" id="{22884690-B900-1EEE-E390-41816FD7C2D4}"/>
+            </a:ext>
+          </a:extLst>
+        </p:cNvPr>
         <p:cNvGrpSpPr/>
         <p:nvPr/>
       </p:nvGrpSpPr>
@@ -5719,7 +4432,7 @@
           <p:cNvPr id="2" name="Slide Number Placeholder 1">
             <a:extLst>
               <a:ext uri="{FF2B5EF4-FFF2-40B4-BE49-F238E27FC236}">
-                <a16:creationId xmlns:a16="http://schemas.microsoft.com/office/drawing/2014/main" id="{5FECDE56-B1F6-2B4A-94B9-BC561DFA24B1}"/>
+                <a16:creationId xmlns:a16="http://schemas.microsoft.com/office/drawing/2014/main" id="{AA01426C-D6A8-B539-4106-89472DB03A26}"/>
               </a:ext>
             </a:extLst>
           </p:cNvPr>
@@ -5745,10 +4458,10 @@
       </p:sp>
       <p:sp>
         <p:nvSpPr>
-          <p:cNvPr id="3" name="Text Placeholder 2">
-            <a:extLst>
-              <a:ext uri="{FF2B5EF4-FFF2-40B4-BE49-F238E27FC236}">
-                <a16:creationId xmlns:a16="http://schemas.microsoft.com/office/drawing/2014/main" id="{FF290E6A-7F4D-743A-63C2-D34B62EFE250}"/>
+          <p:cNvPr id="18" name="Text Placeholder 2">
+            <a:extLst>
+              <a:ext uri="{FF2B5EF4-FFF2-40B4-BE49-F238E27FC236}">
+                <a16:creationId xmlns:a16="http://schemas.microsoft.com/office/drawing/2014/main" id="{E4DF247F-51E1-9FEE-1686-20061D794FE8}"/>
               </a:ext>
             </a:extLst>
           </p:cNvPr>
@@ -5759,24 +4472,29 @@
             <p:ph type="body" idx="1"/>
           </p:nvPr>
         </p:nvSpPr>
-        <p:spPr/>
+        <p:spPr>
+          <a:xfrm>
+            <a:off x="81002" y="48294"/>
+            <a:ext cx="10226779" cy="465975"/>
+          </a:xfrm>
+        </p:spPr>
         <p:txBody>
           <a:bodyPr/>
           <a:lstStyle/>
           <a:p>
             <a:r>
               <a:rPr lang="en-US" dirty="0"/>
-              <a:t>Security</a:t>
-            </a:r>
-          </a:p>
-        </p:txBody>
-      </p:sp>
-      <p:sp>
-        <p:nvSpPr>
-          <p:cNvPr id="5" name="TextBox 4">
-            <a:extLst>
-              <a:ext uri="{FF2B5EF4-FFF2-40B4-BE49-F238E27FC236}">
-                <a16:creationId xmlns:a16="http://schemas.microsoft.com/office/drawing/2014/main" id="{932889F0-1DA4-C54B-CBBA-FD76DD866572}"/>
+              <a:t>Assumptions And Constraints</a:t>
+            </a:r>
+          </a:p>
+        </p:txBody>
+      </p:sp>
+      <p:sp>
+        <p:nvSpPr>
+          <p:cNvPr id="19" name="TextBox 18">
+            <a:extLst>
+              <a:ext uri="{FF2B5EF4-FFF2-40B4-BE49-F238E27FC236}">
+                <a16:creationId xmlns:a16="http://schemas.microsoft.com/office/drawing/2014/main" id="{40F5D4BA-8E47-6CB9-9346-B69FD3F7B089}"/>
               </a:ext>
             </a:extLst>
           </p:cNvPr>
@@ -5785,8 +4503,8 @@
         </p:nvSpPr>
         <p:spPr>
           <a:xfrm>
-            <a:off x="81002" y="972065"/>
-            <a:ext cx="10306912" cy="2246769"/>
+            <a:off x="319898" y="1062682"/>
+            <a:ext cx="11229549" cy="3000821"/>
           </a:xfrm>
           <a:prstGeom prst="rect">
             <a:avLst/>
@@ -5800,99 +4518,93 @@
           <a:lstStyle/>
           <a:p>
             <a:r>
-              <a:rPr lang="en-US" sz="1400" dirty="0"/>
-              <a:t>Describe the security measures applied across the solution to ensure confidentiality, integrity, and availability of data and services.</a:t>
+              <a:rPr lang="en-US" sz="1400" b="1" dirty="0"/>
+              <a:t>Assumption</a:t>
             </a:r>
           </a:p>
           <a:p>
             <a:endParaRPr lang="en-US" sz="1400" dirty="0"/>
           </a:p>
           <a:p>
+            <a:pPr>
+              <a:lnSpc>
+                <a:spcPct val="150000"/>
+              </a:lnSpc>
+            </a:pPr>
+            <a:r>
+              <a:rPr lang="en-US" sz="1400" dirty="0"/>
+              <a:t>Sale Scheduler </a:t>
+            </a:r>
+          </a:p>
+          <a:p>
             <a:pPr marL="285750" indent="-285750">
+              <a:lnSpc>
+                <a:spcPct val="150000"/>
+              </a:lnSpc>
               <a:buFont typeface="Wingdings" panose="05000000000000000000" pitchFamily="2" charset="2"/>
               <a:buChar char="Ø"/>
             </a:pPr>
             <a:r>
               <a:rPr lang="en-US" sz="1400" dirty="0"/>
-              <a:t>Implements OAuth2 and OpenID Connect for authentication and authorization.</a:t>
+              <a:t>Due to single insert for data sync  related with AX and D365 database , data insertion is pretty slow , beside these data first sync to AX and then sync to D365 one after another which make data sync make more slower.</a:t>
             </a:r>
           </a:p>
           <a:p>
             <a:pPr marL="285750" indent="-285750">
+              <a:lnSpc>
+                <a:spcPct val="150000"/>
+              </a:lnSpc>
               <a:buFont typeface="Wingdings" panose="05000000000000000000" pitchFamily="2" charset="2"/>
               <a:buChar char="Ø"/>
             </a:pPr>
             <a:r>
               <a:rPr lang="en-US" sz="1400" dirty="0"/>
-              <a:t>Applies role-based access control (RBAC) for user and system permissions.</a:t>
+              <a:t>To prevent these case batch insert will done by 30 records per batch and async processing for AX and D365 data sync.</a:t>
             </a:r>
           </a:p>
           <a:p>
             <a:pPr marL="285750" indent="-285750">
+              <a:lnSpc>
+                <a:spcPct val="150000"/>
+              </a:lnSpc>
               <a:buFont typeface="Wingdings" panose="05000000000000000000" pitchFamily="2" charset="2"/>
               <a:buChar char="Ø"/>
             </a:pPr>
-            <a:r>
-              <a:rPr lang="en-US" sz="1400" dirty="0"/>
-              <a:t>Ensures secure communication using HTTPS/TLS for all external and internal traffic.</a:t>
+            <a:endParaRPr lang="en-US" sz="1400" dirty="0"/>
+          </a:p>
+          <a:p>
+            <a:pPr>
+              <a:lnSpc>
+                <a:spcPct val="150000"/>
+              </a:lnSpc>
+            </a:pPr>
+            <a:r>
+              <a:rPr lang="en-US" sz="1400" dirty="0"/>
+              <a:t>Data Archiving</a:t>
             </a:r>
           </a:p>
           <a:p>
             <a:pPr marL="285750" indent="-285750">
+              <a:lnSpc>
+                <a:spcPct val="150000"/>
+              </a:lnSpc>
               <a:buFont typeface="Wingdings" panose="05000000000000000000" pitchFamily="2" charset="2"/>
               <a:buChar char="Ø"/>
             </a:pPr>
             <a:r>
               <a:rPr lang="en-US" sz="1400" dirty="0"/>
-              <a:t>Encrypts sensitive data at rest and in transit following enterprise security standards.</a:t>
-            </a:r>
-          </a:p>
-          <a:p>
-            <a:pPr marL="285750" indent="-285750">
-              <a:buFont typeface="Wingdings" panose="05000000000000000000" pitchFamily="2" charset="2"/>
-              <a:buChar char="Ø"/>
-            </a:pPr>
-            <a:r>
-              <a:rPr lang="en-US" sz="1400" dirty="0"/>
-              <a:t>Utilizes API Gateway for request validation, rate limiting, and threat protection.</a:t>
-            </a:r>
-          </a:p>
-          <a:p>
-            <a:pPr marL="285750" indent="-285750">
-              <a:buFont typeface="Wingdings" panose="05000000000000000000" pitchFamily="2" charset="2"/>
-              <a:buChar char="Ø"/>
-            </a:pPr>
-            <a:r>
-              <a:rPr lang="en-US" sz="1400" dirty="0"/>
-              <a:t>Applies secure coding practices and performs regular security reviews.</a:t>
-            </a:r>
-          </a:p>
-          <a:p>
-            <a:pPr marL="285750" indent="-285750">
-              <a:buFont typeface="Wingdings" panose="05000000000000000000" pitchFamily="2" charset="2"/>
-              <a:buChar char="Ø"/>
-            </a:pPr>
-            <a:r>
-              <a:rPr lang="en-US" sz="1400" dirty="0"/>
-              <a:t>Integrates with enterprise IAM for centralized identity management.</a:t>
-            </a:r>
-          </a:p>
-          <a:p>
-            <a:pPr marL="285750" indent="-285750">
-              <a:buFont typeface="Wingdings" panose="05000000000000000000" pitchFamily="2" charset="2"/>
-              <a:buChar char="Ø"/>
-            </a:pPr>
-            <a:r>
-              <a:rPr lang="en-US" sz="1400" dirty="0"/>
-              <a:t>Supports audit logging and monitoring for security event detection.</a:t>
-            </a:r>
+              <a:t>Current data in table are growing longer day to day which can interrupt sale operations , so to prevent this data archiving is require.</a:t>
+            </a:r>
+          </a:p>
+          <a:p>
+            <a:endParaRPr lang="en-US" sz="1400" dirty="0"/>
           </a:p>
         </p:txBody>
       </p:sp>
     </p:spTree>
     <p:extLst>
       <p:ext uri="{BB962C8B-B14F-4D97-AF65-F5344CB8AC3E}">
-        <p14:creationId xmlns:p14="http://schemas.microsoft.com/office/powerpoint/2010/main" val="740920080"/>
+        <p14:creationId xmlns:p14="http://schemas.microsoft.com/office/powerpoint/2010/main" val="3443330506"/>
       </p:ext>
     </p:extLst>
   </p:cSld>
@@ -5907,7 +4619,13 @@
   <p:cSld>
     <p:spTree>
       <p:nvGrpSpPr>
-        <p:cNvPr id="1" name=""/>
+        <p:cNvPr id="1" name="">
+          <a:extLst>
+            <a:ext uri="{FF2B5EF4-FFF2-40B4-BE49-F238E27FC236}">
+              <a16:creationId xmlns:a16="http://schemas.microsoft.com/office/drawing/2014/main" id="{4DEA218B-60FE-E60A-0F3E-7C0182F08CE8}"/>
+            </a:ext>
+          </a:extLst>
+        </p:cNvPr>
         <p:cNvGrpSpPr/>
         <p:nvPr/>
       </p:nvGrpSpPr>
@@ -5924,7 +4642,7 @@
           <p:cNvPr id="2" name="Slide Number Placeholder 1">
             <a:extLst>
               <a:ext uri="{FF2B5EF4-FFF2-40B4-BE49-F238E27FC236}">
-                <a16:creationId xmlns:a16="http://schemas.microsoft.com/office/drawing/2014/main" id="{C1E7AA9C-5FE5-9323-293D-7B56E2B79872}"/>
+                <a16:creationId xmlns:a16="http://schemas.microsoft.com/office/drawing/2014/main" id="{662DA9F6-2BEA-B047-60D3-23A45794C32F}"/>
               </a:ext>
             </a:extLst>
           </p:cNvPr>
@@ -5950,10 +4668,10 @@
       </p:sp>
       <p:sp>
         <p:nvSpPr>
-          <p:cNvPr id="3" name="Text Placeholder 2">
-            <a:extLst>
-              <a:ext uri="{FF2B5EF4-FFF2-40B4-BE49-F238E27FC236}">
-                <a16:creationId xmlns:a16="http://schemas.microsoft.com/office/drawing/2014/main" id="{867816BB-C456-7A51-3B8F-FA808CB68F4F}"/>
+          <p:cNvPr id="18" name="Text Placeholder 2">
+            <a:extLst>
+              <a:ext uri="{FF2B5EF4-FFF2-40B4-BE49-F238E27FC236}">
+                <a16:creationId xmlns:a16="http://schemas.microsoft.com/office/drawing/2014/main" id="{C4C7B635-1912-E4A1-9A59-FFB0B088A5D7}"/>
               </a:ext>
             </a:extLst>
           </p:cNvPr>
@@ -5964,24 +4682,29 @@
             <p:ph type="body" idx="1"/>
           </p:nvPr>
         </p:nvSpPr>
-        <p:spPr/>
+        <p:spPr>
+          <a:xfrm>
+            <a:off x="81002" y="48294"/>
+            <a:ext cx="10226779" cy="465975"/>
+          </a:xfrm>
+        </p:spPr>
         <p:txBody>
           <a:bodyPr/>
           <a:lstStyle/>
           <a:p>
             <a:r>
               <a:rPr lang="en-US" dirty="0"/>
-              <a:t>Authentication and Authorization</a:t>
-            </a:r>
-          </a:p>
-        </p:txBody>
-      </p:sp>
-      <p:sp>
-        <p:nvSpPr>
-          <p:cNvPr id="5" name="TextBox 4">
-            <a:extLst>
-              <a:ext uri="{FF2B5EF4-FFF2-40B4-BE49-F238E27FC236}">
-                <a16:creationId xmlns:a16="http://schemas.microsoft.com/office/drawing/2014/main" id="{22509ED9-06DF-70F4-C752-38470969F884}"/>
+              <a:t>Assumptions And Constraints</a:t>
+            </a:r>
+          </a:p>
+        </p:txBody>
+      </p:sp>
+      <p:sp>
+        <p:nvSpPr>
+          <p:cNvPr id="19" name="TextBox 18">
+            <a:extLst>
+              <a:ext uri="{FF2B5EF4-FFF2-40B4-BE49-F238E27FC236}">
+                <a16:creationId xmlns:a16="http://schemas.microsoft.com/office/drawing/2014/main" id="{165E2067-42E3-DDF2-488A-30B226A5E1D3}"/>
               </a:ext>
             </a:extLst>
           </p:cNvPr>
@@ -5990,8 +4713,8 @@
         </p:nvSpPr>
         <p:spPr>
           <a:xfrm>
-            <a:off x="81002" y="873211"/>
-            <a:ext cx="9062998" cy="523220"/>
+            <a:off x="319898" y="1062682"/>
+            <a:ext cx="11229549" cy="2246769"/>
           </a:xfrm>
           <a:prstGeom prst="rect">
             <a:avLst/>
@@ -6005,24 +4728,87 @@
           <a:lstStyle/>
           <a:p>
             <a:r>
-              <a:rPr lang="en-US" sz="1400" dirty="0"/>
-              <a:t>Describe how the solution manages user identity verification and access control to ensure secure and compliant system usage with </a:t>
-            </a:r>
-            <a:r>
               <a:rPr lang="en-US" sz="1400" b="1" dirty="0"/>
-              <a:t>sequence flow</a:t>
-            </a:r>
-            <a:r>
-              <a:rPr lang="en-US" sz="1400" dirty="0"/>
-              <a:t>.</a:t>
-            </a:r>
+              <a:t>Constraint</a:t>
+            </a:r>
+          </a:p>
+          <a:p>
+            <a:pPr marL="342900" indent="-342900">
+              <a:buFont typeface="Wingdings" panose="05000000000000000000" pitchFamily="2" charset="2"/>
+              <a:buChar char="Ø"/>
+            </a:pPr>
+            <a:r>
+              <a:rPr lang="en-US" sz="1400" dirty="0"/>
+              <a:t>YPS REVAMP- Due to consuming sale data from queue and process sale operation , it will need to wait few seconds for reprinting top up </a:t>
+            </a:r>
+            <a:r>
+              <a:rPr lang="en-US" sz="1400" dirty="0" err="1"/>
+              <a:t>bill.Current</a:t>
+            </a:r>
+            <a:r>
+              <a:rPr lang="en-US" sz="1400" dirty="0"/>
+              <a:t> pos device does not require reprint but future sumi pos will need voucher print from </a:t>
+            </a:r>
+            <a:r>
+              <a:rPr lang="en-US" sz="1400" dirty="0" err="1"/>
+              <a:t>Eservice</a:t>
+            </a:r>
+            <a:r>
+              <a:rPr lang="en-US" sz="1400" dirty="0"/>
+              <a:t> front end , if customer request.</a:t>
+            </a:r>
+          </a:p>
+          <a:p>
+            <a:pPr marL="342900" indent="-342900">
+              <a:buFont typeface="Wingdings" panose="05000000000000000000" pitchFamily="2" charset="2"/>
+              <a:buChar char="Ø"/>
+            </a:pPr>
+            <a:r>
+              <a:rPr lang="en-US" sz="1400" dirty="0"/>
+              <a:t>G&amp;G Bill ,Subscription  &amp; other operations enhancement0,  although sale operation part finish before publishing to queue ,  rest part like commission , prefunding , print and print summary saving part done after consuming from queue so if queue fail due to some reason or block ,data will delay .it will not directly impact customer operations but for management report  part it can cause delay .</a:t>
+            </a:r>
+          </a:p>
+          <a:p>
+            <a:pPr marL="342900" indent="-342900">
+              <a:buFont typeface="Wingdings" panose="05000000000000000000" pitchFamily="2" charset="2"/>
+              <a:buChar char="Ø"/>
+            </a:pPr>
+            <a:r>
+              <a:rPr lang="en-US" sz="1400" dirty="0"/>
+              <a:t>Sale Scheduler – Due to async processing between 3 database this will make more resource usage at sync time.</a:t>
+            </a:r>
+          </a:p>
+          <a:p>
+            <a:pPr marL="342900" indent="-342900">
+              <a:buFont typeface="Wingdings" panose="05000000000000000000" pitchFamily="2" charset="2"/>
+              <a:buChar char="Ø"/>
+            </a:pPr>
+            <a:r>
+              <a:rPr lang="en-US" sz="1400" dirty="0"/>
+              <a:t>Data Archiving Enhancement – Without proper </a:t>
+            </a:r>
+            <a:r>
+              <a:rPr lang="en-US" sz="1400" dirty="0" err="1"/>
+              <a:t>manul</a:t>
+            </a:r>
+            <a:r>
+              <a:rPr lang="en-US" sz="1400" dirty="0"/>
+              <a:t> script combination or system , old data cant gather easily and need to implement report system for fetching between current database and archive database.</a:t>
+            </a:r>
+          </a:p>
+          <a:p>
+            <a:pPr marL="342900" indent="-342900">
+              <a:buFont typeface="Wingdings" panose="05000000000000000000" pitchFamily="2" charset="2"/>
+              <a:buChar char="Ø"/>
+            </a:pPr>
+            <a:endParaRPr lang="en-US" sz="1400" dirty="0"/>
           </a:p>
         </p:txBody>
       </p:sp>
     </p:spTree>
     <p:extLst>
       <p:ext uri="{BB962C8B-B14F-4D97-AF65-F5344CB8AC3E}">
-        <p14:creationId xmlns:p14="http://schemas.microsoft.com/office/powerpoint/2010/main" val="2341347600"/>
+        <p14:creationId xmlns:p14="http://schemas.microsoft.com/office/powerpoint/2010/main" val="2018470881"/>
       </p:ext>
     </p:extLst>
   </p:cSld>
@@ -6054,7 +4840,7 @@
           <p:cNvPr id="2" name="Slide Number Placeholder 1">
             <a:extLst>
               <a:ext uri="{FF2B5EF4-FFF2-40B4-BE49-F238E27FC236}">
-                <a16:creationId xmlns:a16="http://schemas.microsoft.com/office/drawing/2014/main" id="{9122D069-8DFA-FB98-0E81-46A7D13B1E5C}"/>
+                <a16:creationId xmlns:a16="http://schemas.microsoft.com/office/drawing/2014/main" id="{55A1ABD3-2224-FCAA-C067-563A2AFC6D7E}"/>
               </a:ext>
             </a:extLst>
           </p:cNvPr>
@@ -6083,7 +4869,7 @@
           <p:cNvPr id="3" name="Text Placeholder 2">
             <a:extLst>
               <a:ext uri="{FF2B5EF4-FFF2-40B4-BE49-F238E27FC236}">
-                <a16:creationId xmlns:a16="http://schemas.microsoft.com/office/drawing/2014/main" id="{930AFCFB-F40E-CF28-0798-B07203315484}"/>
+                <a16:creationId xmlns:a16="http://schemas.microsoft.com/office/drawing/2014/main" id="{895422F2-7454-7627-91EE-5B441571B88F}"/>
               </a:ext>
             </a:extLst>
           </p:cNvPr>
@@ -6101,50 +4887,51 @@
           <a:p>
             <a:r>
               <a:rPr lang="en-US" dirty="0"/>
-              <a:t>Audit Trail</a:t>
-            </a:r>
-          </a:p>
-        </p:txBody>
-      </p:sp>
-      <p:sp>
-        <p:nvSpPr>
-          <p:cNvPr id="6" name="TextBox 5">
-            <a:extLst>
-              <a:ext uri="{FF2B5EF4-FFF2-40B4-BE49-F238E27FC236}">
-                <a16:creationId xmlns:a16="http://schemas.microsoft.com/office/drawing/2014/main" id="{9474ABBC-AAB1-12B6-0E4F-544747861B02}"/>
-              </a:ext>
-            </a:extLst>
-          </p:cNvPr>
-          <p:cNvSpPr txBox="1"/>
+              <a:t>System Overview</a:t>
+            </a:r>
+          </a:p>
+        </p:txBody>
+      </p:sp>
+      <p:pic>
+        <p:nvPicPr>
+          <p:cNvPr id="6" name="Picture 5">
+            <a:extLst>
+              <a:ext uri="{FF2B5EF4-FFF2-40B4-BE49-F238E27FC236}">
+                <a16:creationId xmlns:a16="http://schemas.microsoft.com/office/drawing/2014/main" id="{93C8D813-E260-6A78-12E5-9DE07D2C4C1C}"/>
+              </a:ext>
+            </a:extLst>
+          </p:cNvPr>
+          <p:cNvPicPr>
+            <a:picLocks noChangeAspect="1"/>
+          </p:cNvPicPr>
           <p:nvPr/>
-        </p:nvSpPr>
+        </p:nvPicPr>
+        <p:blipFill>
+          <a:blip r:embed="rId2">
+            <a:extLst>
+              <a:ext uri="{28A0092B-C50C-407E-A947-70E740481C1C}">
+                <a14:useLocalDpi xmlns:a14="http://schemas.microsoft.com/office/drawing/2010/main" val="0"/>
+              </a:ext>
+            </a:extLst>
+          </a:blip>
+          <a:stretch>
+            <a:fillRect/>
+          </a:stretch>
+        </p:blipFill>
         <p:spPr>
           <a:xfrm>
-            <a:off x="81002" y="1013255"/>
-            <a:ext cx="9062998" cy="523220"/>
+            <a:off x="1747674" y="823783"/>
+            <a:ext cx="7503418" cy="5897692"/>
           </a:xfrm>
           <a:prstGeom prst="rect">
             <a:avLst/>
           </a:prstGeom>
-          <a:noFill/>
         </p:spPr>
-        <p:txBody>
-          <a:bodyPr wrap="square">
-            <a:spAutoFit/>
-          </a:bodyPr>
-          <a:lstStyle/>
-          <a:p>
-            <a:r>
-              <a:rPr lang="en-US" sz="1400" dirty="0"/>
-              <a:t>Describe how the system captures, stores, and manages audit information to meet regulatory, compliance, and operational requirements. This includes tracking user actions, system events, and data changes.</a:t>
-            </a:r>
-          </a:p>
-        </p:txBody>
-      </p:sp>
+      </p:pic>
     </p:spTree>
     <p:extLst>
       <p:ext uri="{BB962C8B-B14F-4D97-AF65-F5344CB8AC3E}">
-        <p14:creationId xmlns:p14="http://schemas.microsoft.com/office/powerpoint/2010/main" val="3307641602"/>
+        <p14:creationId xmlns:p14="http://schemas.microsoft.com/office/powerpoint/2010/main" val="2224916"/>
       </p:ext>
     </p:extLst>
   </p:cSld>
@@ -6159,7 +4946,13 @@
   <p:cSld>
     <p:spTree>
       <p:nvGrpSpPr>
-        <p:cNvPr id="1" name=""/>
+        <p:cNvPr id="1" name="">
+          <a:extLst>
+            <a:ext uri="{FF2B5EF4-FFF2-40B4-BE49-F238E27FC236}">
+              <a16:creationId xmlns:a16="http://schemas.microsoft.com/office/drawing/2014/main" id="{2CA7A9FD-FB06-025D-0BC0-6D810A98D3D2}"/>
+            </a:ext>
+          </a:extLst>
+        </p:cNvPr>
         <p:cNvGrpSpPr/>
         <p:nvPr/>
       </p:nvGrpSpPr>
@@ -6176,7 +4969,7 @@
           <p:cNvPr id="2" name="Slide Number Placeholder 1">
             <a:extLst>
               <a:ext uri="{FF2B5EF4-FFF2-40B4-BE49-F238E27FC236}">
-                <a16:creationId xmlns:a16="http://schemas.microsoft.com/office/drawing/2014/main" id="{0F86DA4D-C961-5160-E807-312B75128172}"/>
+                <a16:creationId xmlns:a16="http://schemas.microsoft.com/office/drawing/2014/main" id="{88B4B551-2D82-43A4-DBF1-6DC94D98D015}"/>
               </a:ext>
             </a:extLst>
           </p:cNvPr>
@@ -6205,7 +4998,7 @@
           <p:cNvPr id="3" name="Text Placeholder 2">
             <a:extLst>
               <a:ext uri="{FF2B5EF4-FFF2-40B4-BE49-F238E27FC236}">
-                <a16:creationId xmlns:a16="http://schemas.microsoft.com/office/drawing/2014/main" id="{034BC941-541B-1E4C-3F34-859BB7109AA3}"/>
+                <a16:creationId xmlns:a16="http://schemas.microsoft.com/office/drawing/2014/main" id="{017450C6-326F-AD3F-B9F6-70637D8AD257}"/>
               </a:ext>
             </a:extLst>
           </p:cNvPr>
@@ -6223,50 +5016,51 @@
           <a:p>
             <a:r>
               <a:rPr lang="en-US" dirty="0"/>
-              <a:t>Database Design</a:t>
-            </a:r>
-          </a:p>
-        </p:txBody>
-      </p:sp>
-      <p:sp>
-        <p:nvSpPr>
-          <p:cNvPr id="7" name="TextBox 6">
-            <a:extLst>
-              <a:ext uri="{FF2B5EF4-FFF2-40B4-BE49-F238E27FC236}">
-                <a16:creationId xmlns:a16="http://schemas.microsoft.com/office/drawing/2014/main" id="{6C46AB80-A987-857F-07C0-124A0CCCB738}"/>
-              </a:ext>
-            </a:extLst>
-          </p:cNvPr>
-          <p:cNvSpPr txBox="1"/>
+              <a:t>High Level Architecture (Existing System)</a:t>
+            </a:r>
+          </a:p>
+        </p:txBody>
+      </p:sp>
+      <p:pic>
+        <p:nvPicPr>
+          <p:cNvPr id="8" name="Picture 7">
+            <a:extLst>
+              <a:ext uri="{FF2B5EF4-FFF2-40B4-BE49-F238E27FC236}">
+                <a16:creationId xmlns:a16="http://schemas.microsoft.com/office/drawing/2014/main" id="{8712141F-80B5-E59F-DCD4-E1765FDE3501}"/>
+              </a:ext>
+            </a:extLst>
+          </p:cNvPr>
+          <p:cNvPicPr>
+            <a:picLocks noChangeAspect="1"/>
+          </p:cNvPicPr>
           <p:nvPr/>
-        </p:nvSpPr>
+        </p:nvPicPr>
+        <p:blipFill>
+          <a:blip r:embed="rId2">
+            <a:extLst>
+              <a:ext uri="{28A0092B-C50C-407E-A947-70E740481C1C}">
+                <a14:useLocalDpi xmlns:a14="http://schemas.microsoft.com/office/drawing/2010/main" val="0"/>
+              </a:ext>
+            </a:extLst>
+          </a:blip>
+          <a:stretch>
+            <a:fillRect/>
+          </a:stretch>
+        </p:blipFill>
         <p:spPr>
           <a:xfrm>
-            <a:off x="81002" y="1037968"/>
-            <a:ext cx="9062998" cy="523220"/>
+            <a:off x="988026" y="923191"/>
+            <a:ext cx="9580328" cy="5798283"/>
           </a:xfrm>
           <a:prstGeom prst="rect">
             <a:avLst/>
           </a:prstGeom>
-          <a:noFill/>
         </p:spPr>
-        <p:txBody>
-          <a:bodyPr wrap="square">
-            <a:spAutoFit/>
-          </a:bodyPr>
-          <a:lstStyle/>
-          <a:p>
-            <a:r>
-              <a:rPr lang="en-US" sz="1400" dirty="0"/>
-              <a:t>Describe how the solution enforces access control for data, ensuring only authorized users and services can view or modify specific information. The approach may include controls at both the database layer and the application layer.</a:t>
-            </a:r>
-          </a:p>
-        </p:txBody>
-      </p:sp>
+      </p:pic>
     </p:spTree>
     <p:extLst>
       <p:ext uri="{BB962C8B-B14F-4D97-AF65-F5344CB8AC3E}">
-        <p14:creationId xmlns:p14="http://schemas.microsoft.com/office/powerpoint/2010/main" val="3136416228"/>
+        <p14:creationId xmlns:p14="http://schemas.microsoft.com/office/powerpoint/2010/main" val="232587727"/>
       </p:ext>
     </p:extLst>
   </p:cSld>
@@ -6298,7 +5092,7 @@
           <p:cNvPr id="2" name="Slide Number Placeholder 1">
             <a:extLst>
               <a:ext uri="{FF2B5EF4-FFF2-40B4-BE49-F238E27FC236}">
-                <a16:creationId xmlns:a16="http://schemas.microsoft.com/office/drawing/2014/main" id="{519C35B9-9927-2891-3F99-3E5FD79A11F0}"/>
+                <a16:creationId xmlns:a16="http://schemas.microsoft.com/office/drawing/2014/main" id="{9AD99018-257E-E80B-CC48-12AEEEDA48FB}"/>
               </a:ext>
             </a:extLst>
           </p:cNvPr>
@@ -6327,7 +5121,7 @@
           <p:cNvPr id="3" name="Text Placeholder 2">
             <a:extLst>
               <a:ext uri="{FF2B5EF4-FFF2-40B4-BE49-F238E27FC236}">
-                <a16:creationId xmlns:a16="http://schemas.microsoft.com/office/drawing/2014/main" id="{DA945467-A53C-E3E8-629E-3AF97668212C}"/>
+                <a16:creationId xmlns:a16="http://schemas.microsoft.com/office/drawing/2014/main" id="{F43F683D-1547-ED8B-AFDE-8F3ED9815590}"/>
               </a:ext>
             </a:extLst>
           </p:cNvPr>
@@ -6345,50 +5139,51 @@
           <a:p>
             <a:r>
               <a:rPr lang="en-US" dirty="0"/>
-              <a:t>Data Access Control</a:t>
-            </a:r>
-          </a:p>
-        </p:txBody>
-      </p:sp>
-      <p:sp>
-        <p:nvSpPr>
-          <p:cNvPr id="5" name="TextBox 4">
-            <a:extLst>
-              <a:ext uri="{FF2B5EF4-FFF2-40B4-BE49-F238E27FC236}">
-                <a16:creationId xmlns:a16="http://schemas.microsoft.com/office/drawing/2014/main" id="{0C4725E2-6701-DB33-A718-B2E9B52C8070}"/>
-              </a:ext>
-            </a:extLst>
-          </p:cNvPr>
-          <p:cNvSpPr txBox="1"/>
+              <a:t>High Level Architecture</a:t>
+            </a:r>
+          </a:p>
+        </p:txBody>
+      </p:sp>
+      <p:pic>
+        <p:nvPicPr>
+          <p:cNvPr id="6" name="Picture 5">
+            <a:extLst>
+              <a:ext uri="{FF2B5EF4-FFF2-40B4-BE49-F238E27FC236}">
+                <a16:creationId xmlns:a16="http://schemas.microsoft.com/office/drawing/2014/main" id="{32BFBE9D-208C-142B-CB5C-930C2192EE3C}"/>
+              </a:ext>
+            </a:extLst>
+          </p:cNvPr>
+          <p:cNvPicPr>
+            <a:picLocks noChangeAspect="1"/>
+          </p:cNvPicPr>
           <p:nvPr/>
-        </p:nvSpPr>
+        </p:nvPicPr>
+        <p:blipFill>
+          <a:blip r:embed="rId2">
+            <a:extLst>
+              <a:ext uri="{28A0092B-C50C-407E-A947-70E740481C1C}">
+                <a14:useLocalDpi xmlns:a14="http://schemas.microsoft.com/office/drawing/2010/main" val="0"/>
+              </a:ext>
+            </a:extLst>
+          </a:blip>
+          <a:stretch>
+            <a:fillRect/>
+          </a:stretch>
+        </p:blipFill>
         <p:spPr>
           <a:xfrm>
-            <a:off x="81002" y="996779"/>
-            <a:ext cx="9062998" cy="523220"/>
+            <a:off x="0" y="683741"/>
+            <a:ext cx="10420865" cy="6174259"/>
           </a:xfrm>
           <a:prstGeom prst="rect">
             <a:avLst/>
           </a:prstGeom>
-          <a:noFill/>
         </p:spPr>
-        <p:txBody>
-          <a:bodyPr wrap="square">
-            <a:spAutoFit/>
-          </a:bodyPr>
-          <a:lstStyle/>
-          <a:p>
-            <a:r>
-              <a:rPr lang="en-US" sz="1400" dirty="0"/>
-              <a:t>Describe the overall data model approach, key entities, storage structure, and design principles applied to support system functionality, performance, and compliance requirements.</a:t>
-            </a:r>
-          </a:p>
-        </p:txBody>
-      </p:sp>
+      </p:pic>
     </p:spTree>
     <p:extLst>
       <p:ext uri="{BB962C8B-B14F-4D97-AF65-F5344CB8AC3E}">
-        <p14:creationId xmlns:p14="http://schemas.microsoft.com/office/powerpoint/2010/main" val="3506998466"/>
+        <p14:creationId xmlns:p14="http://schemas.microsoft.com/office/powerpoint/2010/main" val="3363287682"/>
       </p:ext>
     </p:extLst>
   </p:cSld>
@@ -6420,7 +5215,7 @@
           <p:cNvPr id="2" name="Slide Number Placeholder 1">
             <a:extLst>
               <a:ext uri="{FF2B5EF4-FFF2-40B4-BE49-F238E27FC236}">
-                <a16:creationId xmlns:a16="http://schemas.microsoft.com/office/drawing/2014/main" id="{0F86DA4D-C961-5160-E807-312B75128172}"/>
+                <a16:creationId xmlns:a16="http://schemas.microsoft.com/office/drawing/2014/main" id="{6F55D4C7-5BB5-FF19-92CE-65503AB70A2D}"/>
               </a:ext>
             </a:extLst>
           </p:cNvPr>
@@ -6449,7 +5244,7 @@
           <p:cNvPr id="3" name="Text Placeholder 2">
             <a:extLst>
               <a:ext uri="{FF2B5EF4-FFF2-40B4-BE49-F238E27FC236}">
-                <a16:creationId xmlns:a16="http://schemas.microsoft.com/office/drawing/2014/main" id="{034BC941-541B-1E4C-3F34-859BB7109AA3}"/>
+                <a16:creationId xmlns:a16="http://schemas.microsoft.com/office/drawing/2014/main" id="{E87A27D2-3989-9BB6-7123-D448AD8D2F09}"/>
               </a:ext>
             </a:extLst>
           </p:cNvPr>
@@ -6467,50 +5262,51 @@
           <a:p>
             <a:r>
               <a:rPr lang="en-US" dirty="0"/>
-              <a:t>Database Archival &amp; Housekeeping</a:t>
-            </a:r>
-          </a:p>
-        </p:txBody>
-      </p:sp>
-      <p:sp>
-        <p:nvSpPr>
-          <p:cNvPr id="7" name="TextBox 6">
-            <a:extLst>
-              <a:ext uri="{FF2B5EF4-FFF2-40B4-BE49-F238E27FC236}">
-                <a16:creationId xmlns:a16="http://schemas.microsoft.com/office/drawing/2014/main" id="{94E83100-1DC8-490F-83BA-9F34F27C7F12}"/>
-              </a:ext>
-            </a:extLst>
-          </p:cNvPr>
-          <p:cNvSpPr txBox="1"/>
+              <a:t>Key Components (Component Diagram for YPS)</a:t>
+            </a:r>
+          </a:p>
+        </p:txBody>
+      </p:sp>
+      <p:pic>
+        <p:nvPicPr>
+          <p:cNvPr id="5" name="Picture 4">
+            <a:extLst>
+              <a:ext uri="{FF2B5EF4-FFF2-40B4-BE49-F238E27FC236}">
+                <a16:creationId xmlns:a16="http://schemas.microsoft.com/office/drawing/2014/main" id="{55CA3E6C-186D-780B-AD27-0D960563FAA3}"/>
+              </a:ext>
+            </a:extLst>
+          </p:cNvPr>
+          <p:cNvPicPr>
+            <a:picLocks noChangeAspect="1"/>
+          </p:cNvPicPr>
           <p:nvPr/>
-        </p:nvSpPr>
+        </p:nvPicPr>
+        <p:blipFill>
+          <a:blip r:embed="rId3">
+            <a:extLst>
+              <a:ext uri="{28A0092B-C50C-407E-A947-70E740481C1C}">
+                <a14:useLocalDpi xmlns:a14="http://schemas.microsoft.com/office/drawing/2010/main" val="0"/>
+              </a:ext>
+            </a:extLst>
+          </a:blip>
+          <a:stretch>
+            <a:fillRect/>
+          </a:stretch>
+        </p:blipFill>
         <p:spPr>
           <a:xfrm>
-            <a:off x="81002" y="1021492"/>
-            <a:ext cx="10298674" cy="523220"/>
+            <a:off x="81002" y="698598"/>
+            <a:ext cx="9997870" cy="6159402"/>
           </a:xfrm>
           <a:prstGeom prst="rect">
             <a:avLst/>
           </a:prstGeom>
-          <a:noFill/>
         </p:spPr>
-        <p:txBody>
-          <a:bodyPr wrap="square">
-            <a:spAutoFit/>
-          </a:bodyPr>
-          <a:lstStyle/>
-          <a:p>
-            <a:r>
-              <a:rPr lang="en-US" sz="1400" dirty="0"/>
-              <a:t>Describe how the solution manages data archival and housekeeping activities to maintain optimal performance, reduce storage costs, and comply with retention requirements. </a:t>
-            </a:r>
-          </a:p>
-        </p:txBody>
-      </p:sp>
+      </p:pic>
     </p:spTree>
     <p:extLst>
       <p:ext uri="{BB962C8B-B14F-4D97-AF65-F5344CB8AC3E}">
-        <p14:creationId xmlns:p14="http://schemas.microsoft.com/office/powerpoint/2010/main" val="128412827"/>
+        <p14:creationId xmlns:p14="http://schemas.microsoft.com/office/powerpoint/2010/main" val="1563390098"/>
       </p:ext>
     </p:extLst>
   </p:cSld>
@@ -6525,7 +5321,13 @@
   <p:cSld>
     <p:spTree>
       <p:nvGrpSpPr>
-        <p:cNvPr id="1" name=""/>
+        <p:cNvPr id="1" name="">
+          <a:extLst>
+            <a:ext uri="{FF2B5EF4-FFF2-40B4-BE49-F238E27FC236}">
+              <a16:creationId xmlns:a16="http://schemas.microsoft.com/office/drawing/2014/main" id="{8F0646CA-2DB2-33B4-AC79-AB8522E217BE}"/>
+            </a:ext>
+          </a:extLst>
+        </p:cNvPr>
         <p:cNvGrpSpPr/>
         <p:nvPr/>
       </p:nvGrpSpPr>
@@ -6542,7 +5344,7 @@
           <p:cNvPr id="2" name="Slide Number Placeholder 1">
             <a:extLst>
               <a:ext uri="{FF2B5EF4-FFF2-40B4-BE49-F238E27FC236}">
-                <a16:creationId xmlns:a16="http://schemas.microsoft.com/office/drawing/2014/main" id="{10BAC26C-D6D1-F4C7-8A29-1199B15FCDB2}"/>
+                <a16:creationId xmlns:a16="http://schemas.microsoft.com/office/drawing/2014/main" id="{41091DDC-64D3-AEC1-3001-CD5C4DC4709E}"/>
               </a:ext>
             </a:extLst>
           </p:cNvPr>
@@ -6571,7 +5373,7 @@
           <p:cNvPr id="3" name="Text Placeholder 2">
             <a:extLst>
               <a:ext uri="{FF2B5EF4-FFF2-40B4-BE49-F238E27FC236}">
-                <a16:creationId xmlns:a16="http://schemas.microsoft.com/office/drawing/2014/main" id="{890D0FE2-179C-2A88-577A-2BDD310B8964}"/>
+                <a16:creationId xmlns:a16="http://schemas.microsoft.com/office/drawing/2014/main" id="{E2EF1F56-C17A-0D2D-1D42-8B981DBEBAE4}"/>
               </a:ext>
             </a:extLst>
           </p:cNvPr>
@@ -6589,50 +5391,51 @@
           <a:p>
             <a:r>
               <a:rPr lang="en-US" dirty="0"/>
-              <a:t>Reporting Database Population</a:t>
-            </a:r>
-          </a:p>
-        </p:txBody>
-      </p:sp>
-      <p:sp>
-        <p:nvSpPr>
-          <p:cNvPr id="5" name="TextBox 4">
-            <a:extLst>
-              <a:ext uri="{FF2B5EF4-FFF2-40B4-BE49-F238E27FC236}">
-                <a16:creationId xmlns:a16="http://schemas.microsoft.com/office/drawing/2014/main" id="{3DA6157D-A3D3-A57F-5081-2A9684A373F4}"/>
-              </a:ext>
-            </a:extLst>
-          </p:cNvPr>
-          <p:cNvSpPr txBox="1"/>
+              <a:t>Key Components (Component Diagram for G&amp;G)</a:t>
+            </a:r>
+          </a:p>
+        </p:txBody>
+      </p:sp>
+      <p:pic>
+        <p:nvPicPr>
+          <p:cNvPr id="5" name="Picture 4">
+            <a:extLst>
+              <a:ext uri="{FF2B5EF4-FFF2-40B4-BE49-F238E27FC236}">
+                <a16:creationId xmlns:a16="http://schemas.microsoft.com/office/drawing/2014/main" id="{35847915-0E59-3006-A1B3-0432D35B6C20}"/>
+              </a:ext>
+            </a:extLst>
+          </p:cNvPr>
+          <p:cNvPicPr>
+            <a:picLocks noChangeAspect="1"/>
+          </p:cNvPicPr>
           <p:nvPr/>
-        </p:nvSpPr>
+        </p:nvPicPr>
+        <p:blipFill>
+          <a:blip r:embed="rId3">
+            <a:extLst>
+              <a:ext uri="{28A0092B-C50C-407E-A947-70E740481C1C}">
+                <a14:useLocalDpi xmlns:a14="http://schemas.microsoft.com/office/drawing/2010/main" val="0"/>
+              </a:ext>
+            </a:extLst>
+          </a:blip>
+          <a:stretch>
+            <a:fillRect/>
+          </a:stretch>
+        </p:blipFill>
         <p:spPr>
           <a:xfrm>
-            <a:off x="81002" y="1037968"/>
-            <a:ext cx="10226778" cy="523220"/>
+            <a:off x="81001" y="694606"/>
+            <a:ext cx="9524317" cy="6105099"/>
           </a:xfrm>
           <a:prstGeom prst="rect">
             <a:avLst/>
           </a:prstGeom>
-          <a:noFill/>
         </p:spPr>
-        <p:txBody>
-          <a:bodyPr wrap="square">
-            <a:spAutoFit/>
-          </a:bodyPr>
-          <a:lstStyle/>
-          <a:p>
-            <a:r>
-              <a:rPr lang="en-US" sz="1400" dirty="0"/>
-              <a:t>Describe how the reporting database is populated to support management reporting, analytics, and dashboards without impacting the performance of the main transactional database.</a:t>
-            </a:r>
-          </a:p>
-        </p:txBody>
-      </p:sp>
+      </p:pic>
     </p:spTree>
     <p:extLst>
       <p:ext uri="{BB962C8B-B14F-4D97-AF65-F5344CB8AC3E}">
-        <p14:creationId xmlns:p14="http://schemas.microsoft.com/office/powerpoint/2010/main" val="2719678181"/>
+        <p14:creationId xmlns:p14="http://schemas.microsoft.com/office/powerpoint/2010/main" val="681174057"/>
       </p:ext>
     </p:extLst>
   </p:cSld>
@@ -6647,7 +5450,13 @@
   <p:cSld>
     <p:spTree>
       <p:nvGrpSpPr>
-        <p:cNvPr id="1" name=""/>
+        <p:cNvPr id="1" name="">
+          <a:extLst>
+            <a:ext uri="{FF2B5EF4-FFF2-40B4-BE49-F238E27FC236}">
+              <a16:creationId xmlns:a16="http://schemas.microsoft.com/office/drawing/2014/main" id="{676F9569-F8B4-0BF2-1E8D-51494CCC28D2}"/>
+            </a:ext>
+          </a:extLst>
+        </p:cNvPr>
         <p:cNvGrpSpPr/>
         <p:nvPr/>
       </p:nvGrpSpPr>
@@ -6664,7 +5473,7 @@
           <p:cNvPr id="2" name="Slide Number Placeholder 1">
             <a:extLst>
               <a:ext uri="{FF2B5EF4-FFF2-40B4-BE49-F238E27FC236}">
-                <a16:creationId xmlns:a16="http://schemas.microsoft.com/office/drawing/2014/main" id="{FD9C983F-458B-06E6-E4F8-F1462FB49156}"/>
+                <a16:creationId xmlns:a16="http://schemas.microsoft.com/office/drawing/2014/main" id="{9FC7AF08-CC6B-1C1E-F76C-60D49FE7505C}"/>
               </a:ext>
             </a:extLst>
           </p:cNvPr>
@@ -6693,7 +5502,7 @@
           <p:cNvPr id="3" name="Text Placeholder 2">
             <a:extLst>
               <a:ext uri="{FF2B5EF4-FFF2-40B4-BE49-F238E27FC236}">
-                <a16:creationId xmlns:a16="http://schemas.microsoft.com/office/drawing/2014/main" id="{E2F2EA55-F46C-8AB0-0140-A4E9772F2B82}"/>
+                <a16:creationId xmlns:a16="http://schemas.microsoft.com/office/drawing/2014/main" id="{5EA9A210-0A55-C414-8A7D-7C139E7E94E2}"/>
               </a:ext>
             </a:extLst>
           </p:cNvPr>
@@ -6711,50 +5520,51 @@
           <a:p>
             <a:r>
               <a:rPr lang="en-US" dirty="0"/>
-              <a:t>Tech Stack</a:t>
-            </a:r>
-          </a:p>
-        </p:txBody>
-      </p:sp>
-      <p:sp>
-        <p:nvSpPr>
-          <p:cNvPr id="6" name="TextBox 5">
-            <a:extLst>
-              <a:ext uri="{FF2B5EF4-FFF2-40B4-BE49-F238E27FC236}">
-                <a16:creationId xmlns:a16="http://schemas.microsoft.com/office/drawing/2014/main" id="{B2B63E4E-A4E5-C86F-B191-2DCB82644107}"/>
-              </a:ext>
-            </a:extLst>
-          </p:cNvPr>
-          <p:cNvSpPr txBox="1"/>
+              <a:t>Key Components (Component Diagram for Sale Service)</a:t>
+            </a:r>
+          </a:p>
+        </p:txBody>
+      </p:sp>
+      <p:pic>
+        <p:nvPicPr>
+          <p:cNvPr id="7" name="Picture 6">
+            <a:extLst>
+              <a:ext uri="{FF2B5EF4-FFF2-40B4-BE49-F238E27FC236}">
+                <a16:creationId xmlns:a16="http://schemas.microsoft.com/office/drawing/2014/main" id="{378B3358-698C-E521-27F5-BEA427D9D392}"/>
+              </a:ext>
+            </a:extLst>
+          </p:cNvPr>
+          <p:cNvPicPr>
+            <a:picLocks noChangeAspect="1"/>
+          </p:cNvPicPr>
           <p:nvPr/>
-        </p:nvSpPr>
+        </p:nvPicPr>
+        <p:blipFill>
+          <a:blip r:embed="rId3">
+            <a:extLst>
+              <a:ext uri="{28A0092B-C50C-407E-A947-70E740481C1C}">
+                <a14:useLocalDpi xmlns:a14="http://schemas.microsoft.com/office/drawing/2010/main" val="0"/>
+              </a:ext>
+            </a:extLst>
+          </a:blip>
+          <a:stretch>
+            <a:fillRect/>
+          </a:stretch>
+        </p:blipFill>
         <p:spPr>
           <a:xfrm>
-            <a:off x="81002" y="864974"/>
-            <a:ext cx="10059776" cy="523220"/>
+            <a:off x="618581" y="1222187"/>
+            <a:ext cx="9151620" cy="5204460"/>
           </a:xfrm>
           <a:prstGeom prst="rect">
             <a:avLst/>
           </a:prstGeom>
-          <a:noFill/>
         </p:spPr>
-        <p:txBody>
-          <a:bodyPr wrap="square">
-            <a:spAutoFit/>
-          </a:bodyPr>
-          <a:lstStyle/>
-          <a:p>
-            <a:r>
-              <a:rPr lang="en-US" sz="1400" dirty="0"/>
-              <a:t>Describe the technologies, frameworks, and tools used to build, deploy, and operate the proposed solution. This includes programming languages, platforms, databases, integration tools, and monitoring solutions.</a:t>
-            </a:r>
-          </a:p>
-        </p:txBody>
-      </p:sp>
+      </p:pic>
     </p:spTree>
     <p:extLst>
       <p:ext uri="{BB962C8B-B14F-4D97-AF65-F5344CB8AC3E}">
-        <p14:creationId xmlns:p14="http://schemas.microsoft.com/office/powerpoint/2010/main" val="4188361211"/>
+        <p14:creationId xmlns:p14="http://schemas.microsoft.com/office/powerpoint/2010/main" val="3416017641"/>
       </p:ext>
     </p:extLst>
   </p:cSld>
@@ -6840,10 +5650,10 @@
       </p:sp>
       <p:sp>
         <p:nvSpPr>
-          <p:cNvPr id="5" name="TextBox 4">
-            <a:extLst>
-              <a:ext uri="{FF2B5EF4-FFF2-40B4-BE49-F238E27FC236}">
-                <a16:creationId xmlns:a16="http://schemas.microsoft.com/office/drawing/2014/main" id="{D3771C60-1D3F-DE00-5BFB-A54ED1175548}"/>
+          <p:cNvPr id="4" name="TextBox 3">
+            <a:extLst>
+              <a:ext uri="{FF2B5EF4-FFF2-40B4-BE49-F238E27FC236}">
+                <a16:creationId xmlns:a16="http://schemas.microsoft.com/office/drawing/2014/main" id="{2BBA8B55-BEB5-5E54-D328-A8D0F3CE60FD}"/>
               </a:ext>
             </a:extLst>
           </p:cNvPr>
@@ -6852,8 +5662,8 @@
         </p:nvSpPr>
         <p:spPr>
           <a:xfrm>
-            <a:off x="140043" y="1029730"/>
-            <a:ext cx="9003957" cy="1351588"/>
+            <a:off x="140043" y="932935"/>
+            <a:ext cx="11203460" cy="5262979"/>
           </a:xfrm>
           <a:prstGeom prst="rect">
             <a:avLst/>
@@ -6866,15 +5676,240 @@
           </a:bodyPr>
           <a:lstStyle/>
           <a:p>
-            <a:pPr>
+            <a:pPr marL="285750" indent="-285750">
               <a:lnSpc>
                 <a:spcPct val="150000"/>
               </a:lnSpc>
-            </a:pPr>
-            <a:r>
-              <a:rPr lang="en-US" sz="1400" dirty="0"/>
-              <a:t>Describe the summary of the solution proposal, including the overall scope of architecture covered in this document. Highlight the key design decisions taken during the solution analysis. Include other important considerations such as regulatory requirements, architectural constraints, integration needs, security considerations, and any dependencies that may impact the design.</a:t>
-            </a:r>
+              <a:buFont typeface="Arial" panose="020B0604020202020204" pitchFamily="34" charset="0"/>
+              <a:buChar char="•"/>
+            </a:pPr>
+            <a:r>
+              <a:rPr lang="en-US" sz="1400" dirty="0"/>
+              <a:t>G&amp;G </a:t>
+            </a:r>
+            <a:r>
+              <a:rPr lang="en-US" sz="1400" dirty="0" err="1"/>
+              <a:t>Eservice</a:t>
+            </a:r>
+            <a:r>
+              <a:rPr lang="en-US" sz="1400" dirty="0"/>
+              <a:t> provides a wide range of digital services, including </a:t>
+            </a:r>
+            <a:r>
+              <a:rPr lang="en-US" sz="1400" b="1" dirty="0"/>
+              <a:t>Top-up, YPS Billing, Cash Transactions, Meter Billing, Canal+, Skynet subscriptions, and </a:t>
+            </a:r>
+            <a:r>
+              <a:rPr lang="en-US" sz="1400" b="1" dirty="0" err="1"/>
+              <a:t>MMBus</a:t>
+            </a:r>
+            <a:r>
+              <a:rPr lang="en-US" sz="1400" b="1" dirty="0"/>
+              <a:t> integration</a:t>
+            </a:r>
+            <a:r>
+              <a:rPr lang="en-US" sz="1400" dirty="0"/>
+              <a:t>, through the </a:t>
+            </a:r>
+            <a:r>
+              <a:rPr lang="en-US" sz="1400" b="1" dirty="0"/>
+              <a:t>CCN </a:t>
+            </a:r>
+            <a:r>
+              <a:rPr lang="en-US" sz="1400" b="1" dirty="0" err="1"/>
+              <a:t>EService</a:t>
+            </a:r>
+            <a:r>
+              <a:rPr lang="en-US" sz="1400" b="1" dirty="0"/>
+              <a:t> Middleware</a:t>
+            </a:r>
+            <a:r>
+              <a:rPr lang="en-US" sz="1400" dirty="0"/>
+              <a:t>. Sales data is synchronized with </a:t>
+            </a:r>
+            <a:r>
+              <a:rPr lang="en-US" sz="1400" b="1" dirty="0"/>
+              <a:t>Microsoft AX and D365</a:t>
+            </a:r>
+            <a:r>
+              <a:rPr lang="en-US" sz="1400" dirty="0"/>
+              <a:t>.</a:t>
+            </a:r>
+          </a:p>
+          <a:p>
+            <a:pPr marL="285750" indent="-285750">
+              <a:lnSpc>
+                <a:spcPct val="150000"/>
+              </a:lnSpc>
+              <a:buFont typeface="Arial" panose="020B0604020202020204" pitchFamily="34" charset="0"/>
+              <a:buChar char="•"/>
+            </a:pPr>
+            <a:r>
+              <a:rPr lang="en-US" sz="1400" dirty="0"/>
+              <a:t>With the increasing transaction volume and system usage, the current platform faces challenges in  </a:t>
+            </a:r>
+            <a:r>
+              <a:rPr lang="en-US" sz="1400" b="1" dirty="0"/>
+              <a:t>performance, scalability, and data loss which lead to financial lost</a:t>
+            </a:r>
+            <a:r>
+              <a:rPr lang="en-US" sz="1400" dirty="0"/>
+              <a:t>, primarily due to synchronous processing and growing data size.</a:t>
+            </a:r>
+          </a:p>
+          <a:p>
+            <a:pPr marL="285750" indent="-285750">
+              <a:lnSpc>
+                <a:spcPct val="150000"/>
+              </a:lnSpc>
+              <a:buFont typeface="Arial" panose="020B0604020202020204" pitchFamily="34" charset="0"/>
+              <a:buChar char="•"/>
+            </a:pPr>
+            <a:r>
+              <a:rPr lang="en-US" sz="1400" dirty="0"/>
+              <a:t>To address these challenges, following services are selected for </a:t>
+            </a:r>
+            <a:r>
+              <a:rPr lang="en-US" sz="1400" b="1" dirty="0"/>
+              <a:t>revamp</a:t>
+            </a:r>
+            <a:r>
+              <a:rPr lang="en-US" sz="1400" dirty="0"/>
+              <a:t> and </a:t>
+            </a:r>
+            <a:r>
+              <a:rPr lang="en-US" sz="1400" b="1" dirty="0"/>
+              <a:t>enhancement</a:t>
+            </a:r>
+            <a:r>
+              <a:rPr lang="en-US" sz="1400" dirty="0"/>
+              <a:t>  to align with business needs and cover problems.</a:t>
+            </a:r>
+          </a:p>
+          <a:p>
+            <a:pPr marL="800100" lvl="1" indent="-342900">
+              <a:lnSpc>
+                <a:spcPct val="150000"/>
+              </a:lnSpc>
+              <a:buFont typeface="+mj-lt"/>
+              <a:buAutoNum type="arabicPeriod"/>
+            </a:pPr>
+            <a:r>
+              <a:rPr lang="en-US" sz="1400" dirty="0"/>
+              <a:t> </a:t>
+            </a:r>
+            <a:r>
+              <a:rPr lang="en-US" sz="1400" b="1" dirty="0"/>
+              <a:t>YPS Services (Revamp):</a:t>
+            </a:r>
+            <a:br>
+              <a:rPr lang="en-US" sz="1400" dirty="0"/>
+            </a:br>
+            <a:r>
+              <a:rPr lang="en-US" sz="1400" dirty="0"/>
+              <a:t>Full redesign of the service flow to improve response time and prevent data loss by using  Redis, Rabbit MQ  and separate service</a:t>
+            </a:r>
+          </a:p>
+          <a:p>
+            <a:pPr marL="800100" lvl="1" indent="-342900">
+              <a:lnSpc>
+                <a:spcPct val="150000"/>
+              </a:lnSpc>
+              <a:buFont typeface="+mj-lt"/>
+              <a:buAutoNum type="arabicPeriod"/>
+            </a:pPr>
+            <a:r>
+              <a:rPr lang="en-US" sz="1400" b="1" dirty="0"/>
+              <a:t>Bill &amp; Subscription Services (Enhancement):</a:t>
+            </a:r>
+            <a:br>
+              <a:rPr lang="en-US" sz="1400" dirty="0"/>
+            </a:br>
+            <a:r>
+              <a:rPr lang="en-US" sz="1400" dirty="0"/>
+              <a:t>Improve processing efficiency by optimizing existing logic and system flow with the use of Redis, Rabbit MQ and process separation.</a:t>
+            </a:r>
+          </a:p>
+          <a:p>
+            <a:pPr marL="800100" lvl="1" indent="-342900">
+              <a:lnSpc>
+                <a:spcPct val="150000"/>
+              </a:lnSpc>
+              <a:buFont typeface="+mj-lt"/>
+              <a:buAutoNum type="arabicPeriod"/>
+            </a:pPr>
+            <a:r>
+              <a:rPr lang="en-US" sz="1400" b="1" dirty="0"/>
+              <a:t>Sale Data Synchronization (Enhancement):</a:t>
+            </a:r>
+            <a:br>
+              <a:rPr lang="en-US" sz="1400" dirty="0"/>
+            </a:br>
+            <a:r>
+              <a:rPr lang="en-US" sz="1400" dirty="0"/>
+              <a:t>Improve synchronization with Microsoft AX and D365 by introducing </a:t>
+            </a:r>
+            <a:r>
+              <a:rPr lang="en-US" sz="1400" b="1" dirty="0"/>
+              <a:t>asynchronous jobs for parallel processing </a:t>
+            </a:r>
+            <a:r>
+              <a:rPr lang="en-US" sz="1400" dirty="0"/>
+              <a:t>and </a:t>
+            </a:r>
+            <a:r>
+              <a:rPr lang="en-US" sz="1400" b="1" dirty="0"/>
+              <a:t>using batch inserts instead of single inserts</a:t>
+            </a:r>
+            <a:r>
+              <a:rPr lang="en-US" sz="1400" dirty="0"/>
+              <a:t>.</a:t>
+            </a:r>
+          </a:p>
+          <a:p>
+            <a:pPr marL="800100" lvl="1" indent="-342900">
+              <a:lnSpc>
+                <a:spcPct val="150000"/>
+              </a:lnSpc>
+              <a:buFont typeface="+mj-lt"/>
+              <a:buAutoNum type="arabicPeriod"/>
+            </a:pPr>
+            <a:r>
+              <a:rPr lang="en-US" sz="1400" b="1" dirty="0"/>
+              <a:t>Data Management:</a:t>
+            </a:r>
+            <a:br>
+              <a:rPr lang="en-US" sz="1400" dirty="0"/>
+            </a:br>
+            <a:r>
+              <a:rPr lang="en-US" sz="1400" dirty="0"/>
+              <a:t>Implement </a:t>
+            </a:r>
+            <a:r>
+              <a:rPr lang="en-US" sz="1400" b="1" dirty="0"/>
+              <a:t>data archiving </a:t>
+            </a:r>
+            <a:r>
+              <a:rPr lang="en-US" sz="1400" dirty="0"/>
+              <a:t>to manage increasing data volume and maintain system performance</a:t>
+            </a:r>
+          </a:p>
+          <a:p>
+            <a:pPr marL="285750" indent="-285750">
+              <a:buFont typeface="Arial" panose="020B0604020202020204" pitchFamily="34" charset="0"/>
+              <a:buChar char="•"/>
+            </a:pPr>
+            <a:endParaRPr lang="en-US" sz="1400" dirty="0"/>
+          </a:p>
+          <a:p>
+            <a:pPr marL="285750" indent="-285750">
+              <a:buFont typeface="Arial" panose="020B0604020202020204" pitchFamily="34" charset="0"/>
+              <a:buChar char="•"/>
+            </a:pPr>
+            <a:endParaRPr lang="en-US" sz="1400" dirty="0"/>
+          </a:p>
+          <a:p>
+            <a:endParaRPr lang="en-US" sz="1400" dirty="0"/>
           </a:p>
         </p:txBody>
       </p:sp>
@@ -6913,7 +5948,7 @@
           <p:cNvPr id="2" name="Slide Number Placeholder 1">
             <a:extLst>
               <a:ext uri="{FF2B5EF4-FFF2-40B4-BE49-F238E27FC236}">
-                <a16:creationId xmlns:a16="http://schemas.microsoft.com/office/drawing/2014/main" id="{FD9C983F-458B-06E6-E4F8-F1462FB49156}"/>
+                <a16:creationId xmlns:a16="http://schemas.microsoft.com/office/drawing/2014/main" id="{EFD5D123-49E2-F0CE-4FE5-17CB1B0FC8BE}"/>
               </a:ext>
             </a:extLst>
           </p:cNvPr>
@@ -6942,7 +5977,7 @@
           <p:cNvPr id="3" name="Text Placeholder 2">
             <a:extLst>
               <a:ext uri="{FF2B5EF4-FFF2-40B4-BE49-F238E27FC236}">
-                <a16:creationId xmlns:a16="http://schemas.microsoft.com/office/drawing/2014/main" id="{E2F2EA55-F46C-8AB0-0140-A4E9772F2B82}"/>
+                <a16:creationId xmlns:a16="http://schemas.microsoft.com/office/drawing/2014/main" id="{1CEB25EF-88E3-154B-60A8-18D70F3CBC48}"/>
               </a:ext>
             </a:extLst>
           </p:cNvPr>
@@ -6960,50 +5995,51 @@
           <a:p>
             <a:r>
               <a:rPr lang="en-US" dirty="0"/>
-              <a:t>BOM</a:t>
-            </a:r>
-          </a:p>
-        </p:txBody>
-      </p:sp>
-      <p:sp>
-        <p:nvSpPr>
-          <p:cNvPr id="10" name="TextBox 9">
-            <a:extLst>
-              <a:ext uri="{FF2B5EF4-FFF2-40B4-BE49-F238E27FC236}">
-                <a16:creationId xmlns:a16="http://schemas.microsoft.com/office/drawing/2014/main" id="{DDE052E2-0E9F-C1C3-CFB6-76339C02C630}"/>
-              </a:ext>
-            </a:extLst>
-          </p:cNvPr>
-          <p:cNvSpPr txBox="1"/>
+              <a:t>Swimlane for YPS</a:t>
+            </a:r>
+          </a:p>
+        </p:txBody>
+      </p:sp>
+      <p:pic>
+        <p:nvPicPr>
+          <p:cNvPr id="5" name="Picture 4">
+            <a:extLst>
+              <a:ext uri="{FF2B5EF4-FFF2-40B4-BE49-F238E27FC236}">
+                <a16:creationId xmlns:a16="http://schemas.microsoft.com/office/drawing/2014/main" id="{EDAAF048-E42A-5CBB-7F72-CF0B2FF46E10}"/>
+              </a:ext>
+            </a:extLst>
+          </p:cNvPr>
+          <p:cNvPicPr>
+            <a:picLocks noChangeAspect="1"/>
+          </p:cNvPicPr>
           <p:nvPr/>
-        </p:nvSpPr>
+        </p:nvPicPr>
+        <p:blipFill>
+          <a:blip r:embed="rId3">
+            <a:extLst>
+              <a:ext uri="{28A0092B-C50C-407E-A947-70E740481C1C}">
+                <a14:useLocalDpi xmlns:a14="http://schemas.microsoft.com/office/drawing/2010/main" val="0"/>
+              </a:ext>
+            </a:extLst>
+          </a:blip>
+          <a:stretch>
+            <a:fillRect/>
+          </a:stretch>
+        </p:blipFill>
         <p:spPr>
           <a:xfrm>
-            <a:off x="81001" y="980303"/>
-            <a:ext cx="10226779" cy="523220"/>
+            <a:off x="0" y="880844"/>
+            <a:ext cx="11576807" cy="5907743"/>
           </a:xfrm>
           <a:prstGeom prst="rect">
             <a:avLst/>
           </a:prstGeom>
-          <a:noFill/>
         </p:spPr>
-        <p:txBody>
-          <a:bodyPr wrap="square">
-            <a:spAutoFit/>
-          </a:bodyPr>
-          <a:lstStyle/>
-          <a:p>
-            <a:r>
-              <a:rPr lang="en-US" sz="1400" dirty="0"/>
-              <a:t>Describe the key components, systems, and modules included in the proposed solution. This section provides a clear overview of all major building blocks required to implement the architecture.</a:t>
-            </a:r>
-          </a:p>
-        </p:txBody>
-      </p:sp>
+      </p:pic>
     </p:spTree>
     <p:extLst>
       <p:ext uri="{BB962C8B-B14F-4D97-AF65-F5344CB8AC3E}">
-        <p14:creationId xmlns:p14="http://schemas.microsoft.com/office/powerpoint/2010/main" val="3489865888"/>
+        <p14:creationId xmlns:p14="http://schemas.microsoft.com/office/powerpoint/2010/main" val="3811131600"/>
       </p:ext>
     </p:extLst>
   </p:cSld>
@@ -7014,6 +6050,135 @@
 </file>
 
 <file path=ppt/slides/slide21.xml><?xml version="1.0" encoding="utf-8"?>
+<p:sld xmlns:a="http://schemas.openxmlformats.org/drawingml/2006/main" xmlns:r="http://schemas.openxmlformats.org/officeDocument/2006/relationships" xmlns:p="http://schemas.openxmlformats.org/presentationml/2006/main">
+  <p:cSld>
+    <p:spTree>
+      <p:nvGrpSpPr>
+        <p:cNvPr id="1" name="">
+          <a:extLst>
+            <a:ext uri="{FF2B5EF4-FFF2-40B4-BE49-F238E27FC236}">
+              <a16:creationId xmlns:a16="http://schemas.microsoft.com/office/drawing/2014/main" id="{8A27F542-DBA0-9524-16FC-BA6B1D1F1411}"/>
+            </a:ext>
+          </a:extLst>
+        </p:cNvPr>
+        <p:cNvGrpSpPr/>
+        <p:nvPr/>
+      </p:nvGrpSpPr>
+      <p:grpSpPr>
+        <a:xfrm>
+          <a:off x="0" y="0"/>
+          <a:ext cx="0" cy="0"/>
+          <a:chOff x="0" y="0"/>
+          <a:chExt cx="0" cy="0"/>
+        </a:xfrm>
+      </p:grpSpPr>
+      <p:sp>
+        <p:nvSpPr>
+          <p:cNvPr id="2" name="Slide Number Placeholder 1">
+            <a:extLst>
+              <a:ext uri="{FF2B5EF4-FFF2-40B4-BE49-F238E27FC236}">
+                <a16:creationId xmlns:a16="http://schemas.microsoft.com/office/drawing/2014/main" id="{51C7ABCC-1FA1-BB35-E175-D6B2530F6F86}"/>
+              </a:ext>
+            </a:extLst>
+          </p:cNvPr>
+          <p:cNvSpPr>
+            <a:spLocks noGrp="1"/>
+          </p:cNvSpPr>
+          <p:nvPr>
+            <p:ph type="sldNum" sz="quarter" idx="12"/>
+          </p:nvPr>
+        </p:nvSpPr>
+        <p:spPr/>
+        <p:txBody>
+          <a:bodyPr/>
+          <a:lstStyle/>
+          <a:p>
+            <a:fld id="{93288B1A-0894-4E52-95D8-2AC74CBED725}" type="slidenum">
+              <a:rPr lang="en-US" smtClean="0"/>
+              <a:t>21</a:t>
+            </a:fld>
+            <a:endParaRPr lang="en-US"/>
+          </a:p>
+        </p:txBody>
+      </p:sp>
+      <p:sp>
+        <p:nvSpPr>
+          <p:cNvPr id="3" name="Text Placeholder 2">
+            <a:extLst>
+              <a:ext uri="{FF2B5EF4-FFF2-40B4-BE49-F238E27FC236}">
+                <a16:creationId xmlns:a16="http://schemas.microsoft.com/office/drawing/2014/main" id="{77AC21FC-36FD-7EA7-C46A-F92486BE0EA6}"/>
+              </a:ext>
+            </a:extLst>
+          </p:cNvPr>
+          <p:cNvSpPr>
+            <a:spLocks noGrp="1"/>
+          </p:cNvSpPr>
+          <p:nvPr>
+            <p:ph type="body" idx="1"/>
+          </p:nvPr>
+        </p:nvSpPr>
+        <p:spPr/>
+        <p:txBody>
+          <a:bodyPr/>
+          <a:lstStyle/>
+          <a:p>
+            <a:r>
+              <a:rPr lang="en-US" dirty="0"/>
+              <a:t>Swimlane for G&amp;G</a:t>
+            </a:r>
+          </a:p>
+        </p:txBody>
+      </p:sp>
+      <p:pic>
+        <p:nvPicPr>
+          <p:cNvPr id="6" name="Picture 5">
+            <a:extLst>
+              <a:ext uri="{FF2B5EF4-FFF2-40B4-BE49-F238E27FC236}">
+                <a16:creationId xmlns:a16="http://schemas.microsoft.com/office/drawing/2014/main" id="{7F6BDA59-1201-1687-9327-E25AB7611660}"/>
+              </a:ext>
+            </a:extLst>
+          </p:cNvPr>
+          <p:cNvPicPr>
+            <a:picLocks noChangeAspect="1"/>
+          </p:cNvPicPr>
+          <p:nvPr/>
+        </p:nvPicPr>
+        <p:blipFill>
+          <a:blip r:embed="rId3">
+            <a:extLst>
+              <a:ext uri="{28A0092B-C50C-407E-A947-70E740481C1C}">
+                <a14:useLocalDpi xmlns:a14="http://schemas.microsoft.com/office/drawing/2010/main" val="0"/>
+              </a:ext>
+            </a:extLst>
+          </a:blip>
+          <a:stretch>
+            <a:fillRect/>
+          </a:stretch>
+        </p:blipFill>
+        <p:spPr>
+          <a:xfrm>
+            <a:off x="279576" y="902611"/>
+            <a:ext cx="11431778" cy="5709203"/>
+          </a:xfrm>
+          <a:prstGeom prst="rect">
+            <a:avLst/>
+          </a:prstGeom>
+        </p:spPr>
+      </p:pic>
+    </p:spTree>
+    <p:extLst>
+      <p:ext uri="{BB962C8B-B14F-4D97-AF65-F5344CB8AC3E}">
+        <p14:creationId xmlns:p14="http://schemas.microsoft.com/office/powerpoint/2010/main" val="3219006216"/>
+      </p:ext>
+    </p:extLst>
+  </p:cSld>
+  <p:clrMapOvr>
+    <a:masterClrMapping/>
+  </p:clrMapOvr>
+</p:sld>
+</file>
+
+<file path=ppt/slides/slide22.xml><?xml version="1.0" encoding="utf-8"?>
 <p:sld xmlns:a="http://schemas.openxmlformats.org/drawingml/2006/main" xmlns:r="http://schemas.openxmlformats.org/officeDocument/2006/relationships" xmlns:p="http://schemas.openxmlformats.org/presentationml/2006/main">
   <p:cSld>
     <p:spTree>
@@ -7035,7 +6200,7 @@
           <p:cNvPr id="2" name="Slide Number Placeholder 1">
             <a:extLst>
               <a:ext uri="{FF2B5EF4-FFF2-40B4-BE49-F238E27FC236}">
-                <a16:creationId xmlns:a16="http://schemas.microsoft.com/office/drawing/2014/main" id="{FD9C983F-458B-06E6-E4F8-F1462FB49156}"/>
+                <a16:creationId xmlns:a16="http://schemas.microsoft.com/office/drawing/2014/main" id="{2C6D1A3D-D8D1-97E3-EFD0-0A8F2EB4A746}"/>
               </a:ext>
             </a:extLst>
           </p:cNvPr>
@@ -7053,7 +6218,1015 @@
           <a:p>
             <a:fld id="{93288B1A-0894-4E52-95D8-2AC74CBED725}" type="slidenum">
               <a:rPr lang="en-US" smtClean="0"/>
-              <a:t>21</a:t>
+              <a:t>22</a:t>
+            </a:fld>
+            <a:endParaRPr lang="en-US"/>
+          </a:p>
+        </p:txBody>
+      </p:sp>
+      <p:sp>
+        <p:nvSpPr>
+          <p:cNvPr id="3" name="Text Placeholder 2">
+            <a:extLst>
+              <a:ext uri="{FF2B5EF4-FFF2-40B4-BE49-F238E27FC236}">
+                <a16:creationId xmlns:a16="http://schemas.microsoft.com/office/drawing/2014/main" id="{6D3407A6-CDE3-D3A9-EF51-C54D92FB1B5D}"/>
+              </a:ext>
+            </a:extLst>
+          </p:cNvPr>
+          <p:cNvSpPr>
+            <a:spLocks noGrp="1"/>
+          </p:cNvSpPr>
+          <p:nvPr>
+            <p:ph type="body" idx="1"/>
+          </p:nvPr>
+        </p:nvSpPr>
+        <p:spPr/>
+        <p:txBody>
+          <a:bodyPr/>
+          <a:lstStyle/>
+          <a:p>
+            <a:r>
+              <a:rPr lang="en-US" dirty="0"/>
+              <a:t>Deployment Diagram</a:t>
+            </a:r>
+          </a:p>
+        </p:txBody>
+      </p:sp>
+      <p:pic>
+        <p:nvPicPr>
+          <p:cNvPr id="6" name="Picture 5">
+            <a:extLst>
+              <a:ext uri="{FF2B5EF4-FFF2-40B4-BE49-F238E27FC236}">
+                <a16:creationId xmlns:a16="http://schemas.microsoft.com/office/drawing/2014/main" id="{211B43FD-952E-058D-E21C-FE52A1B36DD1}"/>
+              </a:ext>
+            </a:extLst>
+          </p:cNvPr>
+          <p:cNvPicPr>
+            <a:picLocks noChangeAspect="1"/>
+          </p:cNvPicPr>
+          <p:nvPr/>
+        </p:nvPicPr>
+        <p:blipFill>
+          <a:blip r:embed="rId2">
+            <a:extLst>
+              <a:ext uri="{28A0092B-C50C-407E-A947-70E740481C1C}">
+                <a14:useLocalDpi xmlns:a14="http://schemas.microsoft.com/office/drawing/2010/main" val="0"/>
+              </a:ext>
+            </a:extLst>
+          </a:blip>
+          <a:stretch>
+            <a:fillRect/>
+          </a:stretch>
+        </p:blipFill>
+        <p:spPr>
+          <a:xfrm>
+            <a:off x="81002" y="663764"/>
+            <a:ext cx="9281160" cy="5958840"/>
+          </a:xfrm>
+          <a:prstGeom prst="rect">
+            <a:avLst/>
+          </a:prstGeom>
+        </p:spPr>
+      </p:pic>
+    </p:spTree>
+    <p:extLst>
+      <p:ext uri="{BB962C8B-B14F-4D97-AF65-F5344CB8AC3E}">
+        <p14:creationId xmlns:p14="http://schemas.microsoft.com/office/powerpoint/2010/main" val="296769422"/>
+      </p:ext>
+    </p:extLst>
+  </p:cSld>
+  <p:clrMapOvr>
+    <a:masterClrMapping/>
+  </p:clrMapOvr>
+</p:sld>
+</file>
+
+<file path=ppt/slides/slide23.xml><?xml version="1.0" encoding="utf-8"?>
+<p:sld xmlns:a="http://schemas.openxmlformats.org/drawingml/2006/main" xmlns:r="http://schemas.openxmlformats.org/officeDocument/2006/relationships" xmlns:p="http://schemas.openxmlformats.org/presentationml/2006/main">
+  <p:cSld>
+    <p:spTree>
+      <p:nvGrpSpPr>
+        <p:cNvPr id="1" name="">
+          <a:extLst>
+            <a:ext uri="{FF2B5EF4-FFF2-40B4-BE49-F238E27FC236}">
+              <a16:creationId xmlns:a16="http://schemas.microsoft.com/office/drawing/2014/main" id="{1E66E405-AAC8-05D8-7ECE-81E9975F7576}"/>
+            </a:ext>
+          </a:extLst>
+        </p:cNvPr>
+        <p:cNvGrpSpPr/>
+        <p:nvPr/>
+      </p:nvGrpSpPr>
+      <p:grpSpPr>
+        <a:xfrm>
+          <a:off x="0" y="0"/>
+          <a:ext cx="0" cy="0"/>
+          <a:chOff x="0" y="0"/>
+          <a:chExt cx="0" cy="0"/>
+        </a:xfrm>
+      </p:grpSpPr>
+      <p:sp>
+        <p:nvSpPr>
+          <p:cNvPr id="2" name="Slide Number Placeholder 1">
+            <a:extLst>
+              <a:ext uri="{FF2B5EF4-FFF2-40B4-BE49-F238E27FC236}">
+                <a16:creationId xmlns:a16="http://schemas.microsoft.com/office/drawing/2014/main" id="{1291064B-73D6-452F-64A9-1328B8A6F04D}"/>
+              </a:ext>
+            </a:extLst>
+          </p:cNvPr>
+          <p:cNvSpPr>
+            <a:spLocks noGrp="1"/>
+          </p:cNvSpPr>
+          <p:nvPr>
+            <p:ph type="sldNum" sz="quarter" idx="12"/>
+          </p:nvPr>
+        </p:nvSpPr>
+        <p:spPr/>
+        <p:txBody>
+          <a:bodyPr/>
+          <a:lstStyle/>
+          <a:p>
+            <a:fld id="{93288B1A-0894-4E52-95D8-2AC74CBED725}" type="slidenum">
+              <a:rPr lang="en-US" smtClean="0"/>
+              <a:t>23</a:t>
+            </a:fld>
+            <a:endParaRPr lang="en-US"/>
+          </a:p>
+        </p:txBody>
+      </p:sp>
+      <p:sp>
+        <p:nvSpPr>
+          <p:cNvPr id="3" name="Text Placeholder 2">
+            <a:extLst>
+              <a:ext uri="{FF2B5EF4-FFF2-40B4-BE49-F238E27FC236}">
+                <a16:creationId xmlns:a16="http://schemas.microsoft.com/office/drawing/2014/main" id="{87D4E100-3623-3D48-9C5F-C62975D655F4}"/>
+              </a:ext>
+            </a:extLst>
+          </p:cNvPr>
+          <p:cNvSpPr>
+            <a:spLocks noGrp="1"/>
+          </p:cNvSpPr>
+          <p:nvPr>
+            <p:ph type="body" idx="1"/>
+          </p:nvPr>
+        </p:nvSpPr>
+        <p:spPr/>
+        <p:txBody>
+          <a:bodyPr/>
+          <a:lstStyle/>
+          <a:p>
+            <a:r>
+              <a:rPr lang="en-US" dirty="0"/>
+              <a:t>Database Archival &amp; Housekeeping</a:t>
+            </a:r>
+          </a:p>
+        </p:txBody>
+      </p:sp>
+      <p:sp>
+        <p:nvSpPr>
+          <p:cNvPr id="10" name="TextBox 9">
+            <a:extLst>
+              <a:ext uri="{FF2B5EF4-FFF2-40B4-BE49-F238E27FC236}">
+                <a16:creationId xmlns:a16="http://schemas.microsoft.com/office/drawing/2014/main" id="{A2C2AD31-6C98-BA61-C179-828B8100A1FB}"/>
+              </a:ext>
+            </a:extLst>
+          </p:cNvPr>
+          <p:cNvSpPr txBox="1"/>
+          <p:nvPr/>
+        </p:nvSpPr>
+        <p:spPr>
+          <a:xfrm>
+            <a:off x="609599" y="1015483"/>
+            <a:ext cx="10412627" cy="646331"/>
+          </a:xfrm>
+          <a:prstGeom prst="rect">
+            <a:avLst/>
+          </a:prstGeom>
+          <a:noFill/>
+        </p:spPr>
+        <p:txBody>
+          <a:bodyPr wrap="square">
+            <a:spAutoFit/>
+          </a:bodyPr>
+          <a:lstStyle/>
+          <a:p>
+            <a:r>
+              <a:rPr lang="en-US" dirty="0"/>
+              <a:t>Prevent performance degradation, synchronization delays, and failed operations caused by large transaction volumes.</a:t>
+            </a:r>
+          </a:p>
+        </p:txBody>
+      </p:sp>
+      <p:sp>
+        <p:nvSpPr>
+          <p:cNvPr id="12" name="TextBox 11">
+            <a:extLst>
+              <a:ext uri="{FF2B5EF4-FFF2-40B4-BE49-F238E27FC236}">
+                <a16:creationId xmlns:a16="http://schemas.microsoft.com/office/drawing/2014/main" id="{D5300EA8-FBFB-EE40-4BB8-3972B0782F49}"/>
+              </a:ext>
+            </a:extLst>
+          </p:cNvPr>
+          <p:cNvSpPr txBox="1"/>
+          <p:nvPr/>
+        </p:nvSpPr>
+        <p:spPr>
+          <a:xfrm>
+            <a:off x="510746" y="1822273"/>
+            <a:ext cx="9522940" cy="646331"/>
+          </a:xfrm>
+          <a:prstGeom prst="rect">
+            <a:avLst/>
+          </a:prstGeom>
+          <a:noFill/>
+        </p:spPr>
+        <p:txBody>
+          <a:bodyPr wrap="square">
+            <a:spAutoFit/>
+          </a:bodyPr>
+          <a:lstStyle/>
+          <a:p>
+            <a:pPr>
+              <a:buNone/>
+            </a:pPr>
+            <a:r>
+              <a:rPr lang="en-US" b="1" dirty="0"/>
+              <a:t>Data Retention Requirement</a:t>
+            </a:r>
+          </a:p>
+          <a:p>
+            <a:pPr>
+              <a:buFont typeface="Arial" panose="020B0604020202020204" pitchFamily="34" charset="0"/>
+              <a:buChar char="•"/>
+            </a:pPr>
+            <a:r>
+              <a:rPr lang="en-US" dirty="0"/>
+              <a:t>Maintain active transaction data up to 6 months in primary database </a:t>
+            </a:r>
+          </a:p>
+        </p:txBody>
+      </p:sp>
+      <p:sp>
+        <p:nvSpPr>
+          <p:cNvPr id="14" name="TextBox 13">
+            <a:extLst>
+              <a:ext uri="{FF2B5EF4-FFF2-40B4-BE49-F238E27FC236}">
+                <a16:creationId xmlns:a16="http://schemas.microsoft.com/office/drawing/2014/main" id="{BCA4C2EF-2F48-3409-56D4-968E842243EF}"/>
+              </a:ext>
+            </a:extLst>
+          </p:cNvPr>
+          <p:cNvSpPr txBox="1"/>
+          <p:nvPr/>
+        </p:nvSpPr>
+        <p:spPr>
+          <a:xfrm>
+            <a:off x="510746" y="2593364"/>
+            <a:ext cx="10898660" cy="4019690"/>
+          </a:xfrm>
+          <a:prstGeom prst="rect">
+            <a:avLst/>
+          </a:prstGeom>
+          <a:noFill/>
+        </p:spPr>
+        <p:txBody>
+          <a:bodyPr wrap="square">
+            <a:spAutoFit/>
+          </a:bodyPr>
+          <a:lstStyle/>
+          <a:p>
+            <a:pPr>
+              <a:lnSpc>
+                <a:spcPct val="150000"/>
+              </a:lnSpc>
+              <a:buNone/>
+            </a:pPr>
+            <a:r>
+              <a:rPr lang="en-US" b="1" dirty="0"/>
+              <a:t>Archival Strategy</a:t>
+            </a:r>
+          </a:p>
+          <a:p>
+            <a:pPr>
+              <a:lnSpc>
+                <a:spcPct val="150000"/>
+              </a:lnSpc>
+              <a:buNone/>
+            </a:pPr>
+            <a:r>
+              <a:rPr lang="en-US" sz="1400" b="1" dirty="0"/>
+              <a:t>Archival Rule</a:t>
+            </a:r>
+            <a:endParaRPr lang="en-US" sz="1400" dirty="0"/>
+          </a:p>
+          <a:p>
+            <a:pPr>
+              <a:lnSpc>
+                <a:spcPct val="150000"/>
+              </a:lnSpc>
+              <a:buFont typeface="Arial" panose="020B0604020202020204" pitchFamily="34" charset="0"/>
+              <a:buChar char="•"/>
+            </a:pPr>
+            <a:r>
+              <a:rPr lang="en-US" dirty="0"/>
+              <a:t>Move data </a:t>
+            </a:r>
+            <a:r>
+              <a:rPr lang="en-US" b="1" dirty="0"/>
+              <a:t>older than 6 months</a:t>
+            </a:r>
+            <a:r>
+              <a:rPr lang="en-US" dirty="0"/>
+              <a:t> from primary DB → archive storage </a:t>
+            </a:r>
+          </a:p>
+          <a:p>
+            <a:pPr>
+              <a:lnSpc>
+                <a:spcPct val="150000"/>
+              </a:lnSpc>
+              <a:buNone/>
+            </a:pPr>
+            <a:r>
+              <a:rPr lang="en-US" sz="1400" b="1" dirty="0"/>
+              <a:t>Storage Design</a:t>
+            </a:r>
+            <a:endParaRPr lang="en-US" sz="1400" dirty="0"/>
+          </a:p>
+          <a:p>
+            <a:pPr>
+              <a:lnSpc>
+                <a:spcPct val="150000"/>
+              </a:lnSpc>
+              <a:buFont typeface="Arial" panose="020B0604020202020204" pitchFamily="34" charset="0"/>
+              <a:buChar char="•"/>
+            </a:pPr>
+            <a:r>
+              <a:rPr lang="en-US" dirty="0"/>
+              <a:t>Archive data stored in </a:t>
+            </a:r>
+            <a:r>
+              <a:rPr lang="en-US" b="1" dirty="0"/>
+              <a:t>separate schema (same DB instance)</a:t>
+            </a:r>
+            <a:r>
+              <a:rPr lang="en-US" dirty="0"/>
+              <a:t> </a:t>
+            </a:r>
+          </a:p>
+          <a:p>
+            <a:pPr>
+              <a:lnSpc>
+                <a:spcPct val="150000"/>
+              </a:lnSpc>
+              <a:buFont typeface="Arial" panose="020B0604020202020204" pitchFamily="34" charset="0"/>
+              <a:buChar char="•"/>
+            </a:pPr>
+            <a:r>
+              <a:rPr lang="en-US" dirty="0"/>
+              <a:t>Maintain </a:t>
+            </a:r>
+            <a:r>
+              <a:rPr lang="en-US" b="1" dirty="0"/>
+              <a:t>same table structure</a:t>
+            </a:r>
+            <a:r>
+              <a:rPr lang="en-US" dirty="0"/>
+              <a:t> for consistency and easy access </a:t>
+            </a:r>
+          </a:p>
+          <a:p>
+            <a:pPr>
+              <a:lnSpc>
+                <a:spcPct val="150000"/>
+              </a:lnSpc>
+              <a:buNone/>
+            </a:pPr>
+            <a:r>
+              <a:rPr lang="en-US" sz="1400" b="1" dirty="0"/>
+              <a:t>Archival Approach</a:t>
+            </a:r>
+            <a:endParaRPr lang="en-US" sz="1400" dirty="0"/>
+          </a:p>
+          <a:p>
+            <a:pPr>
+              <a:lnSpc>
+                <a:spcPct val="150000"/>
+              </a:lnSpc>
+              <a:buFont typeface="Arial" panose="020B0604020202020204" pitchFamily="34" charset="0"/>
+              <a:buChar char="•"/>
+            </a:pPr>
+            <a:r>
+              <a:rPr lang="en-US" dirty="0"/>
+              <a:t>Perform </a:t>
+            </a:r>
+            <a:r>
+              <a:rPr lang="en-US" b="1" dirty="0"/>
+              <a:t>monthly monitoring and batch archival</a:t>
+            </a:r>
+            <a:r>
+              <a:rPr lang="en-US" dirty="0"/>
+              <a:t> </a:t>
+            </a:r>
+          </a:p>
+          <a:p>
+            <a:pPr>
+              <a:lnSpc>
+                <a:spcPct val="150000"/>
+              </a:lnSpc>
+              <a:buFont typeface="Arial" panose="020B0604020202020204" pitchFamily="34" charset="0"/>
+              <a:buChar char="•"/>
+            </a:pPr>
+            <a:r>
+              <a:rPr lang="en-US" dirty="0"/>
+              <a:t>Archive in </a:t>
+            </a:r>
+            <a:r>
+              <a:rPr lang="en-US" b="1" dirty="0"/>
+              <a:t>6-month cycles</a:t>
+            </a:r>
+            <a:r>
+              <a:rPr lang="en-US" dirty="0"/>
+              <a:t> (or </a:t>
+            </a:r>
+            <a:r>
+              <a:rPr lang="en-US" b="1" dirty="0"/>
+              <a:t>4-month for audit-sensitive data</a:t>
+            </a:r>
+            <a:r>
+              <a:rPr lang="en-US" dirty="0"/>
+              <a:t>) </a:t>
+            </a:r>
+          </a:p>
+          <a:p>
+            <a:pPr>
+              <a:lnSpc>
+                <a:spcPct val="150000"/>
+              </a:lnSpc>
+              <a:buFont typeface="Arial" panose="020B0604020202020204" pitchFamily="34" charset="0"/>
+              <a:buChar char="•"/>
+            </a:pPr>
+            <a:r>
+              <a:rPr lang="en-US" dirty="0"/>
+              <a:t>Ensure </a:t>
+            </a:r>
+            <a:r>
+              <a:rPr lang="en-US" b="1" dirty="0"/>
+              <a:t>no impact on live transaction processing</a:t>
+            </a:r>
+            <a:r>
+              <a:rPr lang="en-US" dirty="0"/>
+              <a:t> </a:t>
+            </a:r>
+          </a:p>
+        </p:txBody>
+      </p:sp>
+    </p:spTree>
+    <p:extLst>
+      <p:ext uri="{BB962C8B-B14F-4D97-AF65-F5344CB8AC3E}">
+        <p14:creationId xmlns:p14="http://schemas.microsoft.com/office/powerpoint/2010/main" val="777141570"/>
+      </p:ext>
+    </p:extLst>
+  </p:cSld>
+  <p:clrMapOvr>
+    <a:masterClrMapping/>
+  </p:clrMapOvr>
+</p:sld>
+</file>
+
+<file path=ppt/slides/slide24.xml><?xml version="1.0" encoding="utf-8"?>
+<p:sld xmlns:a="http://schemas.openxmlformats.org/drawingml/2006/main" xmlns:r="http://schemas.openxmlformats.org/officeDocument/2006/relationships" xmlns:p="http://schemas.openxmlformats.org/presentationml/2006/main">
+  <p:cSld>
+    <p:spTree>
+      <p:nvGrpSpPr>
+        <p:cNvPr id="1" name="">
+          <a:extLst>
+            <a:ext uri="{FF2B5EF4-FFF2-40B4-BE49-F238E27FC236}">
+              <a16:creationId xmlns:a16="http://schemas.microsoft.com/office/drawing/2014/main" id="{9B96A7D3-9466-8132-004A-C3EC05BCF37C}"/>
+            </a:ext>
+          </a:extLst>
+        </p:cNvPr>
+        <p:cNvGrpSpPr/>
+        <p:nvPr/>
+      </p:nvGrpSpPr>
+      <p:grpSpPr>
+        <a:xfrm>
+          <a:off x="0" y="0"/>
+          <a:ext cx="0" cy="0"/>
+          <a:chOff x="0" y="0"/>
+          <a:chExt cx="0" cy="0"/>
+        </a:xfrm>
+      </p:grpSpPr>
+      <p:sp>
+        <p:nvSpPr>
+          <p:cNvPr id="2" name="Slide Number Placeholder 1">
+            <a:extLst>
+              <a:ext uri="{FF2B5EF4-FFF2-40B4-BE49-F238E27FC236}">
+                <a16:creationId xmlns:a16="http://schemas.microsoft.com/office/drawing/2014/main" id="{29850F89-A6ED-4613-6EFC-C903C6794EB6}"/>
+              </a:ext>
+            </a:extLst>
+          </p:cNvPr>
+          <p:cNvSpPr>
+            <a:spLocks noGrp="1"/>
+          </p:cNvSpPr>
+          <p:nvPr>
+            <p:ph type="sldNum" sz="quarter" idx="12"/>
+          </p:nvPr>
+        </p:nvSpPr>
+        <p:spPr/>
+        <p:txBody>
+          <a:bodyPr/>
+          <a:lstStyle/>
+          <a:p>
+            <a:fld id="{93288B1A-0894-4E52-95D8-2AC74CBED725}" type="slidenum">
+              <a:rPr lang="en-US" smtClean="0"/>
+              <a:t>24</a:t>
+            </a:fld>
+            <a:endParaRPr lang="en-US"/>
+          </a:p>
+        </p:txBody>
+      </p:sp>
+      <p:sp>
+        <p:nvSpPr>
+          <p:cNvPr id="3" name="Text Placeholder 2">
+            <a:extLst>
+              <a:ext uri="{FF2B5EF4-FFF2-40B4-BE49-F238E27FC236}">
+                <a16:creationId xmlns:a16="http://schemas.microsoft.com/office/drawing/2014/main" id="{F804BB2C-01E2-3306-4F2E-39D93263EDF2}"/>
+              </a:ext>
+            </a:extLst>
+          </p:cNvPr>
+          <p:cNvSpPr>
+            <a:spLocks noGrp="1"/>
+          </p:cNvSpPr>
+          <p:nvPr>
+            <p:ph type="body" idx="1"/>
+          </p:nvPr>
+        </p:nvSpPr>
+        <p:spPr/>
+        <p:txBody>
+          <a:bodyPr/>
+          <a:lstStyle/>
+          <a:p>
+            <a:r>
+              <a:rPr lang="en-US" dirty="0"/>
+              <a:t>Database Archival &amp; Housekeeping</a:t>
+            </a:r>
+          </a:p>
+        </p:txBody>
+      </p:sp>
+      <p:sp>
+        <p:nvSpPr>
+          <p:cNvPr id="5" name="TextBox 4">
+            <a:extLst>
+              <a:ext uri="{FF2B5EF4-FFF2-40B4-BE49-F238E27FC236}">
+                <a16:creationId xmlns:a16="http://schemas.microsoft.com/office/drawing/2014/main" id="{989BE93A-4FF5-072A-8405-0BDF21D4D8F8}"/>
+              </a:ext>
+            </a:extLst>
+          </p:cNvPr>
+          <p:cNvSpPr txBox="1"/>
+          <p:nvPr/>
+        </p:nvSpPr>
+        <p:spPr>
+          <a:xfrm>
+            <a:off x="593124" y="944936"/>
+            <a:ext cx="6096000" cy="4247317"/>
+          </a:xfrm>
+          <a:prstGeom prst="rect">
+            <a:avLst/>
+          </a:prstGeom>
+          <a:noFill/>
+        </p:spPr>
+        <p:txBody>
+          <a:bodyPr wrap="square">
+            <a:spAutoFit/>
+          </a:bodyPr>
+          <a:lstStyle/>
+          <a:p>
+            <a:pPr>
+              <a:buNone/>
+            </a:pPr>
+            <a:r>
+              <a:rPr lang="en-US" b="1" dirty="0"/>
+              <a:t>Housekeeping &amp; Cleanup</a:t>
+            </a:r>
+          </a:p>
+          <a:p>
+            <a:pPr>
+              <a:buNone/>
+            </a:pPr>
+            <a:r>
+              <a:rPr lang="en-US" b="1" dirty="0"/>
+              <a:t>Data Cleanup</a:t>
+            </a:r>
+            <a:endParaRPr lang="en-US" dirty="0"/>
+          </a:p>
+          <a:p>
+            <a:pPr>
+              <a:buFont typeface="Arial" panose="020B0604020202020204" pitchFamily="34" charset="0"/>
+              <a:buChar char="•"/>
+            </a:pPr>
+            <a:r>
+              <a:rPr lang="en-US" dirty="0"/>
+              <a:t>Remove archived data from primary table </a:t>
+            </a:r>
+          </a:p>
+          <a:p>
+            <a:pPr>
+              <a:buFont typeface="Arial" panose="020B0604020202020204" pitchFamily="34" charset="0"/>
+              <a:buChar char="•"/>
+            </a:pPr>
+            <a:r>
+              <a:rPr lang="en-US" dirty="0"/>
+              <a:t>Maintain </a:t>
+            </a:r>
+            <a:r>
+              <a:rPr lang="en-US" b="1" dirty="0"/>
+              <a:t>only latest 6 months</a:t>
+            </a:r>
+            <a:r>
+              <a:rPr lang="en-US" dirty="0"/>
+              <a:t> in main DB </a:t>
+            </a:r>
+          </a:p>
+          <a:p>
+            <a:pPr>
+              <a:buNone/>
+            </a:pPr>
+            <a:r>
+              <a:rPr lang="en-US" b="1" dirty="0"/>
+              <a:t>Optimization</a:t>
+            </a:r>
+            <a:endParaRPr lang="en-US" dirty="0"/>
+          </a:p>
+          <a:p>
+            <a:pPr>
+              <a:buFont typeface="Arial" panose="020B0604020202020204" pitchFamily="34" charset="0"/>
+              <a:buChar char="•"/>
+            </a:pPr>
+            <a:r>
+              <a:rPr lang="en-US" dirty="0"/>
+              <a:t>Rebuild indexes after cleanup </a:t>
+            </a:r>
+          </a:p>
+          <a:p>
+            <a:pPr>
+              <a:buFont typeface="Arial" panose="020B0604020202020204" pitchFamily="34" charset="0"/>
+              <a:buChar char="•"/>
+            </a:pPr>
+            <a:r>
+              <a:rPr lang="en-US" dirty="0"/>
+              <a:t>Optimize table to improve query performance </a:t>
+            </a:r>
+          </a:p>
+          <a:p>
+            <a:pPr>
+              <a:buNone/>
+            </a:pPr>
+            <a:br>
+              <a:rPr lang="en-US" dirty="0"/>
+            </a:br>
+            <a:endParaRPr lang="en-US" dirty="0"/>
+          </a:p>
+          <a:p>
+            <a:pPr>
+              <a:buNone/>
+            </a:pPr>
+            <a:r>
+              <a:rPr lang="en-US" b="1" dirty="0"/>
+              <a:t>Automation Strategy</a:t>
+            </a:r>
+          </a:p>
+          <a:p>
+            <a:pPr>
+              <a:buFont typeface="Arial" panose="020B0604020202020204" pitchFamily="34" charset="0"/>
+              <a:buChar char="•"/>
+            </a:pPr>
+            <a:r>
+              <a:rPr lang="en-US" dirty="0"/>
+              <a:t>Implement </a:t>
+            </a:r>
+            <a:r>
+              <a:rPr lang="en-US" b="1" dirty="0"/>
+              <a:t>MySQL Event Scheduler</a:t>
+            </a:r>
+            <a:r>
+              <a:rPr lang="en-US" dirty="0"/>
+              <a:t> for: </a:t>
+            </a:r>
+          </a:p>
+          <a:p>
+            <a:pPr marL="742950" lvl="1" indent="-285750">
+              <a:buFont typeface="Arial" panose="020B0604020202020204" pitchFamily="34" charset="0"/>
+              <a:buChar char="•"/>
+            </a:pPr>
+            <a:r>
+              <a:rPr lang="en-US" dirty="0"/>
+              <a:t>Scheduled archival jobs </a:t>
+            </a:r>
+          </a:p>
+          <a:p>
+            <a:pPr marL="742950" lvl="1" indent="-285750">
+              <a:buFont typeface="Arial" panose="020B0604020202020204" pitchFamily="34" charset="0"/>
+              <a:buChar char="•"/>
+            </a:pPr>
+            <a:r>
+              <a:rPr lang="en-US" dirty="0"/>
+              <a:t>Periodic cleanup execution </a:t>
+            </a:r>
+          </a:p>
+          <a:p>
+            <a:pPr>
+              <a:buFont typeface="Arial" panose="020B0604020202020204" pitchFamily="34" charset="0"/>
+              <a:buChar char="•"/>
+            </a:pPr>
+            <a:r>
+              <a:rPr lang="en-US" dirty="0"/>
+              <a:t>Enable </a:t>
+            </a:r>
+            <a:r>
+              <a:rPr lang="en-US" b="1" dirty="0"/>
+              <a:t>controlled automation with manual monitoring</a:t>
+            </a:r>
+            <a:r>
+              <a:rPr lang="en-US" dirty="0"/>
+              <a:t> </a:t>
+            </a:r>
+          </a:p>
+          <a:p>
+            <a:pPr>
+              <a:buFont typeface="Arial" panose="020B0604020202020204" pitchFamily="34" charset="0"/>
+              <a:buChar char="•"/>
+            </a:pPr>
+            <a:r>
+              <a:rPr lang="en-US" dirty="0"/>
+              <a:t>Ensure </a:t>
+            </a:r>
+            <a:r>
+              <a:rPr lang="en-US" b="1" dirty="0"/>
+              <a:t>job logging and validation before data removal</a:t>
+            </a:r>
+            <a:endParaRPr lang="en-US" dirty="0"/>
+          </a:p>
+        </p:txBody>
+      </p:sp>
+    </p:spTree>
+    <p:extLst>
+      <p:ext uri="{BB962C8B-B14F-4D97-AF65-F5344CB8AC3E}">
+        <p14:creationId xmlns:p14="http://schemas.microsoft.com/office/powerpoint/2010/main" val="3490163521"/>
+      </p:ext>
+    </p:extLst>
+  </p:cSld>
+  <p:clrMapOvr>
+    <a:masterClrMapping/>
+  </p:clrMapOvr>
+</p:sld>
+</file>
+
+<file path=ppt/slides/slide25.xml><?xml version="1.0" encoding="utf-8"?>
+<p:sld xmlns:a="http://schemas.openxmlformats.org/drawingml/2006/main" xmlns:r="http://schemas.openxmlformats.org/officeDocument/2006/relationships" xmlns:p="http://schemas.openxmlformats.org/presentationml/2006/main">
+  <p:cSld>
+    <p:spTree>
+      <p:nvGrpSpPr>
+        <p:cNvPr id="1" name="">
+          <a:extLst>
+            <a:ext uri="{FF2B5EF4-FFF2-40B4-BE49-F238E27FC236}">
+              <a16:creationId xmlns:a16="http://schemas.microsoft.com/office/drawing/2014/main" id="{7B8D2043-1F2B-8A6F-F527-B766C278113C}"/>
+            </a:ext>
+          </a:extLst>
+        </p:cNvPr>
+        <p:cNvGrpSpPr/>
+        <p:nvPr/>
+      </p:nvGrpSpPr>
+      <p:grpSpPr>
+        <a:xfrm>
+          <a:off x="0" y="0"/>
+          <a:ext cx="0" cy="0"/>
+          <a:chOff x="0" y="0"/>
+          <a:chExt cx="0" cy="0"/>
+        </a:xfrm>
+      </p:grpSpPr>
+      <p:sp>
+        <p:nvSpPr>
+          <p:cNvPr id="2" name="Slide Number Placeholder 1">
+            <a:extLst>
+              <a:ext uri="{FF2B5EF4-FFF2-40B4-BE49-F238E27FC236}">
+                <a16:creationId xmlns:a16="http://schemas.microsoft.com/office/drawing/2014/main" id="{2A6056C1-E50A-0AE1-6686-097B851500DF}"/>
+              </a:ext>
+            </a:extLst>
+          </p:cNvPr>
+          <p:cNvSpPr>
+            <a:spLocks noGrp="1"/>
+          </p:cNvSpPr>
+          <p:nvPr>
+            <p:ph type="sldNum" sz="quarter" idx="12"/>
+          </p:nvPr>
+        </p:nvSpPr>
+        <p:spPr/>
+        <p:txBody>
+          <a:bodyPr/>
+          <a:lstStyle/>
+          <a:p>
+            <a:fld id="{93288B1A-0894-4E52-95D8-2AC74CBED725}" type="slidenum">
+              <a:rPr lang="en-US" smtClean="0"/>
+              <a:t>25</a:t>
+            </a:fld>
+            <a:endParaRPr lang="en-US"/>
+          </a:p>
+        </p:txBody>
+      </p:sp>
+      <p:sp>
+        <p:nvSpPr>
+          <p:cNvPr id="3" name="Text Placeholder 2">
+            <a:extLst>
+              <a:ext uri="{FF2B5EF4-FFF2-40B4-BE49-F238E27FC236}">
+                <a16:creationId xmlns:a16="http://schemas.microsoft.com/office/drawing/2014/main" id="{1DBB439A-3424-6632-F65A-268093D8D698}"/>
+              </a:ext>
+            </a:extLst>
+          </p:cNvPr>
+          <p:cNvSpPr>
+            <a:spLocks noGrp="1"/>
+          </p:cNvSpPr>
+          <p:nvPr>
+            <p:ph type="body" idx="1"/>
+          </p:nvPr>
+        </p:nvSpPr>
+        <p:spPr/>
+        <p:txBody>
+          <a:bodyPr/>
+          <a:lstStyle/>
+          <a:p>
+            <a:r>
+              <a:rPr lang="en-US" dirty="0"/>
+              <a:t>Database Archival &amp; Housekeeping</a:t>
+            </a:r>
+          </a:p>
+        </p:txBody>
+      </p:sp>
+      <p:sp>
+        <p:nvSpPr>
+          <p:cNvPr id="7" name="TextBox 6">
+            <a:extLst>
+              <a:ext uri="{FF2B5EF4-FFF2-40B4-BE49-F238E27FC236}">
+                <a16:creationId xmlns:a16="http://schemas.microsoft.com/office/drawing/2014/main" id="{7B919ED9-1694-EE3B-B737-E73173B3B9CD}"/>
+              </a:ext>
+            </a:extLst>
+          </p:cNvPr>
+          <p:cNvSpPr txBox="1"/>
+          <p:nvPr/>
+        </p:nvSpPr>
+        <p:spPr>
+          <a:xfrm>
+            <a:off x="757881" y="1397675"/>
+            <a:ext cx="6096000" cy="2031325"/>
+          </a:xfrm>
+          <a:prstGeom prst="rect">
+            <a:avLst/>
+          </a:prstGeom>
+          <a:noFill/>
+        </p:spPr>
+        <p:txBody>
+          <a:bodyPr wrap="square">
+            <a:spAutoFit/>
+          </a:bodyPr>
+          <a:lstStyle/>
+          <a:p>
+            <a:pPr>
+              <a:buNone/>
+            </a:pPr>
+            <a:r>
+              <a:rPr lang="en-US" b="1" dirty="0"/>
+              <a:t>Future Enhancement</a:t>
+            </a:r>
+          </a:p>
+          <a:p>
+            <a:pPr>
+              <a:buFont typeface="Arial" panose="020B0604020202020204" pitchFamily="34" charset="0"/>
+              <a:buChar char="•"/>
+            </a:pPr>
+            <a:r>
+              <a:rPr lang="en-US" dirty="0"/>
+              <a:t>Implement </a:t>
+            </a:r>
+            <a:r>
+              <a:rPr lang="en-US" b="1" dirty="0"/>
+              <a:t>monthly table partitioning (by transaction date)</a:t>
+            </a:r>
+            <a:r>
+              <a:rPr lang="en-US" dirty="0"/>
+              <a:t> </a:t>
+            </a:r>
+          </a:p>
+          <a:p>
+            <a:pPr>
+              <a:buFont typeface="Arial" panose="020B0604020202020204" pitchFamily="34" charset="0"/>
+              <a:buChar char="•"/>
+            </a:pPr>
+            <a:r>
+              <a:rPr lang="en-US" dirty="0"/>
+              <a:t>Automate: </a:t>
+            </a:r>
+          </a:p>
+          <a:p>
+            <a:pPr marL="742950" lvl="1" indent="-285750">
+              <a:buFont typeface="Arial" panose="020B0604020202020204" pitchFamily="34" charset="0"/>
+              <a:buChar char="•"/>
+            </a:pPr>
+            <a:r>
+              <a:rPr lang="en-US" dirty="0"/>
+              <a:t>Partition creation </a:t>
+            </a:r>
+          </a:p>
+          <a:p>
+            <a:pPr marL="742950" lvl="1" indent="-285750">
+              <a:buFont typeface="Arial" panose="020B0604020202020204" pitchFamily="34" charset="0"/>
+              <a:buChar char="•"/>
+            </a:pPr>
+            <a:r>
+              <a:rPr lang="en-US" dirty="0"/>
+              <a:t>Archival process </a:t>
+            </a:r>
+          </a:p>
+          <a:p>
+            <a:pPr marL="742950" lvl="1" indent="-285750">
+              <a:buFont typeface="Arial" panose="020B0604020202020204" pitchFamily="34" charset="0"/>
+              <a:buChar char="•"/>
+            </a:pPr>
+            <a:r>
+              <a:rPr lang="en-US" dirty="0"/>
+              <a:t>Old data cleanup </a:t>
+            </a:r>
+          </a:p>
+          <a:p>
+            <a:pPr>
+              <a:buFont typeface="Arial" panose="020B0604020202020204" pitchFamily="34" charset="0"/>
+              <a:buChar char="•"/>
+            </a:pPr>
+            <a:r>
+              <a:rPr lang="en-US" dirty="0"/>
+              <a:t>Improve </a:t>
+            </a:r>
+            <a:r>
+              <a:rPr lang="en-US" b="1" dirty="0"/>
+              <a:t>data lifecycle management and scalability</a:t>
+            </a:r>
+            <a:r>
+              <a:rPr lang="en-US" dirty="0"/>
+              <a:t> </a:t>
+            </a:r>
+          </a:p>
+        </p:txBody>
+      </p:sp>
+    </p:spTree>
+    <p:extLst>
+      <p:ext uri="{BB962C8B-B14F-4D97-AF65-F5344CB8AC3E}">
+        <p14:creationId xmlns:p14="http://schemas.microsoft.com/office/powerpoint/2010/main" val="1021220861"/>
+      </p:ext>
+    </p:extLst>
+  </p:cSld>
+  <p:clrMapOvr>
+    <a:masterClrMapping/>
+  </p:clrMapOvr>
+</p:sld>
+</file>
+
+<file path=ppt/slides/slide26.xml><?xml version="1.0" encoding="utf-8"?>
+<p:sld xmlns:a="http://schemas.openxmlformats.org/drawingml/2006/main" xmlns:r="http://schemas.openxmlformats.org/officeDocument/2006/relationships" xmlns:p="http://schemas.openxmlformats.org/presentationml/2006/main">
+  <p:cSld>
+    <p:spTree>
+      <p:nvGrpSpPr>
+        <p:cNvPr id="1" name=""/>
+        <p:cNvGrpSpPr/>
+        <p:nvPr/>
+      </p:nvGrpSpPr>
+      <p:grpSpPr>
+        <a:xfrm>
+          <a:off x="0" y="0"/>
+          <a:ext cx="0" cy="0"/>
+          <a:chOff x="0" y="0"/>
+          <a:chExt cx="0" cy="0"/>
+        </a:xfrm>
+      </p:grpSpPr>
+      <p:sp>
+        <p:nvSpPr>
+          <p:cNvPr id="2" name="Slide Number Placeholder 1">
+            <a:extLst>
+              <a:ext uri="{FF2B5EF4-FFF2-40B4-BE49-F238E27FC236}">
+                <a16:creationId xmlns:a16="http://schemas.microsoft.com/office/drawing/2014/main" id="{FD9C983F-458B-06E6-E4F8-F1462FB49156}"/>
+              </a:ext>
+            </a:extLst>
+          </p:cNvPr>
+          <p:cNvSpPr>
+            <a:spLocks noGrp="1"/>
+          </p:cNvSpPr>
+          <p:nvPr>
+            <p:ph type="sldNum" sz="quarter" idx="12"/>
+          </p:nvPr>
+        </p:nvSpPr>
+        <p:spPr/>
+        <p:txBody>
+          <a:bodyPr/>
+          <a:lstStyle/>
+          <a:p>
+            <a:fld id="{93288B1A-0894-4E52-95D8-2AC74CBED725}" type="slidenum">
+              <a:rPr lang="en-US" smtClean="0"/>
+              <a:t>26</a:t>
             </a:fld>
             <a:endParaRPr lang="en-US"/>
           </a:p>
@@ -7182,10 +7355,10 @@
       </p:sp>
       <p:sp>
         <p:nvSpPr>
-          <p:cNvPr id="6" name="TextBox 5">
-            <a:extLst>
-              <a:ext uri="{FF2B5EF4-FFF2-40B4-BE49-F238E27FC236}">
-                <a16:creationId xmlns:a16="http://schemas.microsoft.com/office/drawing/2014/main" id="{EF4BA4C9-E752-8EAC-898A-F5518684F3C0}"/>
+          <p:cNvPr id="5" name="TextBox 4">
+            <a:extLst>
+              <a:ext uri="{FF2B5EF4-FFF2-40B4-BE49-F238E27FC236}">
+                <a16:creationId xmlns:a16="http://schemas.microsoft.com/office/drawing/2014/main" id="{A203A43F-14AA-7985-EB0B-5F3E571969E7}"/>
               </a:ext>
             </a:extLst>
           </p:cNvPr>
@@ -7194,8 +7367,8 @@
         </p:nvSpPr>
         <p:spPr>
           <a:xfrm>
-            <a:off x="81002" y="1013255"/>
-            <a:ext cx="9062998" cy="705258"/>
+            <a:off x="195648" y="985619"/>
+            <a:ext cx="11510319" cy="646331"/>
           </a:xfrm>
           <a:prstGeom prst="rect">
             <a:avLst/>
@@ -7208,14 +7381,17 @@
           </a:bodyPr>
           <a:lstStyle/>
           <a:p>
-            <a:pPr>
-              <a:lnSpc>
-                <a:spcPct val="150000"/>
-              </a:lnSpc>
-            </a:pPr>
-            <a:r>
-              <a:rPr lang="en-US" sz="1400" dirty="0"/>
-              <a:t>Describe the key goals that the proposed solution aims to achieve, focusing on business needs, regulatory requirements, and architectural improvements.</a:t>
+            <a:r>
+              <a:rPr lang="en-US" dirty="0"/>
+              <a:t>To optimize the G&amp;G </a:t>
+            </a:r>
+            <a:r>
+              <a:rPr lang="en-US" dirty="0" err="1"/>
+              <a:t>Eservice</a:t>
+            </a:r>
+            <a:r>
+              <a:rPr lang="en-US" dirty="0"/>
+              <a:t> platform for higher efficiency, faster processing, and long-term scalability through strategic revamp and enhancements, enabling sustainable service expansion.</a:t>
             </a:r>
           </a:p>
         </p:txBody>
@@ -7238,6 +7414,982 @@
   <p:cSld>
     <p:spTree>
       <p:nvGrpSpPr>
+        <p:cNvPr id="1" name="">
+          <a:extLst>
+            <a:ext uri="{FF2B5EF4-FFF2-40B4-BE49-F238E27FC236}">
+              <a16:creationId xmlns:a16="http://schemas.microsoft.com/office/drawing/2014/main" id="{242E9BE2-4305-176E-2F1F-4DC08B66634E}"/>
+            </a:ext>
+          </a:extLst>
+        </p:cNvPr>
+        <p:cNvGrpSpPr/>
+        <p:nvPr/>
+      </p:nvGrpSpPr>
+      <p:grpSpPr>
+        <a:xfrm>
+          <a:off x="0" y="0"/>
+          <a:ext cx="0" cy="0"/>
+          <a:chOff x="0" y="0"/>
+          <a:chExt cx="0" cy="0"/>
+        </a:xfrm>
+      </p:grpSpPr>
+      <p:sp>
+        <p:nvSpPr>
+          <p:cNvPr id="2" name="Slide Number Placeholder 1">
+            <a:extLst>
+              <a:ext uri="{FF2B5EF4-FFF2-40B4-BE49-F238E27FC236}">
+                <a16:creationId xmlns:a16="http://schemas.microsoft.com/office/drawing/2014/main" id="{B04E2A25-A12E-C672-C20E-6ED42D0E4F82}"/>
+              </a:ext>
+            </a:extLst>
+          </p:cNvPr>
+          <p:cNvSpPr>
+            <a:spLocks noGrp="1"/>
+          </p:cNvSpPr>
+          <p:nvPr>
+            <p:ph type="sldNum" sz="quarter" idx="12"/>
+          </p:nvPr>
+        </p:nvSpPr>
+        <p:spPr/>
+        <p:txBody>
+          <a:bodyPr/>
+          <a:lstStyle/>
+          <a:p>
+            <a:fld id="{93288B1A-0894-4E52-95D8-2AC74CBED725}" type="slidenum">
+              <a:rPr lang="en-US" smtClean="0"/>
+              <a:t>4</a:t>
+            </a:fld>
+            <a:endParaRPr lang="en-US"/>
+          </a:p>
+        </p:txBody>
+      </p:sp>
+      <p:sp>
+        <p:nvSpPr>
+          <p:cNvPr id="3" name="Text Placeholder 2">
+            <a:extLst>
+              <a:ext uri="{FF2B5EF4-FFF2-40B4-BE49-F238E27FC236}">
+                <a16:creationId xmlns:a16="http://schemas.microsoft.com/office/drawing/2014/main" id="{462C3234-0E44-EE12-3F61-505E6D4A39DE}"/>
+              </a:ext>
+            </a:extLst>
+          </p:cNvPr>
+          <p:cNvSpPr>
+            <a:spLocks noGrp="1"/>
+          </p:cNvSpPr>
+          <p:nvPr>
+            <p:ph type="body" idx="1"/>
+          </p:nvPr>
+        </p:nvSpPr>
+        <p:spPr/>
+        <p:txBody>
+          <a:bodyPr/>
+          <a:lstStyle/>
+          <a:p>
+            <a:r>
+              <a:rPr lang="en-US" dirty="0"/>
+              <a:t>About Revamp &amp; Enhancement</a:t>
+            </a:r>
+          </a:p>
+        </p:txBody>
+      </p:sp>
+      <p:sp>
+        <p:nvSpPr>
+          <p:cNvPr id="4" name="TextBox 3">
+            <a:extLst>
+              <a:ext uri="{FF2B5EF4-FFF2-40B4-BE49-F238E27FC236}">
+                <a16:creationId xmlns:a16="http://schemas.microsoft.com/office/drawing/2014/main" id="{55BD922D-8713-24F2-486B-F3EF57A9C851}"/>
+              </a:ext>
+            </a:extLst>
+          </p:cNvPr>
+          <p:cNvSpPr txBox="1"/>
+          <p:nvPr/>
+        </p:nvSpPr>
+        <p:spPr>
+          <a:xfrm>
+            <a:off x="140043" y="932935"/>
+            <a:ext cx="11203460" cy="4998741"/>
+          </a:xfrm>
+          <a:prstGeom prst="rect">
+            <a:avLst/>
+          </a:prstGeom>
+          <a:noFill/>
+        </p:spPr>
+        <p:txBody>
+          <a:bodyPr wrap="square">
+            <a:spAutoFit/>
+          </a:bodyPr>
+          <a:lstStyle/>
+          <a:p>
+            <a:pPr>
+              <a:lnSpc>
+                <a:spcPct val="150000"/>
+              </a:lnSpc>
+            </a:pPr>
+            <a:r>
+              <a:rPr lang="en-US" sz="1600" b="1" dirty="0"/>
+              <a:t>About YPS Services</a:t>
+            </a:r>
+          </a:p>
+          <a:p>
+            <a:pPr marL="285750" indent="-285750">
+              <a:lnSpc>
+                <a:spcPct val="150000"/>
+              </a:lnSpc>
+              <a:buFont typeface="Arial" panose="020B0604020202020204" pitchFamily="34" charset="0"/>
+              <a:buChar char="•"/>
+            </a:pPr>
+            <a:r>
+              <a:rPr lang="en-US" sz="1400" dirty="0"/>
+              <a:t>Currently, sales staff operate YPS POS devices to perform YPS bill top-</a:t>
+            </a:r>
+            <a:r>
+              <a:rPr lang="en-US" sz="1400" dirty="0" err="1"/>
+              <a:t>ups.This</a:t>
+            </a:r>
+            <a:r>
+              <a:rPr lang="en-US" sz="1400" dirty="0"/>
+              <a:t> service is available in </a:t>
+            </a:r>
+            <a:r>
+              <a:rPr lang="en-US" sz="1400" b="1" dirty="0"/>
+              <a:t>96 stores</a:t>
+            </a:r>
+            <a:r>
+              <a:rPr lang="en-US" sz="1400" dirty="0"/>
+              <a:t>, including </a:t>
+            </a:r>
+            <a:r>
+              <a:rPr lang="en-US" sz="1400" b="1" dirty="0"/>
+              <a:t>G&amp;G and Capital</a:t>
+            </a:r>
+            <a:r>
+              <a:rPr lang="en-US" sz="1400" dirty="0"/>
+              <a:t>.</a:t>
+            </a:r>
+          </a:p>
+          <a:p>
+            <a:pPr marL="285750" indent="-285750">
+              <a:lnSpc>
+                <a:spcPct val="150000"/>
+              </a:lnSpc>
+              <a:buFont typeface="Arial" panose="020B0604020202020204" pitchFamily="34" charset="0"/>
+              <a:buChar char="•"/>
+            </a:pPr>
+            <a:r>
+              <a:rPr lang="en-US" sz="1400" dirty="0"/>
+              <a:t>In the future, the YPS top-up service will be expanded to </a:t>
+            </a:r>
+            <a:r>
+              <a:rPr lang="en-US" sz="1400" b="1" dirty="0"/>
+              <a:t>more than 500 stores</a:t>
+            </a:r>
+            <a:r>
+              <a:rPr lang="en-US" sz="1400" dirty="0"/>
+              <a:t> using </a:t>
+            </a:r>
+            <a:r>
+              <a:rPr lang="en-US" sz="1400" b="1" dirty="0" err="1"/>
+              <a:t>Sunmi</a:t>
+            </a:r>
+            <a:r>
+              <a:rPr lang="en-US" sz="1400" b="1" dirty="0"/>
+              <a:t> POS devices</a:t>
+            </a:r>
+            <a:r>
+              <a:rPr lang="en-US" sz="1400" dirty="0"/>
+              <a:t>.</a:t>
+            </a:r>
+          </a:p>
+          <a:p>
+            <a:pPr marL="285750" indent="-285750">
+              <a:lnSpc>
+                <a:spcPct val="150000"/>
+              </a:lnSpc>
+              <a:buFont typeface="Arial" panose="020B0604020202020204" pitchFamily="34" charset="0"/>
+              <a:buChar char="•"/>
+            </a:pPr>
+            <a:endParaRPr lang="en-US" sz="1400" dirty="0"/>
+          </a:p>
+          <a:p>
+            <a:pPr>
+              <a:lnSpc>
+                <a:spcPct val="150000"/>
+              </a:lnSpc>
+            </a:pPr>
+            <a:r>
+              <a:rPr lang="en-US" sz="1600" b="1" dirty="0"/>
+              <a:t>Problem with Current YPS Services(require link with previous slide like data lost , performance)</a:t>
+            </a:r>
+          </a:p>
+          <a:p>
+            <a:pPr marL="285750" indent="-285750">
+              <a:lnSpc>
+                <a:spcPct val="150000"/>
+              </a:lnSpc>
+              <a:buFont typeface="Arial" panose="020B0604020202020204" pitchFamily="34" charset="0"/>
+              <a:buChar char="•"/>
+            </a:pPr>
+            <a:r>
+              <a:rPr lang="en-US" altLang="en-US" sz="1400" b="1" dirty="0">
+                <a:latin typeface="Arial" panose="020B0604020202020204" pitchFamily="34" charset="0"/>
+              </a:rPr>
+              <a:t>Performance Issues </a:t>
+            </a:r>
+            <a:r>
+              <a:rPr lang="en-US" altLang="en-US" sz="1400" dirty="0">
+                <a:latin typeface="Arial" panose="020B0604020202020204" pitchFamily="34" charset="0"/>
+              </a:rPr>
+              <a:t>- YPS sale transaction saving experiences delays.</a:t>
+            </a:r>
+          </a:p>
+          <a:p>
+            <a:pPr marL="285750" indent="-285750">
+              <a:lnSpc>
+                <a:spcPct val="150000"/>
+              </a:lnSpc>
+              <a:buFont typeface="Arial" panose="020B0604020202020204" pitchFamily="34" charset="0"/>
+              <a:buChar char="•"/>
+            </a:pPr>
+            <a:r>
+              <a:rPr lang="en-US" sz="1400" b="1" dirty="0">
+                <a:latin typeface="Arial" panose="020B0604020202020204" pitchFamily="34" charset="0"/>
+              </a:rPr>
+              <a:t>Data Lost Issues </a:t>
+            </a:r>
+            <a:r>
+              <a:rPr lang="en-US" sz="1400" dirty="0">
+                <a:latin typeface="Arial" panose="020B0604020202020204" pitchFamily="34" charset="0"/>
+              </a:rPr>
+              <a:t>– From YPS side , their few time out seconds and lack of retry is the major cause of  data lost up. </a:t>
+            </a:r>
+          </a:p>
+          <a:p>
+            <a:pPr>
+              <a:lnSpc>
+                <a:spcPct val="150000"/>
+              </a:lnSpc>
+            </a:pPr>
+            <a:r>
+              <a:rPr lang="en-US" sz="1400" dirty="0">
+                <a:latin typeface="Arial" panose="020B0604020202020204" pitchFamily="34" charset="0"/>
+              </a:rPr>
+              <a:t>    In G&amp;G  side , due to current implementation , it is hard to handle concurrent request  which lead to missing API call from YPS side and occur  error</a:t>
+            </a:r>
+          </a:p>
+          <a:p>
+            <a:pPr>
+              <a:lnSpc>
+                <a:spcPct val="150000"/>
+              </a:lnSpc>
+            </a:pPr>
+            <a:r>
+              <a:rPr lang="en-US" sz="1400" dirty="0">
+                <a:latin typeface="Arial" panose="020B0604020202020204" pitchFamily="34" charset="0"/>
+              </a:rPr>
+              <a:t>  In worst case scenario data lost between 40% and 60% , which make </a:t>
+            </a:r>
+            <a:r>
+              <a:rPr lang="en-US" sz="1400" dirty="0" err="1">
+                <a:latin typeface="Arial" panose="020B0604020202020204" pitchFamily="34" charset="0"/>
+              </a:rPr>
+              <a:t>yps</a:t>
+            </a:r>
+            <a:r>
+              <a:rPr lang="en-US" sz="1400" dirty="0">
+                <a:latin typeface="Arial" panose="020B0604020202020204" pitchFamily="34" charset="0"/>
+              </a:rPr>
+              <a:t> service temporarily stop and cause financial impact.</a:t>
+            </a:r>
+          </a:p>
+          <a:p>
+            <a:pPr marL="285750" indent="-285750">
+              <a:lnSpc>
+                <a:spcPct val="150000"/>
+              </a:lnSpc>
+              <a:buFont typeface="Arial" panose="020B0604020202020204" pitchFamily="34" charset="0"/>
+              <a:buChar char="•"/>
+            </a:pPr>
+            <a:r>
+              <a:rPr lang="en-US" sz="1400" dirty="0">
+                <a:latin typeface="Arial" panose="020B0604020202020204" pitchFamily="34" charset="0"/>
+              </a:rPr>
+              <a:t>Scalability  Issues-Current design may not suit for future expansion to provide fast response rate and reliable process and occur fail in sale transaction.</a:t>
+            </a:r>
+          </a:p>
+          <a:p>
+            <a:pPr>
+              <a:lnSpc>
+                <a:spcPct val="150000"/>
+              </a:lnSpc>
+            </a:pPr>
+            <a:endParaRPr lang="en-US" sz="1400" dirty="0"/>
+          </a:p>
+          <a:p>
+            <a:pPr>
+              <a:lnSpc>
+                <a:spcPct val="150000"/>
+              </a:lnSpc>
+            </a:pPr>
+            <a:endParaRPr lang="en-US" sz="1400" dirty="0"/>
+          </a:p>
+          <a:p>
+            <a:pPr marL="342900" indent="-342900">
+              <a:lnSpc>
+                <a:spcPct val="150000"/>
+              </a:lnSpc>
+              <a:buAutoNum type="arabicPeriod"/>
+            </a:pPr>
+            <a:endParaRPr lang="en-US" sz="1400" dirty="0"/>
+          </a:p>
+        </p:txBody>
+      </p:sp>
+    </p:spTree>
+    <p:extLst>
+      <p:ext uri="{BB962C8B-B14F-4D97-AF65-F5344CB8AC3E}">
+        <p14:creationId xmlns:p14="http://schemas.microsoft.com/office/powerpoint/2010/main" val="3057371815"/>
+      </p:ext>
+    </p:extLst>
+  </p:cSld>
+  <p:clrMapOvr>
+    <a:masterClrMapping/>
+  </p:clrMapOvr>
+</p:sld>
+</file>
+
+<file path=ppt/slides/slide5.xml><?xml version="1.0" encoding="utf-8"?>
+<p:sld xmlns:a="http://schemas.openxmlformats.org/drawingml/2006/main" xmlns:r="http://schemas.openxmlformats.org/officeDocument/2006/relationships" xmlns:p="http://schemas.openxmlformats.org/presentationml/2006/main">
+  <p:cSld>
+    <p:spTree>
+      <p:nvGrpSpPr>
+        <p:cNvPr id="1" name="">
+          <a:extLst>
+            <a:ext uri="{FF2B5EF4-FFF2-40B4-BE49-F238E27FC236}">
+              <a16:creationId xmlns:a16="http://schemas.microsoft.com/office/drawing/2014/main" id="{E8935FA6-358D-ED4A-C77D-6106C18BC8C1}"/>
+            </a:ext>
+          </a:extLst>
+        </p:cNvPr>
+        <p:cNvGrpSpPr/>
+        <p:nvPr/>
+      </p:nvGrpSpPr>
+      <p:grpSpPr>
+        <a:xfrm>
+          <a:off x="0" y="0"/>
+          <a:ext cx="0" cy="0"/>
+          <a:chOff x="0" y="0"/>
+          <a:chExt cx="0" cy="0"/>
+        </a:xfrm>
+      </p:grpSpPr>
+      <p:sp>
+        <p:nvSpPr>
+          <p:cNvPr id="2" name="Slide Number Placeholder 1">
+            <a:extLst>
+              <a:ext uri="{FF2B5EF4-FFF2-40B4-BE49-F238E27FC236}">
+                <a16:creationId xmlns:a16="http://schemas.microsoft.com/office/drawing/2014/main" id="{8F42393A-2295-632C-21CC-C4C6878EA914}"/>
+              </a:ext>
+            </a:extLst>
+          </p:cNvPr>
+          <p:cNvSpPr>
+            <a:spLocks noGrp="1"/>
+          </p:cNvSpPr>
+          <p:nvPr>
+            <p:ph type="sldNum" sz="quarter" idx="12"/>
+          </p:nvPr>
+        </p:nvSpPr>
+        <p:spPr/>
+        <p:txBody>
+          <a:bodyPr/>
+          <a:lstStyle/>
+          <a:p>
+            <a:fld id="{93288B1A-0894-4E52-95D8-2AC74CBED725}" type="slidenum">
+              <a:rPr lang="en-US" smtClean="0"/>
+              <a:t>5</a:t>
+            </a:fld>
+            <a:endParaRPr lang="en-US"/>
+          </a:p>
+        </p:txBody>
+      </p:sp>
+      <p:sp>
+        <p:nvSpPr>
+          <p:cNvPr id="3" name="Text Placeholder 2">
+            <a:extLst>
+              <a:ext uri="{FF2B5EF4-FFF2-40B4-BE49-F238E27FC236}">
+                <a16:creationId xmlns:a16="http://schemas.microsoft.com/office/drawing/2014/main" id="{8D0A8210-D177-4B15-6948-C28562E3D5D8}"/>
+              </a:ext>
+            </a:extLst>
+          </p:cNvPr>
+          <p:cNvSpPr>
+            <a:spLocks noGrp="1"/>
+          </p:cNvSpPr>
+          <p:nvPr>
+            <p:ph type="body" idx="1"/>
+          </p:nvPr>
+        </p:nvSpPr>
+        <p:spPr/>
+        <p:txBody>
+          <a:bodyPr/>
+          <a:lstStyle/>
+          <a:p>
+            <a:r>
+              <a:rPr lang="en-US" dirty="0"/>
+              <a:t>About Revamp &amp; Enhancement</a:t>
+            </a:r>
+          </a:p>
+        </p:txBody>
+      </p:sp>
+      <p:sp>
+        <p:nvSpPr>
+          <p:cNvPr id="10" name="TextBox 9">
+            <a:extLst>
+              <a:ext uri="{FF2B5EF4-FFF2-40B4-BE49-F238E27FC236}">
+                <a16:creationId xmlns:a16="http://schemas.microsoft.com/office/drawing/2014/main" id="{74B569DA-42FD-69E8-A40D-A75075CF4404}"/>
+              </a:ext>
+            </a:extLst>
+          </p:cNvPr>
+          <p:cNvSpPr txBox="1"/>
+          <p:nvPr/>
+        </p:nvSpPr>
+        <p:spPr>
+          <a:xfrm>
+            <a:off x="205946" y="923773"/>
+            <a:ext cx="11576908" cy="2911695"/>
+          </a:xfrm>
+          <a:prstGeom prst="rect">
+            <a:avLst/>
+          </a:prstGeom>
+          <a:noFill/>
+        </p:spPr>
+        <p:txBody>
+          <a:bodyPr wrap="square">
+            <a:spAutoFit/>
+          </a:bodyPr>
+          <a:lstStyle/>
+          <a:p>
+            <a:pPr>
+              <a:lnSpc>
+                <a:spcPct val="150000"/>
+              </a:lnSpc>
+            </a:pPr>
+            <a:r>
+              <a:rPr lang="en-US" sz="1600" b="1" dirty="0"/>
+              <a:t>About G&amp;G  Bill ,</a:t>
+            </a:r>
+            <a:r>
+              <a:rPr lang="en-US" sz="1600" b="1" dirty="0" err="1"/>
+              <a:t>eserrvices</a:t>
+            </a:r>
+            <a:endParaRPr lang="en-US" sz="1600" b="1" dirty="0"/>
+          </a:p>
+          <a:p>
+            <a:pPr marL="285750" indent="-285750">
+              <a:lnSpc>
+                <a:spcPct val="150000"/>
+              </a:lnSpc>
+              <a:buFont typeface="Arial" panose="020B0604020202020204" pitchFamily="34" charset="0"/>
+              <a:buChar char="•"/>
+            </a:pPr>
+            <a:r>
+              <a:rPr lang="en-US" sz="1400" dirty="0"/>
+              <a:t>Currently Sale staff operate G&amp;G </a:t>
+            </a:r>
+            <a:r>
+              <a:rPr lang="en-US" sz="1400" dirty="0" err="1"/>
+              <a:t>Eservice</a:t>
+            </a:r>
+            <a:r>
+              <a:rPr lang="en-US" sz="1400" dirty="0"/>
+              <a:t> to provide top up , electric bill and subscription </a:t>
+            </a:r>
+          </a:p>
+          <a:p>
+            <a:pPr marL="285750" indent="-285750">
+              <a:lnSpc>
+                <a:spcPct val="150000"/>
+              </a:lnSpc>
+              <a:buFont typeface="Arial" panose="020B0604020202020204" pitchFamily="34" charset="0"/>
+              <a:buChar char="•"/>
+            </a:pPr>
+            <a:r>
+              <a:rPr lang="en-US" sz="1400" dirty="0"/>
+              <a:t>Among each service top up( bill) is the pain point</a:t>
+            </a:r>
+          </a:p>
+          <a:p>
+            <a:pPr marL="285750" indent="-285750">
+              <a:lnSpc>
+                <a:spcPct val="150000"/>
+              </a:lnSpc>
+              <a:buFont typeface="Arial" panose="020B0604020202020204" pitchFamily="34" charset="0"/>
+              <a:buChar char="•"/>
+            </a:pPr>
+            <a:endParaRPr lang="en-US" sz="1800" dirty="0"/>
+          </a:p>
+          <a:p>
+            <a:pPr>
+              <a:lnSpc>
+                <a:spcPct val="150000"/>
+              </a:lnSpc>
+            </a:pPr>
+            <a:r>
+              <a:rPr lang="en-US" sz="1600" b="1" dirty="0"/>
+              <a:t>Key Problem with Current  G&amp;G Services</a:t>
+            </a:r>
+          </a:p>
+          <a:p>
+            <a:pPr marL="285750" indent="-285750">
+              <a:lnSpc>
+                <a:spcPct val="150000"/>
+              </a:lnSpc>
+              <a:buFont typeface="Arial" panose="020B0604020202020204" pitchFamily="34" charset="0"/>
+              <a:buChar char="•"/>
+            </a:pPr>
+            <a:r>
+              <a:rPr lang="en-US" altLang="en-US" sz="1400" dirty="0">
+                <a:latin typeface="Arial" panose="020B0604020202020204" pitchFamily="34" charset="0"/>
+              </a:rPr>
+              <a:t>Financial Lost - Due to  unsuccessful top up even top up success at CCN </a:t>
+            </a:r>
+            <a:r>
+              <a:rPr lang="en-US" altLang="en-US" sz="1400" dirty="0" err="1">
+                <a:latin typeface="Arial" panose="020B0604020202020204" pitchFamily="34" charset="0"/>
+              </a:rPr>
+              <a:t>Eservice</a:t>
+            </a:r>
+            <a:r>
+              <a:rPr lang="en-US" altLang="en-US" sz="1400" dirty="0">
+                <a:latin typeface="Arial" panose="020B0604020202020204" pitchFamily="34" charset="0"/>
+              </a:rPr>
+              <a:t> middle  , G&amp;G suffer financial lost , this occur because of time out issues</a:t>
+            </a:r>
+          </a:p>
+          <a:p>
+            <a:pPr>
+              <a:lnSpc>
+                <a:spcPct val="150000"/>
+              </a:lnSpc>
+            </a:pPr>
+            <a:endParaRPr lang="en-US" sz="1800" dirty="0"/>
+          </a:p>
+        </p:txBody>
+      </p:sp>
+    </p:spTree>
+    <p:extLst>
+      <p:ext uri="{BB962C8B-B14F-4D97-AF65-F5344CB8AC3E}">
+        <p14:creationId xmlns:p14="http://schemas.microsoft.com/office/powerpoint/2010/main" val="652253342"/>
+      </p:ext>
+    </p:extLst>
+  </p:cSld>
+  <p:clrMapOvr>
+    <a:masterClrMapping/>
+  </p:clrMapOvr>
+</p:sld>
+</file>
+
+<file path=ppt/slides/slide6.xml><?xml version="1.0" encoding="utf-8"?>
+<p:sld xmlns:a="http://schemas.openxmlformats.org/drawingml/2006/main" xmlns:r="http://schemas.openxmlformats.org/officeDocument/2006/relationships" xmlns:p="http://schemas.openxmlformats.org/presentationml/2006/main">
+  <p:cSld>
+    <p:spTree>
+      <p:nvGrpSpPr>
+        <p:cNvPr id="1" name="">
+          <a:extLst>
+            <a:ext uri="{FF2B5EF4-FFF2-40B4-BE49-F238E27FC236}">
+              <a16:creationId xmlns:a16="http://schemas.microsoft.com/office/drawing/2014/main" id="{3A9B3652-1C06-C6DD-E4C3-44864C1E3092}"/>
+            </a:ext>
+          </a:extLst>
+        </p:cNvPr>
+        <p:cNvGrpSpPr/>
+        <p:nvPr/>
+      </p:nvGrpSpPr>
+      <p:grpSpPr>
+        <a:xfrm>
+          <a:off x="0" y="0"/>
+          <a:ext cx="0" cy="0"/>
+          <a:chOff x="0" y="0"/>
+          <a:chExt cx="0" cy="0"/>
+        </a:xfrm>
+      </p:grpSpPr>
+      <p:sp>
+        <p:nvSpPr>
+          <p:cNvPr id="2" name="Slide Number Placeholder 1">
+            <a:extLst>
+              <a:ext uri="{FF2B5EF4-FFF2-40B4-BE49-F238E27FC236}">
+                <a16:creationId xmlns:a16="http://schemas.microsoft.com/office/drawing/2014/main" id="{7A4AE7B4-BBE1-8529-16B2-CAA21CEFE10B}"/>
+              </a:ext>
+            </a:extLst>
+          </p:cNvPr>
+          <p:cNvSpPr>
+            <a:spLocks noGrp="1"/>
+          </p:cNvSpPr>
+          <p:nvPr>
+            <p:ph type="sldNum" sz="quarter" idx="12"/>
+          </p:nvPr>
+        </p:nvSpPr>
+        <p:spPr/>
+        <p:txBody>
+          <a:bodyPr/>
+          <a:lstStyle/>
+          <a:p>
+            <a:fld id="{93288B1A-0894-4E52-95D8-2AC74CBED725}" type="slidenum">
+              <a:rPr lang="en-US" smtClean="0"/>
+              <a:t>6</a:t>
+            </a:fld>
+            <a:endParaRPr lang="en-US"/>
+          </a:p>
+        </p:txBody>
+      </p:sp>
+      <p:sp>
+        <p:nvSpPr>
+          <p:cNvPr id="3" name="Text Placeholder 2">
+            <a:extLst>
+              <a:ext uri="{FF2B5EF4-FFF2-40B4-BE49-F238E27FC236}">
+                <a16:creationId xmlns:a16="http://schemas.microsoft.com/office/drawing/2014/main" id="{51E56B7F-C487-AE14-54A8-59C81F3ED81F}"/>
+              </a:ext>
+            </a:extLst>
+          </p:cNvPr>
+          <p:cNvSpPr>
+            <a:spLocks noGrp="1"/>
+          </p:cNvSpPr>
+          <p:nvPr>
+            <p:ph type="body" idx="1"/>
+          </p:nvPr>
+        </p:nvSpPr>
+        <p:spPr/>
+        <p:txBody>
+          <a:bodyPr/>
+          <a:lstStyle/>
+          <a:p>
+            <a:r>
+              <a:rPr lang="en-US" dirty="0"/>
+              <a:t>About Revamp &amp; Enhancement</a:t>
+            </a:r>
+          </a:p>
+        </p:txBody>
+      </p:sp>
+      <p:sp>
+        <p:nvSpPr>
+          <p:cNvPr id="4" name="TextBox 3">
+            <a:extLst>
+              <a:ext uri="{FF2B5EF4-FFF2-40B4-BE49-F238E27FC236}">
+                <a16:creationId xmlns:a16="http://schemas.microsoft.com/office/drawing/2014/main" id="{4C79C9EE-B9C3-325D-FA00-1CB43BF87656}"/>
+              </a:ext>
+            </a:extLst>
+          </p:cNvPr>
+          <p:cNvSpPr txBox="1"/>
+          <p:nvPr/>
+        </p:nvSpPr>
+        <p:spPr>
+          <a:xfrm>
+            <a:off x="140043" y="932935"/>
+            <a:ext cx="11203460" cy="705258"/>
+          </a:xfrm>
+          <a:prstGeom prst="rect">
+            <a:avLst/>
+          </a:prstGeom>
+          <a:noFill/>
+        </p:spPr>
+        <p:txBody>
+          <a:bodyPr wrap="square">
+            <a:spAutoFit/>
+          </a:bodyPr>
+          <a:lstStyle/>
+          <a:p>
+            <a:pPr>
+              <a:lnSpc>
+                <a:spcPct val="150000"/>
+              </a:lnSpc>
+            </a:pPr>
+            <a:endParaRPr lang="en-US" sz="1400" dirty="0"/>
+          </a:p>
+          <a:p>
+            <a:pPr marL="342900" indent="-342900">
+              <a:lnSpc>
+                <a:spcPct val="150000"/>
+              </a:lnSpc>
+              <a:buAutoNum type="arabicPeriod"/>
+            </a:pPr>
+            <a:endParaRPr lang="en-US" sz="1400" dirty="0"/>
+          </a:p>
+        </p:txBody>
+      </p:sp>
+      <p:sp>
+        <p:nvSpPr>
+          <p:cNvPr id="5" name="TextBox 4">
+            <a:extLst>
+              <a:ext uri="{FF2B5EF4-FFF2-40B4-BE49-F238E27FC236}">
+                <a16:creationId xmlns:a16="http://schemas.microsoft.com/office/drawing/2014/main" id="{B45C5188-5DAD-3A49-9C0F-3796A10E02B6}"/>
+              </a:ext>
+            </a:extLst>
+          </p:cNvPr>
+          <p:cNvSpPr txBox="1"/>
+          <p:nvPr/>
+        </p:nvSpPr>
+        <p:spPr>
+          <a:xfrm>
+            <a:off x="227914" y="1172516"/>
+            <a:ext cx="11576908" cy="3111749"/>
+          </a:xfrm>
+          <a:prstGeom prst="rect">
+            <a:avLst/>
+          </a:prstGeom>
+          <a:noFill/>
+        </p:spPr>
+        <p:txBody>
+          <a:bodyPr wrap="square">
+            <a:spAutoFit/>
+          </a:bodyPr>
+          <a:lstStyle/>
+          <a:p>
+            <a:r>
+              <a:rPr lang="en-US" sz="1600" b="1" dirty="0"/>
+              <a:t>About Large Data Volume &amp; Increasing Transaction Load</a:t>
+            </a:r>
+          </a:p>
+          <a:p>
+            <a:pPr marL="285750" indent="-285750">
+              <a:lnSpc>
+                <a:spcPct val="150000"/>
+              </a:lnSpc>
+              <a:buFont typeface="Arial" panose="020B0604020202020204" pitchFamily="34" charset="0"/>
+              <a:buChar char="•"/>
+            </a:pPr>
+            <a:r>
+              <a:rPr lang="en-US" sz="1400" dirty="0"/>
+              <a:t>Currently key transaction table like sale data need to retain up to 2 years and it store 7 million records.</a:t>
+            </a:r>
+          </a:p>
+          <a:p>
+            <a:pPr marL="285750" indent="-285750">
+              <a:lnSpc>
+                <a:spcPct val="150000"/>
+              </a:lnSpc>
+              <a:buFont typeface="Arial" panose="020B0604020202020204" pitchFamily="34" charset="0"/>
+              <a:buChar char="•"/>
+            </a:pPr>
+            <a:r>
+              <a:rPr lang="en-US" altLang="en-US" sz="1400" dirty="0">
+                <a:latin typeface="Arial" panose="020B0604020202020204" pitchFamily="34" charset="0"/>
+              </a:rPr>
+              <a:t>All-store reports require up to </a:t>
+            </a:r>
+            <a:r>
+              <a:rPr lang="en-US" altLang="en-US" sz="1400" b="1" dirty="0">
+                <a:latin typeface="Arial" panose="020B0604020202020204" pitchFamily="34" charset="0"/>
+              </a:rPr>
+              <a:t>2 months of data</a:t>
+            </a:r>
+            <a:r>
+              <a:rPr lang="en-US" altLang="en-US" sz="1400" dirty="0">
+                <a:latin typeface="Arial" panose="020B0604020202020204" pitchFamily="34" charset="0"/>
+              </a:rPr>
+              <a:t>.</a:t>
+            </a:r>
+          </a:p>
+          <a:p>
+            <a:pPr marL="285750" indent="-285750">
+              <a:lnSpc>
+                <a:spcPct val="150000"/>
+              </a:lnSpc>
+              <a:buFont typeface="Arial" panose="020B0604020202020204" pitchFamily="34" charset="0"/>
+              <a:buChar char="•"/>
+            </a:pPr>
+            <a:r>
+              <a:rPr lang="en-US" altLang="en-US" sz="1400" dirty="0">
+                <a:latin typeface="Arial" panose="020B0604020202020204" pitchFamily="34" charset="0"/>
+              </a:rPr>
+              <a:t>Individual stores must access reports up to </a:t>
+            </a:r>
+            <a:r>
+              <a:rPr lang="en-US" altLang="en-US" sz="1400" b="1" dirty="0">
+                <a:latin typeface="Arial" panose="020B0604020202020204" pitchFamily="34" charset="0"/>
+              </a:rPr>
+              <a:t>180 days</a:t>
+            </a:r>
+            <a:r>
+              <a:rPr lang="en-US" altLang="en-US" sz="1400" dirty="0">
+                <a:latin typeface="Arial" panose="020B0604020202020204" pitchFamily="34" charset="0"/>
+              </a:rPr>
+              <a:t>.</a:t>
+            </a:r>
+          </a:p>
+          <a:p>
+            <a:pPr marL="285750" indent="-285750">
+              <a:lnSpc>
+                <a:spcPct val="150000"/>
+              </a:lnSpc>
+              <a:buFont typeface="Arial" panose="020B0604020202020204" pitchFamily="34" charset="0"/>
+              <a:buChar char="•"/>
+            </a:pPr>
+            <a:endParaRPr lang="en-US" sz="1800" dirty="0"/>
+          </a:p>
+          <a:p>
+            <a:pPr>
+              <a:lnSpc>
+                <a:spcPct val="150000"/>
+              </a:lnSpc>
+            </a:pPr>
+            <a:r>
+              <a:rPr lang="en-US" sz="1600" b="1" dirty="0"/>
+              <a:t>Key Problem with  Large Data Volumes</a:t>
+            </a:r>
+          </a:p>
+          <a:p>
+            <a:pPr marL="285750" indent="-285750">
+              <a:lnSpc>
+                <a:spcPct val="150000"/>
+              </a:lnSpc>
+              <a:buFont typeface="Arial" panose="020B0604020202020204" pitchFamily="34" charset="0"/>
+              <a:buChar char="•"/>
+            </a:pPr>
+            <a:r>
+              <a:rPr lang="en-US" sz="1400" dirty="0"/>
+              <a:t>Performance &amp; Scalability issues -Growing data volume impacts on query performance , ERP sync performance , report generation speed and  system scalability</a:t>
+            </a:r>
+          </a:p>
+          <a:p>
+            <a:pPr>
+              <a:lnSpc>
+                <a:spcPct val="150000"/>
+              </a:lnSpc>
+            </a:pPr>
+            <a:endParaRPr lang="en-US" sz="1800" dirty="0"/>
+          </a:p>
+        </p:txBody>
+      </p:sp>
+      <p:sp>
+        <p:nvSpPr>
+          <p:cNvPr id="8" name="TextBox 7">
+            <a:extLst>
+              <a:ext uri="{FF2B5EF4-FFF2-40B4-BE49-F238E27FC236}">
+                <a16:creationId xmlns:a16="http://schemas.microsoft.com/office/drawing/2014/main" id="{85D886FD-F105-0BD9-0FE5-FF6F9E6B0064}"/>
+              </a:ext>
+            </a:extLst>
+          </p:cNvPr>
+          <p:cNvSpPr txBox="1"/>
+          <p:nvPr/>
+        </p:nvSpPr>
+        <p:spPr>
+          <a:xfrm>
+            <a:off x="227914" y="3823380"/>
+            <a:ext cx="11576908" cy="2465419"/>
+          </a:xfrm>
+          <a:prstGeom prst="rect">
+            <a:avLst/>
+          </a:prstGeom>
+          <a:noFill/>
+        </p:spPr>
+        <p:txBody>
+          <a:bodyPr wrap="square">
+            <a:spAutoFit/>
+          </a:bodyPr>
+          <a:lstStyle/>
+          <a:p>
+            <a:r>
+              <a:rPr lang="en-US" sz="1600" b="1" dirty="0"/>
+              <a:t>About Sale Data Sync Services</a:t>
+            </a:r>
+          </a:p>
+          <a:p>
+            <a:pPr marL="285750" indent="-285750">
+              <a:lnSpc>
+                <a:spcPct val="150000"/>
+              </a:lnSpc>
+              <a:buFont typeface="Arial" panose="020B0604020202020204" pitchFamily="34" charset="0"/>
+              <a:buChar char="•"/>
+            </a:pPr>
+            <a:r>
+              <a:rPr lang="en-US" sz="1400" dirty="0"/>
+              <a:t>Currently sale data sync to Ax (Capital Sale Data) and D365 (G&amp;G Data) with scheduler  with 15 min interval</a:t>
+            </a:r>
+          </a:p>
+          <a:p>
+            <a:pPr marL="285750" indent="-285750">
+              <a:lnSpc>
+                <a:spcPct val="150000"/>
+              </a:lnSpc>
+              <a:buFont typeface="Arial" panose="020B0604020202020204" pitchFamily="34" charset="0"/>
+              <a:buChar char="•"/>
+            </a:pPr>
+            <a:r>
+              <a:rPr lang="en-US" altLang="en-US" sz="1400" dirty="0">
+                <a:latin typeface="Arial" panose="020B0604020202020204" pitchFamily="34" charset="0"/>
+              </a:rPr>
+              <a:t>After all transaction finish sync , it end work shift.</a:t>
+            </a:r>
+          </a:p>
+          <a:p>
+            <a:pPr marL="285750" indent="-285750">
+              <a:lnSpc>
+                <a:spcPct val="150000"/>
+              </a:lnSpc>
+              <a:buFont typeface="Arial" panose="020B0604020202020204" pitchFamily="34" charset="0"/>
+              <a:buChar char="•"/>
+            </a:pPr>
+            <a:endParaRPr lang="en-US" sz="1800" dirty="0"/>
+          </a:p>
+          <a:p>
+            <a:pPr>
+              <a:lnSpc>
+                <a:spcPct val="150000"/>
+              </a:lnSpc>
+            </a:pPr>
+            <a:r>
+              <a:rPr lang="en-US" sz="1600" b="1" dirty="0"/>
+              <a:t>Key Problem with  Sale Data Sync Services</a:t>
+            </a:r>
+          </a:p>
+          <a:p>
+            <a:pPr marL="285750" indent="-285750">
+              <a:lnSpc>
+                <a:spcPct val="150000"/>
+              </a:lnSpc>
+              <a:buFont typeface="Arial" panose="020B0604020202020204" pitchFamily="34" charset="0"/>
+              <a:buChar char="•"/>
+            </a:pPr>
+            <a:r>
+              <a:rPr lang="en-US" sz="1400" dirty="0"/>
+              <a:t>Operation &amp; Data Reliability Issues -Due to delay in data sync , data does not reach to </a:t>
+            </a:r>
+            <a:r>
+              <a:rPr lang="en-US" sz="1400" dirty="0" err="1"/>
+              <a:t>erp</a:t>
+            </a:r>
+            <a:r>
+              <a:rPr lang="en-US" sz="1400" dirty="0"/>
+              <a:t> system in time and also hard to end </a:t>
+            </a:r>
+            <a:r>
+              <a:rPr lang="en-US" sz="1400" dirty="0" err="1"/>
+              <a:t>workshift</a:t>
+            </a:r>
+            <a:r>
+              <a:rPr lang="en-US" sz="1400" dirty="0"/>
+              <a:t>.</a:t>
+            </a:r>
+          </a:p>
+          <a:p>
+            <a:pPr>
+              <a:lnSpc>
+                <a:spcPct val="150000"/>
+              </a:lnSpc>
+            </a:pPr>
+            <a:endParaRPr lang="en-US" sz="1800" dirty="0"/>
+          </a:p>
+        </p:txBody>
+      </p:sp>
+    </p:spTree>
+    <p:extLst>
+      <p:ext uri="{BB962C8B-B14F-4D97-AF65-F5344CB8AC3E}">
+        <p14:creationId xmlns:p14="http://schemas.microsoft.com/office/powerpoint/2010/main" val="3924253111"/>
+      </p:ext>
+    </p:extLst>
+  </p:cSld>
+  <p:clrMapOvr>
+    <a:masterClrMapping/>
+  </p:clrMapOvr>
+</p:sld>
+</file>
+
+<file path=ppt/slides/slide7.xml><?xml version="1.0" encoding="utf-8"?>
+<p:sld xmlns:a="http://schemas.openxmlformats.org/drawingml/2006/main" xmlns:r="http://schemas.openxmlformats.org/officeDocument/2006/relationships" xmlns:p="http://schemas.openxmlformats.org/presentationml/2006/main">
+  <p:cSld>
+    <p:spTree>
+      <p:nvGrpSpPr>
         <p:cNvPr id="1" name=""/>
         <p:cNvGrpSpPr/>
         <p:nvPr/>
@@ -7273,7 +8425,7 @@
           <a:p>
             <a:fld id="{93288B1A-0894-4E52-95D8-2AC74CBED725}" type="slidenum">
               <a:rPr lang="en-US" smtClean="0"/>
-              <a:t>4</a:t>
+              <a:t>7</a:t>
             </a:fld>
             <a:endParaRPr lang="en-US"/>
           </a:p>
@@ -7598,662 +8750,10 @@
           </a:graphicData>
         </a:graphic>
       </p:graphicFrame>
-      <p:sp>
-        <p:nvSpPr>
-          <p:cNvPr id="6" name="TextBox 5">
-            <a:extLst>
-              <a:ext uri="{FF2B5EF4-FFF2-40B4-BE49-F238E27FC236}">
-                <a16:creationId xmlns:a16="http://schemas.microsoft.com/office/drawing/2014/main" id="{344968CC-672C-491C-7CE7-6D1162736D10}"/>
-              </a:ext>
-            </a:extLst>
-          </p:cNvPr>
-          <p:cNvSpPr txBox="1"/>
-          <p:nvPr/>
-        </p:nvSpPr>
-        <p:spPr>
-          <a:xfrm>
-            <a:off x="81003" y="871947"/>
-            <a:ext cx="10209800" cy="1028423"/>
-          </a:xfrm>
-          <a:prstGeom prst="rect">
-            <a:avLst/>
-          </a:prstGeom>
-          <a:noFill/>
-        </p:spPr>
-        <p:txBody>
-          <a:bodyPr wrap="square">
-            <a:spAutoFit/>
-          </a:bodyPr>
-          <a:lstStyle/>
-          <a:p>
-            <a:pPr>
-              <a:lnSpc>
-                <a:spcPct val="150000"/>
-              </a:lnSpc>
-            </a:pPr>
-            <a:r>
-              <a:rPr lang="en-US" sz="1400" dirty="0"/>
-              <a:t>Describe the key goals that the proposed solution aims to achieve, focusing on business needs, regulatory requirements, and architectural improvements.</a:t>
-            </a:r>
-          </a:p>
-          <a:p>
-            <a:pPr>
-              <a:lnSpc>
-                <a:spcPct val="150000"/>
-              </a:lnSpc>
-            </a:pPr>
-            <a:r>
-              <a:rPr lang="en-US" sz="1400" dirty="0"/>
-              <a:t>For examples:</a:t>
-            </a:r>
-          </a:p>
-        </p:txBody>
-      </p:sp>
     </p:spTree>
     <p:extLst>
       <p:ext uri="{BB962C8B-B14F-4D97-AF65-F5344CB8AC3E}">
         <p14:creationId xmlns:p14="http://schemas.microsoft.com/office/powerpoint/2010/main" val="615142532"/>
-      </p:ext>
-    </p:extLst>
-  </p:cSld>
-  <p:clrMapOvr>
-    <a:masterClrMapping/>
-  </p:clrMapOvr>
-</p:sld>
-</file>
-
-<file path=ppt/slides/slide5.xml><?xml version="1.0" encoding="utf-8"?>
-<p:sld xmlns:a="http://schemas.openxmlformats.org/drawingml/2006/main" xmlns:r="http://schemas.openxmlformats.org/officeDocument/2006/relationships" xmlns:p="http://schemas.openxmlformats.org/presentationml/2006/main">
-  <p:cSld>
-    <p:spTree>
-      <p:nvGrpSpPr>
-        <p:cNvPr id="1" name=""/>
-        <p:cNvGrpSpPr/>
-        <p:nvPr/>
-      </p:nvGrpSpPr>
-      <p:grpSpPr>
-        <a:xfrm>
-          <a:off x="0" y="0"/>
-          <a:ext cx="0" cy="0"/>
-          <a:chOff x="0" y="0"/>
-          <a:chExt cx="0" cy="0"/>
-        </a:xfrm>
-      </p:grpSpPr>
-      <p:sp>
-        <p:nvSpPr>
-          <p:cNvPr id="2" name="Slide Number Placeholder 1">
-            <a:extLst>
-              <a:ext uri="{FF2B5EF4-FFF2-40B4-BE49-F238E27FC236}">
-                <a16:creationId xmlns:a16="http://schemas.microsoft.com/office/drawing/2014/main" id="{800F5CF6-2FC2-DAA9-FFF3-85FDAEDC377C}"/>
-              </a:ext>
-            </a:extLst>
-          </p:cNvPr>
-          <p:cNvSpPr>
-            <a:spLocks noGrp="1"/>
-          </p:cNvSpPr>
-          <p:nvPr>
-            <p:ph type="sldNum" sz="quarter" idx="12"/>
-          </p:nvPr>
-        </p:nvSpPr>
-        <p:spPr/>
-        <p:txBody>
-          <a:bodyPr/>
-          <a:lstStyle/>
-          <a:p>
-            <a:fld id="{93288B1A-0894-4E52-95D8-2AC74CBED725}" type="slidenum">
-              <a:rPr lang="en-US" smtClean="0"/>
-              <a:t>5</a:t>
-            </a:fld>
-            <a:endParaRPr lang="en-US"/>
-          </a:p>
-        </p:txBody>
-      </p:sp>
-      <p:sp>
-        <p:nvSpPr>
-          <p:cNvPr id="3" name="Text Placeholder 2">
-            <a:extLst>
-              <a:ext uri="{FF2B5EF4-FFF2-40B4-BE49-F238E27FC236}">
-                <a16:creationId xmlns:a16="http://schemas.microsoft.com/office/drawing/2014/main" id="{18BF5E4B-B356-09D4-A2FB-5CF5B996F068}"/>
-              </a:ext>
-            </a:extLst>
-          </p:cNvPr>
-          <p:cNvSpPr>
-            <a:spLocks noGrp="1"/>
-          </p:cNvSpPr>
-          <p:nvPr>
-            <p:ph type="body" idx="1"/>
-          </p:nvPr>
-        </p:nvSpPr>
-        <p:spPr/>
-        <p:txBody>
-          <a:bodyPr/>
-          <a:lstStyle/>
-          <a:p>
-            <a:r>
-              <a:rPr lang="en-US" dirty="0"/>
-              <a:t>Scope</a:t>
-            </a:r>
-          </a:p>
-        </p:txBody>
-      </p:sp>
-      <p:sp>
-        <p:nvSpPr>
-          <p:cNvPr id="6" name="TextBox 5">
-            <a:extLst>
-              <a:ext uri="{FF2B5EF4-FFF2-40B4-BE49-F238E27FC236}">
-                <a16:creationId xmlns:a16="http://schemas.microsoft.com/office/drawing/2014/main" id="{4A08F4D0-3A0B-98D3-152B-8DA7EAE1C4AE}"/>
-              </a:ext>
-            </a:extLst>
-          </p:cNvPr>
-          <p:cNvSpPr txBox="1"/>
-          <p:nvPr/>
-        </p:nvSpPr>
-        <p:spPr>
-          <a:xfrm>
-            <a:off x="148281" y="930876"/>
-            <a:ext cx="8995719" cy="5801588"/>
-          </a:xfrm>
-          <a:prstGeom prst="rect">
-            <a:avLst/>
-          </a:prstGeom>
-          <a:noFill/>
-        </p:spPr>
-        <p:txBody>
-          <a:bodyPr wrap="square">
-            <a:spAutoFit/>
-          </a:bodyPr>
-          <a:lstStyle/>
-          <a:p>
-            <a:r>
-              <a:rPr lang="en-US" sz="1400" dirty="0"/>
-              <a:t>Describe the boundaries and coverage of the proposed solution, including which systems, processes, and components are included or excluded. This section clarifies what the architecture will address and what is outside its scope.</a:t>
-            </a:r>
-          </a:p>
-          <a:p>
-            <a:endParaRPr lang="en-US" sz="1400" dirty="0"/>
-          </a:p>
-          <a:p>
-            <a:r>
-              <a:rPr lang="en-US" sz="1400" dirty="0"/>
-              <a:t>For examples:</a:t>
-            </a:r>
-          </a:p>
-          <a:p>
-            <a:endParaRPr lang="en-US" sz="1400" dirty="0"/>
-          </a:p>
-          <a:p>
-            <a:r>
-              <a:rPr lang="en-US" sz="1400" b="1" dirty="0"/>
-              <a:t>In-Scope</a:t>
-            </a:r>
-          </a:p>
-          <a:p>
-            <a:pPr marL="285750" indent="-285750">
-              <a:lnSpc>
-                <a:spcPct val="150000"/>
-              </a:lnSpc>
-              <a:buFont typeface="Wingdings" panose="05000000000000000000" pitchFamily="2" charset="2"/>
-              <a:buChar char="Ø"/>
-            </a:pPr>
-            <a:r>
-              <a:rPr lang="en-US" sz="1400" dirty="0"/>
-              <a:t>Implementation of new application modules and services as per the proposed architecture.</a:t>
-            </a:r>
-          </a:p>
-          <a:p>
-            <a:pPr marL="285750" indent="-285750">
-              <a:lnSpc>
-                <a:spcPct val="150000"/>
-              </a:lnSpc>
-              <a:buFont typeface="Wingdings" panose="05000000000000000000" pitchFamily="2" charset="2"/>
-              <a:buChar char="Ø"/>
-            </a:pPr>
-            <a:r>
-              <a:rPr lang="en-US" sz="1400" dirty="0"/>
-              <a:t>Backend development using </a:t>
-            </a:r>
-            <a:r>
-              <a:rPr lang="en-US" sz="1400" b="1" dirty="0"/>
-              <a:t>Spring Boot</a:t>
-            </a:r>
-            <a:r>
-              <a:rPr lang="en-US" sz="1400" dirty="0"/>
-              <a:t> in a monolithic structure.</a:t>
-            </a:r>
-          </a:p>
-          <a:p>
-            <a:pPr marL="285750" indent="-285750">
-              <a:lnSpc>
-                <a:spcPct val="150000"/>
-              </a:lnSpc>
-              <a:buFont typeface="Wingdings" panose="05000000000000000000" pitchFamily="2" charset="2"/>
-              <a:buChar char="Ø"/>
-            </a:pPr>
-            <a:r>
-              <a:rPr lang="en-US" sz="1400" dirty="0"/>
-              <a:t>Role-based access control (RBAC) implemented at the backend.</a:t>
-            </a:r>
-          </a:p>
-          <a:p>
-            <a:pPr marL="285750" indent="-285750">
-              <a:lnSpc>
-                <a:spcPct val="150000"/>
-              </a:lnSpc>
-              <a:buFont typeface="Wingdings" panose="05000000000000000000" pitchFamily="2" charset="2"/>
-              <a:buChar char="Ø"/>
-            </a:pPr>
-            <a:r>
-              <a:rPr lang="en-US" sz="1400" dirty="0"/>
-              <a:t>User login using hashed passwords stored in the portal database.</a:t>
-            </a:r>
-          </a:p>
-          <a:p>
-            <a:pPr marL="285750" indent="-285750">
-              <a:lnSpc>
-                <a:spcPct val="150000"/>
-              </a:lnSpc>
-              <a:buFont typeface="Wingdings" panose="05000000000000000000" pitchFamily="2" charset="2"/>
-              <a:buChar char="Ø"/>
-            </a:pPr>
-            <a:r>
-              <a:rPr lang="en-US" sz="1400" dirty="0"/>
-              <a:t>OTP verification for first-time login and every login attempt by all parent merchant users .</a:t>
-            </a:r>
-          </a:p>
-          <a:p>
-            <a:pPr marL="285750" indent="-285750">
-              <a:lnSpc>
-                <a:spcPct val="150000"/>
-              </a:lnSpc>
-              <a:buFont typeface="Wingdings" panose="05000000000000000000" pitchFamily="2" charset="2"/>
-              <a:buChar char="Ø"/>
-            </a:pPr>
-            <a:r>
-              <a:rPr lang="en-US" sz="1400" dirty="0"/>
-              <a:t>Audit logging for login attempts, OTP validations, report access, and privileged functions.</a:t>
-            </a:r>
-          </a:p>
-          <a:p>
-            <a:pPr>
-              <a:lnSpc>
-                <a:spcPct val="150000"/>
-              </a:lnSpc>
-            </a:pPr>
-            <a:endParaRPr lang="en-US" sz="1400" dirty="0"/>
-          </a:p>
-          <a:p>
-            <a:pPr>
-              <a:lnSpc>
-                <a:spcPct val="150000"/>
-              </a:lnSpc>
-            </a:pPr>
-            <a:r>
-              <a:rPr lang="en-US" sz="1400" b="1" dirty="0"/>
-              <a:t>Out-Scope</a:t>
-            </a:r>
-          </a:p>
-          <a:p>
-            <a:pPr marL="285750" indent="-285750">
-              <a:lnSpc>
-                <a:spcPct val="150000"/>
-              </a:lnSpc>
-              <a:buFont typeface="Wingdings" panose="05000000000000000000" pitchFamily="2" charset="2"/>
-              <a:buChar char="Ø"/>
-            </a:pPr>
-            <a:r>
-              <a:rPr lang="en-US" sz="1400" dirty="0"/>
-              <a:t>Changes to legacy systems not directly impacted by the solution.</a:t>
-            </a:r>
-          </a:p>
-          <a:p>
-            <a:pPr marL="285750" indent="-285750">
-              <a:lnSpc>
-                <a:spcPct val="150000"/>
-              </a:lnSpc>
-              <a:buFont typeface="Wingdings" panose="05000000000000000000" pitchFamily="2" charset="2"/>
-              <a:buChar char="Ø"/>
-            </a:pPr>
-            <a:r>
-              <a:rPr lang="en-US" sz="1400" dirty="0"/>
-              <a:t>Manual processes or operations that remain outside the automated workflows.</a:t>
-            </a:r>
-          </a:p>
-          <a:p>
-            <a:pPr marL="285750" indent="-285750">
-              <a:lnSpc>
-                <a:spcPct val="150000"/>
-              </a:lnSpc>
-              <a:buFont typeface="Wingdings" panose="05000000000000000000" pitchFamily="2" charset="2"/>
-              <a:buChar char="Ø"/>
-            </a:pPr>
-            <a:r>
-              <a:rPr lang="en-US" sz="1400" dirty="0"/>
-              <a:t>Third-party systems not listed for integration in the solution proposal.</a:t>
-            </a:r>
-          </a:p>
-          <a:p>
-            <a:pPr marL="285750" indent="-285750">
-              <a:lnSpc>
-                <a:spcPct val="150000"/>
-              </a:lnSpc>
-              <a:buFont typeface="Wingdings" panose="05000000000000000000" pitchFamily="2" charset="2"/>
-              <a:buChar char="Ø"/>
-            </a:pPr>
-            <a:r>
-              <a:rPr lang="en-US" sz="1400" dirty="0"/>
-              <a:t>Non-functional requirements not explicitly covered (e.g., hardware upgrades outside the current architecture).</a:t>
-            </a:r>
-          </a:p>
-          <a:p>
-            <a:pPr marL="285750" indent="-285750">
-              <a:lnSpc>
-                <a:spcPct val="150000"/>
-              </a:lnSpc>
-              <a:buFont typeface="Wingdings" panose="05000000000000000000" pitchFamily="2" charset="2"/>
-              <a:buChar char="Ø"/>
-            </a:pPr>
-            <a:r>
-              <a:rPr lang="en-US" sz="1400" dirty="0"/>
-              <a:t>Any future enhancements or modules beyond the current project scope.</a:t>
-            </a:r>
-          </a:p>
-          <a:p>
-            <a:endParaRPr lang="en-US" sz="1400" dirty="0"/>
-          </a:p>
-        </p:txBody>
-      </p:sp>
-    </p:spTree>
-    <p:extLst>
-      <p:ext uri="{BB962C8B-B14F-4D97-AF65-F5344CB8AC3E}">
-        <p14:creationId xmlns:p14="http://schemas.microsoft.com/office/powerpoint/2010/main" val="2253167209"/>
-      </p:ext>
-    </p:extLst>
-  </p:cSld>
-  <p:clrMapOvr>
-    <a:masterClrMapping/>
-  </p:clrMapOvr>
-</p:sld>
-</file>
-
-<file path=ppt/slides/slide6.xml><?xml version="1.0" encoding="utf-8"?>
-<p:sld xmlns:a="http://schemas.openxmlformats.org/drawingml/2006/main" xmlns:r="http://schemas.openxmlformats.org/officeDocument/2006/relationships" xmlns:p="http://schemas.openxmlformats.org/presentationml/2006/main">
-  <p:cSld>
-    <p:spTree>
-      <p:nvGrpSpPr>
-        <p:cNvPr id="1" name=""/>
-        <p:cNvGrpSpPr/>
-        <p:nvPr/>
-      </p:nvGrpSpPr>
-      <p:grpSpPr>
-        <a:xfrm>
-          <a:off x="0" y="0"/>
-          <a:ext cx="0" cy="0"/>
-          <a:chOff x="0" y="0"/>
-          <a:chExt cx="0" cy="0"/>
-        </a:xfrm>
-      </p:grpSpPr>
-      <p:sp>
-        <p:nvSpPr>
-          <p:cNvPr id="2" name="Slide Number Placeholder 1">
-            <a:extLst>
-              <a:ext uri="{FF2B5EF4-FFF2-40B4-BE49-F238E27FC236}">
-                <a16:creationId xmlns:a16="http://schemas.microsoft.com/office/drawing/2014/main" id="{2653FD79-DFAF-0975-69EF-FB3463742E2D}"/>
-              </a:ext>
-            </a:extLst>
-          </p:cNvPr>
-          <p:cNvSpPr>
-            <a:spLocks noGrp="1"/>
-          </p:cNvSpPr>
-          <p:nvPr>
-            <p:ph type="sldNum" sz="quarter" idx="12"/>
-          </p:nvPr>
-        </p:nvSpPr>
-        <p:spPr/>
-        <p:txBody>
-          <a:bodyPr/>
-          <a:lstStyle/>
-          <a:p>
-            <a:fld id="{93288B1A-0894-4E52-95D8-2AC74CBED725}" type="slidenum">
-              <a:rPr lang="en-US" smtClean="0"/>
-              <a:t>6</a:t>
-            </a:fld>
-            <a:endParaRPr lang="en-US"/>
-          </a:p>
-        </p:txBody>
-      </p:sp>
-      <p:sp>
-        <p:nvSpPr>
-          <p:cNvPr id="18" name="Text Placeholder 2">
-            <a:extLst>
-              <a:ext uri="{FF2B5EF4-FFF2-40B4-BE49-F238E27FC236}">
-                <a16:creationId xmlns:a16="http://schemas.microsoft.com/office/drawing/2014/main" id="{B6A3574E-BCA8-647A-9EAA-2CEFC6088E80}"/>
-              </a:ext>
-            </a:extLst>
-          </p:cNvPr>
-          <p:cNvSpPr>
-            <a:spLocks noGrp="1"/>
-          </p:cNvSpPr>
-          <p:nvPr>
-            <p:ph type="body" idx="1"/>
-          </p:nvPr>
-        </p:nvSpPr>
-        <p:spPr>
-          <a:xfrm>
-            <a:off x="81002" y="48294"/>
-            <a:ext cx="10226779" cy="465975"/>
-          </a:xfrm>
-        </p:spPr>
-        <p:txBody>
-          <a:bodyPr/>
-          <a:lstStyle/>
-          <a:p>
-            <a:r>
-              <a:rPr lang="en-US" dirty="0"/>
-              <a:t>Assumptions And Constraints</a:t>
-            </a:r>
-          </a:p>
-        </p:txBody>
-      </p:sp>
-      <p:sp>
-        <p:nvSpPr>
-          <p:cNvPr id="19" name="TextBox 18">
-            <a:extLst>
-              <a:ext uri="{FF2B5EF4-FFF2-40B4-BE49-F238E27FC236}">
-                <a16:creationId xmlns:a16="http://schemas.microsoft.com/office/drawing/2014/main" id="{85B4683E-03BA-A611-0997-F9DE828A7C96}"/>
-              </a:ext>
-            </a:extLst>
-          </p:cNvPr>
-          <p:cNvSpPr txBox="1"/>
-          <p:nvPr/>
-        </p:nvSpPr>
-        <p:spPr>
-          <a:xfrm>
-            <a:off x="81002" y="864974"/>
-            <a:ext cx="10059776" cy="738664"/>
-          </a:xfrm>
-          <a:prstGeom prst="rect">
-            <a:avLst/>
-          </a:prstGeom>
-          <a:noFill/>
-        </p:spPr>
-        <p:txBody>
-          <a:bodyPr wrap="square">
-            <a:spAutoFit/>
-          </a:bodyPr>
-          <a:lstStyle/>
-          <a:p>
-            <a:r>
-              <a:rPr lang="en-US" sz="1400" dirty="0"/>
-              <a:t>Describe the key assumptions and constraints that impact the proposed solution. Assumptions are factors considered true for planning purposes, while constraints are limitations that must be considered in the design.</a:t>
-            </a:r>
-          </a:p>
-          <a:p>
-            <a:endParaRPr lang="en-US" sz="1400" dirty="0"/>
-          </a:p>
-        </p:txBody>
-      </p:sp>
-    </p:spTree>
-    <p:extLst>
-      <p:ext uri="{BB962C8B-B14F-4D97-AF65-F5344CB8AC3E}">
-        <p14:creationId xmlns:p14="http://schemas.microsoft.com/office/powerpoint/2010/main" val="1235559352"/>
-      </p:ext>
-    </p:extLst>
-  </p:cSld>
-  <p:clrMapOvr>
-    <a:masterClrMapping/>
-  </p:clrMapOvr>
-</p:sld>
-</file>
-
-<file path=ppt/slides/slide7.xml><?xml version="1.0" encoding="utf-8"?>
-<p:sld xmlns:a="http://schemas.openxmlformats.org/drawingml/2006/main" xmlns:r="http://schemas.openxmlformats.org/officeDocument/2006/relationships" xmlns:p="http://schemas.openxmlformats.org/presentationml/2006/main">
-  <p:cSld>
-    <p:spTree>
-      <p:nvGrpSpPr>
-        <p:cNvPr id="1" name=""/>
-        <p:cNvGrpSpPr/>
-        <p:nvPr/>
-      </p:nvGrpSpPr>
-      <p:grpSpPr>
-        <a:xfrm>
-          <a:off x="0" y="0"/>
-          <a:ext cx="0" cy="0"/>
-          <a:chOff x="0" y="0"/>
-          <a:chExt cx="0" cy="0"/>
-        </a:xfrm>
-      </p:grpSpPr>
-      <p:sp>
-        <p:nvSpPr>
-          <p:cNvPr id="2" name="Slide Number Placeholder 1">
-            <a:extLst>
-              <a:ext uri="{FF2B5EF4-FFF2-40B4-BE49-F238E27FC236}">
-                <a16:creationId xmlns:a16="http://schemas.microsoft.com/office/drawing/2014/main" id="{55A1ABD3-2224-FCAA-C067-563A2AFC6D7E}"/>
-              </a:ext>
-            </a:extLst>
-          </p:cNvPr>
-          <p:cNvSpPr>
-            <a:spLocks noGrp="1"/>
-          </p:cNvSpPr>
-          <p:nvPr>
-            <p:ph type="sldNum" sz="quarter" idx="12"/>
-          </p:nvPr>
-        </p:nvSpPr>
-        <p:spPr/>
-        <p:txBody>
-          <a:bodyPr/>
-          <a:lstStyle/>
-          <a:p>
-            <a:fld id="{93288B1A-0894-4E52-95D8-2AC74CBED725}" type="slidenum">
-              <a:rPr lang="en-US" smtClean="0"/>
-              <a:t>7</a:t>
-            </a:fld>
-            <a:endParaRPr lang="en-US"/>
-          </a:p>
-        </p:txBody>
-      </p:sp>
-      <p:sp>
-        <p:nvSpPr>
-          <p:cNvPr id="3" name="Text Placeholder 2">
-            <a:extLst>
-              <a:ext uri="{FF2B5EF4-FFF2-40B4-BE49-F238E27FC236}">
-                <a16:creationId xmlns:a16="http://schemas.microsoft.com/office/drawing/2014/main" id="{895422F2-7454-7627-91EE-5B441571B88F}"/>
-              </a:ext>
-            </a:extLst>
-          </p:cNvPr>
-          <p:cNvSpPr>
-            <a:spLocks noGrp="1"/>
-          </p:cNvSpPr>
-          <p:nvPr>
-            <p:ph type="body" idx="1"/>
-          </p:nvPr>
-        </p:nvSpPr>
-        <p:spPr/>
-        <p:txBody>
-          <a:bodyPr/>
-          <a:lstStyle/>
-          <a:p>
-            <a:r>
-              <a:rPr lang="en-US" dirty="0"/>
-              <a:t>Solution Overview</a:t>
-            </a:r>
-          </a:p>
-        </p:txBody>
-      </p:sp>
-      <p:pic>
-        <p:nvPicPr>
-          <p:cNvPr id="5" name="Picture 4">
-            <a:extLst>
-              <a:ext uri="{FF2B5EF4-FFF2-40B4-BE49-F238E27FC236}">
-                <a16:creationId xmlns:a16="http://schemas.microsoft.com/office/drawing/2014/main" id="{6EB207E7-4542-1289-3145-260DB3FAC1AB}"/>
-              </a:ext>
-            </a:extLst>
-          </p:cNvPr>
-          <p:cNvPicPr>
-            <a:picLocks noChangeAspect="1"/>
-          </p:cNvPicPr>
-          <p:nvPr/>
-        </p:nvPicPr>
-        <p:blipFill>
-          <a:blip r:embed="rId2">
-            <a:extLst>
-              <a:ext uri="{28A0092B-C50C-407E-A947-70E740481C1C}">
-                <a14:useLocalDpi xmlns:a14="http://schemas.microsoft.com/office/drawing/2010/main" val="0"/>
-              </a:ext>
-            </a:extLst>
-          </a:blip>
-          <a:stretch>
-            <a:fillRect/>
-          </a:stretch>
-        </p:blipFill>
-        <p:spPr>
-          <a:xfrm>
-            <a:off x="81002" y="823783"/>
-            <a:ext cx="5653056" cy="5960076"/>
-          </a:xfrm>
-          <a:prstGeom prst="rect">
-            <a:avLst/>
-          </a:prstGeom>
-        </p:spPr>
-      </p:pic>
-      <p:sp>
-        <p:nvSpPr>
-          <p:cNvPr id="7" name="TextBox 6">
-            <a:extLst>
-              <a:ext uri="{FF2B5EF4-FFF2-40B4-BE49-F238E27FC236}">
-                <a16:creationId xmlns:a16="http://schemas.microsoft.com/office/drawing/2014/main" id="{2DE14C54-E52B-D7B2-AEF3-2AB70C46F51C}"/>
-              </a:ext>
-            </a:extLst>
-          </p:cNvPr>
-          <p:cNvSpPr txBox="1"/>
-          <p:nvPr/>
-        </p:nvSpPr>
-        <p:spPr>
-          <a:xfrm>
-            <a:off x="5877173" y="897925"/>
-            <a:ext cx="6111627" cy="738664"/>
-          </a:xfrm>
-          <a:prstGeom prst="rect">
-            <a:avLst/>
-          </a:prstGeom>
-          <a:noFill/>
-        </p:spPr>
-        <p:txBody>
-          <a:bodyPr wrap="square">
-            <a:spAutoFit/>
-          </a:bodyPr>
-          <a:lstStyle/>
-          <a:p>
-            <a:r>
-              <a:rPr lang="en-US" sz="1400" dirty="0"/>
-              <a:t>Describe the overall solution in a holistic manner, covering the key business components, common services used, application platform and infrastructure, integration services, and all interfacing systems involved</a:t>
-            </a:r>
-          </a:p>
-        </p:txBody>
-      </p:sp>
-    </p:spTree>
-    <p:extLst>
-      <p:ext uri="{BB962C8B-B14F-4D97-AF65-F5344CB8AC3E}">
-        <p14:creationId xmlns:p14="http://schemas.microsoft.com/office/powerpoint/2010/main" val="2224916"/>
       </p:ext>
     </p:extLst>
   </p:cSld>
@@ -8285,7 +8785,7 @@
           <p:cNvPr id="2" name="Slide Number Placeholder 1">
             <a:extLst>
               <a:ext uri="{FF2B5EF4-FFF2-40B4-BE49-F238E27FC236}">
-                <a16:creationId xmlns:a16="http://schemas.microsoft.com/office/drawing/2014/main" id="{9AD99018-257E-E80B-CC48-12AEEEDA48FB}"/>
+                <a16:creationId xmlns:a16="http://schemas.microsoft.com/office/drawing/2014/main" id="{800F5CF6-2FC2-DAA9-FFF3-85FDAEDC377C}"/>
               </a:ext>
             </a:extLst>
           </p:cNvPr>
@@ -8314,7 +8814,7 @@
           <p:cNvPr id="3" name="Text Placeholder 2">
             <a:extLst>
               <a:ext uri="{FF2B5EF4-FFF2-40B4-BE49-F238E27FC236}">
-                <a16:creationId xmlns:a16="http://schemas.microsoft.com/office/drawing/2014/main" id="{F43F683D-1547-ED8B-AFDE-8F3ED9815590}"/>
+                <a16:creationId xmlns:a16="http://schemas.microsoft.com/office/drawing/2014/main" id="{18BF5E4B-B356-09D4-A2FB-5CF5B996F068}"/>
               </a:ext>
             </a:extLst>
           </p:cNvPr>
@@ -8332,17 +8832,17 @@
           <a:p>
             <a:r>
               <a:rPr lang="en-US" dirty="0"/>
-              <a:t>High Level Architecture</a:t>
-            </a:r>
-          </a:p>
-        </p:txBody>
-      </p:sp>
-      <p:sp>
-        <p:nvSpPr>
-          <p:cNvPr id="5" name="TextBox 4">
-            <a:extLst>
-              <a:ext uri="{FF2B5EF4-FFF2-40B4-BE49-F238E27FC236}">
-                <a16:creationId xmlns:a16="http://schemas.microsoft.com/office/drawing/2014/main" id="{82FAD60E-CFEC-2969-C965-6D7602D8379A}"/>
+              <a:t>Scope</a:t>
+            </a:r>
+          </a:p>
+        </p:txBody>
+      </p:sp>
+      <p:sp>
+        <p:nvSpPr>
+          <p:cNvPr id="6" name="TextBox 5">
+            <a:extLst>
+              <a:ext uri="{FF2B5EF4-FFF2-40B4-BE49-F238E27FC236}">
+                <a16:creationId xmlns:a16="http://schemas.microsoft.com/office/drawing/2014/main" id="{4A08F4D0-3A0B-98D3-152B-8DA7EAE1C4AE}"/>
               </a:ext>
             </a:extLst>
           </p:cNvPr>
@@ -8351,8 +8851,8 @@
         </p:nvSpPr>
         <p:spPr>
           <a:xfrm>
-            <a:off x="5544066" y="996779"/>
-            <a:ext cx="4763715" cy="738664"/>
+            <a:off x="148281" y="930876"/>
+            <a:ext cx="11195222" cy="4724370"/>
           </a:xfrm>
           <a:prstGeom prst="rect">
             <a:avLst/>
@@ -8366,52 +8866,216 @@
           <a:lstStyle/>
           <a:p>
             <a:r>
-              <a:rPr lang="en-US" sz="1400" dirty="0"/>
-              <a:t>Describe the high-level technical architecture including hosting location, network zones, key technical components, and overall network flow between layers.</a:t>
-            </a:r>
-          </a:p>
-        </p:txBody>
-      </p:sp>
-      <p:pic>
-        <p:nvPicPr>
-          <p:cNvPr id="7" name="Picture 6">
-            <a:extLst>
-              <a:ext uri="{FF2B5EF4-FFF2-40B4-BE49-F238E27FC236}">
-                <a16:creationId xmlns:a16="http://schemas.microsoft.com/office/drawing/2014/main" id="{63DDF4DC-EFCA-12D3-89DC-683518865446}"/>
-              </a:ext>
-            </a:extLst>
-          </p:cNvPr>
-          <p:cNvPicPr>
-            <a:picLocks noChangeAspect="1"/>
-          </p:cNvPicPr>
-          <p:nvPr/>
-        </p:nvPicPr>
-        <p:blipFill>
-          <a:blip r:embed="rId2">
-            <a:extLst>
-              <a:ext uri="{28A0092B-C50C-407E-A947-70E740481C1C}">
-                <a14:useLocalDpi xmlns:a14="http://schemas.microsoft.com/office/drawing/2010/main" val="0"/>
-              </a:ext>
-            </a:extLst>
-          </a:blip>
-          <a:stretch>
-            <a:fillRect/>
-          </a:stretch>
-        </p:blipFill>
-        <p:spPr>
-          <a:xfrm>
-            <a:off x="189470" y="980303"/>
-            <a:ext cx="4821881" cy="5859500"/>
-          </a:xfrm>
-          <a:prstGeom prst="rect">
-            <a:avLst/>
-          </a:prstGeom>
-        </p:spPr>
-      </p:pic>
+              <a:rPr lang="en-US" sz="1400" b="1" dirty="0"/>
+              <a:t>In-Scope</a:t>
+            </a:r>
+          </a:p>
+          <a:p>
+            <a:pPr>
+              <a:lnSpc>
+                <a:spcPct val="150000"/>
+              </a:lnSpc>
+            </a:pPr>
+            <a:r>
+              <a:rPr lang="en-US" sz="1400" u="sng" dirty="0"/>
+              <a:t> YPS Service</a:t>
+            </a:r>
+            <a:endParaRPr lang="en-US" sz="1400" b="1" dirty="0"/>
+          </a:p>
+          <a:p>
+            <a:pPr marL="285750" indent="-285750">
+              <a:lnSpc>
+                <a:spcPct val="150000"/>
+              </a:lnSpc>
+              <a:buFont typeface="Wingdings" panose="05000000000000000000" pitchFamily="2" charset="2"/>
+              <a:buChar char="Ø"/>
+            </a:pPr>
+            <a:r>
+              <a:rPr lang="en-US" sz="1400" dirty="0"/>
+              <a:t>Implement new service as </a:t>
+            </a:r>
+            <a:r>
+              <a:rPr lang="en-US" sz="1400" dirty="0" err="1"/>
+              <a:t>YPSService</a:t>
+            </a:r>
+            <a:r>
+              <a:rPr lang="en-US" sz="1400" dirty="0"/>
+              <a:t> to handle all </a:t>
+            </a:r>
+            <a:r>
+              <a:rPr lang="en-US" sz="1400" dirty="0" err="1"/>
+              <a:t>yps</a:t>
+            </a:r>
+            <a:r>
+              <a:rPr lang="en-US" sz="1400" dirty="0"/>
+              <a:t> operation such as incoming </a:t>
+            </a:r>
+            <a:r>
+              <a:rPr lang="en-US" sz="1400" dirty="0" err="1"/>
+              <a:t>yps</a:t>
+            </a:r>
+            <a:r>
+              <a:rPr lang="en-US" sz="1400" dirty="0"/>
+              <a:t> transaction ,preparing raw sale data and recovering  fail sale data part.</a:t>
+            </a:r>
+          </a:p>
+          <a:p>
+            <a:pPr marL="285750" indent="-285750">
+              <a:lnSpc>
+                <a:spcPct val="150000"/>
+              </a:lnSpc>
+              <a:buFont typeface="Wingdings" panose="05000000000000000000" pitchFamily="2" charset="2"/>
+              <a:buChar char="Ø"/>
+            </a:pPr>
+            <a:r>
+              <a:rPr lang="en-US" sz="1400" dirty="0"/>
+              <a:t>Use separate </a:t>
+            </a:r>
+            <a:r>
+              <a:rPr lang="en-US" sz="1400" dirty="0" err="1"/>
+              <a:t>yps</a:t>
+            </a:r>
+            <a:r>
+              <a:rPr lang="en-US" sz="1400" dirty="0"/>
+              <a:t> database for handling </a:t>
+            </a:r>
+            <a:r>
+              <a:rPr lang="en-US" sz="1400" dirty="0" err="1"/>
+              <a:t>yps</a:t>
+            </a:r>
+            <a:r>
+              <a:rPr lang="en-US" sz="1400" dirty="0"/>
+              <a:t> operations for storing </a:t>
+            </a:r>
+            <a:r>
+              <a:rPr lang="en-US" sz="1400" dirty="0" err="1"/>
+              <a:t>yps</a:t>
+            </a:r>
+            <a:r>
+              <a:rPr lang="en-US" sz="1400" dirty="0"/>
+              <a:t> transactions ,import records and </a:t>
+            </a:r>
+            <a:r>
+              <a:rPr lang="en-US" sz="1400" dirty="0" err="1"/>
+              <a:t>ypsfile</a:t>
+            </a:r>
+            <a:r>
+              <a:rPr lang="en-US" sz="1400" dirty="0"/>
+              <a:t> config records.</a:t>
+            </a:r>
+          </a:p>
+          <a:p>
+            <a:pPr marL="285750" indent="-285750">
+              <a:lnSpc>
+                <a:spcPct val="150000"/>
+              </a:lnSpc>
+              <a:buFont typeface="Wingdings" panose="05000000000000000000" pitchFamily="2" charset="2"/>
+              <a:buChar char="Ø"/>
+            </a:pPr>
+            <a:r>
+              <a:rPr lang="en-US" sz="1400" dirty="0"/>
+              <a:t>Raw sale data will send to Rabbit MQ and it will consume by DataService and process sale operations. </a:t>
+            </a:r>
+            <a:r>
+              <a:rPr lang="en-US" sz="1400" dirty="0" err="1"/>
+              <a:t>DataServices</a:t>
+            </a:r>
+            <a:r>
+              <a:rPr lang="en-US" sz="1400" dirty="0"/>
+              <a:t> will implement for revamp to process </a:t>
+            </a:r>
+            <a:r>
+              <a:rPr lang="en-US" sz="1400" dirty="0" err="1"/>
+              <a:t>YPSsale</a:t>
+            </a:r>
+            <a:r>
+              <a:rPr lang="en-US" sz="1400" dirty="0"/>
+              <a:t> and finalize other </a:t>
+            </a:r>
+            <a:r>
+              <a:rPr lang="en-US" sz="1400" dirty="0" err="1"/>
+              <a:t>g&amp;g</a:t>
+            </a:r>
+            <a:r>
+              <a:rPr lang="en-US" sz="1400" dirty="0"/>
+              <a:t> operations.</a:t>
+            </a:r>
+          </a:p>
+          <a:p>
+            <a:pPr>
+              <a:lnSpc>
+                <a:spcPct val="150000"/>
+              </a:lnSpc>
+            </a:pPr>
+            <a:endParaRPr lang="en-US" sz="1400" dirty="0"/>
+          </a:p>
+          <a:p>
+            <a:pPr>
+              <a:lnSpc>
+                <a:spcPct val="150000"/>
+              </a:lnSpc>
+            </a:pPr>
+            <a:r>
+              <a:rPr lang="en-US" sz="1400" u="sng" dirty="0"/>
+              <a:t>G&amp;G Bill &amp; Subscription Service</a:t>
+            </a:r>
+          </a:p>
+          <a:p>
+            <a:pPr marL="285750" indent="-285750">
+              <a:lnSpc>
+                <a:spcPct val="150000"/>
+              </a:lnSpc>
+              <a:buFont typeface="Wingdings" panose="05000000000000000000" pitchFamily="2" charset="2"/>
+              <a:buChar char="Ø"/>
+            </a:pPr>
+            <a:r>
+              <a:rPr lang="en-US" sz="1400" dirty="0"/>
+              <a:t>Sale operations will enhance  by using Redis &amp; Rabbit MQ. So, implement only sale part before publishing to queue in existing G&amp;G </a:t>
+            </a:r>
+            <a:r>
+              <a:rPr lang="en-US" sz="1400" dirty="0" err="1"/>
+              <a:t>Eservices</a:t>
+            </a:r>
+            <a:r>
+              <a:rPr lang="en-US" sz="1400" dirty="0"/>
+              <a:t>  and DataService  part is consuming sale data and finalize sale by adding commission ,print and prefunding.</a:t>
+            </a:r>
+          </a:p>
+          <a:p>
+            <a:pPr marL="285750" indent="-285750">
+              <a:lnSpc>
+                <a:spcPct val="150000"/>
+              </a:lnSpc>
+              <a:buFont typeface="Wingdings" panose="05000000000000000000" pitchFamily="2" charset="2"/>
+              <a:buChar char="Ø"/>
+            </a:pPr>
+            <a:r>
+              <a:rPr lang="en-US" sz="1400" dirty="0"/>
+              <a:t>Optimize code flow for data fetching  and processing sale operation by dividing code part (sale ,commission , print) to prevent operation fail &amp; data lost due to database processing.</a:t>
+            </a:r>
+          </a:p>
+          <a:p>
+            <a:pPr marL="285750" indent="-285750">
+              <a:lnSpc>
+                <a:spcPct val="150000"/>
+              </a:lnSpc>
+              <a:buFont typeface="Wingdings" panose="05000000000000000000" pitchFamily="2" charset="2"/>
+              <a:buChar char="Ø"/>
+            </a:pPr>
+            <a:r>
+              <a:rPr lang="en-US" sz="1400" dirty="0"/>
+              <a:t>Retry mechanism for bill , subscription service for fail operations and rollback to prevent duplication operations</a:t>
+            </a:r>
+          </a:p>
+          <a:p>
+            <a:endParaRPr lang="en-US" sz="1400" dirty="0"/>
+          </a:p>
+        </p:txBody>
+      </p:sp>
     </p:spTree>
     <p:extLst>
       <p:ext uri="{BB962C8B-B14F-4D97-AF65-F5344CB8AC3E}">
-        <p14:creationId xmlns:p14="http://schemas.microsoft.com/office/powerpoint/2010/main" val="3363287682"/>
+        <p14:creationId xmlns:p14="http://schemas.microsoft.com/office/powerpoint/2010/main" val="2253167209"/>
       </p:ext>
     </p:extLst>
   </p:cSld>
@@ -8426,7 +9090,13 @@
   <p:cSld>
     <p:spTree>
       <p:nvGrpSpPr>
-        <p:cNvPr id="1" name=""/>
+        <p:cNvPr id="1" name="">
+          <a:extLst>
+            <a:ext uri="{FF2B5EF4-FFF2-40B4-BE49-F238E27FC236}">
+              <a16:creationId xmlns:a16="http://schemas.microsoft.com/office/drawing/2014/main" id="{BBCD89C9-E8DA-94A2-577F-6636A989D3A0}"/>
+            </a:ext>
+          </a:extLst>
+        </p:cNvPr>
         <p:cNvGrpSpPr/>
         <p:nvPr/>
       </p:nvGrpSpPr>
@@ -8443,7 +9113,7 @@
           <p:cNvPr id="2" name="Slide Number Placeholder 1">
             <a:extLst>
               <a:ext uri="{FF2B5EF4-FFF2-40B4-BE49-F238E27FC236}">
-                <a16:creationId xmlns:a16="http://schemas.microsoft.com/office/drawing/2014/main" id="{6F55D4C7-5BB5-FF19-92CE-65503AB70A2D}"/>
+                <a16:creationId xmlns:a16="http://schemas.microsoft.com/office/drawing/2014/main" id="{06AC11A3-EB5F-AD58-CE02-B0906833E222}"/>
               </a:ext>
             </a:extLst>
           </p:cNvPr>
@@ -8472,7 +9142,7 @@
           <p:cNvPr id="3" name="Text Placeholder 2">
             <a:extLst>
               <a:ext uri="{FF2B5EF4-FFF2-40B4-BE49-F238E27FC236}">
-                <a16:creationId xmlns:a16="http://schemas.microsoft.com/office/drawing/2014/main" id="{E87A27D2-3989-9BB6-7123-D448AD8D2F09}"/>
+                <a16:creationId xmlns:a16="http://schemas.microsoft.com/office/drawing/2014/main" id="{A17C72E8-5E50-9F5A-ECC9-A6479B38753A}"/>
               </a:ext>
             </a:extLst>
           </p:cNvPr>
@@ -8490,17 +9160,17 @@
           <a:p>
             <a:r>
               <a:rPr lang="en-US" dirty="0"/>
-              <a:t>Key Components</a:t>
-            </a:r>
-          </a:p>
-        </p:txBody>
-      </p:sp>
-      <p:sp>
-        <p:nvSpPr>
-          <p:cNvPr id="7" name="TextBox 6">
-            <a:extLst>
-              <a:ext uri="{FF2B5EF4-FFF2-40B4-BE49-F238E27FC236}">
-                <a16:creationId xmlns:a16="http://schemas.microsoft.com/office/drawing/2014/main" id="{CE745D66-859B-A9EB-87D5-0D075FFD9D01}"/>
+              <a:t>Scope</a:t>
+            </a:r>
+          </a:p>
+        </p:txBody>
+      </p:sp>
+      <p:sp>
+        <p:nvSpPr>
+          <p:cNvPr id="6" name="TextBox 5">
+            <a:extLst>
+              <a:ext uri="{FF2B5EF4-FFF2-40B4-BE49-F238E27FC236}">
+                <a16:creationId xmlns:a16="http://schemas.microsoft.com/office/drawing/2014/main" id="{A19D81BE-110C-342E-AE03-D1248546B62A}"/>
               </a:ext>
             </a:extLst>
           </p:cNvPr>
@@ -8509,8 +9179,8 @@
         </p:nvSpPr>
         <p:spPr>
           <a:xfrm>
-            <a:off x="4917989" y="897924"/>
-            <a:ext cx="5389792" cy="738664"/>
+            <a:off x="148281" y="930876"/>
+            <a:ext cx="11491784" cy="4832092"/>
           </a:xfrm>
           <a:prstGeom prst="rect">
             <a:avLst/>
@@ -8524,52 +9194,168 @@
           <a:lstStyle/>
           <a:p>
             <a:r>
-              <a:rPr lang="en-US" sz="1400" dirty="0"/>
-              <a:t>Key Components include the core business modules, application services, common shared services, data services, integration interfaces, user interface layer, and the supporting infrastructure platform.</a:t>
-            </a:r>
-          </a:p>
-        </p:txBody>
-      </p:sp>
-      <p:pic>
-        <p:nvPicPr>
-          <p:cNvPr id="9" name="Picture 8">
-            <a:extLst>
-              <a:ext uri="{FF2B5EF4-FFF2-40B4-BE49-F238E27FC236}">
-                <a16:creationId xmlns:a16="http://schemas.microsoft.com/office/drawing/2014/main" id="{899A5962-98FF-B136-73F3-60B851E0BA16}"/>
-              </a:ext>
-            </a:extLst>
-          </p:cNvPr>
-          <p:cNvPicPr>
-            <a:picLocks noChangeAspect="1"/>
-          </p:cNvPicPr>
-          <p:nvPr/>
-        </p:nvPicPr>
-        <p:blipFill>
-          <a:blip r:embed="rId3">
-            <a:extLst>
-              <a:ext uri="{28A0092B-C50C-407E-A947-70E740481C1C}">
-                <a14:useLocalDpi xmlns:a14="http://schemas.microsoft.com/office/drawing/2010/main" val="0"/>
-              </a:ext>
-            </a:extLst>
-          </a:blip>
-          <a:stretch>
-            <a:fillRect/>
-          </a:stretch>
-        </p:blipFill>
-        <p:spPr>
-          <a:xfrm>
-            <a:off x="81002" y="897924"/>
-            <a:ext cx="4449809" cy="5942467"/>
-          </a:xfrm>
-          <a:prstGeom prst="rect">
-            <a:avLst/>
-          </a:prstGeom>
-        </p:spPr>
-      </p:pic>
+              <a:rPr lang="en-US" sz="1400" b="1" dirty="0"/>
+              <a:t>In-Scope</a:t>
+            </a:r>
+          </a:p>
+          <a:p>
+            <a:r>
+              <a:rPr lang="en-US" sz="1400" u="sng" dirty="0"/>
+              <a:t>Schedule Service</a:t>
+            </a:r>
+          </a:p>
+          <a:p>
+            <a:endParaRPr lang="en-US" sz="1400" b="1" dirty="0"/>
+          </a:p>
+          <a:p>
+            <a:pPr marL="285750" indent="-285750">
+              <a:lnSpc>
+                <a:spcPct val="150000"/>
+              </a:lnSpc>
+              <a:buFont typeface="Wingdings" panose="05000000000000000000" pitchFamily="2" charset="2"/>
+              <a:buChar char="Ø"/>
+            </a:pPr>
+            <a:r>
+              <a:rPr lang="en-US" sz="1400" dirty="0"/>
+              <a:t>Optimize current code by changing sync operations to async operation for AX and D365 operations for saving  data to database only in Sale Scheduler.</a:t>
+            </a:r>
+          </a:p>
+          <a:p>
+            <a:pPr marL="285750" indent="-285750">
+              <a:lnSpc>
+                <a:spcPct val="150000"/>
+              </a:lnSpc>
+              <a:buFont typeface="Wingdings" panose="05000000000000000000" pitchFamily="2" charset="2"/>
+              <a:buChar char="Ø"/>
+            </a:pPr>
+            <a:r>
+              <a:rPr lang="en-US" sz="1400" dirty="0"/>
+              <a:t>For AX &amp; D365 data insert will use  batch  insert  by 30 rows per transactions.</a:t>
+            </a:r>
+          </a:p>
+          <a:p>
+            <a:pPr>
+              <a:lnSpc>
+                <a:spcPct val="150000"/>
+              </a:lnSpc>
+            </a:pPr>
+            <a:endParaRPr lang="en-US" sz="1400" dirty="0"/>
+          </a:p>
+          <a:p>
+            <a:endParaRPr lang="en-US" sz="1400" b="1" dirty="0"/>
+          </a:p>
+          <a:p>
+            <a:r>
+              <a:rPr lang="en-US" sz="1400" u="sng" dirty="0"/>
+              <a:t>Data Archiving Service</a:t>
+            </a:r>
+          </a:p>
+          <a:p>
+            <a:endParaRPr lang="en-US" sz="1400" b="1" dirty="0"/>
+          </a:p>
+          <a:p>
+            <a:pPr marL="285750" indent="-285750">
+              <a:lnSpc>
+                <a:spcPct val="150000"/>
+              </a:lnSpc>
+              <a:buFont typeface="Wingdings" panose="05000000000000000000" pitchFamily="2" charset="2"/>
+              <a:buChar char="Ø"/>
+            </a:pPr>
+            <a:r>
+              <a:rPr lang="en-US" sz="1400" dirty="0"/>
+              <a:t>For data archiving following key table are selected </a:t>
+            </a:r>
+          </a:p>
+          <a:p>
+            <a:pPr marL="1257300" lvl="2" indent="-342900">
+              <a:lnSpc>
+                <a:spcPct val="150000"/>
+              </a:lnSpc>
+              <a:buFont typeface="+mj-lt"/>
+              <a:buAutoNum type="arabicPeriod"/>
+            </a:pPr>
+            <a:r>
+              <a:rPr lang="en-US" sz="1400" dirty="0"/>
+              <a:t> Sale ( More than 7 Million)</a:t>
+            </a:r>
+          </a:p>
+          <a:p>
+            <a:pPr marL="1257300" lvl="2" indent="-342900">
+              <a:lnSpc>
+                <a:spcPct val="150000"/>
+              </a:lnSpc>
+              <a:buFont typeface="+mj-lt"/>
+              <a:buAutoNum type="arabicPeriod"/>
+            </a:pPr>
+            <a:r>
+              <a:rPr lang="en-US" sz="1400" dirty="0"/>
+              <a:t>Commission ( More than 10 million)</a:t>
+            </a:r>
+          </a:p>
+          <a:p>
+            <a:pPr marL="1257300" lvl="2" indent="-342900">
+              <a:lnSpc>
+                <a:spcPct val="150000"/>
+              </a:lnSpc>
+              <a:buFont typeface="+mj-lt"/>
+              <a:buAutoNum type="arabicPeriod"/>
+            </a:pPr>
+            <a:r>
+              <a:rPr lang="en-US" sz="1400" dirty="0"/>
+              <a:t> Reprint ,</a:t>
+            </a:r>
+            <a:r>
+              <a:rPr lang="en-US" sz="1400" dirty="0" err="1"/>
+              <a:t>PrintSummary</a:t>
+            </a:r>
+            <a:r>
+              <a:rPr lang="en-US" sz="1400" dirty="0"/>
+              <a:t> (More than 7 million) </a:t>
+            </a:r>
+          </a:p>
+          <a:p>
+            <a:pPr marL="285750" indent="-285750">
+              <a:lnSpc>
+                <a:spcPct val="150000"/>
+              </a:lnSpc>
+              <a:buFont typeface="Wingdings" panose="05000000000000000000" pitchFamily="2" charset="2"/>
+              <a:buChar char="Ø"/>
+            </a:pPr>
+            <a:r>
+              <a:rPr lang="en-US" sz="1400" dirty="0"/>
+              <a:t>Only  selected table will archive to archive database  and each of the selected table will archive to date duration archive table in archive database. </a:t>
+            </a:r>
+          </a:p>
+          <a:p>
+            <a:pPr marL="285750" indent="-285750">
+              <a:lnSpc>
+                <a:spcPct val="150000"/>
+              </a:lnSpc>
+              <a:buFont typeface="Wingdings" panose="05000000000000000000" pitchFamily="2" charset="2"/>
+              <a:buChar char="Ø"/>
+            </a:pPr>
+            <a:r>
+              <a:rPr lang="en-US" sz="1400" dirty="0"/>
+              <a:t>For example in archive database , sale table will exist with 2025-04-01_sale and 2025_08_01_sale for storing old sale records.</a:t>
+            </a:r>
+          </a:p>
+          <a:p>
+            <a:pPr>
+              <a:lnSpc>
+                <a:spcPct val="150000"/>
+              </a:lnSpc>
+            </a:pPr>
+            <a:endParaRPr lang="en-US" sz="1400" dirty="0"/>
+          </a:p>
+          <a:p>
+            <a:endParaRPr lang="en-US" sz="1400" dirty="0"/>
+          </a:p>
+        </p:txBody>
+      </p:sp>
     </p:spTree>
     <p:extLst>
       <p:ext uri="{BB962C8B-B14F-4D97-AF65-F5344CB8AC3E}">
-        <p14:creationId xmlns:p14="http://schemas.microsoft.com/office/powerpoint/2010/main" val="1563390098"/>
+        <p14:creationId xmlns:p14="http://schemas.microsoft.com/office/powerpoint/2010/main" val="2474854777"/>
       </p:ext>
     </p:extLst>
   </p:cSld>

--- a/GandG_YPS/Presentation/G&G_Revamp_ARB.pptx
+++ b/GandG_YPS/Presentation/G&G_Revamp_ARB.pptx
@@ -5,7 +5,7 @@
     <p:sldMasterId id="2147483661" r:id="rId4"/>
   </p:sldMasterIdLst>
   <p:notesMasterIdLst>
-    <p:notesMasterId r:id="rId40"/>
+    <p:notesMasterId r:id="rId45"/>
   </p:notesMasterIdLst>
   <p:sldIdLst>
     <p:sldId id="2145708748" r:id="rId5"/>
@@ -35,14 +35,19 @@
     <p:sldId id="2145708760" r:id="rId29"/>
     <p:sldId id="2145708805" r:id="rId30"/>
     <p:sldId id="2145708803" r:id="rId31"/>
-    <p:sldId id="2145708793" r:id="rId32"/>
+    <p:sldId id="2145708808" r:id="rId32"/>
     <p:sldId id="2145708788" r:id="rId33"/>
     <p:sldId id="2145708796" r:id="rId34"/>
-    <p:sldId id="2145708799" r:id="rId35"/>
-    <p:sldId id="2145708794" r:id="rId36"/>
-    <p:sldId id="2145708795" r:id="rId37"/>
-    <p:sldId id="2145708798" r:id="rId38"/>
-    <p:sldId id="2145708766" r:id="rId39"/>
+    <p:sldId id="2145708809" r:id="rId35"/>
+    <p:sldId id="2145708810" r:id="rId36"/>
+    <p:sldId id="2145708812" r:id="rId37"/>
+    <p:sldId id="2145708811" r:id="rId38"/>
+    <p:sldId id="2145708793" r:id="rId39"/>
+    <p:sldId id="2145708799" r:id="rId40"/>
+    <p:sldId id="2145708794" r:id="rId41"/>
+    <p:sldId id="2145708795" r:id="rId42"/>
+    <p:sldId id="2145708798" r:id="rId43"/>
+    <p:sldId id="2145708766" r:id="rId44"/>
   </p:sldIdLst>
   <p:sldSz cx="12192000" cy="6858000"/>
   <p:notesSz cx="6858000" cy="9144000"/>
@@ -231,7 +236,7 @@
           <a:p>
             <a:fld id="{CFB89EC9-ADF7-4CD8-A359-4B3486574A56}" type="datetimeFigureOut">
               <a:rPr lang="en-US" smtClean="0"/>
-              <a:t>4/3/2026</a:t>
+              <a:t>4/28/2026</a:t>
             </a:fld>
             <a:endParaRPr lang="en-US"/>
           </a:p>
@@ -1215,6 +1220,330 @@
   <p:cSld>
     <p:spTree>
       <p:nvGrpSpPr>
+        <p:cNvPr id="1" name="">
+          <a:extLst>
+            <a:ext uri="{FF2B5EF4-FFF2-40B4-BE49-F238E27FC236}">
+              <a16:creationId xmlns:a16="http://schemas.microsoft.com/office/drawing/2014/main" id="{E86EE3BC-FA6C-05E9-A637-5E04DCF6F378}"/>
+            </a:ext>
+          </a:extLst>
+        </p:cNvPr>
+        <p:cNvGrpSpPr/>
+        <p:nvPr/>
+      </p:nvGrpSpPr>
+      <p:grpSpPr>
+        <a:xfrm>
+          <a:off x="0" y="0"/>
+          <a:ext cx="0" cy="0"/>
+          <a:chOff x="0" y="0"/>
+          <a:chExt cx="0" cy="0"/>
+        </a:xfrm>
+      </p:grpSpPr>
+      <p:sp>
+        <p:nvSpPr>
+          <p:cNvPr id="2" name="Slide Image Placeholder 1">
+            <a:extLst>
+              <a:ext uri="{FF2B5EF4-FFF2-40B4-BE49-F238E27FC236}">
+                <a16:creationId xmlns:a16="http://schemas.microsoft.com/office/drawing/2014/main" id="{E0086639-0AAB-73B3-BC9B-673497F5F835}"/>
+              </a:ext>
+            </a:extLst>
+          </p:cNvPr>
+          <p:cNvSpPr>
+            <a:spLocks noGrp="1" noRot="1" noChangeAspect="1"/>
+          </p:cNvSpPr>
+          <p:nvPr>
+            <p:ph type="sldImg"/>
+          </p:nvPr>
+        </p:nvSpPr>
+        <p:spPr/>
+      </p:sp>
+      <p:sp>
+        <p:nvSpPr>
+          <p:cNvPr id="3" name="Notes Placeholder 2">
+            <a:extLst>
+              <a:ext uri="{FF2B5EF4-FFF2-40B4-BE49-F238E27FC236}">
+                <a16:creationId xmlns:a16="http://schemas.microsoft.com/office/drawing/2014/main" id="{8A84E0B9-FCC1-ECF5-B85B-2021F29E9022}"/>
+              </a:ext>
+            </a:extLst>
+          </p:cNvPr>
+          <p:cNvSpPr>
+            <a:spLocks noGrp="1"/>
+          </p:cNvSpPr>
+          <p:nvPr>
+            <p:ph type="body" idx="1"/>
+          </p:nvPr>
+        </p:nvSpPr>
+        <p:spPr/>
+        <p:txBody>
+          <a:bodyPr/>
+          <a:lstStyle/>
+          <a:p>
+            <a:endParaRPr lang="en-US" dirty="0"/>
+          </a:p>
+        </p:txBody>
+      </p:sp>
+      <p:sp>
+        <p:nvSpPr>
+          <p:cNvPr id="4" name="Slide Number Placeholder 3">
+            <a:extLst>
+              <a:ext uri="{FF2B5EF4-FFF2-40B4-BE49-F238E27FC236}">
+                <a16:creationId xmlns:a16="http://schemas.microsoft.com/office/drawing/2014/main" id="{98EC3D2C-8425-6E75-D97B-B88B891A8189}"/>
+              </a:ext>
+            </a:extLst>
+          </p:cNvPr>
+          <p:cNvSpPr>
+            <a:spLocks noGrp="1"/>
+          </p:cNvSpPr>
+          <p:nvPr>
+            <p:ph type="sldNum" sz="quarter" idx="5"/>
+          </p:nvPr>
+        </p:nvSpPr>
+        <p:spPr/>
+        <p:txBody>
+          <a:bodyPr/>
+          <a:lstStyle/>
+          <a:p>
+            <a:fld id="{74180750-FA6C-4B62-A27E-0AEE5A77FE02}" type="slidenum">
+              <a:rPr lang="en-US" smtClean="0"/>
+              <a:t>31</a:t>
+            </a:fld>
+            <a:endParaRPr lang="en-US"/>
+          </a:p>
+        </p:txBody>
+      </p:sp>
+    </p:spTree>
+    <p:extLst>
+      <p:ext uri="{BB962C8B-B14F-4D97-AF65-F5344CB8AC3E}">
+        <p14:creationId xmlns:p14="http://schemas.microsoft.com/office/powerpoint/2010/main" val="3535969467"/>
+      </p:ext>
+    </p:extLst>
+  </p:cSld>
+  <p:clrMapOvr>
+    <a:masterClrMapping/>
+  </p:clrMapOvr>
+</p:notes>
+</file>
+
+<file path=ppt/notesSlides/notesSlide17.xml><?xml version="1.0" encoding="utf-8"?>
+<p:notes xmlns:a="http://schemas.openxmlformats.org/drawingml/2006/main" xmlns:r="http://schemas.openxmlformats.org/officeDocument/2006/relationships" xmlns:p="http://schemas.openxmlformats.org/presentationml/2006/main">
+  <p:cSld>
+    <p:spTree>
+      <p:nvGrpSpPr>
+        <p:cNvPr id="1" name="">
+          <a:extLst>
+            <a:ext uri="{FF2B5EF4-FFF2-40B4-BE49-F238E27FC236}">
+              <a16:creationId xmlns:a16="http://schemas.microsoft.com/office/drawing/2014/main" id="{B2E0DE32-03EA-EEA8-3D44-6D55625C53A0}"/>
+            </a:ext>
+          </a:extLst>
+        </p:cNvPr>
+        <p:cNvGrpSpPr/>
+        <p:nvPr/>
+      </p:nvGrpSpPr>
+      <p:grpSpPr>
+        <a:xfrm>
+          <a:off x="0" y="0"/>
+          <a:ext cx="0" cy="0"/>
+          <a:chOff x="0" y="0"/>
+          <a:chExt cx="0" cy="0"/>
+        </a:xfrm>
+      </p:grpSpPr>
+      <p:sp>
+        <p:nvSpPr>
+          <p:cNvPr id="2" name="Slide Image Placeholder 1">
+            <a:extLst>
+              <a:ext uri="{FF2B5EF4-FFF2-40B4-BE49-F238E27FC236}">
+                <a16:creationId xmlns:a16="http://schemas.microsoft.com/office/drawing/2014/main" id="{51583407-0C2F-141D-B0A2-C6F407CA421B}"/>
+              </a:ext>
+            </a:extLst>
+          </p:cNvPr>
+          <p:cNvSpPr>
+            <a:spLocks noGrp="1" noRot="1" noChangeAspect="1"/>
+          </p:cNvSpPr>
+          <p:nvPr>
+            <p:ph type="sldImg"/>
+          </p:nvPr>
+        </p:nvSpPr>
+        <p:spPr/>
+      </p:sp>
+      <p:sp>
+        <p:nvSpPr>
+          <p:cNvPr id="3" name="Notes Placeholder 2">
+            <a:extLst>
+              <a:ext uri="{FF2B5EF4-FFF2-40B4-BE49-F238E27FC236}">
+                <a16:creationId xmlns:a16="http://schemas.microsoft.com/office/drawing/2014/main" id="{51C27F7C-A84C-1FB1-45BC-CB4911F279ED}"/>
+              </a:ext>
+            </a:extLst>
+          </p:cNvPr>
+          <p:cNvSpPr>
+            <a:spLocks noGrp="1"/>
+          </p:cNvSpPr>
+          <p:nvPr>
+            <p:ph type="body" idx="1"/>
+          </p:nvPr>
+        </p:nvSpPr>
+        <p:spPr/>
+        <p:txBody>
+          <a:bodyPr/>
+          <a:lstStyle/>
+          <a:p>
+            <a:endParaRPr lang="en-US" dirty="0"/>
+          </a:p>
+        </p:txBody>
+      </p:sp>
+      <p:sp>
+        <p:nvSpPr>
+          <p:cNvPr id="4" name="Slide Number Placeholder 3">
+            <a:extLst>
+              <a:ext uri="{FF2B5EF4-FFF2-40B4-BE49-F238E27FC236}">
+                <a16:creationId xmlns:a16="http://schemas.microsoft.com/office/drawing/2014/main" id="{685CC796-CA79-2AC3-DD03-A50448AFBD86}"/>
+              </a:ext>
+            </a:extLst>
+          </p:cNvPr>
+          <p:cNvSpPr>
+            <a:spLocks noGrp="1"/>
+          </p:cNvSpPr>
+          <p:nvPr>
+            <p:ph type="sldNum" sz="quarter" idx="5"/>
+          </p:nvPr>
+        </p:nvSpPr>
+        <p:spPr/>
+        <p:txBody>
+          <a:bodyPr/>
+          <a:lstStyle/>
+          <a:p>
+            <a:fld id="{74180750-FA6C-4B62-A27E-0AEE5A77FE02}" type="slidenum">
+              <a:rPr lang="en-US" smtClean="0"/>
+              <a:t>32</a:t>
+            </a:fld>
+            <a:endParaRPr lang="en-US"/>
+          </a:p>
+        </p:txBody>
+      </p:sp>
+    </p:spTree>
+    <p:extLst>
+      <p:ext uri="{BB962C8B-B14F-4D97-AF65-F5344CB8AC3E}">
+        <p14:creationId xmlns:p14="http://schemas.microsoft.com/office/powerpoint/2010/main" val="1313907433"/>
+      </p:ext>
+    </p:extLst>
+  </p:cSld>
+  <p:clrMapOvr>
+    <a:masterClrMapping/>
+  </p:clrMapOvr>
+</p:notes>
+</file>
+
+<file path=ppt/notesSlides/notesSlide18.xml><?xml version="1.0" encoding="utf-8"?>
+<p:notes xmlns:a="http://schemas.openxmlformats.org/drawingml/2006/main" xmlns:r="http://schemas.openxmlformats.org/officeDocument/2006/relationships" xmlns:p="http://schemas.openxmlformats.org/presentationml/2006/main">
+  <p:cSld>
+    <p:spTree>
+      <p:nvGrpSpPr>
+        <p:cNvPr id="1" name="">
+          <a:extLst>
+            <a:ext uri="{FF2B5EF4-FFF2-40B4-BE49-F238E27FC236}">
+              <a16:creationId xmlns:a16="http://schemas.microsoft.com/office/drawing/2014/main" id="{3BACF1CB-EDBA-7CCA-B4E0-6CAFD92457BD}"/>
+            </a:ext>
+          </a:extLst>
+        </p:cNvPr>
+        <p:cNvGrpSpPr/>
+        <p:nvPr/>
+      </p:nvGrpSpPr>
+      <p:grpSpPr>
+        <a:xfrm>
+          <a:off x="0" y="0"/>
+          <a:ext cx="0" cy="0"/>
+          <a:chOff x="0" y="0"/>
+          <a:chExt cx="0" cy="0"/>
+        </a:xfrm>
+      </p:grpSpPr>
+      <p:sp>
+        <p:nvSpPr>
+          <p:cNvPr id="2" name="Slide Image Placeholder 1">
+            <a:extLst>
+              <a:ext uri="{FF2B5EF4-FFF2-40B4-BE49-F238E27FC236}">
+                <a16:creationId xmlns:a16="http://schemas.microsoft.com/office/drawing/2014/main" id="{DF3B35F2-4CA6-F879-C890-61AC16101DB1}"/>
+              </a:ext>
+            </a:extLst>
+          </p:cNvPr>
+          <p:cNvSpPr>
+            <a:spLocks noGrp="1" noRot="1" noChangeAspect="1"/>
+          </p:cNvSpPr>
+          <p:nvPr>
+            <p:ph type="sldImg"/>
+          </p:nvPr>
+        </p:nvSpPr>
+        <p:spPr/>
+      </p:sp>
+      <p:sp>
+        <p:nvSpPr>
+          <p:cNvPr id="3" name="Notes Placeholder 2">
+            <a:extLst>
+              <a:ext uri="{FF2B5EF4-FFF2-40B4-BE49-F238E27FC236}">
+                <a16:creationId xmlns:a16="http://schemas.microsoft.com/office/drawing/2014/main" id="{3F1AEC6A-5F04-775E-A008-319C78CEF755}"/>
+              </a:ext>
+            </a:extLst>
+          </p:cNvPr>
+          <p:cNvSpPr>
+            <a:spLocks noGrp="1"/>
+          </p:cNvSpPr>
+          <p:nvPr>
+            <p:ph type="body" idx="1"/>
+          </p:nvPr>
+        </p:nvSpPr>
+        <p:spPr/>
+        <p:txBody>
+          <a:bodyPr/>
+          <a:lstStyle/>
+          <a:p>
+            <a:endParaRPr lang="en-US" dirty="0"/>
+          </a:p>
+        </p:txBody>
+      </p:sp>
+      <p:sp>
+        <p:nvSpPr>
+          <p:cNvPr id="4" name="Slide Number Placeholder 3">
+            <a:extLst>
+              <a:ext uri="{FF2B5EF4-FFF2-40B4-BE49-F238E27FC236}">
+                <a16:creationId xmlns:a16="http://schemas.microsoft.com/office/drawing/2014/main" id="{2E4E984C-345E-F634-BB43-6ADC5B842E57}"/>
+              </a:ext>
+            </a:extLst>
+          </p:cNvPr>
+          <p:cNvSpPr>
+            <a:spLocks noGrp="1"/>
+          </p:cNvSpPr>
+          <p:nvPr>
+            <p:ph type="sldNum" sz="quarter" idx="5"/>
+          </p:nvPr>
+        </p:nvSpPr>
+        <p:spPr/>
+        <p:txBody>
+          <a:bodyPr/>
+          <a:lstStyle/>
+          <a:p>
+            <a:fld id="{74180750-FA6C-4B62-A27E-0AEE5A77FE02}" type="slidenum">
+              <a:rPr lang="en-US" smtClean="0"/>
+              <a:t>34</a:t>
+            </a:fld>
+            <a:endParaRPr lang="en-US"/>
+          </a:p>
+        </p:txBody>
+      </p:sp>
+    </p:spTree>
+    <p:extLst>
+      <p:ext uri="{BB962C8B-B14F-4D97-AF65-F5344CB8AC3E}">
+        <p14:creationId xmlns:p14="http://schemas.microsoft.com/office/powerpoint/2010/main" val="620772348"/>
+      </p:ext>
+    </p:extLst>
+  </p:cSld>
+  <p:clrMapOvr>
+    <a:masterClrMapping/>
+  </p:clrMapOvr>
+</p:notes>
+</file>
+
+<file path=ppt/notesSlides/notesSlide19.xml><?xml version="1.0" encoding="utf-8"?>
+<p:notes xmlns:a="http://schemas.openxmlformats.org/drawingml/2006/main" xmlns:r="http://schemas.openxmlformats.org/officeDocument/2006/relationships" xmlns:p="http://schemas.openxmlformats.org/presentationml/2006/main">
+  <p:cSld>
+    <p:spTree>
+      <p:nvGrpSpPr>
         <p:cNvPr id="1" name=""/>
         <p:cNvGrpSpPr/>
         <p:nvPr/>
@@ -1275,7 +1604,7 @@
           <a:p>
             <a:fld id="{74180750-FA6C-4B62-A27E-0AEE5A77FE02}" type="slidenum">
               <a:rPr lang="en-US" smtClean="0"/>
-              <a:t>32</a:t>
+              <a:t>37</a:t>
             </a:fld>
             <a:endParaRPr lang="en-US"/>
           </a:p>
@@ -1294,7 +1623,91 @@
 </p:notes>
 </file>
 
-<file path=ppt/notesSlides/notesSlide17.xml><?xml version="1.0" encoding="utf-8"?>
+<file path=ppt/notesSlides/notesSlide2.xml><?xml version="1.0" encoding="utf-8"?>
+<p:notes xmlns:a="http://schemas.openxmlformats.org/drawingml/2006/main" xmlns:r="http://schemas.openxmlformats.org/officeDocument/2006/relationships" xmlns:p="http://schemas.openxmlformats.org/presentationml/2006/main">
+  <p:cSld>
+    <p:spTree>
+      <p:nvGrpSpPr>
+        <p:cNvPr id="1" name=""/>
+        <p:cNvGrpSpPr/>
+        <p:nvPr/>
+      </p:nvGrpSpPr>
+      <p:grpSpPr>
+        <a:xfrm>
+          <a:off x="0" y="0"/>
+          <a:ext cx="0" cy="0"/>
+          <a:chOff x="0" y="0"/>
+          <a:chExt cx="0" cy="0"/>
+        </a:xfrm>
+      </p:grpSpPr>
+      <p:sp>
+        <p:nvSpPr>
+          <p:cNvPr id="2" name="Slide Image Placeholder 1"/>
+          <p:cNvSpPr>
+            <a:spLocks noGrp="1" noRot="1" noChangeAspect="1"/>
+          </p:cNvSpPr>
+          <p:nvPr>
+            <p:ph type="sldImg"/>
+          </p:nvPr>
+        </p:nvSpPr>
+        <p:spPr/>
+      </p:sp>
+      <p:sp>
+        <p:nvSpPr>
+          <p:cNvPr id="3" name="Notes Placeholder 2"/>
+          <p:cNvSpPr>
+            <a:spLocks noGrp="1"/>
+          </p:cNvSpPr>
+          <p:nvPr>
+            <p:ph type="body" idx="1"/>
+          </p:nvPr>
+        </p:nvSpPr>
+        <p:spPr/>
+        <p:txBody>
+          <a:bodyPr/>
+          <a:lstStyle/>
+          <a:p>
+            <a:endParaRPr lang="en-US" dirty="0"/>
+          </a:p>
+        </p:txBody>
+      </p:sp>
+      <p:sp>
+        <p:nvSpPr>
+          <p:cNvPr id="4" name="Slide Number Placeholder 3"/>
+          <p:cNvSpPr>
+            <a:spLocks noGrp="1"/>
+          </p:cNvSpPr>
+          <p:nvPr>
+            <p:ph type="sldNum" sz="quarter" idx="5"/>
+          </p:nvPr>
+        </p:nvSpPr>
+        <p:spPr/>
+        <p:txBody>
+          <a:bodyPr/>
+          <a:lstStyle/>
+          <a:p>
+            <a:fld id="{74180750-FA6C-4B62-A27E-0AEE5A77FE02}" type="slidenum">
+              <a:rPr lang="en-US" smtClean="0"/>
+              <a:t>4</a:t>
+            </a:fld>
+            <a:endParaRPr lang="en-US"/>
+          </a:p>
+        </p:txBody>
+      </p:sp>
+    </p:spTree>
+    <p:extLst>
+      <p:ext uri="{BB962C8B-B14F-4D97-AF65-F5344CB8AC3E}">
+        <p14:creationId xmlns:p14="http://schemas.microsoft.com/office/powerpoint/2010/main" val="3293985319"/>
+      </p:ext>
+    </p:extLst>
+  </p:cSld>
+  <p:clrMapOvr>
+    <a:masterClrMapping/>
+  </p:clrMapOvr>
+</p:notes>
+</file>
+
+<file path=ppt/notesSlides/notesSlide20.xml><?xml version="1.0" encoding="utf-8"?>
 <p:notes xmlns:a="http://schemas.openxmlformats.org/drawingml/2006/main" xmlns:r="http://schemas.openxmlformats.org/officeDocument/2006/relationships" xmlns:p="http://schemas.openxmlformats.org/presentationml/2006/main">
   <p:cSld>
     <p:spTree>
@@ -1383,7 +1796,7 @@
           <a:p>
             <a:fld id="{74180750-FA6C-4B62-A27E-0AEE5A77FE02}" type="slidenum">
               <a:rPr lang="en-US" smtClean="0"/>
-              <a:t>33</a:t>
+              <a:t>38</a:t>
             </a:fld>
             <a:endParaRPr lang="en-US"/>
           </a:p>
@@ -1402,7 +1815,7 @@
 </p:notes>
 </file>
 
-<file path=ppt/notesSlides/notesSlide18.xml><?xml version="1.0" encoding="utf-8"?>
+<file path=ppt/notesSlides/notesSlide21.xml><?xml version="1.0" encoding="utf-8"?>
 <p:notes xmlns:a="http://schemas.openxmlformats.org/drawingml/2006/main" xmlns:r="http://schemas.openxmlformats.org/officeDocument/2006/relationships" xmlns:p="http://schemas.openxmlformats.org/presentationml/2006/main">
   <p:cSld>
     <p:spTree>
@@ -1491,7 +1904,7 @@
           <a:p>
             <a:fld id="{74180750-FA6C-4B62-A27E-0AEE5A77FE02}" type="slidenum">
               <a:rPr lang="en-US" smtClean="0"/>
-              <a:t>34</a:t>
+              <a:t>39</a:t>
             </a:fld>
             <a:endParaRPr lang="en-US"/>
           </a:p>
@@ -1501,90 +1914,6 @@
     <p:extLst>
       <p:ext uri="{BB962C8B-B14F-4D97-AF65-F5344CB8AC3E}">
         <p14:creationId xmlns:p14="http://schemas.microsoft.com/office/powerpoint/2010/main" val="2745930826"/>
-      </p:ext>
-    </p:extLst>
-  </p:cSld>
-  <p:clrMapOvr>
-    <a:masterClrMapping/>
-  </p:clrMapOvr>
-</p:notes>
-</file>
-
-<file path=ppt/notesSlides/notesSlide2.xml><?xml version="1.0" encoding="utf-8"?>
-<p:notes xmlns:a="http://schemas.openxmlformats.org/drawingml/2006/main" xmlns:r="http://schemas.openxmlformats.org/officeDocument/2006/relationships" xmlns:p="http://schemas.openxmlformats.org/presentationml/2006/main">
-  <p:cSld>
-    <p:spTree>
-      <p:nvGrpSpPr>
-        <p:cNvPr id="1" name=""/>
-        <p:cNvGrpSpPr/>
-        <p:nvPr/>
-      </p:nvGrpSpPr>
-      <p:grpSpPr>
-        <a:xfrm>
-          <a:off x="0" y="0"/>
-          <a:ext cx="0" cy="0"/>
-          <a:chOff x="0" y="0"/>
-          <a:chExt cx="0" cy="0"/>
-        </a:xfrm>
-      </p:grpSpPr>
-      <p:sp>
-        <p:nvSpPr>
-          <p:cNvPr id="2" name="Slide Image Placeholder 1"/>
-          <p:cNvSpPr>
-            <a:spLocks noGrp="1" noRot="1" noChangeAspect="1"/>
-          </p:cNvSpPr>
-          <p:nvPr>
-            <p:ph type="sldImg"/>
-          </p:nvPr>
-        </p:nvSpPr>
-        <p:spPr/>
-      </p:sp>
-      <p:sp>
-        <p:nvSpPr>
-          <p:cNvPr id="3" name="Notes Placeholder 2"/>
-          <p:cNvSpPr>
-            <a:spLocks noGrp="1"/>
-          </p:cNvSpPr>
-          <p:nvPr>
-            <p:ph type="body" idx="1"/>
-          </p:nvPr>
-        </p:nvSpPr>
-        <p:spPr/>
-        <p:txBody>
-          <a:bodyPr/>
-          <a:lstStyle/>
-          <a:p>
-            <a:endParaRPr lang="en-US" dirty="0"/>
-          </a:p>
-        </p:txBody>
-      </p:sp>
-      <p:sp>
-        <p:nvSpPr>
-          <p:cNvPr id="4" name="Slide Number Placeholder 3"/>
-          <p:cNvSpPr>
-            <a:spLocks noGrp="1"/>
-          </p:cNvSpPr>
-          <p:nvPr>
-            <p:ph type="sldNum" sz="quarter" idx="5"/>
-          </p:nvPr>
-        </p:nvSpPr>
-        <p:spPr/>
-        <p:txBody>
-          <a:bodyPr/>
-          <a:lstStyle/>
-          <a:p>
-            <a:fld id="{74180750-FA6C-4B62-A27E-0AEE5A77FE02}" type="slidenum">
-              <a:rPr lang="en-US" smtClean="0"/>
-              <a:t>4</a:t>
-            </a:fld>
-            <a:endParaRPr lang="en-US"/>
-          </a:p>
-        </p:txBody>
-      </p:sp>
-    </p:spTree>
-    <p:extLst>
-      <p:ext uri="{BB962C8B-B14F-4D97-AF65-F5344CB8AC3E}">
-        <p14:creationId xmlns:p14="http://schemas.microsoft.com/office/powerpoint/2010/main" val="3293985319"/>
       </p:ext>
     </p:extLst>
   </p:cSld>
@@ -2494,7 +2823,7 @@
                   </a:prstClr>
                 </a:solidFill>
               </a:rPr>
-              <a:t>4/3/2026</a:t>
+              <a:t>4/28/2026</a:t>
             </a:fld>
             <a:endParaRPr lang="en-US">
               <a:solidFill>
@@ -3335,7 +3664,7 @@
           <a:p>
             <a:fld id="{A1CDCD78-8B7B-4976-8AE0-648AF1DF3CEB}" type="datetime1">
               <a:rPr lang="en-US" smtClean="0"/>
-              <a:t>4/3/2026</a:t>
+              <a:t>4/28/2026</a:t>
             </a:fld>
             <a:endParaRPr lang="en-US"/>
           </a:p>
@@ -3773,7 +4102,7 @@
                 </a:spcAft>
                 <a:defRPr/>
               </a:pPr>
-              <a:t>4/3/2026</a:t>
+              <a:t>4/28/2026</a:t>
             </a:fld>
             <a:endParaRPr lang="en-US">
               <a:solidFill>
@@ -5563,10 +5892,10 @@
           <p:nvPr/>
         </p:nvPicPr>
         <p:blipFill>
-          <a:blip r:embed="rId3">
+          <a:blip>
             <a:extLst>
               <a:ext uri="{96DAC541-7B7A-43D3-8B79-37D633B846F1}">
-                <asvg:svgBlip xmlns:asvg="http://schemas.microsoft.com/office/drawing/2016/SVG/main" r:embed="rId4"/>
+                <asvg:svgBlip xmlns:asvg="http://schemas.microsoft.com/office/drawing/2016/SVG/main" r:embed="rId3"/>
               </a:ext>
             </a:extLst>
           </a:blip>
@@ -5686,10 +6015,10 @@
           <p:nvPr/>
         </p:nvPicPr>
         <p:blipFill>
-          <a:blip r:embed="rId2">
+          <a:blip>
             <a:extLst>
               <a:ext uri="{96DAC541-7B7A-43D3-8B79-37D633B846F1}">
-                <asvg:svgBlip xmlns:asvg="http://schemas.microsoft.com/office/drawing/2016/SVG/main" r:embed="rId3"/>
+                <asvg:svgBlip xmlns:asvg="http://schemas.microsoft.com/office/drawing/2016/SVG/main" r:embed="rId2"/>
               </a:ext>
             </a:extLst>
           </a:blip>
@@ -5699,7 +6028,7 @@
         </p:blipFill>
         <p:spPr>
           <a:xfrm>
-            <a:off x="975360" y="602501"/>
+            <a:off x="967740" y="602500"/>
             <a:ext cx="8605669" cy="6186920"/>
           </a:xfrm>
           <a:prstGeom prst="rect">
@@ -5809,10 +6138,10 @@
           <p:nvPr/>
         </p:nvPicPr>
         <p:blipFill>
-          <a:blip r:embed="rId3">
+          <a:blip>
             <a:extLst>
               <a:ext uri="{96DAC541-7B7A-43D3-8B79-37D633B846F1}">
-                <asvg:svgBlip xmlns:asvg="http://schemas.microsoft.com/office/drawing/2016/SVG/main" r:embed="rId4"/>
+                <asvg:svgBlip xmlns:asvg="http://schemas.microsoft.com/office/drawing/2016/SVG/main" r:embed="rId3"/>
               </a:ext>
             </a:extLst>
           </a:blip>
@@ -5939,10 +6268,10 @@
           <p:nvPr/>
         </p:nvPicPr>
         <p:blipFill>
-          <a:blip r:embed="rId3">
+          <a:blip>
             <a:extLst>
               <a:ext uri="{96DAC541-7B7A-43D3-8B79-37D633B846F1}">
-                <asvg:svgBlip xmlns:asvg="http://schemas.microsoft.com/office/drawing/2016/SVG/main" r:embed="rId4"/>
+                <asvg:svgBlip xmlns:asvg="http://schemas.microsoft.com/office/drawing/2016/SVG/main" r:embed="rId3"/>
               </a:ext>
             </a:extLst>
           </a:blip>
@@ -6076,10 +6405,10 @@
           <p:nvPr/>
         </p:nvPicPr>
         <p:blipFill>
-          <a:blip r:embed="rId3">
+          <a:blip>
             <a:extLst>
               <a:ext uri="{96DAC541-7B7A-43D3-8B79-37D633B846F1}">
-                <asvg:svgBlip xmlns:asvg="http://schemas.microsoft.com/office/drawing/2016/SVG/main" r:embed="rId4"/>
+                <asvg:svgBlip xmlns:asvg="http://schemas.microsoft.com/office/drawing/2016/SVG/main" r:embed="rId3"/>
               </a:ext>
             </a:extLst>
           </a:blip>
@@ -6825,7 +7154,7 @@
               <a:rPr lang="en-US" sz="1500" b="1" dirty="0">
                 <a:latin typeface="Calibri (Headings)"/>
               </a:rPr>
-              <a:t>data archiving </a:t>
+              <a:t>data archiving(change to hot-cold table strategy)</a:t>
             </a:r>
             <a:r>
               <a:rPr lang="en-US" sz="1500" dirty="0">
@@ -6981,10 +7310,10 @@
           <p:nvPr/>
         </p:nvPicPr>
         <p:blipFill>
-          <a:blip r:embed="rId3">
+          <a:blip>
             <a:extLst>
               <a:ext uri="{96DAC541-7B7A-43D3-8B79-37D633B846F1}">
-                <asvg:svgBlip xmlns:asvg="http://schemas.microsoft.com/office/drawing/2016/SVG/main" r:embed="rId4"/>
+                <asvg:svgBlip xmlns:asvg="http://schemas.microsoft.com/office/drawing/2016/SVG/main" r:embed="rId3"/>
               </a:ext>
             </a:extLst>
           </a:blip>
@@ -7272,7 +7601,15 @@
             </a:pPr>
             <a:r>
               <a:rPr lang="en-US" dirty="0"/>
-              <a:t>Archive low business-dependency tables </a:t>
+              <a:t>Move historical data from </a:t>
+            </a:r>
+            <a:r>
+              <a:rPr lang="en-US" b="1" dirty="0"/>
+              <a:t>low business-dependency tables</a:t>
+            </a:r>
+            <a:r>
+              <a:rPr lang="en-US" dirty="0"/>
+              <a:t> to history tables first.</a:t>
             </a:r>
           </a:p>
           <a:p>
@@ -7319,7 +7656,15 @@
             </a:pPr>
             <a:r>
               <a:rPr lang="en-US" dirty="0"/>
-              <a:t>Align with business on retention and archival strategy for sale data </a:t>
+              <a:t>Align with business stakeholders on the required </a:t>
+            </a:r>
+            <a:r>
+              <a:rPr lang="en-US" b="1" dirty="0"/>
+              <a:t>data availability period</a:t>
+            </a:r>
+            <a:r>
+              <a:rPr lang="en-US" dirty="0"/>
+              <a:t> in active working tables for sale data.</a:t>
             </a:r>
           </a:p>
           <a:p>
@@ -8610,14 +8955,14 @@
           <p:nvPr>
             <p:extLst>
               <p:ext uri="{D42A27DB-BD31-4B8C-83A1-F6EECF244321}">
-                <p14:modId xmlns:p14="http://schemas.microsoft.com/office/powerpoint/2010/main" val="336979329"/>
+                <p14:modId xmlns:p14="http://schemas.microsoft.com/office/powerpoint/2010/main" val="1171393705"/>
               </p:ext>
             </p:extLst>
           </p:nvPr>
         </p:nvGraphicFramePr>
         <p:xfrm>
           <a:off x="144779" y="1143001"/>
-          <a:ext cx="9406990" cy="2983223"/>
+          <a:ext cx="9406990" cy="3463867"/>
         </p:xfrm>
         <a:graphic>
           <a:graphicData uri="http://schemas.openxmlformats.org/drawingml/2006/table">
@@ -8626,55 +8971,62 @@
                 <a:tableStyleId>{5C22544A-7EE6-4342-B048-85BDC9FD1C3A}</a:tableStyleId>
               </a:tblPr>
               <a:tblGrid>
-                <a:gridCol w="562232">
+                <a:gridCol w="459047">
                   <a:extLst>
                     <a:ext uri="{9D8B030D-6E8A-4147-A177-3AD203B41FA5}">
                       <a16:colId xmlns:a16="http://schemas.microsoft.com/office/drawing/2014/main" val="2048063751"/>
                     </a:ext>
                   </a:extLst>
                 </a:gridCol>
-                <a:gridCol w="2628746">
+                <a:gridCol w="2146299">
                   <a:extLst>
                     <a:ext uri="{9D8B030D-6E8A-4147-A177-3AD203B41FA5}">
                       <a16:colId xmlns:a16="http://schemas.microsoft.com/office/drawing/2014/main" val="3374596826"/>
                     </a:ext>
                   </a:extLst>
                 </a:gridCol>
-                <a:gridCol w="1160104">
+                <a:gridCol w="947193">
                   <a:extLst>
                     <a:ext uri="{9D8B030D-6E8A-4147-A177-3AD203B41FA5}">
                       <a16:colId xmlns:a16="http://schemas.microsoft.com/office/drawing/2014/main" val="1921714934"/>
                     </a:ext>
                   </a:extLst>
                 </a:gridCol>
-                <a:gridCol w="1193013">
+                <a:gridCol w="974062">
                   <a:extLst>
                     <a:ext uri="{9D8B030D-6E8A-4147-A177-3AD203B41FA5}">
                       <a16:colId xmlns:a16="http://schemas.microsoft.com/office/drawing/2014/main" val="3309252802"/>
                     </a:ext>
                   </a:extLst>
                 </a:gridCol>
-                <a:gridCol w="1110737">
+                <a:gridCol w="906886">
                   <a:extLst>
                     <a:ext uri="{9D8B030D-6E8A-4147-A177-3AD203B41FA5}">
                       <a16:colId xmlns:a16="http://schemas.microsoft.com/office/drawing/2014/main" val="503383076"/>
                     </a:ext>
                   </a:extLst>
                 </a:gridCol>
-                <a:gridCol w="637644">
+                <a:gridCol w="520619">
                   <a:extLst>
                     <a:ext uri="{9D8B030D-6E8A-4147-A177-3AD203B41FA5}">
                       <a16:colId xmlns:a16="http://schemas.microsoft.com/office/drawing/2014/main" val="3325115333"/>
                     </a:ext>
                   </a:extLst>
                 </a:gridCol>
-                <a:gridCol w="2114514">
+                <a:gridCol w="1726442">
                   <a:extLst>
                     <a:ext uri="{9D8B030D-6E8A-4147-A177-3AD203B41FA5}">
                       <a16:colId xmlns:a16="http://schemas.microsoft.com/office/drawing/2014/main" val="3942792913"/>
                     </a:ext>
                   </a:extLst>
                 </a:gridCol>
+                <a:gridCol w="1726442">
+                  <a:extLst>
+                    <a:ext uri="{9D8B030D-6E8A-4147-A177-3AD203B41FA5}">
+                      <a16:colId xmlns:a16="http://schemas.microsoft.com/office/drawing/2014/main" val="3435817981"/>
+                    </a:ext>
+                  </a:extLst>
+                </a:gridCol>
               </a:tblGrid>
               <a:tr h="371580">
                 <a:tc>
@@ -8771,6 +9123,17 @@
                         <a:rPr lang="en-US" sz="1300" dirty="0"/>
                         <a:t>Remark</a:t>
                       </a:r>
+                    </a:p>
+                  </a:txBody>
+                  <a:tcPr/>
+                </a:tc>
+                <a:tc>
+                  <a:txBody>
+                    <a:bodyPr/>
+                    <a:lstStyle/>
+                    <a:p>
+                      <a:pPr algn="ctr"/>
+                      <a:endParaRPr lang="en-US" sz="1300" dirty="0"/>
                     </a:p>
                   </a:txBody>
                   <a:tcPr/>
@@ -8873,6 +9236,16 @@
                   </a:txBody>
                   <a:tcPr/>
                 </a:tc>
+                <a:tc>
+                  <a:txBody>
+                    <a:bodyPr/>
+                    <a:lstStyle/>
+                    <a:p>
+                      <a:endParaRPr lang="en-US" sz="1300" dirty="0"/>
+                    </a:p>
+                  </a:txBody>
+                  <a:tcPr/>
+                </a:tc>
                 <a:extLst>
                   <a:ext uri="{0D108BD9-81ED-4DB2-BD59-A6C34878D82A}">
                     <a16:rowId xmlns:a16="http://schemas.microsoft.com/office/drawing/2014/main" val="623737958"/>
@@ -8959,6 +9332,16 @@
                   </a:txBody>
                   <a:tcPr/>
                 </a:tc>
+                <a:tc>
+                  <a:txBody>
+                    <a:bodyPr/>
+                    <a:lstStyle/>
+                    <a:p>
+                      <a:endParaRPr lang="en-US" sz="1300" dirty="0"/>
+                    </a:p>
+                  </a:txBody>
+                  <a:tcPr/>
+                </a:tc>
                 <a:extLst>
                   <a:ext uri="{0D108BD9-81ED-4DB2-BD59-A6C34878D82A}">
                     <a16:rowId xmlns:a16="http://schemas.microsoft.com/office/drawing/2014/main" val="2983401621"/>
@@ -9054,6 +9437,16 @@
                   </a:txBody>
                   <a:tcPr/>
                 </a:tc>
+                <a:tc>
+                  <a:txBody>
+                    <a:bodyPr/>
+                    <a:lstStyle/>
+                    <a:p>
+                      <a:endParaRPr lang="en-US" sz="1300" dirty="0"/>
+                    </a:p>
+                  </a:txBody>
+                  <a:tcPr/>
+                </a:tc>
                 <a:extLst>
                   <a:ext uri="{0D108BD9-81ED-4DB2-BD59-A6C34878D82A}">
                     <a16:rowId xmlns:a16="http://schemas.microsoft.com/office/drawing/2014/main" val="2013266158"/>
@@ -9143,6 +9536,16 @@
                   </a:txBody>
                   <a:tcPr/>
                 </a:tc>
+                <a:tc>
+                  <a:txBody>
+                    <a:bodyPr/>
+                    <a:lstStyle/>
+                    <a:p>
+                      <a:endParaRPr lang="en-US" sz="1300" dirty="0"/>
+                    </a:p>
+                  </a:txBody>
+                  <a:tcPr/>
+                </a:tc>
                 <a:extLst>
                   <a:ext uri="{0D108BD9-81ED-4DB2-BD59-A6C34878D82A}">
                     <a16:rowId xmlns:a16="http://schemas.microsoft.com/office/drawing/2014/main" val="2680670364"/>
@@ -9215,6 +9618,16 @@
                         <a:rPr lang="en-US" sz="1300" dirty="0"/>
                         <a:t>1</a:t>
                       </a:r>
+                    </a:p>
+                  </a:txBody>
+                  <a:tcPr/>
+                </a:tc>
+                <a:tc>
+                  <a:txBody>
+                    <a:bodyPr/>
+                    <a:lstStyle/>
+                    <a:p>
+                      <a:endParaRPr lang="en-US" sz="1300" dirty="0"/>
                     </a:p>
                   </a:txBody>
                   <a:tcPr/>
@@ -9332,6 +9745,16 @@
                   </a:txBody>
                   <a:tcPr/>
                 </a:tc>
+                <a:tc>
+                  <a:txBody>
+                    <a:bodyPr/>
+                    <a:lstStyle/>
+                    <a:p>
+                      <a:endParaRPr lang="en-US" sz="1300" dirty="0"/>
+                    </a:p>
+                  </a:txBody>
+                  <a:tcPr/>
+                </a:tc>
                 <a:extLst>
                   <a:ext uri="{0D108BD9-81ED-4DB2-BD59-A6C34878D82A}">
                     <a16:rowId xmlns:a16="http://schemas.microsoft.com/office/drawing/2014/main" val="479185954"/>
@@ -9444,6 +9867,16 @@
                   </a:txBody>
                   <a:tcPr/>
                 </a:tc>
+                <a:tc>
+                  <a:txBody>
+                    <a:bodyPr/>
+                    <a:lstStyle/>
+                    <a:p>
+                      <a:endParaRPr lang="en-US" sz="1300" dirty="0"/>
+                    </a:p>
+                  </a:txBody>
+                  <a:tcPr/>
+                </a:tc>
                 <a:extLst>
                   <a:ext uri="{0D108BD9-81ED-4DB2-BD59-A6C34878D82A}">
                     <a16:rowId xmlns:a16="http://schemas.microsoft.com/office/drawing/2014/main" val="2230200074"/>
@@ -9542,6 +9975,16 @@
                         <a:rPr lang="en-US" sz="1300" dirty="0"/>
                         <a:t>1</a:t>
                       </a:r>
+                    </a:p>
+                  </a:txBody>
+                  <a:tcPr/>
+                </a:tc>
+                <a:tc>
+                  <a:txBody>
+                    <a:bodyPr/>
+                    <a:lstStyle/>
+                    <a:p>
+                      <a:endParaRPr lang="en-US" sz="1300" dirty="0"/>
                     </a:p>
                   </a:txBody>
                   <a:tcPr/>
@@ -11319,7 +11762,13 @@
   <p:cSld>
     <p:spTree>
       <p:nvGrpSpPr>
-        <p:cNvPr id="1" name=""/>
+        <p:cNvPr id="1" name="">
+          <a:extLst>
+            <a:ext uri="{FF2B5EF4-FFF2-40B4-BE49-F238E27FC236}">
+              <a16:creationId xmlns:a16="http://schemas.microsoft.com/office/drawing/2014/main" id="{33D73DCD-8B7D-B2F4-838C-97E194D06599}"/>
+            </a:ext>
+          </a:extLst>
+        </p:cNvPr>
         <p:cNvGrpSpPr/>
         <p:nvPr/>
       </p:nvGrpSpPr>
@@ -11336,7 +11785,7 @@
           <p:cNvPr id="2" name="Text Placeholder 1">
             <a:extLst>
               <a:ext uri="{FF2B5EF4-FFF2-40B4-BE49-F238E27FC236}">
-                <a16:creationId xmlns:a16="http://schemas.microsoft.com/office/drawing/2014/main" id="{789CF22F-5AA4-B171-99C4-50EE2DCE24BE}"/>
+                <a16:creationId xmlns:a16="http://schemas.microsoft.com/office/drawing/2014/main" id="{AD8DE332-4DB9-50A9-3806-F6BCA8DD1471}"/>
               </a:ext>
             </a:extLst>
           </p:cNvPr>
@@ -11362,8 +11811,17 @@
               <a:rPr lang="en-GB" sz="3600" dirty="0">
                 <a:latin typeface="Aptos Narrow" panose="020B0004020202020204" pitchFamily="34" charset="0"/>
               </a:rPr>
-              <a:t>G&amp; G Data Management</a:t>
-            </a:r>
+              <a:t>G&amp; G Data Management </a:t>
+            </a:r>
+            <a:r>
+              <a:rPr lang="en-US" sz="3600" dirty="0">
+                <a:latin typeface="Aptos Narrow" panose="020B0004020202020204" pitchFamily="34" charset="0"/>
+              </a:rPr>
+              <a:t>Updated Proposal (Revised after Review)</a:t>
+            </a:r>
+            <a:endParaRPr lang="en-GB" sz="3600" dirty="0">
+              <a:latin typeface="Aptos Narrow" panose="020B0004020202020204" pitchFamily="34" charset="0"/>
+            </a:endParaRPr>
           </a:p>
           <a:p>
             <a:pPr algn="ctr"/>
@@ -11388,7 +11846,7 @@
     </p:spTree>
     <p:extLst>
       <p:ext uri="{BB962C8B-B14F-4D97-AF65-F5344CB8AC3E}">
-        <p14:creationId xmlns:p14="http://schemas.microsoft.com/office/powerpoint/2010/main" val="120747862"/>
+        <p14:creationId xmlns:p14="http://schemas.microsoft.com/office/powerpoint/2010/main" val="3257706796"/>
       </p:ext>
     </p:extLst>
   </p:cSld>
@@ -12609,6 +13067,2832 @@
         <p:cNvPr id="1" name="">
           <a:extLst>
             <a:ext uri="{FF2B5EF4-FFF2-40B4-BE49-F238E27FC236}">
+              <a16:creationId xmlns:a16="http://schemas.microsoft.com/office/drawing/2014/main" id="{0869CFEB-0D9C-56F2-13CD-AF2A109255E4}"/>
+            </a:ext>
+          </a:extLst>
+        </p:cNvPr>
+        <p:cNvGrpSpPr/>
+        <p:nvPr/>
+      </p:nvGrpSpPr>
+      <p:grpSpPr>
+        <a:xfrm>
+          <a:off x="0" y="0"/>
+          <a:ext cx="0" cy="0"/>
+          <a:chOff x="0" y="0"/>
+          <a:chExt cx="0" cy="0"/>
+        </a:xfrm>
+      </p:grpSpPr>
+      <p:sp>
+        <p:nvSpPr>
+          <p:cNvPr id="2" name="Slide Number Placeholder 1">
+            <a:extLst>
+              <a:ext uri="{FF2B5EF4-FFF2-40B4-BE49-F238E27FC236}">
+                <a16:creationId xmlns:a16="http://schemas.microsoft.com/office/drawing/2014/main" id="{ECB56508-8F86-5B2E-E3BF-04CB400D3C4B}"/>
+              </a:ext>
+            </a:extLst>
+          </p:cNvPr>
+          <p:cNvSpPr>
+            <a:spLocks noGrp="1"/>
+          </p:cNvSpPr>
+          <p:nvPr>
+            <p:ph type="sldNum" sz="quarter" idx="12"/>
+          </p:nvPr>
+        </p:nvSpPr>
+        <p:spPr/>
+        <p:txBody>
+          <a:bodyPr/>
+          <a:lstStyle/>
+          <a:p>
+            <a:fld id="{93288B1A-0894-4E52-95D8-2AC74CBED725}" type="slidenum">
+              <a:rPr lang="en-US" smtClean="0"/>
+              <a:t>31</a:t>
+            </a:fld>
+            <a:endParaRPr lang="en-US"/>
+          </a:p>
+        </p:txBody>
+      </p:sp>
+      <p:sp>
+        <p:nvSpPr>
+          <p:cNvPr id="3" name="Text Placeholder 2">
+            <a:extLst>
+              <a:ext uri="{FF2B5EF4-FFF2-40B4-BE49-F238E27FC236}">
+                <a16:creationId xmlns:a16="http://schemas.microsoft.com/office/drawing/2014/main" id="{A96FC328-DA9D-AE44-A000-BFDD6E940CF1}"/>
+              </a:ext>
+            </a:extLst>
+          </p:cNvPr>
+          <p:cNvSpPr>
+            <a:spLocks noGrp="1"/>
+          </p:cNvSpPr>
+          <p:nvPr>
+            <p:ph type="body" idx="1"/>
+          </p:nvPr>
+        </p:nvSpPr>
+        <p:spPr/>
+        <p:txBody>
+          <a:bodyPr/>
+          <a:lstStyle/>
+          <a:p>
+            <a:r>
+              <a:rPr lang="en-US" dirty="0"/>
+              <a:t>Near-Term Stabilization (Immediate Action)</a:t>
+            </a:r>
+          </a:p>
+        </p:txBody>
+      </p:sp>
+      <p:sp>
+        <p:nvSpPr>
+          <p:cNvPr id="10" name="TextBox 9">
+            <a:extLst>
+              <a:ext uri="{FF2B5EF4-FFF2-40B4-BE49-F238E27FC236}">
+                <a16:creationId xmlns:a16="http://schemas.microsoft.com/office/drawing/2014/main" id="{7F326459-026E-4C54-64FD-3800739C34AD}"/>
+              </a:ext>
+            </a:extLst>
+          </p:cNvPr>
+          <p:cNvSpPr txBox="1"/>
+          <p:nvPr/>
+        </p:nvSpPr>
+        <p:spPr>
+          <a:xfrm>
+            <a:off x="321205" y="943879"/>
+            <a:ext cx="10412627" cy="5355312"/>
+          </a:xfrm>
+          <a:prstGeom prst="rect">
+            <a:avLst/>
+          </a:prstGeom>
+          <a:noFill/>
+        </p:spPr>
+        <p:txBody>
+          <a:bodyPr wrap="square">
+            <a:spAutoFit/>
+          </a:bodyPr>
+          <a:lstStyle/>
+          <a:p>
+            <a:pPr>
+              <a:lnSpc>
+                <a:spcPct val="150000"/>
+              </a:lnSpc>
+            </a:pPr>
+            <a:r>
+              <a:rPr lang="en-US" b="1" dirty="0"/>
+              <a:t>Approach</a:t>
+            </a:r>
+            <a:endParaRPr lang="en-US" dirty="0"/>
+          </a:p>
+          <a:p>
+            <a:pPr marL="742950" lvl="1" indent="-285750">
+              <a:lnSpc>
+                <a:spcPct val="150000"/>
+              </a:lnSpc>
+              <a:buFont typeface="Wingdings" panose="05000000000000000000" pitchFamily="2" charset="2"/>
+              <a:buChar char="Ø"/>
+            </a:pPr>
+            <a:r>
+              <a:rPr lang="en-US" dirty="0"/>
+              <a:t>Replace traditional archiving with </a:t>
+            </a:r>
+            <a:r>
+              <a:rPr lang="en-US" b="1" dirty="0"/>
+              <a:t>Hot–Cold Table Strategy</a:t>
+            </a:r>
+          </a:p>
+          <a:p>
+            <a:pPr marL="742950" lvl="1" indent="-285750">
+              <a:lnSpc>
+                <a:spcPct val="150000"/>
+              </a:lnSpc>
+              <a:buFont typeface="Wingdings" panose="05000000000000000000" pitchFamily="2" charset="2"/>
+              <a:buChar char="Ø"/>
+            </a:pPr>
+            <a:r>
+              <a:rPr lang="en-US" altLang="en-US" dirty="0">
+                <a:latin typeface="Calibri (Body)"/>
+              </a:rPr>
+              <a:t>Separate: </a:t>
+            </a:r>
+          </a:p>
+          <a:p>
+            <a:pPr lvl="4" eaLnBrk="0" fontAlgn="base" hangingPunct="0">
+              <a:spcBef>
+                <a:spcPct val="0"/>
+              </a:spcBef>
+              <a:spcAft>
+                <a:spcPct val="0"/>
+              </a:spcAft>
+              <a:buFontTx/>
+              <a:buChar char="•"/>
+            </a:pPr>
+            <a:r>
+              <a:rPr lang="en-US" altLang="en-US" b="1" dirty="0">
+                <a:latin typeface="Calibri (Body)"/>
+              </a:rPr>
+              <a:t>Hot Data (active transactions)</a:t>
+            </a:r>
+            <a:r>
+              <a:rPr lang="en-US" altLang="en-US" dirty="0">
+                <a:latin typeface="Calibri (Body)"/>
+              </a:rPr>
+              <a:t> → main table </a:t>
+            </a:r>
+          </a:p>
+          <a:p>
+            <a:pPr lvl="4" eaLnBrk="0" fontAlgn="base" hangingPunct="0">
+              <a:spcBef>
+                <a:spcPct val="0"/>
+              </a:spcBef>
+              <a:spcAft>
+                <a:spcPct val="0"/>
+              </a:spcAft>
+              <a:buFontTx/>
+              <a:buChar char="•"/>
+            </a:pPr>
+            <a:r>
+              <a:rPr lang="en-US" altLang="en-US" b="1" dirty="0">
+                <a:latin typeface="Calibri (Body)"/>
+              </a:rPr>
+              <a:t>Cold Data (historical data)</a:t>
+            </a:r>
+            <a:r>
+              <a:rPr lang="en-US" altLang="en-US" dirty="0">
+                <a:latin typeface="Calibri (Body)"/>
+              </a:rPr>
+              <a:t> → history table </a:t>
+            </a:r>
+            <a:endParaRPr lang="en-US" b="1" dirty="0">
+              <a:latin typeface="Calibri (Body)"/>
+            </a:endParaRPr>
+          </a:p>
+          <a:p>
+            <a:pPr marL="742950" lvl="1" indent="-285750">
+              <a:lnSpc>
+                <a:spcPct val="150000"/>
+              </a:lnSpc>
+              <a:buFont typeface="Wingdings" panose="05000000000000000000" pitchFamily="2" charset="2"/>
+              <a:buChar char="Ø"/>
+            </a:pPr>
+            <a:r>
+              <a:rPr lang="en-US" altLang="en-US" dirty="0">
+                <a:latin typeface="Calibri (Body)"/>
+              </a:rPr>
+              <a:t>Maintain </a:t>
+            </a:r>
+            <a:r>
+              <a:rPr lang="en-US" altLang="en-US" b="1" dirty="0">
+                <a:latin typeface="Calibri (Body)"/>
+              </a:rPr>
+              <a:t>identical schema</a:t>
+            </a:r>
+            <a:r>
+              <a:rPr lang="en-US" altLang="en-US" dirty="0">
+                <a:latin typeface="Calibri (Body)"/>
+              </a:rPr>
+              <a:t> for consistency and easy querying</a:t>
+            </a:r>
+          </a:p>
+          <a:p>
+            <a:pPr marL="742950" lvl="1" indent="-285750">
+              <a:lnSpc>
+                <a:spcPct val="150000"/>
+              </a:lnSpc>
+              <a:buFont typeface="Wingdings" panose="05000000000000000000" pitchFamily="2" charset="2"/>
+              <a:buChar char="Ø"/>
+            </a:pPr>
+            <a:r>
+              <a:rPr lang="en-US" altLang="en-US" b="1" dirty="0">
+                <a:latin typeface="Calibri (Body)"/>
+              </a:rPr>
+              <a:t>Monitor </a:t>
+            </a:r>
+            <a:r>
+              <a:rPr lang="en-US" altLang="en-US" dirty="0">
+                <a:latin typeface="Calibri (Body)"/>
+              </a:rPr>
+              <a:t>data volume per month and move data as proposal data moving plan</a:t>
+            </a:r>
+            <a:endParaRPr lang="en-US" altLang="en-US" b="1" dirty="0">
+              <a:latin typeface="Calibri (Body)"/>
+            </a:endParaRPr>
+          </a:p>
+          <a:p>
+            <a:pPr>
+              <a:lnSpc>
+                <a:spcPct val="150000"/>
+              </a:lnSpc>
+            </a:pPr>
+            <a:r>
+              <a:rPr lang="en-US" b="1" dirty="0"/>
+              <a:t>Storage Design</a:t>
+            </a:r>
+            <a:endParaRPr lang="en-US" dirty="0"/>
+          </a:p>
+          <a:p>
+            <a:pPr>
+              <a:lnSpc>
+                <a:spcPct val="150000"/>
+              </a:lnSpc>
+            </a:pPr>
+            <a:r>
+              <a:rPr lang="en-US" dirty="0"/>
+              <a:t>History Data stored in : </a:t>
+            </a:r>
+          </a:p>
+          <a:p>
+            <a:pPr marL="742950" lvl="1" indent="-285750">
+              <a:lnSpc>
+                <a:spcPct val="150000"/>
+              </a:lnSpc>
+              <a:buFont typeface="Wingdings" panose="05000000000000000000" pitchFamily="2" charset="2"/>
+              <a:buChar char="Ø"/>
+            </a:pPr>
+            <a:r>
+              <a:rPr lang="en-US" dirty="0"/>
+              <a:t>Dedicated </a:t>
+            </a:r>
+            <a:r>
+              <a:rPr lang="en-US" b="1" dirty="0"/>
+              <a:t>history tables within the same database </a:t>
+            </a:r>
+          </a:p>
+          <a:p>
+            <a:pPr>
+              <a:lnSpc>
+                <a:spcPct val="150000"/>
+              </a:lnSpc>
+            </a:pPr>
+            <a:r>
+              <a:rPr lang="en-US" b="1" dirty="0"/>
+              <a:t>Data Retention</a:t>
+            </a:r>
+            <a:endParaRPr lang="en-US" dirty="0"/>
+          </a:p>
+          <a:p>
+            <a:pPr marL="742950" lvl="1" indent="-285750">
+              <a:lnSpc>
+                <a:spcPct val="150000"/>
+              </a:lnSpc>
+              <a:buFont typeface="Wingdings" panose="05000000000000000000" pitchFamily="2" charset="2"/>
+              <a:buChar char="Ø"/>
+            </a:pPr>
+            <a:r>
+              <a:rPr lang="en-US" dirty="0"/>
+              <a:t>No change to existing data retention policy (aligned with IT Governance) 	 	</a:t>
+            </a:r>
+          </a:p>
+          <a:p>
+            <a:pPr fontAlgn="base"/>
+            <a:endParaRPr lang="en-US" dirty="0"/>
+          </a:p>
+          <a:p>
+            <a:endParaRPr lang="en-US" dirty="0"/>
+          </a:p>
+        </p:txBody>
+      </p:sp>
+      <p:sp>
+        <p:nvSpPr>
+          <p:cNvPr id="4" name="TextBox 7">
+            <a:extLst>
+              <a:ext uri="{FF2B5EF4-FFF2-40B4-BE49-F238E27FC236}">
+                <a16:creationId xmlns:a16="http://schemas.microsoft.com/office/drawing/2014/main" id="{324C7135-F7C6-D8FC-FE8C-B31A3AA2CD3F}"/>
+              </a:ext>
+            </a:extLst>
+          </p:cNvPr>
+          <p:cNvSpPr txBox="1"/>
+          <p:nvPr/>
+        </p:nvSpPr>
+        <p:spPr>
+          <a:xfrm>
+            <a:off x="341616" y="5394075"/>
+            <a:ext cx="9705549" cy="830997"/>
+          </a:xfrm>
+          <a:prstGeom prst="rect">
+            <a:avLst/>
+          </a:prstGeom>
+          <a:noFill/>
+        </p:spPr>
+        <p:txBody>
+          <a:bodyPr wrap="square">
+            <a:spAutoFit/>
+          </a:bodyPr>
+          <a:lstStyle>
+            <a:defPPr>
+              <a:defRPr lang="en-US"/>
+            </a:defPPr>
+            <a:lvl1pPr marL="0" algn="l" defTabSz="914400" rtl="0" eaLnBrk="1" latinLnBrk="0" hangingPunct="1">
+              <a:defRPr sz="1800" kern="1200">
+                <a:solidFill>
+                  <a:schemeClr val="tx1"/>
+                </a:solidFill>
+                <a:latin typeface="+mn-lt"/>
+                <a:ea typeface="+mn-ea"/>
+                <a:cs typeface="+mn-cs"/>
+              </a:defRPr>
+            </a:lvl1pPr>
+            <a:lvl2pPr marL="457200" algn="l" defTabSz="914400" rtl="0" eaLnBrk="1" latinLnBrk="0" hangingPunct="1">
+              <a:defRPr sz="1800" kern="1200">
+                <a:solidFill>
+                  <a:schemeClr val="tx1"/>
+                </a:solidFill>
+                <a:latin typeface="+mn-lt"/>
+                <a:ea typeface="+mn-ea"/>
+                <a:cs typeface="+mn-cs"/>
+              </a:defRPr>
+            </a:lvl2pPr>
+            <a:lvl3pPr marL="914400" algn="l" defTabSz="914400" rtl="0" eaLnBrk="1" latinLnBrk="0" hangingPunct="1">
+              <a:defRPr sz="1800" kern="1200">
+                <a:solidFill>
+                  <a:schemeClr val="tx1"/>
+                </a:solidFill>
+                <a:latin typeface="+mn-lt"/>
+                <a:ea typeface="+mn-ea"/>
+                <a:cs typeface="+mn-cs"/>
+              </a:defRPr>
+            </a:lvl3pPr>
+            <a:lvl4pPr marL="1371600" algn="l" defTabSz="914400" rtl="0" eaLnBrk="1" latinLnBrk="0" hangingPunct="1">
+              <a:defRPr sz="1800" kern="1200">
+                <a:solidFill>
+                  <a:schemeClr val="tx1"/>
+                </a:solidFill>
+                <a:latin typeface="+mn-lt"/>
+                <a:ea typeface="+mn-ea"/>
+                <a:cs typeface="+mn-cs"/>
+              </a:defRPr>
+            </a:lvl4pPr>
+            <a:lvl5pPr marL="1828800" algn="l" defTabSz="914400" rtl="0" eaLnBrk="1" latinLnBrk="0" hangingPunct="1">
+              <a:defRPr sz="1800" kern="1200">
+                <a:solidFill>
+                  <a:schemeClr val="tx1"/>
+                </a:solidFill>
+                <a:latin typeface="+mn-lt"/>
+                <a:ea typeface="+mn-ea"/>
+                <a:cs typeface="+mn-cs"/>
+              </a:defRPr>
+            </a:lvl5pPr>
+            <a:lvl6pPr marL="2286000" algn="l" defTabSz="914400" rtl="0" eaLnBrk="1" latinLnBrk="0" hangingPunct="1">
+              <a:defRPr sz="1800" kern="1200">
+                <a:solidFill>
+                  <a:schemeClr val="tx1"/>
+                </a:solidFill>
+                <a:latin typeface="+mn-lt"/>
+                <a:ea typeface="+mn-ea"/>
+                <a:cs typeface="+mn-cs"/>
+              </a:defRPr>
+            </a:lvl6pPr>
+            <a:lvl7pPr marL="2743200" algn="l" defTabSz="914400" rtl="0" eaLnBrk="1" latinLnBrk="0" hangingPunct="1">
+              <a:defRPr sz="1800" kern="1200">
+                <a:solidFill>
+                  <a:schemeClr val="tx1"/>
+                </a:solidFill>
+                <a:latin typeface="+mn-lt"/>
+                <a:ea typeface="+mn-ea"/>
+                <a:cs typeface="+mn-cs"/>
+              </a:defRPr>
+            </a:lvl7pPr>
+            <a:lvl8pPr marL="3200400" algn="l" defTabSz="914400" rtl="0" eaLnBrk="1" latinLnBrk="0" hangingPunct="1">
+              <a:defRPr sz="1800" kern="1200">
+                <a:solidFill>
+                  <a:schemeClr val="tx1"/>
+                </a:solidFill>
+                <a:latin typeface="+mn-lt"/>
+                <a:ea typeface="+mn-ea"/>
+                <a:cs typeface="+mn-cs"/>
+              </a:defRPr>
+            </a:lvl8pPr>
+            <a:lvl9pPr marL="3657600" algn="l" defTabSz="914400" rtl="0" eaLnBrk="1" latinLnBrk="0" hangingPunct="1">
+              <a:defRPr sz="1800" kern="1200">
+                <a:solidFill>
+                  <a:schemeClr val="tx1"/>
+                </a:solidFill>
+                <a:latin typeface="+mn-lt"/>
+                <a:ea typeface="+mn-ea"/>
+                <a:cs typeface="+mn-cs"/>
+              </a:defRPr>
+            </a:lvl9pPr>
+          </a:lstStyle>
+          <a:p>
+            <a:r>
+              <a:rPr lang="en-US" sz="1200" b="1" dirty="0"/>
+              <a:t>Doc Ref:</a:t>
+            </a:r>
+          </a:p>
+          <a:p>
+            <a:r>
+              <a:rPr lang="en-US" sz="1200" dirty="0">
+                <a:solidFill>
+                  <a:srgbClr val="0070C0"/>
+                </a:solidFill>
+              </a:rPr>
+              <a:t>https://cdsgmm.sharepoint.com/sites/QMSInformationSecurityManagement/Shared%20Documents/Forms/AllItems.aspx?id=%2Fsites%2FQMSInformationSecurityManagement%2FShared%20Documents%2FCDSG%2FPolicy%2FPolicy%20Retention%20and%20Archival%2Epdf&amp;parent=%2Fsites%2FQMSInformationSecurityManagement%2FShared%20Documents%2FCDSG%2FPolicy&amp;p=true&amp;ga=1</a:t>
+            </a:r>
+          </a:p>
+        </p:txBody>
+      </p:sp>
+    </p:spTree>
+    <p:extLst>
+      <p:ext uri="{BB962C8B-B14F-4D97-AF65-F5344CB8AC3E}">
+        <p14:creationId xmlns:p14="http://schemas.microsoft.com/office/powerpoint/2010/main" val="43126691"/>
+      </p:ext>
+    </p:extLst>
+  </p:cSld>
+  <p:clrMapOvr>
+    <a:masterClrMapping/>
+  </p:clrMapOvr>
+</p:sld>
+</file>
+
+<file path=ppt/slides/slide32.xml><?xml version="1.0" encoding="utf-8"?>
+<p:sld xmlns:a="http://schemas.openxmlformats.org/drawingml/2006/main" xmlns:r="http://schemas.openxmlformats.org/officeDocument/2006/relationships" xmlns:p="http://schemas.openxmlformats.org/presentationml/2006/main">
+  <p:cSld>
+    <p:spTree>
+      <p:nvGrpSpPr>
+        <p:cNvPr id="1" name="">
+          <a:extLst>
+            <a:ext uri="{FF2B5EF4-FFF2-40B4-BE49-F238E27FC236}">
+              <a16:creationId xmlns:a16="http://schemas.microsoft.com/office/drawing/2014/main" id="{3CF1E32E-03D3-86F6-C0BD-15B511E160AE}"/>
+            </a:ext>
+          </a:extLst>
+        </p:cNvPr>
+        <p:cNvGrpSpPr/>
+        <p:nvPr/>
+      </p:nvGrpSpPr>
+      <p:grpSpPr>
+        <a:xfrm>
+          <a:off x="0" y="0"/>
+          <a:ext cx="0" cy="0"/>
+          <a:chOff x="0" y="0"/>
+          <a:chExt cx="0" cy="0"/>
+        </a:xfrm>
+      </p:grpSpPr>
+      <p:sp>
+        <p:nvSpPr>
+          <p:cNvPr id="2" name="Slide Number Placeholder 1">
+            <a:extLst>
+              <a:ext uri="{FF2B5EF4-FFF2-40B4-BE49-F238E27FC236}">
+                <a16:creationId xmlns:a16="http://schemas.microsoft.com/office/drawing/2014/main" id="{052218D6-978A-84A5-4510-C27BAAAE2C3C}"/>
+              </a:ext>
+            </a:extLst>
+          </p:cNvPr>
+          <p:cNvSpPr>
+            <a:spLocks noGrp="1"/>
+          </p:cNvSpPr>
+          <p:nvPr>
+            <p:ph type="sldNum" sz="quarter" idx="12"/>
+          </p:nvPr>
+        </p:nvSpPr>
+        <p:spPr/>
+        <p:txBody>
+          <a:bodyPr/>
+          <a:lstStyle/>
+          <a:p>
+            <a:fld id="{93288B1A-0894-4E52-95D8-2AC74CBED725}" type="slidenum">
+              <a:rPr lang="en-US" smtClean="0"/>
+              <a:t>32</a:t>
+            </a:fld>
+            <a:endParaRPr lang="en-US"/>
+          </a:p>
+        </p:txBody>
+      </p:sp>
+      <p:sp>
+        <p:nvSpPr>
+          <p:cNvPr id="3" name="Text Placeholder 2">
+            <a:extLst>
+              <a:ext uri="{FF2B5EF4-FFF2-40B4-BE49-F238E27FC236}">
+                <a16:creationId xmlns:a16="http://schemas.microsoft.com/office/drawing/2014/main" id="{99077FBE-B281-CD48-ADF3-2E0B39521AD9}"/>
+              </a:ext>
+            </a:extLst>
+          </p:cNvPr>
+          <p:cNvSpPr>
+            <a:spLocks noGrp="1"/>
+          </p:cNvSpPr>
+          <p:nvPr>
+            <p:ph type="body" idx="1"/>
+          </p:nvPr>
+        </p:nvSpPr>
+        <p:spPr/>
+        <p:txBody>
+          <a:bodyPr/>
+          <a:lstStyle/>
+          <a:p>
+            <a:r>
+              <a:rPr lang="en-US" dirty="0"/>
+              <a:t>Large Volume table status with propose data moving plan</a:t>
+            </a:r>
+          </a:p>
+        </p:txBody>
+      </p:sp>
+      <p:sp>
+        <p:nvSpPr>
+          <p:cNvPr id="10" name="TextBox 9">
+            <a:extLst>
+              <a:ext uri="{FF2B5EF4-FFF2-40B4-BE49-F238E27FC236}">
+                <a16:creationId xmlns:a16="http://schemas.microsoft.com/office/drawing/2014/main" id="{0581D6AF-A85B-0C07-EDD9-B05131A03170}"/>
+              </a:ext>
+            </a:extLst>
+          </p:cNvPr>
+          <p:cNvSpPr txBox="1"/>
+          <p:nvPr/>
+        </p:nvSpPr>
+        <p:spPr>
+          <a:xfrm>
+            <a:off x="609599" y="1015483"/>
+            <a:ext cx="10412627" cy="1477328"/>
+          </a:xfrm>
+          <a:prstGeom prst="rect">
+            <a:avLst/>
+          </a:prstGeom>
+          <a:noFill/>
+        </p:spPr>
+        <p:txBody>
+          <a:bodyPr wrap="square">
+            <a:spAutoFit/>
+          </a:bodyPr>
+          <a:lstStyle/>
+          <a:p>
+            <a:pPr marL="285750" indent="-285750">
+              <a:buFont typeface="Wingdings" panose="05000000000000000000" pitchFamily="2" charset="2"/>
+              <a:buChar char="Ø"/>
+            </a:pPr>
+            <a:endParaRPr lang="en-US" dirty="0"/>
+          </a:p>
+          <a:p>
+            <a:endParaRPr lang="en-US" dirty="0"/>
+          </a:p>
+          <a:p>
+            <a:pPr marL="285750" indent="-285750">
+              <a:buFont typeface="Wingdings" panose="05000000000000000000" pitchFamily="2" charset="2"/>
+              <a:buChar char="Ø"/>
+            </a:pPr>
+            <a:endParaRPr lang="en-US" dirty="0"/>
+          </a:p>
+          <a:p>
+            <a:pPr marL="285750" indent="-285750">
+              <a:buFont typeface="Wingdings" panose="05000000000000000000" pitchFamily="2" charset="2"/>
+              <a:buChar char="Ø"/>
+            </a:pPr>
+            <a:endParaRPr lang="en-US" dirty="0"/>
+          </a:p>
+          <a:p>
+            <a:endParaRPr lang="en-US" dirty="0"/>
+          </a:p>
+        </p:txBody>
+      </p:sp>
+      <p:graphicFrame>
+        <p:nvGraphicFramePr>
+          <p:cNvPr id="8" name="Table 7">
+            <a:extLst>
+              <a:ext uri="{FF2B5EF4-FFF2-40B4-BE49-F238E27FC236}">
+                <a16:creationId xmlns:a16="http://schemas.microsoft.com/office/drawing/2014/main" id="{02787BAD-AA43-5BB4-D25E-51F5776A4D54}"/>
+              </a:ext>
+            </a:extLst>
+          </p:cNvPr>
+          <p:cNvGraphicFramePr>
+            <a:graphicFrameLocks noGrp="1"/>
+          </p:cNvGraphicFramePr>
+          <p:nvPr/>
+        </p:nvGraphicFramePr>
+        <p:xfrm>
+          <a:off x="212344" y="878997"/>
+          <a:ext cx="10824464" cy="3506915"/>
+        </p:xfrm>
+        <a:graphic>
+          <a:graphicData uri="http://schemas.openxmlformats.org/drawingml/2006/table">
+            <a:tbl>
+              <a:tblPr firstRow="1" bandRow="1">
+                <a:tableStyleId>{5940675A-B579-460E-94D1-54222C63F5DA}</a:tableStyleId>
+              </a:tblPr>
+              <a:tblGrid>
+                <a:gridCol w="1040384">
+                  <a:extLst>
+                    <a:ext uri="{9D8B030D-6E8A-4147-A177-3AD203B41FA5}">
+                      <a16:colId xmlns:a16="http://schemas.microsoft.com/office/drawing/2014/main" val="1938797340"/>
+                    </a:ext>
+                  </a:extLst>
+                </a:gridCol>
+                <a:gridCol w="2254497">
+                  <a:extLst>
+                    <a:ext uri="{9D8B030D-6E8A-4147-A177-3AD203B41FA5}">
+                      <a16:colId xmlns:a16="http://schemas.microsoft.com/office/drawing/2014/main" val="1983860111"/>
+                    </a:ext>
+                  </a:extLst>
+                </a:gridCol>
+                <a:gridCol w="1351114">
+                  <a:extLst>
+                    <a:ext uri="{9D8B030D-6E8A-4147-A177-3AD203B41FA5}">
+                      <a16:colId xmlns:a16="http://schemas.microsoft.com/office/drawing/2014/main" val="528643849"/>
+                    </a:ext>
+                  </a:extLst>
+                </a:gridCol>
+                <a:gridCol w="1597325">
+                  <a:extLst>
+                    <a:ext uri="{9D8B030D-6E8A-4147-A177-3AD203B41FA5}">
+                      <a16:colId xmlns:a16="http://schemas.microsoft.com/office/drawing/2014/main" val="1154069943"/>
+                    </a:ext>
+                  </a:extLst>
+                </a:gridCol>
+                <a:gridCol w="1225897">
+                  <a:extLst>
+                    <a:ext uri="{9D8B030D-6E8A-4147-A177-3AD203B41FA5}">
+                      <a16:colId xmlns:a16="http://schemas.microsoft.com/office/drawing/2014/main" val="3273392666"/>
+                    </a:ext>
+                  </a:extLst>
+                </a:gridCol>
+                <a:gridCol w="3355247">
+                  <a:extLst>
+                    <a:ext uri="{9D8B030D-6E8A-4147-A177-3AD203B41FA5}">
+                      <a16:colId xmlns:a16="http://schemas.microsoft.com/office/drawing/2014/main" val="4067158745"/>
+                    </a:ext>
+                  </a:extLst>
+                </a:gridCol>
+              </a:tblGrid>
+              <a:tr h="370840">
+                <a:tc>
+                  <a:txBody>
+                    <a:bodyPr/>
+                    <a:lstStyle/>
+                    <a:p>
+                      <a:r>
+                        <a:rPr lang="en-US" dirty="0"/>
+                        <a:t>Business Impact</a:t>
+                      </a:r>
+                    </a:p>
+                  </a:txBody>
+                  <a:tcPr/>
+                </a:tc>
+                <a:tc>
+                  <a:txBody>
+                    <a:bodyPr/>
+                    <a:lstStyle/>
+                    <a:p>
+                      <a:r>
+                        <a:rPr lang="en-US" dirty="0"/>
+                        <a:t>Table Name</a:t>
+                      </a:r>
+                    </a:p>
+                    <a:p>
+                      <a:r>
+                        <a:rPr lang="en-US" dirty="0"/>
+                        <a:t>(immediate archive)</a:t>
+                      </a:r>
+                    </a:p>
+                  </a:txBody>
+                  <a:tcPr/>
+                </a:tc>
+                <a:tc>
+                  <a:txBody>
+                    <a:bodyPr/>
+                    <a:lstStyle/>
+                    <a:p>
+                      <a:r>
+                        <a:rPr lang="en-US" dirty="0"/>
+                        <a:t>Row Count</a:t>
+                      </a:r>
+                    </a:p>
+                  </a:txBody>
+                  <a:tcPr/>
+                </a:tc>
+                <a:tc>
+                  <a:txBody>
+                    <a:bodyPr/>
+                    <a:lstStyle/>
+                    <a:p>
+                      <a:r>
+                        <a:rPr lang="en-US" dirty="0"/>
+                        <a:t>After </a:t>
+                      </a:r>
+                    </a:p>
+                    <a:p>
+                      <a:r>
+                        <a:rPr lang="en-US" dirty="0"/>
+                        <a:t>Moving data</a:t>
+                      </a:r>
+                    </a:p>
+                  </a:txBody>
+                  <a:tcPr/>
+                </a:tc>
+                <a:tc>
+                  <a:txBody>
+                    <a:bodyPr/>
+                    <a:lstStyle/>
+                    <a:p>
+                      <a:r>
+                        <a:rPr lang="en-US" dirty="0"/>
+                        <a:t>Propose </a:t>
+                      </a:r>
+                    </a:p>
+                    <a:p>
+                      <a:r>
+                        <a:rPr lang="en-US" dirty="0"/>
+                        <a:t>Retention</a:t>
+                      </a:r>
+                    </a:p>
+                    <a:p>
+                      <a:r>
+                        <a:rPr lang="en-US" dirty="0"/>
+                        <a:t>Period</a:t>
+                      </a:r>
+                    </a:p>
+                  </a:txBody>
+                  <a:tcPr/>
+                </a:tc>
+                <a:tc>
+                  <a:txBody>
+                    <a:bodyPr/>
+                    <a:lstStyle/>
+                    <a:p>
+                      <a:r>
+                        <a:rPr lang="en-US" dirty="0"/>
+                        <a:t>Uses</a:t>
+                      </a:r>
+                    </a:p>
+                  </a:txBody>
+                  <a:tcPr/>
+                </a:tc>
+                <a:extLst>
+                  <a:ext uri="{0D108BD9-81ED-4DB2-BD59-A6C34878D82A}">
+                    <a16:rowId xmlns:a16="http://schemas.microsoft.com/office/drawing/2014/main" val="1621610168"/>
+                  </a:ext>
+                </a:extLst>
+              </a:tr>
+              <a:tr h="370840">
+                <a:tc>
+                  <a:txBody>
+                    <a:bodyPr/>
+                    <a:lstStyle/>
+                    <a:p>
+                      <a:endParaRPr lang="en-US" dirty="0"/>
+                    </a:p>
+                  </a:txBody>
+                  <a:tcPr>
+                    <a:solidFill>
+                      <a:schemeClr val="accent6">
+                        <a:lumMod val="60000"/>
+                        <a:lumOff val="40000"/>
+                      </a:schemeClr>
+                    </a:solidFill>
+                  </a:tcPr>
+                </a:tc>
+                <a:tc>
+                  <a:txBody>
+                    <a:bodyPr/>
+                    <a:lstStyle/>
+                    <a:p>
+                      <a:pPr marL="0" marR="0">
+                        <a:lnSpc>
+                          <a:spcPct val="150000"/>
+                        </a:lnSpc>
+                        <a:buNone/>
+                      </a:pPr>
+                      <a:r>
+                        <a:rPr lang="en-US" sz="1600" b="1" kern="100" dirty="0" err="1">
+                          <a:solidFill>
+                            <a:schemeClr val="bg1"/>
+                          </a:solidFill>
+                          <a:effectLst/>
+                        </a:rPr>
+                        <a:t>print_summary</a:t>
+                      </a:r>
+                      <a:endParaRPr lang="en-US" sz="1600" b="1" kern="100" dirty="0">
+                        <a:solidFill>
+                          <a:schemeClr val="bg1"/>
+                        </a:solidFill>
+                        <a:effectLst/>
+                        <a:latin typeface="Times New Roman" panose="02020603050405020304" pitchFamily="18" charset="0"/>
+                        <a:ea typeface="Times New Roman" panose="02020603050405020304" pitchFamily="18" charset="0"/>
+                        <a:cs typeface="Times New Roman" panose="02020603050405020304" pitchFamily="18" charset="0"/>
+                      </a:endParaRPr>
+                    </a:p>
+                  </a:txBody>
+                  <a:tcPr marL="68580" marR="68580" marT="0" marB="0" anchor="ctr">
+                    <a:solidFill>
+                      <a:schemeClr val="accent6">
+                        <a:lumMod val="60000"/>
+                        <a:lumOff val="40000"/>
+                      </a:schemeClr>
+                    </a:solidFill>
+                  </a:tcPr>
+                </a:tc>
+                <a:tc>
+                  <a:txBody>
+                    <a:bodyPr/>
+                    <a:lstStyle/>
+                    <a:p>
+                      <a:pPr marL="0" marR="0" algn="r">
+                        <a:lnSpc>
+                          <a:spcPct val="150000"/>
+                        </a:lnSpc>
+                        <a:buNone/>
+                      </a:pPr>
+                      <a:r>
+                        <a:rPr lang="en-US" sz="1800" b="1" kern="100" dirty="0">
+                          <a:effectLst/>
+                        </a:rPr>
+                        <a:t>2,246,923</a:t>
+                      </a:r>
+                      <a:endParaRPr lang="en-US" sz="1800" b="1" kern="100" dirty="0">
+                        <a:effectLst/>
+                        <a:latin typeface="Times New Roman" panose="02020603050405020304" pitchFamily="18" charset="0"/>
+                        <a:ea typeface="Times New Roman" panose="02020603050405020304" pitchFamily="18" charset="0"/>
+                        <a:cs typeface="Times New Roman" panose="02020603050405020304" pitchFamily="18" charset="0"/>
+                      </a:endParaRPr>
+                    </a:p>
+                  </a:txBody>
+                  <a:tcPr marL="68580" marR="68580" marT="0" marB="0" anchor="ctr"/>
+                </a:tc>
+                <a:tc>
+                  <a:txBody>
+                    <a:bodyPr/>
+                    <a:lstStyle/>
+                    <a:p>
+                      <a:pPr marL="0" marR="0" lvl="0" indent="0" algn="l" defTabSz="914400" rtl="0" eaLnBrk="1" fontAlgn="auto" latinLnBrk="0" hangingPunct="1">
+                        <a:lnSpc>
+                          <a:spcPct val="100000"/>
+                        </a:lnSpc>
+                        <a:spcBef>
+                          <a:spcPts val="0"/>
+                        </a:spcBef>
+                        <a:spcAft>
+                          <a:spcPts val="0"/>
+                        </a:spcAft>
+                        <a:buClrTx/>
+                        <a:buSzTx/>
+                        <a:buFontTx/>
+                        <a:buNone/>
+                        <a:tabLst/>
+                        <a:defRPr/>
+                      </a:pPr>
+                      <a:r>
+                        <a:rPr lang="en-US" dirty="0"/>
+                        <a:t>600 K</a:t>
+                      </a:r>
+                    </a:p>
+                  </a:txBody>
+                  <a:tcPr/>
+                </a:tc>
+                <a:tc>
+                  <a:txBody>
+                    <a:bodyPr/>
+                    <a:lstStyle/>
+                    <a:p>
+                      <a:r>
+                        <a:rPr lang="en-US" dirty="0"/>
+                        <a:t>3 month</a:t>
+                      </a:r>
+                    </a:p>
+                  </a:txBody>
+                  <a:tcPr/>
+                </a:tc>
+                <a:tc>
+                  <a:txBody>
+                    <a:bodyPr/>
+                    <a:lstStyle/>
+                    <a:p>
+                      <a:r>
+                        <a:rPr lang="en-US" dirty="0"/>
+                        <a:t>Shop level sale check</a:t>
+                      </a:r>
+                    </a:p>
+                  </a:txBody>
+                  <a:tcPr/>
+                </a:tc>
+                <a:extLst>
+                  <a:ext uri="{0D108BD9-81ED-4DB2-BD59-A6C34878D82A}">
+                    <a16:rowId xmlns:a16="http://schemas.microsoft.com/office/drawing/2014/main" val="3421293376"/>
+                  </a:ext>
+                </a:extLst>
+              </a:tr>
+              <a:tr h="370840">
+                <a:tc>
+                  <a:txBody>
+                    <a:bodyPr/>
+                    <a:lstStyle/>
+                    <a:p>
+                      <a:endParaRPr lang="en-US" dirty="0"/>
+                    </a:p>
+                  </a:txBody>
+                  <a:tcPr>
+                    <a:solidFill>
+                      <a:schemeClr val="accent6">
+                        <a:lumMod val="60000"/>
+                        <a:lumOff val="40000"/>
+                      </a:schemeClr>
+                    </a:solidFill>
+                  </a:tcPr>
+                </a:tc>
+                <a:tc>
+                  <a:txBody>
+                    <a:bodyPr/>
+                    <a:lstStyle/>
+                    <a:p>
+                      <a:pPr marL="0" marR="0">
+                        <a:lnSpc>
+                          <a:spcPct val="150000"/>
+                        </a:lnSpc>
+                        <a:buNone/>
+                      </a:pPr>
+                      <a:r>
+                        <a:rPr lang="en-US" sz="1600" b="1" kern="100" dirty="0" err="1">
+                          <a:solidFill>
+                            <a:schemeClr val="bg1"/>
+                          </a:solidFill>
+                          <a:effectLst/>
+                        </a:rPr>
+                        <a:t>yps_integration</a:t>
+                      </a:r>
+                      <a:endParaRPr lang="en-US" sz="1600" b="1" kern="100" dirty="0">
+                        <a:solidFill>
+                          <a:schemeClr val="bg1"/>
+                        </a:solidFill>
+                        <a:effectLst/>
+                        <a:latin typeface="Times New Roman" panose="02020603050405020304" pitchFamily="18" charset="0"/>
+                        <a:ea typeface="Times New Roman" panose="02020603050405020304" pitchFamily="18" charset="0"/>
+                        <a:cs typeface="Times New Roman" panose="02020603050405020304" pitchFamily="18" charset="0"/>
+                      </a:endParaRPr>
+                    </a:p>
+                  </a:txBody>
+                  <a:tcPr marL="68580" marR="68580" marT="0" marB="0" anchor="ctr">
+                    <a:solidFill>
+                      <a:schemeClr val="bg1">
+                        <a:lumMod val="65000"/>
+                      </a:schemeClr>
+                    </a:solidFill>
+                  </a:tcPr>
+                </a:tc>
+                <a:tc>
+                  <a:txBody>
+                    <a:bodyPr/>
+                    <a:lstStyle/>
+                    <a:p>
+                      <a:pPr marL="0" marR="0" algn="r">
+                        <a:lnSpc>
+                          <a:spcPct val="150000"/>
+                        </a:lnSpc>
+                        <a:buNone/>
+                      </a:pPr>
+                      <a:r>
+                        <a:rPr lang="en-US" sz="1800" b="1" kern="100" dirty="0">
+                          <a:effectLst/>
+                        </a:rPr>
+                        <a:t>51,677</a:t>
+                      </a:r>
+                      <a:endParaRPr lang="en-US" sz="1800" b="1" kern="100" dirty="0">
+                        <a:effectLst/>
+                        <a:latin typeface="Times New Roman" panose="02020603050405020304" pitchFamily="18" charset="0"/>
+                        <a:ea typeface="Times New Roman" panose="02020603050405020304" pitchFamily="18" charset="0"/>
+                        <a:cs typeface="Times New Roman" panose="02020603050405020304" pitchFamily="18" charset="0"/>
+                      </a:endParaRPr>
+                    </a:p>
+                  </a:txBody>
+                  <a:tcPr marL="68580" marR="68580" marT="0" marB="0" anchor="ctr"/>
+                </a:tc>
+                <a:tc>
+                  <a:txBody>
+                    <a:bodyPr/>
+                    <a:lstStyle/>
+                    <a:p>
+                      <a:endParaRPr lang="en-US" dirty="0"/>
+                    </a:p>
+                  </a:txBody>
+                  <a:tcPr/>
+                </a:tc>
+                <a:tc>
+                  <a:txBody>
+                    <a:bodyPr/>
+                    <a:lstStyle/>
+                    <a:p>
+                      <a:pPr marL="0" marR="0" lvl="0" indent="0" algn="l" defTabSz="914400" rtl="0" eaLnBrk="1" fontAlgn="auto" latinLnBrk="0" hangingPunct="1">
+                        <a:lnSpc>
+                          <a:spcPct val="100000"/>
+                        </a:lnSpc>
+                        <a:spcBef>
+                          <a:spcPts val="0"/>
+                        </a:spcBef>
+                        <a:spcAft>
+                          <a:spcPts val="0"/>
+                        </a:spcAft>
+                        <a:buClrTx/>
+                        <a:buSzTx/>
+                        <a:buFontTx/>
+                        <a:buNone/>
+                        <a:tabLst/>
+                        <a:defRPr/>
+                      </a:pPr>
+                      <a:r>
+                        <a:rPr lang="en-US" dirty="0"/>
+                        <a:t>3 month</a:t>
+                      </a:r>
+                    </a:p>
+                  </a:txBody>
+                  <a:tcPr/>
+                </a:tc>
+                <a:tc>
+                  <a:txBody>
+                    <a:bodyPr/>
+                    <a:lstStyle/>
+                    <a:p>
+                      <a:r>
+                        <a:rPr lang="en-US" dirty="0"/>
+                        <a:t>YPS Entry</a:t>
+                      </a:r>
+                    </a:p>
+                  </a:txBody>
+                  <a:tcPr/>
+                </a:tc>
+                <a:extLst>
+                  <a:ext uri="{0D108BD9-81ED-4DB2-BD59-A6C34878D82A}">
+                    <a16:rowId xmlns:a16="http://schemas.microsoft.com/office/drawing/2014/main" val="1130528783"/>
+                  </a:ext>
+                </a:extLst>
+              </a:tr>
+              <a:tr h="370840">
+                <a:tc>
+                  <a:txBody>
+                    <a:bodyPr/>
+                    <a:lstStyle/>
+                    <a:p>
+                      <a:endParaRPr lang="en-US" dirty="0"/>
+                    </a:p>
+                  </a:txBody>
+                  <a:tcPr>
+                    <a:solidFill>
+                      <a:schemeClr val="accent6">
+                        <a:lumMod val="60000"/>
+                        <a:lumOff val="40000"/>
+                      </a:schemeClr>
+                    </a:solidFill>
+                  </a:tcPr>
+                </a:tc>
+                <a:tc>
+                  <a:txBody>
+                    <a:bodyPr/>
+                    <a:lstStyle/>
+                    <a:p>
+                      <a:pPr marL="0" marR="0">
+                        <a:lnSpc>
+                          <a:spcPct val="150000"/>
+                        </a:lnSpc>
+                        <a:buNone/>
+                      </a:pPr>
+                      <a:r>
+                        <a:rPr lang="en-US" sz="1600" b="1" kern="100" dirty="0" err="1">
+                          <a:solidFill>
+                            <a:schemeClr val="bg1"/>
+                          </a:solidFill>
+                          <a:effectLst/>
+                        </a:rPr>
+                        <a:t>integration_history</a:t>
+                      </a:r>
+                      <a:endParaRPr lang="en-US" sz="1600" b="1" kern="100" dirty="0">
+                        <a:solidFill>
+                          <a:schemeClr val="bg1"/>
+                        </a:solidFill>
+                        <a:effectLst/>
+                        <a:latin typeface="Times New Roman" panose="02020603050405020304" pitchFamily="18" charset="0"/>
+                        <a:ea typeface="Times New Roman" panose="02020603050405020304" pitchFamily="18" charset="0"/>
+                        <a:cs typeface="Times New Roman" panose="02020603050405020304" pitchFamily="18" charset="0"/>
+                      </a:endParaRPr>
+                    </a:p>
+                  </a:txBody>
+                  <a:tcPr marL="68580" marR="68580" marT="0" marB="0" anchor="ctr">
+                    <a:solidFill>
+                      <a:srgbClr val="FF0000"/>
+                    </a:solidFill>
+                  </a:tcPr>
+                </a:tc>
+                <a:tc>
+                  <a:txBody>
+                    <a:bodyPr/>
+                    <a:lstStyle/>
+                    <a:p>
+                      <a:pPr marL="0" marR="0" algn="r">
+                        <a:lnSpc>
+                          <a:spcPct val="150000"/>
+                        </a:lnSpc>
+                        <a:buNone/>
+                      </a:pPr>
+                      <a:r>
+                        <a:rPr lang="en-US" sz="1800" b="1" kern="100" dirty="0">
+                          <a:effectLst/>
+                        </a:rPr>
+                        <a:t>6,887,279</a:t>
+                      </a:r>
+                      <a:endParaRPr lang="en-US" sz="1800" b="1" kern="100" dirty="0">
+                        <a:effectLst/>
+                        <a:latin typeface="Times New Roman" panose="02020603050405020304" pitchFamily="18" charset="0"/>
+                        <a:ea typeface="Times New Roman" panose="02020603050405020304" pitchFamily="18" charset="0"/>
+                        <a:cs typeface="Times New Roman" panose="02020603050405020304" pitchFamily="18" charset="0"/>
+                      </a:endParaRPr>
+                    </a:p>
+                  </a:txBody>
+                  <a:tcPr marL="68580" marR="68580" marT="0" marB="0" anchor="ctr"/>
+                </a:tc>
+                <a:tc>
+                  <a:txBody>
+                    <a:bodyPr/>
+                    <a:lstStyle/>
+                    <a:p>
+                      <a:pPr marL="0" marR="0" lvl="0" indent="0" algn="l" defTabSz="914400" rtl="0" eaLnBrk="1" fontAlgn="auto" latinLnBrk="0" hangingPunct="1">
+                        <a:lnSpc>
+                          <a:spcPct val="100000"/>
+                        </a:lnSpc>
+                        <a:spcBef>
+                          <a:spcPts val="0"/>
+                        </a:spcBef>
+                        <a:spcAft>
+                          <a:spcPts val="0"/>
+                        </a:spcAft>
+                        <a:buClrTx/>
+                        <a:buSzTx/>
+                        <a:buFontTx/>
+                        <a:buNone/>
+                        <a:tabLst/>
+                        <a:defRPr/>
+                      </a:pPr>
+                      <a:r>
+                        <a:rPr lang="en-US" dirty="0"/>
+                        <a:t>600 K </a:t>
+                      </a:r>
+                    </a:p>
+                  </a:txBody>
+                  <a:tcPr/>
+                </a:tc>
+                <a:tc>
+                  <a:txBody>
+                    <a:bodyPr/>
+                    <a:lstStyle/>
+                    <a:p>
+                      <a:r>
+                        <a:rPr lang="en-US" dirty="0"/>
+                        <a:t>3 month</a:t>
+                      </a:r>
+                    </a:p>
+                  </a:txBody>
+                  <a:tcPr/>
+                </a:tc>
+                <a:tc>
+                  <a:txBody>
+                    <a:bodyPr/>
+                    <a:lstStyle/>
+                    <a:p>
+                      <a:r>
+                        <a:rPr lang="en-US" dirty="0"/>
+                        <a:t>G&amp;G </a:t>
+                      </a:r>
+                      <a:r>
+                        <a:rPr lang="en-US" dirty="0" err="1"/>
+                        <a:t>Eservice</a:t>
+                      </a:r>
+                      <a:r>
+                        <a:rPr lang="en-US" dirty="0"/>
+                        <a:t> Entry</a:t>
+                      </a:r>
+                    </a:p>
+                  </a:txBody>
+                  <a:tcPr/>
+                </a:tc>
+                <a:extLst>
+                  <a:ext uri="{0D108BD9-81ED-4DB2-BD59-A6C34878D82A}">
+                    <a16:rowId xmlns:a16="http://schemas.microsoft.com/office/drawing/2014/main" val="702431370"/>
+                  </a:ext>
+                </a:extLst>
+              </a:tr>
+              <a:tr h="370840">
+                <a:tc>
+                  <a:txBody>
+                    <a:bodyPr/>
+                    <a:lstStyle/>
+                    <a:p>
+                      <a:endParaRPr lang="en-US" dirty="0"/>
+                    </a:p>
+                  </a:txBody>
+                  <a:tcPr>
+                    <a:solidFill>
+                      <a:schemeClr val="accent6">
+                        <a:lumMod val="60000"/>
+                        <a:lumOff val="40000"/>
+                      </a:schemeClr>
+                    </a:solidFill>
+                  </a:tcPr>
+                </a:tc>
+                <a:tc>
+                  <a:txBody>
+                    <a:bodyPr/>
+                    <a:lstStyle/>
+                    <a:p>
+                      <a:pPr marL="0" marR="0">
+                        <a:lnSpc>
+                          <a:spcPct val="150000"/>
+                        </a:lnSpc>
+                        <a:buNone/>
+                      </a:pPr>
+                      <a:r>
+                        <a:rPr lang="en-US" sz="1600" b="1" kern="100" dirty="0" err="1">
+                          <a:solidFill>
+                            <a:schemeClr val="bg1"/>
+                          </a:solidFill>
+                          <a:effectLst/>
+                        </a:rPr>
+                        <a:t>re_print</a:t>
+                      </a:r>
+                      <a:endParaRPr lang="en-US" sz="1600" b="1" kern="100" dirty="0">
+                        <a:solidFill>
+                          <a:schemeClr val="bg1"/>
+                        </a:solidFill>
+                        <a:effectLst/>
+                        <a:latin typeface="Times New Roman" panose="02020603050405020304" pitchFamily="18" charset="0"/>
+                        <a:ea typeface="Times New Roman" panose="02020603050405020304" pitchFamily="18" charset="0"/>
+                        <a:cs typeface="Times New Roman" panose="02020603050405020304" pitchFamily="18" charset="0"/>
+                      </a:endParaRPr>
+                    </a:p>
+                  </a:txBody>
+                  <a:tcPr marL="68580" marR="68580" marT="0" marB="0" anchor="ctr">
+                    <a:solidFill>
+                      <a:srgbClr val="FF0000"/>
+                    </a:solidFill>
+                  </a:tcPr>
+                </a:tc>
+                <a:tc>
+                  <a:txBody>
+                    <a:bodyPr/>
+                    <a:lstStyle/>
+                    <a:p>
+                      <a:pPr marL="0" marR="0" algn="r">
+                        <a:lnSpc>
+                          <a:spcPct val="150000"/>
+                        </a:lnSpc>
+                        <a:buNone/>
+                      </a:pPr>
+                      <a:r>
+                        <a:rPr lang="en-US" sz="1800" b="1" kern="100" dirty="0">
+                          <a:effectLst/>
+                        </a:rPr>
+                        <a:t>6,655,344</a:t>
+                      </a:r>
+                      <a:endParaRPr lang="en-US" sz="1800" b="1" kern="100" dirty="0">
+                        <a:effectLst/>
+                        <a:latin typeface="Times New Roman" panose="02020603050405020304" pitchFamily="18" charset="0"/>
+                        <a:ea typeface="Times New Roman" panose="02020603050405020304" pitchFamily="18" charset="0"/>
+                        <a:cs typeface="Times New Roman" panose="02020603050405020304" pitchFamily="18" charset="0"/>
+                      </a:endParaRPr>
+                    </a:p>
+                  </a:txBody>
+                  <a:tcPr marL="68580" marR="68580" marT="0" marB="0" anchor="ctr"/>
+                </a:tc>
+                <a:tc>
+                  <a:txBody>
+                    <a:bodyPr/>
+                    <a:lstStyle/>
+                    <a:p>
+                      <a:pPr marL="0" marR="0" lvl="0" indent="0" algn="l" defTabSz="914400" rtl="0" eaLnBrk="1" fontAlgn="auto" latinLnBrk="0" hangingPunct="1">
+                        <a:lnSpc>
+                          <a:spcPct val="100000"/>
+                        </a:lnSpc>
+                        <a:spcBef>
+                          <a:spcPts val="0"/>
+                        </a:spcBef>
+                        <a:spcAft>
+                          <a:spcPts val="0"/>
+                        </a:spcAft>
+                        <a:buClrTx/>
+                        <a:buSzTx/>
+                        <a:buFontTx/>
+                        <a:buNone/>
+                        <a:tabLst/>
+                        <a:defRPr/>
+                      </a:pPr>
+                      <a:r>
+                        <a:rPr lang="en-US" dirty="0"/>
+                        <a:t>100 K</a:t>
+                      </a:r>
+                    </a:p>
+                  </a:txBody>
+                  <a:tcPr/>
+                </a:tc>
+                <a:tc>
+                  <a:txBody>
+                    <a:bodyPr/>
+                    <a:lstStyle/>
+                    <a:p>
+                      <a:r>
+                        <a:rPr lang="en-US" dirty="0"/>
+                        <a:t>1 month</a:t>
+                      </a:r>
+                    </a:p>
+                  </a:txBody>
+                  <a:tcPr/>
+                </a:tc>
+                <a:tc>
+                  <a:txBody>
+                    <a:bodyPr/>
+                    <a:lstStyle/>
+                    <a:p>
+                      <a:r>
+                        <a:rPr lang="en-US" dirty="0"/>
+                        <a:t>Print</a:t>
+                      </a:r>
+                    </a:p>
+                  </a:txBody>
+                  <a:tcPr/>
+                </a:tc>
+                <a:extLst>
+                  <a:ext uri="{0D108BD9-81ED-4DB2-BD59-A6C34878D82A}">
+                    <a16:rowId xmlns:a16="http://schemas.microsoft.com/office/drawing/2014/main" val="1002451943"/>
+                  </a:ext>
+                </a:extLst>
+              </a:tr>
+              <a:tr h="360689">
+                <a:tc>
+                  <a:txBody>
+                    <a:bodyPr/>
+                    <a:lstStyle/>
+                    <a:p>
+                      <a:endParaRPr lang="en-US" dirty="0"/>
+                    </a:p>
+                  </a:txBody>
+                  <a:tcPr>
+                    <a:solidFill>
+                      <a:schemeClr val="accent6">
+                        <a:lumMod val="60000"/>
+                        <a:lumOff val="40000"/>
+                      </a:schemeClr>
+                    </a:solidFill>
+                  </a:tcPr>
+                </a:tc>
+                <a:tc>
+                  <a:txBody>
+                    <a:bodyPr/>
+                    <a:lstStyle/>
+                    <a:p>
+                      <a:pPr marL="0" marR="0">
+                        <a:lnSpc>
+                          <a:spcPct val="150000"/>
+                        </a:lnSpc>
+                        <a:buNone/>
+                      </a:pPr>
+                      <a:r>
+                        <a:rPr lang="en-US" sz="1600" b="1" kern="100" dirty="0" err="1">
+                          <a:solidFill>
+                            <a:schemeClr val="bg1"/>
+                          </a:solidFill>
+                          <a:effectLst/>
+                        </a:rPr>
+                        <a:t>prefunding_log</a:t>
+                      </a:r>
+                      <a:endParaRPr lang="en-US" sz="1600" b="1" kern="100" dirty="0">
+                        <a:solidFill>
+                          <a:schemeClr val="bg1"/>
+                        </a:solidFill>
+                        <a:effectLst/>
+                        <a:latin typeface="Times New Roman" panose="02020603050405020304" pitchFamily="18" charset="0"/>
+                        <a:ea typeface="Times New Roman" panose="02020603050405020304" pitchFamily="18" charset="0"/>
+                        <a:cs typeface="Times New Roman" panose="02020603050405020304" pitchFamily="18" charset="0"/>
+                      </a:endParaRPr>
+                    </a:p>
+                  </a:txBody>
+                  <a:tcPr marL="68580" marR="68580" marT="0" marB="0" anchor="ctr">
+                    <a:solidFill>
+                      <a:srgbClr val="FF0000"/>
+                    </a:solidFill>
+                  </a:tcPr>
+                </a:tc>
+                <a:tc>
+                  <a:txBody>
+                    <a:bodyPr/>
+                    <a:lstStyle/>
+                    <a:p>
+                      <a:pPr marL="0" marR="0" algn="r">
+                        <a:lnSpc>
+                          <a:spcPct val="150000"/>
+                        </a:lnSpc>
+                        <a:buNone/>
+                      </a:pPr>
+                      <a:r>
+                        <a:rPr lang="en-US" sz="1800" b="1" kern="100" dirty="0">
+                          <a:effectLst/>
+                        </a:rPr>
+                        <a:t>1,649,836</a:t>
+                      </a:r>
+                      <a:endParaRPr lang="en-US" sz="1800" b="1" kern="100" dirty="0">
+                        <a:effectLst/>
+                        <a:latin typeface="Times New Roman" panose="02020603050405020304" pitchFamily="18" charset="0"/>
+                        <a:ea typeface="Times New Roman" panose="02020603050405020304" pitchFamily="18" charset="0"/>
+                        <a:cs typeface="Times New Roman" panose="02020603050405020304" pitchFamily="18" charset="0"/>
+                      </a:endParaRPr>
+                    </a:p>
+                  </a:txBody>
+                  <a:tcPr marL="68580" marR="68580" marT="0" marB="0" anchor="ctr"/>
+                </a:tc>
+                <a:tc>
+                  <a:txBody>
+                    <a:bodyPr/>
+                    <a:lstStyle/>
+                    <a:p>
+                      <a:r>
+                        <a:rPr lang="en-US" dirty="0"/>
+                        <a:t>516 K</a:t>
+                      </a:r>
+                    </a:p>
+                  </a:txBody>
+                  <a:tcPr/>
+                </a:tc>
+                <a:tc>
+                  <a:txBody>
+                    <a:bodyPr/>
+                    <a:lstStyle/>
+                    <a:p>
+                      <a:pPr marL="0" marR="0" lvl="0" indent="0" algn="l" defTabSz="914400" rtl="0" eaLnBrk="1" fontAlgn="auto" latinLnBrk="0" hangingPunct="1">
+                        <a:lnSpc>
+                          <a:spcPct val="100000"/>
+                        </a:lnSpc>
+                        <a:spcBef>
+                          <a:spcPts val="0"/>
+                        </a:spcBef>
+                        <a:spcAft>
+                          <a:spcPts val="0"/>
+                        </a:spcAft>
+                        <a:buClrTx/>
+                        <a:buSzTx/>
+                        <a:buFontTx/>
+                        <a:buNone/>
+                        <a:tabLst/>
+                        <a:defRPr/>
+                      </a:pPr>
+                      <a:r>
+                        <a:rPr lang="en-US" dirty="0"/>
+                        <a:t>3 month</a:t>
+                      </a:r>
+                    </a:p>
+                  </a:txBody>
+                  <a:tcPr/>
+                </a:tc>
+                <a:tc>
+                  <a:txBody>
+                    <a:bodyPr/>
+                    <a:lstStyle/>
+                    <a:p>
+                      <a:r>
+                        <a:rPr lang="en-US" dirty="0"/>
+                        <a:t>prefunding</a:t>
+                      </a:r>
+                    </a:p>
+                  </a:txBody>
+                  <a:tcPr/>
+                </a:tc>
+                <a:extLst>
+                  <a:ext uri="{0D108BD9-81ED-4DB2-BD59-A6C34878D82A}">
+                    <a16:rowId xmlns:a16="http://schemas.microsoft.com/office/drawing/2014/main" val="2473324404"/>
+                  </a:ext>
+                </a:extLst>
+              </a:tr>
+              <a:tr h="370840">
+                <a:tc>
+                  <a:txBody>
+                    <a:bodyPr/>
+                    <a:lstStyle/>
+                    <a:p>
+                      <a:endParaRPr lang="en-US" dirty="0"/>
+                    </a:p>
+                  </a:txBody>
+                  <a:tcPr>
+                    <a:solidFill>
+                      <a:schemeClr val="accent6">
+                        <a:lumMod val="60000"/>
+                        <a:lumOff val="40000"/>
+                      </a:schemeClr>
+                    </a:solidFill>
+                  </a:tcPr>
+                </a:tc>
+                <a:tc>
+                  <a:txBody>
+                    <a:bodyPr/>
+                    <a:lstStyle/>
+                    <a:p>
+                      <a:pPr marL="0" marR="0">
+                        <a:lnSpc>
+                          <a:spcPct val="150000"/>
+                        </a:lnSpc>
+                        <a:buNone/>
+                      </a:pPr>
+                      <a:r>
+                        <a:rPr lang="en-US" sz="1600" b="1" kern="100" dirty="0" err="1">
+                          <a:solidFill>
+                            <a:schemeClr val="bg1"/>
+                          </a:solidFill>
+                          <a:effectLst/>
+                        </a:rPr>
+                        <a:t>work_shift_action</a:t>
+                      </a:r>
+                      <a:endParaRPr lang="en-US" sz="1600" b="1" kern="100" dirty="0">
+                        <a:solidFill>
+                          <a:schemeClr val="bg1"/>
+                        </a:solidFill>
+                        <a:effectLst/>
+                        <a:latin typeface="Times New Roman" panose="02020603050405020304" pitchFamily="18" charset="0"/>
+                        <a:ea typeface="Times New Roman" panose="02020603050405020304" pitchFamily="18" charset="0"/>
+                        <a:cs typeface="Times New Roman" panose="02020603050405020304" pitchFamily="18" charset="0"/>
+                      </a:endParaRPr>
+                    </a:p>
+                  </a:txBody>
+                  <a:tcPr marL="68580" marR="68580" marT="0" marB="0" anchor="ctr">
+                    <a:solidFill>
+                      <a:schemeClr val="accent6">
+                        <a:lumMod val="60000"/>
+                        <a:lumOff val="40000"/>
+                      </a:schemeClr>
+                    </a:solidFill>
+                  </a:tcPr>
+                </a:tc>
+                <a:tc>
+                  <a:txBody>
+                    <a:bodyPr/>
+                    <a:lstStyle/>
+                    <a:p>
+                      <a:pPr marL="0" marR="0" algn="r">
+                        <a:lnSpc>
+                          <a:spcPct val="150000"/>
+                        </a:lnSpc>
+                        <a:buNone/>
+                      </a:pPr>
+                      <a:r>
+                        <a:rPr lang="en-US" sz="1800" b="1" kern="100" dirty="0">
+                          <a:effectLst/>
+                        </a:rPr>
+                        <a:t>596,665</a:t>
+                      </a:r>
+                      <a:endParaRPr lang="en-US" sz="1800" b="1" kern="100" dirty="0">
+                        <a:effectLst/>
+                        <a:latin typeface="Times New Roman" panose="02020603050405020304" pitchFamily="18" charset="0"/>
+                        <a:ea typeface="Times New Roman" panose="02020603050405020304" pitchFamily="18" charset="0"/>
+                        <a:cs typeface="Times New Roman" panose="02020603050405020304" pitchFamily="18" charset="0"/>
+                      </a:endParaRPr>
+                    </a:p>
+                  </a:txBody>
+                  <a:tcPr marL="68580" marR="68580" marT="0" marB="0" anchor="ctr"/>
+                </a:tc>
+                <a:tc>
+                  <a:txBody>
+                    <a:bodyPr/>
+                    <a:lstStyle/>
+                    <a:p>
+                      <a:pPr marL="0" marR="0" lvl="0" indent="0" algn="l" defTabSz="914400" rtl="0" eaLnBrk="1" fontAlgn="auto" latinLnBrk="0" hangingPunct="1">
+                        <a:lnSpc>
+                          <a:spcPct val="100000"/>
+                        </a:lnSpc>
+                        <a:spcBef>
+                          <a:spcPts val="0"/>
+                        </a:spcBef>
+                        <a:spcAft>
+                          <a:spcPts val="0"/>
+                        </a:spcAft>
+                        <a:buClrTx/>
+                        <a:buSzTx/>
+                        <a:buFontTx/>
+                        <a:buNone/>
+                        <a:tabLst/>
+                        <a:defRPr/>
+                      </a:pPr>
+                      <a:r>
+                        <a:rPr lang="en-US" dirty="0"/>
+                        <a:t>100 K</a:t>
+                      </a:r>
+                    </a:p>
+                  </a:txBody>
+                  <a:tcPr/>
+                </a:tc>
+                <a:tc>
+                  <a:txBody>
+                    <a:bodyPr/>
+                    <a:lstStyle/>
+                    <a:p>
+                      <a:r>
+                        <a:rPr lang="en-US" dirty="0"/>
+                        <a:t>2 month</a:t>
+                      </a:r>
+                    </a:p>
+                  </a:txBody>
+                  <a:tcPr/>
+                </a:tc>
+                <a:tc>
+                  <a:txBody>
+                    <a:bodyPr/>
+                    <a:lstStyle/>
+                    <a:p>
+                      <a:r>
+                        <a:rPr lang="en-US" dirty="0" err="1"/>
+                        <a:t>Workshift</a:t>
+                      </a:r>
+                      <a:r>
+                        <a:rPr lang="en-US" dirty="0"/>
+                        <a:t> info</a:t>
+                      </a:r>
+                    </a:p>
+                  </a:txBody>
+                  <a:tcPr/>
+                </a:tc>
+                <a:extLst>
+                  <a:ext uri="{0D108BD9-81ED-4DB2-BD59-A6C34878D82A}">
+                    <a16:rowId xmlns:a16="http://schemas.microsoft.com/office/drawing/2014/main" val="3270587433"/>
+                  </a:ext>
+                </a:extLst>
+              </a:tr>
+              <a:tr h="370840">
+                <a:tc>
+                  <a:txBody>
+                    <a:bodyPr/>
+                    <a:lstStyle/>
+                    <a:p>
+                      <a:endParaRPr lang="en-US" dirty="0"/>
+                    </a:p>
+                  </a:txBody>
+                  <a:tcPr>
+                    <a:solidFill>
+                      <a:schemeClr val="bg1">
+                        <a:lumMod val="65000"/>
+                      </a:schemeClr>
+                    </a:solidFill>
+                  </a:tcPr>
+                </a:tc>
+                <a:tc>
+                  <a:txBody>
+                    <a:bodyPr/>
+                    <a:lstStyle/>
+                    <a:p>
+                      <a:pPr marL="0" marR="0">
+                        <a:lnSpc>
+                          <a:spcPct val="150000"/>
+                        </a:lnSpc>
+                        <a:buNone/>
+                      </a:pPr>
+                      <a:r>
+                        <a:rPr lang="en-US" sz="1600" b="1" kern="100" dirty="0" err="1">
+                          <a:solidFill>
+                            <a:schemeClr val="bg1"/>
+                          </a:solidFill>
+                          <a:effectLst/>
+                        </a:rPr>
+                        <a:t>trigger_log</a:t>
+                      </a:r>
+                      <a:endParaRPr lang="en-US" sz="1600" b="1" kern="100" dirty="0">
+                        <a:solidFill>
+                          <a:schemeClr val="bg1"/>
+                        </a:solidFill>
+                        <a:effectLst/>
+                        <a:latin typeface="Times New Roman" panose="02020603050405020304" pitchFamily="18" charset="0"/>
+                        <a:ea typeface="Times New Roman" panose="02020603050405020304" pitchFamily="18" charset="0"/>
+                        <a:cs typeface="Times New Roman" panose="02020603050405020304" pitchFamily="18" charset="0"/>
+                      </a:endParaRPr>
+                    </a:p>
+                  </a:txBody>
+                  <a:tcPr marL="68580" marR="68580" marT="0" marB="0" anchor="ctr">
+                    <a:solidFill>
+                      <a:srgbClr val="FF0000"/>
+                    </a:solidFill>
+                  </a:tcPr>
+                </a:tc>
+                <a:tc>
+                  <a:txBody>
+                    <a:bodyPr/>
+                    <a:lstStyle/>
+                    <a:p>
+                      <a:pPr marL="0" marR="0" algn="r">
+                        <a:lnSpc>
+                          <a:spcPct val="150000"/>
+                        </a:lnSpc>
+                        <a:buNone/>
+                      </a:pPr>
+                      <a:r>
+                        <a:rPr lang="en-US" sz="1800" b="1" kern="100" dirty="0">
+                          <a:effectLst/>
+                        </a:rPr>
+                        <a:t>2,647,377</a:t>
+                      </a:r>
+                      <a:endParaRPr lang="en-US" sz="1800" b="1" kern="100" dirty="0">
+                        <a:effectLst/>
+                        <a:latin typeface="Times New Roman" panose="02020603050405020304" pitchFamily="18" charset="0"/>
+                        <a:ea typeface="Times New Roman" panose="02020603050405020304" pitchFamily="18" charset="0"/>
+                        <a:cs typeface="Times New Roman" panose="02020603050405020304" pitchFamily="18" charset="0"/>
+                      </a:endParaRPr>
+                    </a:p>
+                  </a:txBody>
+                  <a:tcPr marL="68580" marR="68580" marT="0" marB="0" anchor="ctr"/>
+                </a:tc>
+                <a:tc>
+                  <a:txBody>
+                    <a:bodyPr/>
+                    <a:lstStyle/>
+                    <a:p>
+                      <a:r>
+                        <a:rPr lang="en-US" dirty="0"/>
+                        <a:t>300 K</a:t>
+                      </a:r>
+                    </a:p>
+                  </a:txBody>
+                  <a:tcPr/>
+                </a:tc>
+                <a:tc>
+                  <a:txBody>
+                    <a:bodyPr/>
+                    <a:lstStyle/>
+                    <a:p>
+                      <a:pPr marL="0" marR="0" lvl="0" indent="0" algn="l" defTabSz="914400" rtl="0" eaLnBrk="1" fontAlgn="auto" latinLnBrk="0" hangingPunct="1">
+                        <a:lnSpc>
+                          <a:spcPct val="100000"/>
+                        </a:lnSpc>
+                        <a:spcBef>
+                          <a:spcPts val="0"/>
+                        </a:spcBef>
+                        <a:spcAft>
+                          <a:spcPts val="0"/>
+                        </a:spcAft>
+                        <a:buClrTx/>
+                        <a:buSzTx/>
+                        <a:buFontTx/>
+                        <a:buNone/>
+                        <a:tabLst/>
+                        <a:defRPr/>
+                      </a:pPr>
+                      <a:r>
+                        <a:rPr lang="en-US" dirty="0"/>
+                        <a:t>2 month</a:t>
+                      </a:r>
+                    </a:p>
+                  </a:txBody>
+                  <a:tcPr/>
+                </a:tc>
+                <a:tc>
+                  <a:txBody>
+                    <a:bodyPr/>
+                    <a:lstStyle/>
+                    <a:p>
+                      <a:endParaRPr lang="en-US" dirty="0"/>
+                    </a:p>
+                  </a:txBody>
+                  <a:tcPr/>
+                </a:tc>
+                <a:extLst>
+                  <a:ext uri="{0D108BD9-81ED-4DB2-BD59-A6C34878D82A}">
+                    <a16:rowId xmlns:a16="http://schemas.microsoft.com/office/drawing/2014/main" val="54685047"/>
+                  </a:ext>
+                </a:extLst>
+              </a:tr>
+            </a:tbl>
+          </a:graphicData>
+        </a:graphic>
+      </p:graphicFrame>
+      <p:sp>
+        <p:nvSpPr>
+          <p:cNvPr id="4" name="Rectangle 3">
+            <a:extLst>
+              <a:ext uri="{FF2B5EF4-FFF2-40B4-BE49-F238E27FC236}">
+                <a16:creationId xmlns:a16="http://schemas.microsoft.com/office/drawing/2014/main" id="{A5B2CA30-80C3-C9EF-CE1D-F8652FCE7F6B}"/>
+              </a:ext>
+            </a:extLst>
+          </p:cNvPr>
+          <p:cNvSpPr/>
+          <p:nvPr/>
+        </p:nvSpPr>
+        <p:spPr>
+          <a:xfrm>
+            <a:off x="850392" y="6428232"/>
+            <a:ext cx="228600" cy="258034"/>
+          </a:xfrm>
+          <a:prstGeom prst="rect">
+            <a:avLst/>
+          </a:prstGeom>
+          <a:solidFill>
+            <a:srgbClr val="FF0000"/>
+          </a:solidFill>
+        </p:spPr>
+        <p:style>
+          <a:lnRef idx="2">
+            <a:schemeClr val="accent1">
+              <a:shade val="15000"/>
+            </a:schemeClr>
+          </a:lnRef>
+          <a:fillRef idx="1">
+            <a:schemeClr val="accent1"/>
+          </a:fillRef>
+          <a:effectRef idx="0">
+            <a:schemeClr val="accent1"/>
+          </a:effectRef>
+          <a:fontRef idx="minor">
+            <a:schemeClr val="lt1"/>
+          </a:fontRef>
+        </p:style>
+        <p:txBody>
+          <a:bodyPr rtlCol="0" anchor="ctr"/>
+          <a:lstStyle/>
+          <a:p>
+            <a:pPr algn="ctr"/>
+            <a:endParaRPr lang="en-US" dirty="0"/>
+          </a:p>
+        </p:txBody>
+      </p:sp>
+      <p:sp>
+        <p:nvSpPr>
+          <p:cNvPr id="5" name="TextBox 4">
+            <a:extLst>
+              <a:ext uri="{FF2B5EF4-FFF2-40B4-BE49-F238E27FC236}">
+                <a16:creationId xmlns:a16="http://schemas.microsoft.com/office/drawing/2014/main" id="{5C5F1AE5-98B6-2DC3-9EAF-DD7765C57374}"/>
+              </a:ext>
+            </a:extLst>
+          </p:cNvPr>
+          <p:cNvSpPr txBox="1"/>
+          <p:nvPr/>
+        </p:nvSpPr>
+        <p:spPr>
+          <a:xfrm>
+            <a:off x="1170432" y="6428232"/>
+            <a:ext cx="1463040" cy="369332"/>
+          </a:xfrm>
+          <a:prstGeom prst="rect">
+            <a:avLst/>
+          </a:prstGeom>
+          <a:noFill/>
+        </p:spPr>
+        <p:txBody>
+          <a:bodyPr wrap="square" rtlCol="0">
+            <a:spAutoFit/>
+          </a:bodyPr>
+          <a:lstStyle/>
+          <a:p>
+            <a:r>
+              <a:rPr lang="en-US" dirty="0"/>
+              <a:t>High</a:t>
+            </a:r>
+          </a:p>
+        </p:txBody>
+      </p:sp>
+      <p:sp>
+        <p:nvSpPr>
+          <p:cNvPr id="6" name="Rectangle 5">
+            <a:extLst>
+              <a:ext uri="{FF2B5EF4-FFF2-40B4-BE49-F238E27FC236}">
+                <a16:creationId xmlns:a16="http://schemas.microsoft.com/office/drawing/2014/main" id="{4580ACA6-9357-58BE-A872-0B9E8248088D}"/>
+              </a:ext>
+            </a:extLst>
+          </p:cNvPr>
+          <p:cNvSpPr/>
+          <p:nvPr/>
+        </p:nvSpPr>
+        <p:spPr>
+          <a:xfrm>
+            <a:off x="1901952" y="6465443"/>
+            <a:ext cx="228600" cy="258034"/>
+          </a:xfrm>
+          <a:prstGeom prst="rect">
+            <a:avLst/>
+          </a:prstGeom>
+          <a:solidFill>
+            <a:schemeClr val="accent6">
+              <a:lumMod val="60000"/>
+              <a:lumOff val="40000"/>
+            </a:schemeClr>
+          </a:solidFill>
+        </p:spPr>
+        <p:style>
+          <a:lnRef idx="2">
+            <a:schemeClr val="accent1">
+              <a:shade val="15000"/>
+            </a:schemeClr>
+          </a:lnRef>
+          <a:fillRef idx="1">
+            <a:schemeClr val="accent1"/>
+          </a:fillRef>
+          <a:effectRef idx="0">
+            <a:schemeClr val="accent1"/>
+          </a:effectRef>
+          <a:fontRef idx="minor">
+            <a:schemeClr val="lt1"/>
+          </a:fontRef>
+        </p:style>
+        <p:txBody>
+          <a:bodyPr rtlCol="0" anchor="ctr"/>
+          <a:lstStyle/>
+          <a:p>
+            <a:pPr algn="ctr"/>
+            <a:endParaRPr lang="en-US" dirty="0"/>
+          </a:p>
+        </p:txBody>
+      </p:sp>
+      <p:sp>
+        <p:nvSpPr>
+          <p:cNvPr id="7" name="TextBox 6">
+            <a:extLst>
+              <a:ext uri="{FF2B5EF4-FFF2-40B4-BE49-F238E27FC236}">
+                <a16:creationId xmlns:a16="http://schemas.microsoft.com/office/drawing/2014/main" id="{D56E98CA-0E73-32A1-5C38-394D8C180453}"/>
+              </a:ext>
+            </a:extLst>
+          </p:cNvPr>
+          <p:cNvSpPr txBox="1"/>
+          <p:nvPr/>
+        </p:nvSpPr>
+        <p:spPr>
+          <a:xfrm>
+            <a:off x="2130552" y="6409794"/>
+            <a:ext cx="1463040" cy="369332"/>
+          </a:xfrm>
+          <a:prstGeom prst="rect">
+            <a:avLst/>
+          </a:prstGeom>
+          <a:noFill/>
+        </p:spPr>
+        <p:txBody>
+          <a:bodyPr wrap="square" rtlCol="0">
+            <a:spAutoFit/>
+          </a:bodyPr>
+          <a:lstStyle/>
+          <a:p>
+            <a:r>
+              <a:rPr lang="en-US" dirty="0"/>
+              <a:t>Medium</a:t>
+            </a:r>
+          </a:p>
+        </p:txBody>
+      </p:sp>
+      <p:sp>
+        <p:nvSpPr>
+          <p:cNvPr id="9" name="Rectangle 8">
+            <a:extLst>
+              <a:ext uri="{FF2B5EF4-FFF2-40B4-BE49-F238E27FC236}">
+                <a16:creationId xmlns:a16="http://schemas.microsoft.com/office/drawing/2014/main" id="{F80781A0-8AB2-F3D2-FBC5-D09A395EE78E}"/>
+              </a:ext>
+            </a:extLst>
+          </p:cNvPr>
+          <p:cNvSpPr/>
+          <p:nvPr/>
+        </p:nvSpPr>
+        <p:spPr>
+          <a:xfrm>
+            <a:off x="3250692" y="6463441"/>
+            <a:ext cx="228600" cy="258034"/>
+          </a:xfrm>
+          <a:prstGeom prst="rect">
+            <a:avLst/>
+          </a:prstGeom>
+          <a:solidFill>
+            <a:schemeClr val="bg1">
+              <a:lumMod val="65000"/>
+            </a:schemeClr>
+          </a:solidFill>
+        </p:spPr>
+        <p:style>
+          <a:lnRef idx="2">
+            <a:schemeClr val="accent1">
+              <a:shade val="15000"/>
+            </a:schemeClr>
+          </a:lnRef>
+          <a:fillRef idx="1">
+            <a:schemeClr val="accent1"/>
+          </a:fillRef>
+          <a:effectRef idx="0">
+            <a:schemeClr val="accent1"/>
+          </a:effectRef>
+          <a:fontRef idx="minor">
+            <a:schemeClr val="lt1"/>
+          </a:fontRef>
+        </p:style>
+        <p:txBody>
+          <a:bodyPr rtlCol="0" anchor="ctr"/>
+          <a:lstStyle/>
+          <a:p>
+            <a:pPr algn="ctr"/>
+            <a:endParaRPr lang="en-US" dirty="0"/>
+          </a:p>
+        </p:txBody>
+      </p:sp>
+      <p:sp>
+        <p:nvSpPr>
+          <p:cNvPr id="11" name="TextBox 10">
+            <a:extLst>
+              <a:ext uri="{FF2B5EF4-FFF2-40B4-BE49-F238E27FC236}">
+                <a16:creationId xmlns:a16="http://schemas.microsoft.com/office/drawing/2014/main" id="{F54122DE-E884-C612-2E65-0915D9A16BCD}"/>
+              </a:ext>
+            </a:extLst>
+          </p:cNvPr>
+          <p:cNvSpPr txBox="1"/>
+          <p:nvPr/>
+        </p:nvSpPr>
+        <p:spPr>
+          <a:xfrm>
+            <a:off x="3593592" y="6401651"/>
+            <a:ext cx="1463040" cy="369332"/>
+          </a:xfrm>
+          <a:prstGeom prst="rect">
+            <a:avLst/>
+          </a:prstGeom>
+          <a:noFill/>
+        </p:spPr>
+        <p:txBody>
+          <a:bodyPr wrap="square" rtlCol="0">
+            <a:spAutoFit/>
+          </a:bodyPr>
+          <a:lstStyle/>
+          <a:p>
+            <a:r>
+              <a:rPr lang="en-US" dirty="0"/>
+              <a:t>Low</a:t>
+            </a:r>
+          </a:p>
+        </p:txBody>
+      </p:sp>
+      <p:sp>
+        <p:nvSpPr>
+          <p:cNvPr id="12" name="TextBox 11">
+            <a:extLst>
+              <a:ext uri="{FF2B5EF4-FFF2-40B4-BE49-F238E27FC236}">
+                <a16:creationId xmlns:a16="http://schemas.microsoft.com/office/drawing/2014/main" id="{0C2456D4-120C-617A-5B1B-0E9B7297862A}"/>
+              </a:ext>
+            </a:extLst>
+          </p:cNvPr>
+          <p:cNvSpPr txBox="1"/>
+          <p:nvPr/>
+        </p:nvSpPr>
+        <p:spPr>
+          <a:xfrm>
+            <a:off x="12192" y="4644342"/>
+            <a:ext cx="11755316" cy="1200329"/>
+          </a:xfrm>
+          <a:prstGeom prst="rect">
+            <a:avLst/>
+          </a:prstGeom>
+          <a:noFill/>
+        </p:spPr>
+        <p:txBody>
+          <a:bodyPr wrap="square" rtlCol="0">
+            <a:spAutoFit/>
+          </a:bodyPr>
+          <a:lstStyle/>
+          <a:p>
+            <a:r>
+              <a:rPr lang="en-US" dirty="0"/>
+              <a:t>To optimize performance, large-volume tables such as </a:t>
+            </a:r>
+            <a:r>
+              <a:rPr lang="en-US" b="1" dirty="0" err="1"/>
+              <a:t>Sale_Transaction</a:t>
+            </a:r>
+            <a:r>
+              <a:rPr lang="en-US" b="1" dirty="0"/>
+              <a:t> (~7.3M) </a:t>
+            </a:r>
+            <a:r>
+              <a:rPr lang="en-US" dirty="0"/>
+              <a:t>and </a:t>
+            </a:r>
+            <a:r>
+              <a:rPr lang="en-US" b="1" dirty="0" err="1"/>
+              <a:t>Commission_Transaction</a:t>
+            </a:r>
+            <a:r>
+              <a:rPr lang="en-US" b="1" dirty="0"/>
+              <a:t> (~7.1M)</a:t>
+            </a:r>
+            <a:r>
+              <a:rPr lang="en-US" dirty="0"/>
+              <a:t> will adopt a </a:t>
+            </a:r>
+            <a:r>
+              <a:rPr lang="en-US" b="1" dirty="0"/>
+              <a:t>hot–cold data strategy</a:t>
+            </a:r>
+            <a:r>
+              <a:rPr lang="en-US" dirty="0"/>
+              <a:t>. Active tables will retain only the latest </a:t>
+            </a:r>
+            <a:r>
+              <a:rPr lang="en-US" b="1" dirty="0"/>
+              <a:t>6 months of data</a:t>
+            </a:r>
+            <a:r>
+              <a:rPr lang="en-US" dirty="0"/>
+              <a:t>, while older records will be offloaded to history tables. Historical data will remain accessible through </a:t>
+            </a:r>
+            <a:r>
+              <a:rPr lang="en-US" b="1" dirty="0"/>
+              <a:t>on-demand reporting</a:t>
+            </a:r>
+            <a:r>
+              <a:rPr lang="en-US" dirty="0"/>
+              <a:t>, ensuring no impact to business operations.</a:t>
+            </a:r>
+          </a:p>
+        </p:txBody>
+      </p:sp>
+    </p:spTree>
+    <p:extLst>
+      <p:ext uri="{BB962C8B-B14F-4D97-AF65-F5344CB8AC3E}">
+        <p14:creationId xmlns:p14="http://schemas.microsoft.com/office/powerpoint/2010/main" val="2186184645"/>
+      </p:ext>
+    </p:extLst>
+  </p:cSld>
+  <p:clrMapOvr>
+    <a:masterClrMapping/>
+  </p:clrMapOvr>
+</p:sld>
+</file>
+
+<file path=ppt/slides/slide33.xml><?xml version="1.0" encoding="utf-8"?>
+<p:sld xmlns:a="http://schemas.openxmlformats.org/drawingml/2006/main" xmlns:r="http://schemas.openxmlformats.org/officeDocument/2006/relationships" xmlns:p="http://schemas.openxmlformats.org/presentationml/2006/main">
+  <p:cSld>
+    <p:spTree>
+      <p:nvGrpSpPr>
+        <p:cNvPr id="1" name="">
+          <a:extLst>
+            <a:ext uri="{FF2B5EF4-FFF2-40B4-BE49-F238E27FC236}">
+              <a16:creationId xmlns:a16="http://schemas.microsoft.com/office/drawing/2014/main" id="{072582AA-A1F2-4AE9-6150-444A8F4F6104}"/>
+            </a:ext>
+          </a:extLst>
+        </p:cNvPr>
+        <p:cNvGrpSpPr/>
+        <p:nvPr/>
+      </p:nvGrpSpPr>
+      <p:grpSpPr>
+        <a:xfrm>
+          <a:off x="0" y="0"/>
+          <a:ext cx="0" cy="0"/>
+          <a:chOff x="0" y="0"/>
+          <a:chExt cx="0" cy="0"/>
+        </a:xfrm>
+      </p:grpSpPr>
+      <p:sp>
+        <p:nvSpPr>
+          <p:cNvPr id="2" name="Slide Number Placeholder 1">
+            <a:extLst>
+              <a:ext uri="{FF2B5EF4-FFF2-40B4-BE49-F238E27FC236}">
+                <a16:creationId xmlns:a16="http://schemas.microsoft.com/office/drawing/2014/main" id="{15CDE7CC-7366-EECE-A5BC-B48C424C0381}"/>
+              </a:ext>
+            </a:extLst>
+          </p:cNvPr>
+          <p:cNvSpPr>
+            <a:spLocks noGrp="1"/>
+          </p:cNvSpPr>
+          <p:nvPr>
+            <p:ph type="sldNum" sz="quarter" idx="12"/>
+          </p:nvPr>
+        </p:nvSpPr>
+        <p:spPr/>
+        <p:txBody>
+          <a:bodyPr/>
+          <a:lstStyle/>
+          <a:p>
+            <a:fld id="{93288B1A-0894-4E52-95D8-2AC74CBED725}" type="slidenum">
+              <a:rPr lang="en-US" smtClean="0"/>
+              <a:t>33</a:t>
+            </a:fld>
+            <a:endParaRPr lang="en-US"/>
+          </a:p>
+        </p:txBody>
+      </p:sp>
+      <p:sp>
+        <p:nvSpPr>
+          <p:cNvPr id="3" name="Text Placeholder 2">
+            <a:extLst>
+              <a:ext uri="{FF2B5EF4-FFF2-40B4-BE49-F238E27FC236}">
+                <a16:creationId xmlns:a16="http://schemas.microsoft.com/office/drawing/2014/main" id="{A8500F90-BC35-41F2-C5FE-A697C1B7A064}"/>
+              </a:ext>
+            </a:extLst>
+          </p:cNvPr>
+          <p:cNvSpPr>
+            <a:spLocks noGrp="1"/>
+          </p:cNvSpPr>
+          <p:nvPr>
+            <p:ph type="body" idx="1"/>
+          </p:nvPr>
+        </p:nvSpPr>
+        <p:spPr/>
+        <p:txBody>
+          <a:bodyPr/>
+          <a:lstStyle/>
+          <a:p>
+            <a:r>
+              <a:rPr lang="en-US" dirty="0"/>
+              <a:t>Why Data Management is required</a:t>
+            </a:r>
+          </a:p>
+        </p:txBody>
+      </p:sp>
+      <p:sp>
+        <p:nvSpPr>
+          <p:cNvPr id="10" name="TextBox 9">
+            <a:extLst>
+              <a:ext uri="{FF2B5EF4-FFF2-40B4-BE49-F238E27FC236}">
+                <a16:creationId xmlns:a16="http://schemas.microsoft.com/office/drawing/2014/main" id="{8320E093-B7BC-AC4B-6C62-A12F5E3BB764}"/>
+              </a:ext>
+            </a:extLst>
+          </p:cNvPr>
+          <p:cNvSpPr txBox="1"/>
+          <p:nvPr/>
+        </p:nvSpPr>
+        <p:spPr>
+          <a:xfrm>
+            <a:off x="644032" y="913835"/>
+            <a:ext cx="10412627" cy="3731791"/>
+          </a:xfrm>
+          <a:prstGeom prst="rect">
+            <a:avLst/>
+          </a:prstGeom>
+          <a:noFill/>
+        </p:spPr>
+        <p:txBody>
+          <a:bodyPr wrap="square">
+            <a:spAutoFit/>
+          </a:bodyPr>
+          <a:lstStyle/>
+          <a:p>
+            <a:pPr>
+              <a:lnSpc>
+                <a:spcPct val="150000"/>
+              </a:lnSpc>
+            </a:pPr>
+            <a:r>
+              <a:rPr lang="en-US" b="1" dirty="0">
+                <a:latin typeface="+mj-lt"/>
+              </a:rPr>
+              <a:t>Current Challenges</a:t>
+            </a:r>
+            <a:endParaRPr lang="en-US" dirty="0">
+              <a:latin typeface="+mj-lt"/>
+            </a:endParaRPr>
+          </a:p>
+          <a:p>
+            <a:pPr marL="285750" indent="-285750">
+              <a:lnSpc>
+                <a:spcPct val="150000"/>
+              </a:lnSpc>
+              <a:buFont typeface="Wingdings" panose="05000000000000000000" pitchFamily="2" charset="2"/>
+              <a:buChar char="Ø"/>
+            </a:pPr>
+            <a:r>
+              <a:rPr lang="en-US" dirty="0">
+                <a:latin typeface="+mj-lt"/>
+              </a:rPr>
+              <a:t>Continuous </a:t>
+            </a:r>
+            <a:r>
+              <a:rPr lang="en-US" b="1" dirty="0">
+                <a:latin typeface="+mj-lt"/>
+              </a:rPr>
+              <a:t>data growth </a:t>
+            </a:r>
+            <a:r>
+              <a:rPr lang="en-US" dirty="0">
+                <a:latin typeface="+mj-lt"/>
+              </a:rPr>
+              <a:t>in transactional tables </a:t>
+            </a:r>
+          </a:p>
+          <a:p>
+            <a:pPr marL="285750" indent="-285750">
+              <a:lnSpc>
+                <a:spcPct val="150000"/>
+              </a:lnSpc>
+              <a:buFont typeface="Wingdings" panose="05000000000000000000" pitchFamily="2" charset="2"/>
+              <a:buChar char="Ø"/>
+            </a:pPr>
+            <a:r>
+              <a:rPr lang="en-US" dirty="0">
+                <a:latin typeface="+mj-lt"/>
+              </a:rPr>
+              <a:t>Large tables </a:t>
+            </a:r>
+            <a:r>
+              <a:rPr lang="en-US" b="1" dirty="0">
+                <a:latin typeface="+mj-lt"/>
+              </a:rPr>
+              <a:t>degrade query performance </a:t>
+            </a:r>
+          </a:p>
+          <a:p>
+            <a:pPr marL="285750" indent="-285750">
+              <a:lnSpc>
+                <a:spcPct val="150000"/>
+              </a:lnSpc>
+              <a:buFont typeface="Wingdings" panose="05000000000000000000" pitchFamily="2" charset="2"/>
+              <a:buChar char="Ø"/>
+            </a:pPr>
+            <a:r>
+              <a:rPr lang="en-US" dirty="0">
+                <a:latin typeface="+mj-lt"/>
+              </a:rPr>
+              <a:t>Increased database </a:t>
+            </a:r>
+            <a:r>
+              <a:rPr lang="en-US" b="1" dirty="0">
+                <a:latin typeface="+mj-lt"/>
+              </a:rPr>
+              <a:t>resource consumption </a:t>
+            </a:r>
+          </a:p>
+          <a:p>
+            <a:pPr marL="285750" indent="-285750">
+              <a:lnSpc>
+                <a:spcPct val="150000"/>
+              </a:lnSpc>
+              <a:buFont typeface="Wingdings" panose="05000000000000000000" pitchFamily="2" charset="2"/>
+              <a:buChar char="Ø"/>
+            </a:pPr>
+            <a:r>
+              <a:rPr lang="en-US" dirty="0">
+                <a:latin typeface="+mj-lt"/>
+              </a:rPr>
+              <a:t>Difficult to scale with future expansion (</a:t>
+            </a:r>
+            <a:r>
+              <a:rPr lang="en-US" b="1" dirty="0">
+                <a:latin typeface="+mj-lt"/>
+              </a:rPr>
+              <a:t>500+ stores</a:t>
+            </a:r>
+            <a:r>
+              <a:rPr lang="en-US" dirty="0">
+                <a:latin typeface="+mj-lt"/>
+              </a:rPr>
+              <a:t>) </a:t>
+            </a:r>
+          </a:p>
+          <a:p>
+            <a:pPr>
+              <a:lnSpc>
+                <a:spcPct val="150000"/>
+              </a:lnSpc>
+            </a:pPr>
+            <a:r>
+              <a:rPr lang="en-US" b="1" dirty="0">
+                <a:latin typeface="+mj-lt"/>
+              </a:rPr>
+              <a:t>Conclusion:</a:t>
+            </a:r>
+            <a:endParaRPr lang="en-US" dirty="0">
+              <a:latin typeface="+mj-lt"/>
+            </a:endParaRPr>
+          </a:p>
+          <a:p>
+            <a:pPr marL="285750" indent="-285750">
+              <a:lnSpc>
+                <a:spcPct val="150000"/>
+              </a:lnSpc>
+              <a:buFont typeface="Wingdings" panose="05000000000000000000" pitchFamily="2" charset="2"/>
+              <a:buChar char="Ø"/>
+            </a:pPr>
+            <a:r>
+              <a:rPr lang="en-US" b="1" dirty="0">
+                <a:latin typeface="+mj-lt"/>
+              </a:rPr>
+              <a:t>Without data archiving/hot-cold </a:t>
+            </a:r>
+            <a:r>
+              <a:rPr lang="en-US" b="1">
+                <a:latin typeface="+mj-lt"/>
+              </a:rPr>
+              <a:t>table strategy </a:t>
+            </a:r>
+            <a:r>
+              <a:rPr lang="en-US" b="1" dirty="0">
+                <a:latin typeface="+mj-lt"/>
+              </a:rPr>
+              <a:t>and indexing, </a:t>
+            </a:r>
+            <a:r>
+              <a:rPr lang="en-US" dirty="0">
+                <a:latin typeface="+mj-lt"/>
+              </a:rPr>
+              <a:t>system performance will continue to </a:t>
+            </a:r>
+            <a:r>
+              <a:rPr lang="en-US" b="1" dirty="0">
+                <a:latin typeface="+mj-lt"/>
+              </a:rPr>
+              <a:t>degrad</a:t>
+            </a:r>
+            <a:r>
+              <a:rPr lang="en-US" dirty="0">
+                <a:latin typeface="+mj-lt"/>
+              </a:rPr>
+              <a:t>e as </a:t>
+            </a:r>
+            <a:r>
+              <a:rPr lang="en-US" b="1" dirty="0">
+                <a:latin typeface="+mj-lt"/>
+              </a:rPr>
+              <a:t>transaction volume increases.</a:t>
+            </a:r>
+          </a:p>
+          <a:p>
+            <a:pPr lvl="0" eaLnBrk="0" fontAlgn="base" hangingPunct="0">
+              <a:spcBef>
+                <a:spcPts val="300"/>
+              </a:spcBef>
+              <a:spcAft>
+                <a:spcPts val="300"/>
+              </a:spcAft>
+            </a:pPr>
+            <a:endParaRPr lang="en-US" altLang="en-US" dirty="0">
+              <a:latin typeface="+mj-lt"/>
+              <a:cs typeface="Arial" panose="020B0604020202020204" pitchFamily="34" charset="0"/>
+            </a:endParaRPr>
+          </a:p>
+        </p:txBody>
+      </p:sp>
+    </p:spTree>
+    <p:extLst>
+      <p:ext uri="{BB962C8B-B14F-4D97-AF65-F5344CB8AC3E}">
+        <p14:creationId xmlns:p14="http://schemas.microsoft.com/office/powerpoint/2010/main" val="1418204459"/>
+      </p:ext>
+    </p:extLst>
+  </p:cSld>
+  <p:clrMapOvr>
+    <a:masterClrMapping/>
+  </p:clrMapOvr>
+</p:sld>
+</file>
+
+<file path=ppt/slides/slide34.xml><?xml version="1.0" encoding="utf-8"?>
+<p:sld xmlns:a="http://schemas.openxmlformats.org/drawingml/2006/main" xmlns:r="http://schemas.openxmlformats.org/officeDocument/2006/relationships" xmlns:p="http://schemas.openxmlformats.org/presentationml/2006/main">
+  <p:cSld>
+    <p:spTree>
+      <p:nvGrpSpPr>
+        <p:cNvPr id="1" name="">
+          <a:extLst>
+            <a:ext uri="{FF2B5EF4-FFF2-40B4-BE49-F238E27FC236}">
+              <a16:creationId xmlns:a16="http://schemas.microsoft.com/office/drawing/2014/main" id="{548C1893-1F7D-7CD7-7F9C-015DB27173FA}"/>
+            </a:ext>
+          </a:extLst>
+        </p:cNvPr>
+        <p:cNvGrpSpPr/>
+        <p:nvPr/>
+      </p:nvGrpSpPr>
+      <p:grpSpPr>
+        <a:xfrm>
+          <a:off x="0" y="0"/>
+          <a:ext cx="0" cy="0"/>
+          <a:chOff x="0" y="0"/>
+          <a:chExt cx="0" cy="0"/>
+        </a:xfrm>
+      </p:grpSpPr>
+      <p:sp>
+        <p:nvSpPr>
+          <p:cNvPr id="2" name="Slide Number Placeholder 1">
+            <a:extLst>
+              <a:ext uri="{FF2B5EF4-FFF2-40B4-BE49-F238E27FC236}">
+                <a16:creationId xmlns:a16="http://schemas.microsoft.com/office/drawing/2014/main" id="{7F6C5966-0F7C-DCBE-CF06-F87A33DC8366}"/>
+              </a:ext>
+            </a:extLst>
+          </p:cNvPr>
+          <p:cNvSpPr>
+            <a:spLocks noGrp="1"/>
+          </p:cNvSpPr>
+          <p:nvPr>
+            <p:ph type="sldNum" sz="quarter" idx="12"/>
+          </p:nvPr>
+        </p:nvSpPr>
+        <p:spPr/>
+        <p:txBody>
+          <a:bodyPr/>
+          <a:lstStyle/>
+          <a:p>
+            <a:fld id="{93288B1A-0894-4E52-95D8-2AC74CBED725}" type="slidenum">
+              <a:rPr lang="en-US" smtClean="0"/>
+              <a:t>34</a:t>
+            </a:fld>
+            <a:endParaRPr lang="en-US"/>
+          </a:p>
+        </p:txBody>
+      </p:sp>
+      <p:sp>
+        <p:nvSpPr>
+          <p:cNvPr id="3" name="Text Placeholder 2">
+            <a:extLst>
+              <a:ext uri="{FF2B5EF4-FFF2-40B4-BE49-F238E27FC236}">
+                <a16:creationId xmlns:a16="http://schemas.microsoft.com/office/drawing/2014/main" id="{B6807E87-F2B4-1CA2-E50A-D8622AC9857E}"/>
+              </a:ext>
+            </a:extLst>
+          </p:cNvPr>
+          <p:cNvSpPr>
+            <a:spLocks noGrp="1"/>
+          </p:cNvSpPr>
+          <p:nvPr>
+            <p:ph type="body" idx="1"/>
+          </p:nvPr>
+        </p:nvSpPr>
+        <p:spPr/>
+        <p:txBody>
+          <a:bodyPr/>
+          <a:lstStyle/>
+          <a:p>
+            <a:r>
+              <a:rPr lang="en-US" dirty="0"/>
+              <a:t>Future Propose Enhancement</a:t>
+            </a:r>
+          </a:p>
+        </p:txBody>
+      </p:sp>
+      <p:sp>
+        <p:nvSpPr>
+          <p:cNvPr id="10" name="TextBox 9">
+            <a:extLst>
+              <a:ext uri="{FF2B5EF4-FFF2-40B4-BE49-F238E27FC236}">
+                <a16:creationId xmlns:a16="http://schemas.microsoft.com/office/drawing/2014/main" id="{B8EF050F-0942-35EA-81CB-36235585414D}"/>
+              </a:ext>
+            </a:extLst>
+          </p:cNvPr>
+          <p:cNvSpPr txBox="1"/>
+          <p:nvPr/>
+        </p:nvSpPr>
+        <p:spPr>
+          <a:xfrm>
+            <a:off x="469809" y="1111831"/>
+            <a:ext cx="10412627" cy="3788858"/>
+          </a:xfrm>
+          <a:prstGeom prst="rect">
+            <a:avLst/>
+          </a:prstGeom>
+          <a:noFill/>
+        </p:spPr>
+        <p:txBody>
+          <a:bodyPr wrap="square">
+            <a:spAutoFit/>
+          </a:bodyPr>
+          <a:lstStyle/>
+          <a:p>
+            <a:pPr>
+              <a:lnSpc>
+                <a:spcPct val="150000"/>
+              </a:lnSpc>
+            </a:pPr>
+            <a:r>
+              <a:rPr lang="en-US" b="1" dirty="0"/>
+              <a:t>1. Unified Historical Reporting</a:t>
+            </a:r>
+            <a:endParaRPr lang="en-US" dirty="0"/>
+          </a:p>
+          <a:p>
+            <a:pPr>
+              <a:lnSpc>
+                <a:spcPct val="150000"/>
+              </a:lnSpc>
+            </a:pPr>
+            <a:r>
+              <a:rPr lang="en-US" dirty="0"/>
+              <a:t>Build a reporting mechanism to fetch data from both </a:t>
+            </a:r>
+            <a:r>
+              <a:rPr lang="en-US" b="1" dirty="0"/>
+              <a:t>active working tables</a:t>
+            </a:r>
+            <a:r>
+              <a:rPr lang="en-US" dirty="0"/>
+              <a:t> and </a:t>
+            </a:r>
+            <a:r>
+              <a:rPr lang="en-US" b="1" dirty="0"/>
+              <a:t>history tables</a:t>
+            </a:r>
+            <a:r>
+              <a:rPr lang="en-US" dirty="0"/>
+              <a:t>. </a:t>
+            </a:r>
+          </a:p>
+          <a:p>
+            <a:pPr>
+              <a:lnSpc>
+                <a:spcPct val="150000"/>
+              </a:lnSpc>
+            </a:pPr>
+            <a:r>
+              <a:rPr lang="en-US" dirty="0"/>
+              <a:t>Support business reporting without impacting live transaction processing. </a:t>
+            </a:r>
+          </a:p>
+          <a:p>
+            <a:pPr>
+              <a:lnSpc>
+                <a:spcPct val="150000"/>
+              </a:lnSpc>
+            </a:pPr>
+            <a:r>
+              <a:rPr lang="en-US" b="1" dirty="0"/>
+              <a:t>2. Role-Based Access Control for Historical Data</a:t>
+            </a:r>
+            <a:endParaRPr lang="en-US" dirty="0"/>
+          </a:p>
+          <a:p>
+            <a:pPr>
+              <a:lnSpc>
+                <a:spcPct val="150000"/>
+              </a:lnSpc>
+            </a:pPr>
+            <a:r>
+              <a:rPr lang="en-US" dirty="0"/>
+              <a:t>Implement RBAC to control access to old historical data. </a:t>
+            </a:r>
+          </a:p>
+          <a:p>
+            <a:pPr>
+              <a:lnSpc>
+                <a:spcPct val="150000"/>
+              </a:lnSpc>
+            </a:pPr>
+            <a:r>
+              <a:rPr lang="en-US" dirty="0"/>
+              <a:t>Restrict sensitive historical reports based on user role and permission level. </a:t>
+            </a:r>
+          </a:p>
+          <a:p>
+            <a:pPr>
+              <a:lnSpc>
+                <a:spcPct val="150000"/>
+              </a:lnSpc>
+            </a:pPr>
+            <a:r>
+              <a:rPr lang="en-US" b="1" dirty="0"/>
+              <a:t>3. Archive Database Strategy</a:t>
+            </a:r>
+            <a:endParaRPr lang="en-US" dirty="0"/>
+          </a:p>
+          <a:p>
+            <a:pPr>
+              <a:lnSpc>
+                <a:spcPct val="150000"/>
+              </a:lnSpc>
+            </a:pPr>
+            <a:r>
+              <a:rPr lang="en-US" dirty="0"/>
+              <a:t>Introduce a separate </a:t>
+            </a:r>
+            <a:r>
+              <a:rPr lang="en-US" b="1" dirty="0"/>
+              <a:t>archive database</a:t>
+            </a:r>
+            <a:r>
+              <a:rPr lang="en-US" dirty="0"/>
+              <a:t> for long-term data storage. </a:t>
+            </a:r>
+          </a:p>
+          <a:p>
+            <a:pPr>
+              <a:lnSpc>
+                <a:spcPct val="150000"/>
+              </a:lnSpc>
+            </a:pPr>
+            <a:r>
+              <a:rPr lang="en-US" dirty="0"/>
+              <a:t>Move older history records from history tables to archive tables based on IT Governance retention policy.</a:t>
+            </a:r>
+          </a:p>
+        </p:txBody>
+      </p:sp>
+    </p:spTree>
+    <p:extLst>
+      <p:ext uri="{BB962C8B-B14F-4D97-AF65-F5344CB8AC3E}">
+        <p14:creationId xmlns:p14="http://schemas.microsoft.com/office/powerpoint/2010/main" val="2527136972"/>
+      </p:ext>
+    </p:extLst>
+  </p:cSld>
+  <p:clrMapOvr>
+    <a:masterClrMapping/>
+  </p:clrMapOvr>
+</p:sld>
+</file>
+
+<file path=ppt/slides/slide35.xml><?xml version="1.0" encoding="utf-8"?>
+<p:sld xmlns:a="http://schemas.openxmlformats.org/drawingml/2006/main" xmlns:r="http://schemas.openxmlformats.org/officeDocument/2006/relationships" xmlns:p="http://schemas.openxmlformats.org/presentationml/2006/main">
+  <p:cSld>
+    <p:spTree>
+      <p:nvGrpSpPr>
+        <p:cNvPr id="1" name=""/>
+        <p:cNvGrpSpPr/>
+        <p:nvPr/>
+      </p:nvGrpSpPr>
+      <p:grpSpPr>
+        <a:xfrm>
+          <a:off x="0" y="0"/>
+          <a:ext cx="0" cy="0"/>
+          <a:chOff x="0" y="0"/>
+          <a:chExt cx="0" cy="0"/>
+        </a:xfrm>
+      </p:grpSpPr>
+      <p:sp>
+        <p:nvSpPr>
+          <p:cNvPr id="2" name="Text Placeholder 1">
+            <a:extLst>
+              <a:ext uri="{FF2B5EF4-FFF2-40B4-BE49-F238E27FC236}">
+                <a16:creationId xmlns:a16="http://schemas.microsoft.com/office/drawing/2014/main" id="{789CF22F-5AA4-B171-99C4-50EE2DCE24BE}"/>
+              </a:ext>
+            </a:extLst>
+          </p:cNvPr>
+          <p:cNvSpPr>
+            <a:spLocks noGrp="1"/>
+          </p:cNvSpPr>
+          <p:nvPr>
+            <p:ph type="body" sz="quarter" idx="10"/>
+          </p:nvPr>
+        </p:nvSpPr>
+        <p:spPr>
+          <a:xfrm>
+            <a:off x="1647568" y="1581665"/>
+            <a:ext cx="8491043" cy="1705232"/>
+          </a:xfrm>
+        </p:spPr>
+        <p:txBody>
+          <a:bodyPr/>
+          <a:lstStyle/>
+          <a:p>
+            <a:pPr algn="ctr"/>
+            <a:r>
+              <a:rPr lang="en-GB" sz="3600" dirty="0">
+                <a:latin typeface="Aptos Narrow" panose="020B0004020202020204" pitchFamily="34" charset="0"/>
+              </a:rPr>
+              <a:t>G&amp; G Data Management</a:t>
+            </a:r>
+          </a:p>
+          <a:p>
+            <a:pPr algn="ctr"/>
+            <a:r>
+              <a:rPr lang="en-GB" sz="3600" dirty="0">
+                <a:latin typeface="Aptos Narrow" panose="020B0004020202020204" pitchFamily="34" charset="0"/>
+              </a:rPr>
+              <a:t>Initial Proposal (Not Approved)</a:t>
+            </a:r>
+          </a:p>
+          <a:p>
+            <a:pPr algn="ctr"/>
+            <a:endParaRPr lang="en-GB" sz="3600" b="0" dirty="0">
+              <a:latin typeface="Aptos Narrow" panose="020B0004020202020204" pitchFamily="34" charset="0"/>
+            </a:endParaRPr>
+          </a:p>
+          <a:p>
+            <a:pPr algn="ctr"/>
+            <a:endParaRPr lang="en-GB" sz="3600" b="0" dirty="0">
+              <a:latin typeface="Aptos Narrow" panose="020B0004020202020204" pitchFamily="34" charset="0"/>
+            </a:endParaRPr>
+          </a:p>
+          <a:p>
+            <a:pPr algn="ctr"/>
+            <a:endParaRPr lang="en-GB" sz="3600" b="0" dirty="0">
+              <a:latin typeface="Aptos Narrow" panose="020B0004020202020204" pitchFamily="34" charset="0"/>
+            </a:endParaRPr>
+          </a:p>
+        </p:txBody>
+      </p:sp>
+    </p:spTree>
+    <p:extLst>
+      <p:ext uri="{BB962C8B-B14F-4D97-AF65-F5344CB8AC3E}">
+        <p14:creationId xmlns:p14="http://schemas.microsoft.com/office/powerpoint/2010/main" val="120747862"/>
+      </p:ext>
+    </p:extLst>
+  </p:cSld>
+  <p:clrMapOvr>
+    <a:masterClrMapping/>
+  </p:clrMapOvr>
+</p:sld>
+</file>
+
+<file path=ppt/slides/slide36.xml><?xml version="1.0" encoding="utf-8"?>
+<p:sld xmlns:a="http://schemas.openxmlformats.org/drawingml/2006/main" xmlns:r="http://schemas.openxmlformats.org/officeDocument/2006/relationships" xmlns:p="http://schemas.openxmlformats.org/presentationml/2006/main">
+  <p:cSld>
+    <p:spTree>
+      <p:nvGrpSpPr>
+        <p:cNvPr id="1" name="">
+          <a:extLst>
+            <a:ext uri="{FF2B5EF4-FFF2-40B4-BE49-F238E27FC236}">
               <a16:creationId xmlns:a16="http://schemas.microsoft.com/office/drawing/2014/main" id="{43C84614-2D23-1ECE-38A9-F70BDEB33B91}"/>
             </a:ext>
           </a:extLst>
@@ -12647,7 +15931,7 @@
           <a:p>
             <a:fld id="{93288B1A-0894-4E52-95D8-2AC74CBED725}" type="slidenum">
               <a:rPr lang="en-US" smtClean="0"/>
-              <a:t>31</a:t>
+              <a:t>36</a:t>
             </a:fld>
             <a:endParaRPr lang="en-US"/>
           </a:p>
@@ -12904,7 +16188,7 @@
 </p:sld>
 </file>
 
-<file path=ppt/slides/slide32.xml><?xml version="1.0" encoding="utf-8"?>
+<file path=ppt/slides/slide37.xml><?xml version="1.0" encoding="utf-8"?>
 <p:sld xmlns:a="http://schemas.openxmlformats.org/drawingml/2006/main" xmlns:r="http://schemas.openxmlformats.org/officeDocument/2006/relationships" xmlns:p="http://schemas.openxmlformats.org/presentationml/2006/main">
   <p:cSld>
     <p:spTree>
@@ -12950,7 +16234,7 @@
           <a:p>
             <a:fld id="{93288B1A-0894-4E52-95D8-2AC74CBED725}" type="slidenum">
               <a:rPr lang="en-US" smtClean="0"/>
-              <a:t>32</a:t>
+              <a:t>37</a:t>
             </a:fld>
             <a:endParaRPr lang="en-US"/>
           </a:p>
@@ -13055,7 +16339,7 @@
           <p:nvPr>
             <p:extLst>
               <p:ext uri="{D42A27DB-BD31-4B8C-83A1-F6EECF244321}">
-                <p14:modId xmlns:p14="http://schemas.microsoft.com/office/powerpoint/2010/main" val="1393695490"/>
+                <p14:modId xmlns:p14="http://schemas.microsoft.com/office/powerpoint/2010/main" val="2485703044"/>
               </p:ext>
             </p:extLst>
           </p:nvPr>
@@ -13619,7 +16903,7 @@
                       </a:pPr>
                       <a:r>
                         <a:rPr lang="en-US" dirty="0"/>
-                        <a:t>1.5 M</a:t>
+                        <a:t>600 K </a:t>
                       </a:r>
                     </a:p>
                   </a:txBody>
@@ -13632,7 +16916,7 @@
                     <a:p>
                       <a:r>
                         <a:rPr lang="en-US" dirty="0"/>
-                        <a:t>6 month</a:t>
+                        <a:t>3 month</a:t>
                       </a:r>
                     </a:p>
                   </a:txBody>
@@ -13771,7 +17055,7 @@
                       </a:pPr>
                       <a:r>
                         <a:rPr lang="en-US" dirty="0"/>
-                        <a:t>1.4 M</a:t>
+                        <a:t>100 K</a:t>
                       </a:r>
                     </a:p>
                   </a:txBody>
@@ -14605,7 +17889,7 @@
 </p:sld>
 </file>
 
-<file path=ppt/slides/slide33.xml><?xml version="1.0" encoding="utf-8"?>
+<file path=ppt/slides/slide38.xml><?xml version="1.0" encoding="utf-8"?>
 <p:sld xmlns:a="http://schemas.openxmlformats.org/drawingml/2006/main" xmlns:r="http://schemas.openxmlformats.org/officeDocument/2006/relationships" xmlns:p="http://schemas.openxmlformats.org/presentationml/2006/main">
   <p:cSld>
     <p:spTree>
@@ -14651,7 +17935,7 @@
           <a:p>
             <a:fld id="{93288B1A-0894-4E52-95D8-2AC74CBED725}" type="slidenum">
               <a:rPr lang="en-US" smtClean="0"/>
-              <a:t>33</a:t>
+              <a:t>38</a:t>
             </a:fld>
             <a:endParaRPr lang="en-US"/>
           </a:p>
@@ -15193,7 +18477,7 @@
 </p:sld>
 </file>
 
-<file path=ppt/slides/slide34.xml><?xml version="1.0" encoding="utf-8"?>
+<file path=ppt/slides/slide39.xml><?xml version="1.0" encoding="utf-8"?>
 <p:sld xmlns:a="http://schemas.openxmlformats.org/drawingml/2006/main" xmlns:r="http://schemas.openxmlformats.org/officeDocument/2006/relationships" xmlns:p="http://schemas.openxmlformats.org/presentationml/2006/main">
   <p:cSld>
     <p:spTree>
@@ -15239,7 +18523,7 @@
           <a:p>
             <a:fld id="{93288B1A-0894-4E52-95D8-2AC74CBED725}" type="slidenum">
               <a:rPr lang="en-US" smtClean="0"/>
-              <a:t>34</a:t>
+              <a:t>39</a:t>
             </a:fld>
             <a:endParaRPr lang="en-US"/>
           </a:p>
@@ -15437,99 +18721,6 @@
     <p:extLst>
       <p:ext uri="{BB962C8B-B14F-4D97-AF65-F5344CB8AC3E}">
         <p14:creationId xmlns:p14="http://schemas.microsoft.com/office/powerpoint/2010/main" val="2523895106"/>
-      </p:ext>
-    </p:extLst>
-  </p:cSld>
-  <p:clrMapOvr>
-    <a:masterClrMapping/>
-  </p:clrMapOvr>
-</p:sld>
-</file>
-
-<file path=ppt/slides/slide35.xml><?xml version="1.0" encoding="utf-8"?>
-<p:sld xmlns:a="http://schemas.openxmlformats.org/drawingml/2006/main" xmlns:r="http://schemas.openxmlformats.org/officeDocument/2006/relationships" xmlns:p="http://schemas.openxmlformats.org/presentationml/2006/main">
-  <p:cSld>
-    <p:spTree>
-      <p:nvGrpSpPr>
-        <p:cNvPr id="1" name=""/>
-        <p:cNvGrpSpPr/>
-        <p:nvPr/>
-      </p:nvGrpSpPr>
-      <p:grpSpPr>
-        <a:xfrm>
-          <a:off x="0" y="0"/>
-          <a:ext cx="0" cy="0"/>
-          <a:chOff x="0" y="0"/>
-          <a:chExt cx="0" cy="0"/>
-        </a:xfrm>
-      </p:grpSpPr>
-      <p:sp>
-        <p:nvSpPr>
-          <p:cNvPr id="2" name="Slide Number Placeholder 1">
-            <a:extLst>
-              <a:ext uri="{FF2B5EF4-FFF2-40B4-BE49-F238E27FC236}">
-                <a16:creationId xmlns:a16="http://schemas.microsoft.com/office/drawing/2014/main" id="{FD9C983F-458B-06E6-E4F8-F1462FB49156}"/>
-              </a:ext>
-            </a:extLst>
-          </p:cNvPr>
-          <p:cNvSpPr>
-            <a:spLocks noGrp="1"/>
-          </p:cNvSpPr>
-          <p:nvPr>
-            <p:ph type="sldNum" sz="quarter" idx="12"/>
-          </p:nvPr>
-        </p:nvSpPr>
-        <p:spPr/>
-        <p:txBody>
-          <a:bodyPr/>
-          <a:lstStyle/>
-          <a:p>
-            <a:fld id="{93288B1A-0894-4E52-95D8-2AC74CBED725}" type="slidenum">
-              <a:rPr lang="en-US" smtClean="0"/>
-              <a:t>35</a:t>
-            </a:fld>
-            <a:endParaRPr lang="en-US"/>
-          </a:p>
-        </p:txBody>
-      </p:sp>
-      <p:sp>
-        <p:nvSpPr>
-          <p:cNvPr id="3" name="Text Placeholder 2">
-            <a:extLst>
-              <a:ext uri="{FF2B5EF4-FFF2-40B4-BE49-F238E27FC236}">
-                <a16:creationId xmlns:a16="http://schemas.microsoft.com/office/drawing/2014/main" id="{E2F2EA55-F46C-8AB0-0140-A4E9772F2B82}"/>
-              </a:ext>
-            </a:extLst>
-          </p:cNvPr>
-          <p:cNvSpPr>
-            <a:spLocks noGrp="1"/>
-          </p:cNvSpPr>
-          <p:nvPr>
-            <p:ph type="body" idx="1"/>
-          </p:nvPr>
-        </p:nvSpPr>
-        <p:spPr>
-          <a:xfrm>
-            <a:off x="0" y="3000635"/>
-            <a:ext cx="12191999" cy="518983"/>
-          </a:xfrm>
-        </p:spPr>
-        <p:txBody>
-          <a:bodyPr/>
-          <a:lstStyle/>
-          <a:p>
-            <a:pPr algn="ctr"/>
-            <a:r>
-              <a:rPr lang="en-US" dirty="0"/>
-              <a:t>Thank You!</a:t>
-            </a:r>
-          </a:p>
-        </p:txBody>
-      </p:sp>
-    </p:spTree>
-    <p:extLst>
-      <p:ext uri="{BB962C8B-B14F-4D97-AF65-F5344CB8AC3E}">
-        <p14:creationId xmlns:p14="http://schemas.microsoft.com/office/powerpoint/2010/main" val="1784669213"/>
       </p:ext>
     </p:extLst>
   </p:cSld>
@@ -16025,6 +19216,99 @@
     <p:extLst>
       <p:ext uri="{BB962C8B-B14F-4D97-AF65-F5344CB8AC3E}">
         <p14:creationId xmlns:p14="http://schemas.microsoft.com/office/powerpoint/2010/main" val="3057371815"/>
+      </p:ext>
+    </p:extLst>
+  </p:cSld>
+  <p:clrMapOvr>
+    <a:masterClrMapping/>
+  </p:clrMapOvr>
+</p:sld>
+</file>
+
+<file path=ppt/slides/slide40.xml><?xml version="1.0" encoding="utf-8"?>
+<p:sld xmlns:a="http://schemas.openxmlformats.org/drawingml/2006/main" xmlns:r="http://schemas.openxmlformats.org/officeDocument/2006/relationships" xmlns:p="http://schemas.openxmlformats.org/presentationml/2006/main">
+  <p:cSld>
+    <p:spTree>
+      <p:nvGrpSpPr>
+        <p:cNvPr id="1" name=""/>
+        <p:cNvGrpSpPr/>
+        <p:nvPr/>
+      </p:nvGrpSpPr>
+      <p:grpSpPr>
+        <a:xfrm>
+          <a:off x="0" y="0"/>
+          <a:ext cx="0" cy="0"/>
+          <a:chOff x="0" y="0"/>
+          <a:chExt cx="0" cy="0"/>
+        </a:xfrm>
+      </p:grpSpPr>
+      <p:sp>
+        <p:nvSpPr>
+          <p:cNvPr id="2" name="Slide Number Placeholder 1">
+            <a:extLst>
+              <a:ext uri="{FF2B5EF4-FFF2-40B4-BE49-F238E27FC236}">
+                <a16:creationId xmlns:a16="http://schemas.microsoft.com/office/drawing/2014/main" id="{FD9C983F-458B-06E6-E4F8-F1462FB49156}"/>
+              </a:ext>
+            </a:extLst>
+          </p:cNvPr>
+          <p:cNvSpPr>
+            <a:spLocks noGrp="1"/>
+          </p:cNvSpPr>
+          <p:nvPr>
+            <p:ph type="sldNum" sz="quarter" idx="12"/>
+          </p:nvPr>
+        </p:nvSpPr>
+        <p:spPr/>
+        <p:txBody>
+          <a:bodyPr/>
+          <a:lstStyle/>
+          <a:p>
+            <a:fld id="{93288B1A-0894-4E52-95D8-2AC74CBED725}" type="slidenum">
+              <a:rPr lang="en-US" smtClean="0"/>
+              <a:t>40</a:t>
+            </a:fld>
+            <a:endParaRPr lang="en-US"/>
+          </a:p>
+        </p:txBody>
+      </p:sp>
+      <p:sp>
+        <p:nvSpPr>
+          <p:cNvPr id="3" name="Text Placeholder 2">
+            <a:extLst>
+              <a:ext uri="{FF2B5EF4-FFF2-40B4-BE49-F238E27FC236}">
+                <a16:creationId xmlns:a16="http://schemas.microsoft.com/office/drawing/2014/main" id="{E2F2EA55-F46C-8AB0-0140-A4E9772F2B82}"/>
+              </a:ext>
+            </a:extLst>
+          </p:cNvPr>
+          <p:cNvSpPr>
+            <a:spLocks noGrp="1"/>
+          </p:cNvSpPr>
+          <p:nvPr>
+            <p:ph type="body" idx="1"/>
+          </p:nvPr>
+        </p:nvSpPr>
+        <p:spPr>
+          <a:xfrm>
+            <a:off x="0" y="3000635"/>
+            <a:ext cx="12191999" cy="518983"/>
+          </a:xfrm>
+        </p:spPr>
+        <p:txBody>
+          <a:bodyPr/>
+          <a:lstStyle/>
+          <a:p>
+            <a:pPr algn="ctr"/>
+            <a:r>
+              <a:rPr lang="en-US" dirty="0"/>
+              <a:t>Thank You!</a:t>
+            </a:r>
+          </a:p>
+        </p:txBody>
+      </p:sp>
+    </p:spTree>
+    <p:extLst>
+      <p:ext uri="{BB962C8B-B14F-4D97-AF65-F5344CB8AC3E}">
+        <p14:creationId xmlns:p14="http://schemas.microsoft.com/office/powerpoint/2010/main" val="1784669213"/>
       </p:ext>
     </p:extLst>
   </p:cSld>
@@ -16967,14 +20251,14 @@
           <p:nvPr>
             <p:extLst>
               <p:ext uri="{D42A27DB-BD31-4B8C-83A1-F6EECF244321}">
-                <p14:modId xmlns:p14="http://schemas.microsoft.com/office/powerpoint/2010/main" val="1116429342"/>
+                <p14:modId xmlns:p14="http://schemas.microsoft.com/office/powerpoint/2010/main" val="3924244242"/>
               </p:ext>
             </p:extLst>
           </p:nvPr>
         </p:nvGraphicFramePr>
         <p:xfrm>
           <a:off x="555787" y="1163557"/>
-          <a:ext cx="10226778" cy="2321560"/>
+          <a:ext cx="10226778" cy="3205480"/>
         </p:xfrm>
         <a:graphic>
           <a:graphicData uri="http://schemas.openxmlformats.org/drawingml/2006/table">
@@ -17117,14 +20401,52 @@
                     <a:lstStyle/>
                     <a:p>
                       <a:r>
-                        <a:rPr lang="en-US" sz="1300" dirty="0"/>
-                        <a:t>Employ HTTPS for all communications.</a:t>
-                      </a:r>
-                    </a:p>
-                    <a:p>
-                      <a:r>
-                        <a:rPr lang="en-US" sz="1300" dirty="0"/>
-                        <a:t>Each API endpoint is protected by a single security mechanism. JWT for user-based operations</a:t>
+                        <a:rPr lang="en-US" sz="1400" dirty="0"/>
+                        <a:t>Use </a:t>
+                      </a:r>
+                      <a:r>
+                        <a:rPr lang="en-US" sz="1400" b="1" dirty="0"/>
+                        <a:t>JWT/OAuth2</a:t>
+                      </a:r>
+                      <a:r>
+                        <a:rPr lang="en-US" sz="1400" dirty="0"/>
+                        <a:t> for user authentication and authorization. </a:t>
+                      </a:r>
+                    </a:p>
+                    <a:p>
+                      <a:r>
+                        <a:rPr lang="en-US" sz="1400" dirty="0"/>
+                        <a:t>Apply </a:t>
+                      </a:r>
+                      <a:r>
+                        <a:rPr lang="en-US" sz="1400" b="1" dirty="0"/>
+                        <a:t>role-based access control (RBAC)</a:t>
+                      </a:r>
+                      <a:r>
+                        <a:rPr lang="en-US" sz="1400" dirty="0"/>
+                        <a:t> for business functions and sensitive data access. Implement </a:t>
+                      </a:r>
+                      <a:r>
+                        <a:rPr lang="en-US" sz="1400" b="1" dirty="0"/>
+                        <a:t>API Gateway security controls</a:t>
+                      </a:r>
+                      <a:r>
+                        <a:rPr lang="en-US" sz="1400" dirty="0"/>
+                        <a:t>, including rate limiting, request validation, IP allowlist where required, and centralized authentication. </a:t>
+                      </a:r>
+                    </a:p>
+                    <a:p>
+                      <a:r>
+                        <a:rPr lang="en-US" sz="1400" dirty="0"/>
+                        <a:t>Enable </a:t>
+                      </a:r>
+                      <a:r>
+                        <a:rPr lang="en-US" sz="1400" b="1" dirty="0"/>
+                        <a:t>audit logging and monitoring</a:t>
+                      </a:r>
+                      <a:r>
+                        <a:rPr lang="en-US" sz="1400" dirty="0"/>
+                        <a:t> for authentication failures, access violations, and suspicious activity.</a:t>
                       </a:r>
                       <a:endParaRPr lang="en-US" sz="1300" b="0" dirty="0"/>
                     </a:p>
@@ -17821,7 +21143,7 @@
         <p:spPr>
           <a:xfrm>
             <a:off x="148281" y="930876"/>
-            <a:ext cx="11434119" cy="4204356"/>
+            <a:ext cx="11434119" cy="3788858"/>
           </a:xfrm>
           <a:prstGeom prst="rect">
             <a:avLst/>
@@ -17870,33 +21192,6 @@
                 <a:latin typeface="Calibri (Headings)"/>
               </a:rPr>
               <a:t> </a:t>
-            </a:r>
-          </a:p>
-          <a:p>
-            <a:pPr marL="285750" indent="-285750">
-              <a:lnSpc>
-                <a:spcPct val="150000"/>
-              </a:lnSpc>
-              <a:buFont typeface="Wingdings" panose="05000000000000000000" pitchFamily="2" charset="2"/>
-              <a:buChar char="Ø"/>
-            </a:pPr>
-            <a:r>
-              <a:rPr lang="en-US" dirty="0">
-                <a:latin typeface="Calibri (Headings)"/>
-              </a:rPr>
-              <a:t>Primary DB retains </a:t>
-            </a:r>
-            <a:r>
-              <a:rPr lang="en-US" b="1" dirty="0">
-                <a:latin typeface="Calibri (Headings)"/>
-              </a:rPr>
-              <a:t>1-year active data</a:t>
-            </a:r>
-            <a:r>
-              <a:rPr lang="en-US" dirty="0">
-                <a:latin typeface="Calibri (Headings)"/>
-              </a:rPr>
-              <a:t> for processing </a:t>
             </a:r>
           </a:p>
           <a:p>
@@ -18705,6 +22000,27 @@
 </file>
 
 <file path=customXml/item1.xml><?xml version="1.0" encoding="utf-8"?>
+<?mso-contentType ?>
+<FormTemplates xmlns="http://schemas.microsoft.com/sharepoint/v3/contenttype/forms">
+  <Display>DocumentLibraryForm</Display>
+  <Edit>DocumentLibraryForm</Edit>
+  <New>DocumentLibraryForm</New>
+</FormTemplates>
+</file>
+
+<file path=customXml/item2.xml><?xml version="1.0" encoding="utf-8"?>
+<p:properties xmlns:p="http://schemas.microsoft.com/office/2006/metadata/properties" xmlns:xsi="http://www.w3.org/2001/XMLSchema-instance" xmlns:pc="http://schemas.microsoft.com/office/infopath/2007/PartnerControls">
+  <documentManagement>
+    <lcf76f155ced4ddcb4097134ff3c332f xmlns="9fad6302-fdb1-4d2b-bae6-d2fdf9a97a42">
+      <Terms xmlns="http://schemas.microsoft.com/office/infopath/2007/PartnerControls"/>
+    </lcf76f155ced4ddcb4097134ff3c332f>
+    <TaxCatchAll xmlns="76bb2ce8-bb45-4930-a7cf-51d5c3ce9955" xsi:nil="true"/>
+    <_Flow_SignoffStatus xmlns="9fad6302-fdb1-4d2b-bae6-d2fdf9a97a42" xsi:nil="true"/>
+  </documentManagement>
+</p:properties>
+</file>
+
+<file path=customXml/item3.xml><?xml version="1.0" encoding="utf-8"?>
 <ct:contentTypeSchema xmlns:ct="http://schemas.microsoft.com/office/2006/metadata/contentType" xmlns:ma="http://schemas.microsoft.com/office/2006/metadata/properties/metaAttributes" ct:_="" ma:_="" ma:contentTypeName="Document" ma:contentTypeID="0x010100159FAA4C2747084B87058E0E0A310158" ma:contentTypeVersion="17" ma:contentTypeDescription="Create a new document." ma:contentTypeScope="" ma:versionID="0d994700019694c4b789f2f92615bef0">
   <xsd:schema xmlns:xsd="http://www.w3.org/2001/XMLSchema" xmlns:xs="http://www.w3.org/2001/XMLSchema" xmlns:p="http://schemas.microsoft.com/office/2006/metadata/properties" xmlns:ns2="9fad6302-fdb1-4d2b-bae6-d2fdf9a97a42" xmlns:ns3="76bb2ce8-bb45-4930-a7cf-51d5c3ce9955" targetNamespace="http://schemas.microsoft.com/office/2006/metadata/properties" ma:root="true" ma:fieldsID="d1a30f74a7ef0c27ba753240d6a6513d" ns2:_="" ns3:_="">
     <xsd:import namespace="9fad6302-fdb1-4d2b-bae6-d2fdf9a97a42"/>
@@ -18953,42 +22269,10 @@
 </ct:contentTypeSchema>
 </file>
 
-<file path=customXml/item2.xml><?xml version="1.0" encoding="utf-8"?>
-<p:properties xmlns:p="http://schemas.microsoft.com/office/2006/metadata/properties" xmlns:xsi="http://www.w3.org/2001/XMLSchema-instance" xmlns:pc="http://schemas.microsoft.com/office/infopath/2007/PartnerControls">
-  <documentManagement>
-    <lcf76f155ced4ddcb4097134ff3c332f xmlns="9fad6302-fdb1-4d2b-bae6-d2fdf9a97a42">
-      <Terms xmlns="http://schemas.microsoft.com/office/infopath/2007/PartnerControls"/>
-    </lcf76f155ced4ddcb4097134ff3c332f>
-    <TaxCatchAll xmlns="76bb2ce8-bb45-4930-a7cf-51d5c3ce9955" xsi:nil="true"/>
-    <_Flow_SignoffStatus xmlns="9fad6302-fdb1-4d2b-bae6-d2fdf9a97a42" xsi:nil="true"/>
-  </documentManagement>
-</p:properties>
-</file>
-
-<file path=customXml/item3.xml><?xml version="1.0" encoding="utf-8"?>
-<?mso-contentType ?>
-<FormTemplates xmlns="http://schemas.microsoft.com/sharepoint/v3/contenttype/forms">
-  <Display>DocumentLibraryForm</Display>
-  <Edit>DocumentLibraryForm</Edit>
-  <New>DocumentLibraryForm</New>
-</FormTemplates>
-</file>
-
 <file path=customXml/itemProps1.xml><?xml version="1.0" encoding="utf-8"?>
-<ds:datastoreItem xmlns:ds="http://schemas.openxmlformats.org/officeDocument/2006/customXml" ds:itemID="{33B31715-BA8D-4E42-B12B-716E5EB2CB93}">
+<ds:datastoreItem xmlns:ds="http://schemas.openxmlformats.org/officeDocument/2006/customXml" ds:itemID="{8217D971-2416-483F-8C3C-F9A2317247D7}">
   <ds:schemaRefs>
-    <ds:schemaRef ds:uri="http://schemas.microsoft.com/office/2006/metadata/contentType"/>
-    <ds:schemaRef ds:uri="http://schemas.microsoft.com/office/2006/metadata/properties/metaAttributes"/>
-    <ds:schemaRef ds:uri="http://www.w3.org/2001/XMLSchema"/>
-    <ds:schemaRef ds:uri="http://schemas.microsoft.com/office/2006/metadata/properties"/>
-    <ds:schemaRef ds:uri="9fad6302-fdb1-4d2b-bae6-d2fdf9a97a42"/>
-    <ds:schemaRef ds:uri="76bb2ce8-bb45-4930-a7cf-51d5c3ce9955"/>
-    <ds:schemaRef ds:uri="http://schemas.microsoft.com/office/2006/documentManagement/types"/>
-    <ds:schemaRef ds:uri="http://schemas.microsoft.com/office/infopath/2007/PartnerControls"/>
-    <ds:schemaRef ds:uri="http://schemas.openxmlformats.org/package/2006/metadata/core-properties"/>
-    <ds:schemaRef ds:uri="http://purl.org/dc/elements/1.1/"/>
-    <ds:schemaRef ds:uri="http://purl.org/dc/terms/"/>
-    <ds:schemaRef ds:uri="http://schemas.microsoft.com/internal/obd"/>
+    <ds:schemaRef ds:uri="http://schemas.microsoft.com/sharepoint/v3/contenttype/forms"/>
   </ds:schemaRefs>
 </ds:datastoreItem>
 </file>
@@ -19011,9 +22295,20 @@
 </file>
 
 <file path=customXml/itemProps3.xml><?xml version="1.0" encoding="utf-8"?>
-<ds:datastoreItem xmlns:ds="http://schemas.openxmlformats.org/officeDocument/2006/customXml" ds:itemID="{8217D971-2416-483F-8C3C-F9A2317247D7}">
+<ds:datastoreItem xmlns:ds="http://schemas.openxmlformats.org/officeDocument/2006/customXml" ds:itemID="{33B31715-BA8D-4E42-B12B-716E5EB2CB93}">
   <ds:schemaRefs>
-    <ds:schemaRef ds:uri="http://schemas.microsoft.com/sharepoint/v3/contenttype/forms"/>
+    <ds:schemaRef ds:uri="http://schemas.microsoft.com/office/2006/metadata/contentType"/>
+    <ds:schemaRef ds:uri="http://schemas.microsoft.com/office/2006/metadata/properties/metaAttributes"/>
+    <ds:schemaRef ds:uri="http://www.w3.org/2001/XMLSchema"/>
+    <ds:schemaRef ds:uri="http://schemas.microsoft.com/office/2006/metadata/properties"/>
+    <ds:schemaRef ds:uri="9fad6302-fdb1-4d2b-bae6-d2fdf9a97a42"/>
+    <ds:schemaRef ds:uri="76bb2ce8-bb45-4930-a7cf-51d5c3ce9955"/>
+    <ds:schemaRef ds:uri="http://schemas.microsoft.com/office/2006/documentManagement/types"/>
+    <ds:schemaRef ds:uri="http://schemas.microsoft.com/office/infopath/2007/PartnerControls"/>
+    <ds:schemaRef ds:uri="http://schemas.openxmlformats.org/package/2006/metadata/core-properties"/>
+    <ds:schemaRef ds:uri="http://purl.org/dc/elements/1.1/"/>
+    <ds:schemaRef ds:uri="http://purl.org/dc/terms/"/>
+    <ds:schemaRef ds:uri="http://schemas.microsoft.com/internal/obd"/>
   </ds:schemaRefs>
 </ds:datastoreItem>
 </file>